--- a/260418_add/ppt/Fig4D_volcano_gene_pathwaycat_native_editable.pptx
+++ b/260418_add/ppt/Fig4D_volcano_gene_pathwaycat_native_editable.pptx
@@ -36272,7 +36272,7 @@
             <a:avLst/>
           </a:prstGeom>
           <a:solidFill>
-            <a:srgbClr val="00567D"/>
+            <a:srgbClr val="A24E78"/>
           </a:solidFill>
           <a:ln w="6350">
             <a:solidFill>
@@ -36318,7 +36318,7 @@
             <a:avLst/>
           </a:prstGeom>
           <a:solidFill>
-            <a:srgbClr val="C11456"/>
+            <a:srgbClr val="118AB2"/>
           </a:solidFill>
           <a:ln w="6350">
             <a:solidFill>
@@ -36364,7 +36364,7 @@
             <a:avLst/>
           </a:prstGeom>
           <a:solidFill>
-            <a:srgbClr val="00567D"/>
+            <a:srgbClr val="A24E78"/>
           </a:solidFill>
           <a:ln w="6350">
             <a:solidFill>
@@ -36410,7 +36410,7 @@
             <a:avLst/>
           </a:prstGeom>
           <a:solidFill>
-            <a:srgbClr val="B03219"/>
+            <a:srgbClr val="5A8261"/>
           </a:solidFill>
           <a:ln w="6350">
             <a:solidFill>
@@ -36456,7 +36456,7 @@
             <a:avLst/>
           </a:prstGeom>
           <a:solidFill>
-            <a:srgbClr val="C11456"/>
+            <a:srgbClr val="118AB2"/>
           </a:solidFill>
           <a:ln w="6350">
             <a:solidFill>
@@ -36502,7 +36502,7 @@
             <a:avLst/>
           </a:prstGeom>
           <a:solidFill>
-            <a:srgbClr val="B03219"/>
+            <a:srgbClr val="5A8261"/>
           </a:solidFill>
           <a:ln w="6350">
             <a:solidFill>
@@ -36548,7 +36548,7 @@
             <a:avLst/>
           </a:prstGeom>
           <a:solidFill>
-            <a:srgbClr val="B03219"/>
+            <a:srgbClr val="5A8261"/>
           </a:solidFill>
           <a:ln w="6350">
             <a:solidFill>
@@ -36594,7 +36594,7 @@
             <a:avLst/>
           </a:prstGeom>
           <a:solidFill>
-            <a:srgbClr val="B03219"/>
+            <a:srgbClr val="5A8261"/>
           </a:solidFill>
           <a:ln w="6350">
             <a:solidFill>
@@ -36640,7 +36640,7 @@
             <a:avLst/>
           </a:prstGeom>
           <a:solidFill>
-            <a:srgbClr val="C11456"/>
+            <a:srgbClr val="118AB2"/>
           </a:solidFill>
           <a:ln w="6350">
             <a:solidFill>
@@ -36686,7 +36686,7 @@
             <a:avLst/>
           </a:prstGeom>
           <a:solidFill>
-            <a:srgbClr val="00567D"/>
+            <a:srgbClr val="A24E78"/>
           </a:solidFill>
           <a:ln w="6350">
             <a:solidFill>
@@ -36732,7 +36732,7 @@
             <a:avLst/>
           </a:prstGeom>
           <a:solidFill>
-            <a:srgbClr val="C11456"/>
+            <a:srgbClr val="118AB2"/>
           </a:solidFill>
           <a:ln w="6350">
             <a:solidFill>
@@ -36778,7 +36778,7 @@
             <a:avLst/>
           </a:prstGeom>
           <a:solidFill>
-            <a:srgbClr val="B03219"/>
+            <a:srgbClr val="5A8261"/>
           </a:solidFill>
           <a:ln w="6350">
             <a:solidFill>
@@ -36824,7 +36824,7 @@
             <a:avLst/>
           </a:prstGeom>
           <a:solidFill>
-            <a:srgbClr val="C11456"/>
+            <a:srgbClr val="118AB2"/>
           </a:solidFill>
           <a:ln w="6350">
             <a:solidFill>
@@ -36870,7 +36870,7 @@
             <a:avLst/>
           </a:prstGeom>
           <a:solidFill>
-            <a:srgbClr val="057A64"/>
+            <a:srgbClr val="E39A1E"/>
           </a:solidFill>
           <a:ln w="6350">
             <a:solidFill>
@@ -36916,7 +36916,7 @@
             <a:avLst/>
           </a:prstGeom>
           <a:solidFill>
-            <a:srgbClr val="00567D"/>
+            <a:srgbClr val="A24E78"/>
           </a:solidFill>
           <a:ln w="6350">
             <a:solidFill>
@@ -36962,7 +36962,7 @@
             <a:avLst/>
           </a:prstGeom>
           <a:solidFill>
-            <a:srgbClr val="C11456"/>
+            <a:srgbClr val="118AB2"/>
           </a:solidFill>
           <a:ln w="6350">
             <a:solidFill>
@@ -37008,7 +37008,7 @@
             <a:avLst/>
           </a:prstGeom>
           <a:solidFill>
-            <a:srgbClr val="00567D"/>
+            <a:srgbClr val="A24E78"/>
           </a:solidFill>
           <a:ln w="6350">
             <a:solidFill>
@@ -37054,7 +37054,7 @@
             <a:avLst/>
           </a:prstGeom>
           <a:solidFill>
-            <a:srgbClr val="C11456"/>
+            <a:srgbClr val="118AB2"/>
           </a:solidFill>
           <a:ln w="6350">
             <a:solidFill>
@@ -37100,7 +37100,7 @@
             <a:avLst/>
           </a:prstGeom>
           <a:solidFill>
-            <a:srgbClr val="C11456"/>
+            <a:srgbClr val="118AB2"/>
           </a:solidFill>
           <a:ln w="6350">
             <a:solidFill>
@@ -37146,7 +37146,7 @@
             <a:avLst/>
           </a:prstGeom>
           <a:solidFill>
-            <a:srgbClr val="B03219"/>
+            <a:srgbClr val="5A8261"/>
           </a:solidFill>
           <a:ln w="6350">
             <a:solidFill>
@@ -37192,7 +37192,7 @@
             <a:avLst/>
           </a:prstGeom>
           <a:solidFill>
-            <a:srgbClr val="00567D"/>
+            <a:srgbClr val="A24E78"/>
           </a:solidFill>
           <a:ln w="6350">
             <a:solidFill>
@@ -37238,7 +37238,7 @@
             <a:avLst/>
           </a:prstGeom>
           <a:solidFill>
-            <a:srgbClr val="00567D"/>
+            <a:srgbClr val="A24E78"/>
           </a:solidFill>
           <a:ln w="6350">
             <a:solidFill>
@@ -37271,5815 +37271,7 @@
       </p:sp>
       <p:sp>
         <p:nvSpPr>
-          <p:cNvPr id="777" name="Oval 776"/>
-          <p:cNvSpPr/>
-          <p:nvPr/>
-        </p:nvSpPr>
-        <p:spPr>
-          <a:xfrm>
-            <a:off x="2403542" y="2372726"/>
-            <a:ext cx="92000" cy="92000"/>
-          </a:xfrm>
-          <a:prstGeom prst="ellipse">
-            <a:avLst/>
-          </a:prstGeom>
-          <a:noFill/>
-          <a:ln w="13970">
-            <a:solidFill>
-              <a:srgbClr val="D4A300"/>
-            </a:solidFill>
-          </a:ln>
-          <a:effectLst/>
-        </p:spPr>
-        <p:style>
-          <a:lnRef idx="1">
-            <a:schemeClr val="accent1"/>
-          </a:lnRef>
-          <a:fillRef idx="3">
-            <a:schemeClr val="accent1"/>
-          </a:fillRef>
-          <a:effectRef idx="2">
-            <a:schemeClr val="accent1"/>
-          </a:effectRef>
-          <a:fontRef idx="minor">
-            <a:schemeClr val="lt1"/>
-          </a:fontRef>
-        </p:style>
-        <p:txBody>
-          <a:bodyPr rtlCol="0" anchor="ctr"/>
-          <a:lstStyle/>
-          <a:p>
-            <a:pPr algn="ctr"/>
-          </a:p>
-        </p:txBody>
-      </p:sp>
-      <p:sp>
-        <p:nvSpPr>
-          <p:cNvPr id="778" name="Oval 777"/>
-          <p:cNvSpPr/>
-          <p:nvPr/>
-        </p:nvSpPr>
-        <p:spPr>
-          <a:xfrm>
-            <a:off x="2096826" y="2698536"/>
-            <a:ext cx="92000" cy="92000"/>
-          </a:xfrm>
-          <a:prstGeom prst="ellipse">
-            <a:avLst/>
-          </a:prstGeom>
-          <a:noFill/>
-          <a:ln w="13970">
-            <a:solidFill>
-              <a:srgbClr val="D4A300"/>
-            </a:solidFill>
-          </a:ln>
-          <a:effectLst/>
-        </p:spPr>
-        <p:style>
-          <a:lnRef idx="1">
-            <a:schemeClr val="accent1"/>
-          </a:lnRef>
-          <a:fillRef idx="3">
-            <a:schemeClr val="accent1"/>
-          </a:fillRef>
-          <a:effectRef idx="2">
-            <a:schemeClr val="accent1"/>
-          </a:effectRef>
-          <a:fontRef idx="minor">
-            <a:schemeClr val="lt1"/>
-          </a:fontRef>
-        </p:style>
-        <p:txBody>
-          <a:bodyPr rtlCol="0" anchor="ctr"/>
-          <a:lstStyle/>
-          <a:p>
-            <a:pPr algn="ctr"/>
-          </a:p>
-        </p:txBody>
-      </p:sp>
-      <p:sp>
-        <p:nvSpPr>
-          <p:cNvPr id="779" name="Oval 778"/>
-          <p:cNvSpPr/>
-          <p:nvPr/>
-        </p:nvSpPr>
-        <p:spPr>
-          <a:xfrm>
-            <a:off x="5407220" y="2730454"/>
-            <a:ext cx="92000" cy="92000"/>
-          </a:xfrm>
-          <a:prstGeom prst="ellipse">
-            <a:avLst/>
-          </a:prstGeom>
-          <a:noFill/>
-          <a:ln w="13970">
-            <a:solidFill>
-              <a:srgbClr val="D4A300"/>
-            </a:solidFill>
-          </a:ln>
-          <a:effectLst/>
-        </p:spPr>
-        <p:style>
-          <a:lnRef idx="1">
-            <a:schemeClr val="accent1"/>
-          </a:lnRef>
-          <a:fillRef idx="3">
-            <a:schemeClr val="accent1"/>
-          </a:fillRef>
-          <a:effectRef idx="2">
-            <a:schemeClr val="accent1"/>
-          </a:effectRef>
-          <a:fontRef idx="minor">
-            <a:schemeClr val="lt1"/>
-          </a:fontRef>
-        </p:style>
-        <p:txBody>
-          <a:bodyPr rtlCol="0" anchor="ctr"/>
-          <a:lstStyle/>
-          <a:p>
-            <a:pPr algn="ctr"/>
-          </a:p>
-        </p:txBody>
-      </p:sp>
-      <p:sp>
-        <p:nvSpPr>
-          <p:cNvPr id="780" name="Oval 779"/>
-          <p:cNvSpPr/>
-          <p:nvPr/>
-        </p:nvSpPr>
-        <p:spPr>
-          <a:xfrm>
-            <a:off x="3381959" y="2760810"/>
-            <a:ext cx="92000" cy="92000"/>
-          </a:xfrm>
-          <a:prstGeom prst="ellipse">
-            <a:avLst/>
-          </a:prstGeom>
-          <a:noFill/>
-          <a:ln w="13970">
-            <a:solidFill>
-              <a:srgbClr val="D4A300"/>
-            </a:solidFill>
-          </a:ln>
-          <a:effectLst/>
-        </p:spPr>
-        <p:style>
-          <a:lnRef idx="1">
-            <a:schemeClr val="accent1"/>
-          </a:lnRef>
-          <a:fillRef idx="3">
-            <a:schemeClr val="accent1"/>
-          </a:fillRef>
-          <a:effectRef idx="2">
-            <a:schemeClr val="accent1"/>
-          </a:effectRef>
-          <a:fontRef idx="minor">
-            <a:schemeClr val="lt1"/>
-          </a:fontRef>
-        </p:style>
-        <p:txBody>
-          <a:bodyPr rtlCol="0" anchor="ctr"/>
-          <a:lstStyle/>
-          <a:p>
-            <a:pPr algn="ctr"/>
-          </a:p>
-        </p:txBody>
-      </p:sp>
-      <p:sp>
-        <p:nvSpPr>
-          <p:cNvPr id="781" name="Oval 780"/>
-          <p:cNvSpPr/>
-          <p:nvPr/>
-        </p:nvSpPr>
-        <p:spPr>
-          <a:xfrm>
-            <a:off x="3233241" y="2919529"/>
-            <a:ext cx="92000" cy="92000"/>
-          </a:xfrm>
-          <a:prstGeom prst="ellipse">
-            <a:avLst/>
-          </a:prstGeom>
-          <a:noFill/>
-          <a:ln w="13970">
-            <a:solidFill>
-              <a:srgbClr val="D4A300"/>
-            </a:solidFill>
-          </a:ln>
-          <a:effectLst/>
-        </p:spPr>
-        <p:style>
-          <a:lnRef idx="1">
-            <a:schemeClr val="accent1"/>
-          </a:lnRef>
-          <a:fillRef idx="3">
-            <a:schemeClr val="accent1"/>
-          </a:fillRef>
-          <a:effectRef idx="2">
-            <a:schemeClr val="accent1"/>
-          </a:effectRef>
-          <a:fontRef idx="minor">
-            <a:schemeClr val="lt1"/>
-          </a:fontRef>
-        </p:style>
-        <p:txBody>
-          <a:bodyPr rtlCol="0" anchor="ctr"/>
-          <a:lstStyle/>
-          <a:p>
-            <a:pPr algn="ctr"/>
-          </a:p>
-        </p:txBody>
-      </p:sp>
-      <p:sp>
-        <p:nvSpPr>
-          <p:cNvPr id="782" name="Oval 781"/>
-          <p:cNvSpPr/>
-          <p:nvPr/>
-        </p:nvSpPr>
-        <p:spPr>
-          <a:xfrm>
-            <a:off x="7453577" y="2953640"/>
-            <a:ext cx="92000" cy="92000"/>
-          </a:xfrm>
-          <a:prstGeom prst="ellipse">
-            <a:avLst/>
-          </a:prstGeom>
-          <a:noFill/>
-          <a:ln w="13970">
-            <a:solidFill>
-              <a:srgbClr val="D4A300"/>
-            </a:solidFill>
-          </a:ln>
-          <a:effectLst/>
-        </p:spPr>
-        <p:style>
-          <a:lnRef idx="1">
-            <a:schemeClr val="accent1"/>
-          </a:lnRef>
-          <a:fillRef idx="3">
-            <a:schemeClr val="accent1"/>
-          </a:fillRef>
-          <a:effectRef idx="2">
-            <a:schemeClr val="accent1"/>
-          </a:effectRef>
-          <a:fontRef idx="minor">
-            <a:schemeClr val="lt1"/>
-          </a:fontRef>
-        </p:style>
-        <p:txBody>
-          <a:bodyPr rtlCol="0" anchor="ctr"/>
-          <a:lstStyle/>
-          <a:p>
-            <a:pPr algn="ctr"/>
-          </a:p>
-        </p:txBody>
-      </p:sp>
-      <p:sp>
-        <p:nvSpPr>
-          <p:cNvPr id="783" name="Oval 782"/>
-          <p:cNvSpPr/>
-          <p:nvPr/>
-        </p:nvSpPr>
-        <p:spPr>
-          <a:xfrm>
-            <a:off x="1271087" y="2956587"/>
-            <a:ext cx="92000" cy="92000"/>
-          </a:xfrm>
-          <a:prstGeom prst="ellipse">
-            <a:avLst/>
-          </a:prstGeom>
-          <a:noFill/>
-          <a:ln w="13970">
-            <a:solidFill>
-              <a:srgbClr val="D4A300"/>
-            </a:solidFill>
-          </a:ln>
-          <a:effectLst/>
-        </p:spPr>
-        <p:style>
-          <a:lnRef idx="1">
-            <a:schemeClr val="accent1"/>
-          </a:lnRef>
-          <a:fillRef idx="3">
-            <a:schemeClr val="accent1"/>
-          </a:fillRef>
-          <a:effectRef idx="2">
-            <a:schemeClr val="accent1"/>
-          </a:effectRef>
-          <a:fontRef idx="minor">
-            <a:schemeClr val="lt1"/>
-          </a:fontRef>
-        </p:style>
-        <p:txBody>
-          <a:bodyPr rtlCol="0" anchor="ctr"/>
-          <a:lstStyle/>
-          <a:p>
-            <a:pPr algn="ctr"/>
-          </a:p>
-        </p:txBody>
-      </p:sp>
-      <p:sp>
-        <p:nvSpPr>
-          <p:cNvPr id="784" name="Oval 783"/>
-          <p:cNvSpPr/>
-          <p:nvPr/>
-        </p:nvSpPr>
-        <p:spPr>
-          <a:xfrm>
-            <a:off x="3501973" y="2957549"/>
-            <a:ext cx="92000" cy="92000"/>
-          </a:xfrm>
-          <a:prstGeom prst="ellipse">
-            <a:avLst/>
-          </a:prstGeom>
-          <a:noFill/>
-          <a:ln w="13970">
-            <a:solidFill>
-              <a:srgbClr val="D4A300"/>
-            </a:solidFill>
-          </a:ln>
-          <a:effectLst/>
-        </p:spPr>
-        <p:style>
-          <a:lnRef idx="1">
-            <a:schemeClr val="accent1"/>
-          </a:lnRef>
-          <a:fillRef idx="3">
-            <a:schemeClr val="accent1"/>
-          </a:fillRef>
-          <a:effectRef idx="2">
-            <a:schemeClr val="accent1"/>
-          </a:effectRef>
-          <a:fontRef idx="minor">
-            <a:schemeClr val="lt1"/>
-          </a:fontRef>
-        </p:style>
-        <p:txBody>
-          <a:bodyPr rtlCol="0" anchor="ctr"/>
-          <a:lstStyle/>
-          <a:p>
-            <a:pPr algn="ctr"/>
-          </a:p>
-        </p:txBody>
-      </p:sp>
-      <p:sp>
-        <p:nvSpPr>
-          <p:cNvPr id="785" name="Oval 784"/>
-          <p:cNvSpPr/>
-          <p:nvPr/>
-        </p:nvSpPr>
-        <p:spPr>
-          <a:xfrm>
-            <a:off x="5770244" y="2963522"/>
-            <a:ext cx="92000" cy="92000"/>
-          </a:xfrm>
-          <a:prstGeom prst="ellipse">
-            <a:avLst/>
-          </a:prstGeom>
-          <a:noFill/>
-          <a:ln w="13970">
-            <a:solidFill>
-              <a:srgbClr val="D4A300"/>
-            </a:solidFill>
-          </a:ln>
-          <a:effectLst/>
-        </p:spPr>
-        <p:style>
-          <a:lnRef idx="1">
-            <a:schemeClr val="accent1"/>
-          </a:lnRef>
-          <a:fillRef idx="3">
-            <a:schemeClr val="accent1"/>
-          </a:fillRef>
-          <a:effectRef idx="2">
-            <a:schemeClr val="accent1"/>
-          </a:effectRef>
-          <a:fontRef idx="minor">
-            <a:schemeClr val="lt1"/>
-          </a:fontRef>
-        </p:style>
-        <p:txBody>
-          <a:bodyPr rtlCol="0" anchor="ctr"/>
-          <a:lstStyle/>
-          <a:p>
-            <a:pPr algn="ctr"/>
-          </a:p>
-        </p:txBody>
-      </p:sp>
-      <p:sp>
-        <p:nvSpPr>
-          <p:cNvPr id="786" name="Oval 785"/>
-          <p:cNvSpPr/>
-          <p:nvPr/>
-        </p:nvSpPr>
-        <p:spPr>
-          <a:xfrm>
-            <a:off x="6147402" y="2964931"/>
-            <a:ext cx="92000" cy="92000"/>
-          </a:xfrm>
-          <a:prstGeom prst="ellipse">
-            <a:avLst/>
-          </a:prstGeom>
-          <a:noFill/>
-          <a:ln w="13970">
-            <a:solidFill>
-              <a:srgbClr val="D4A300"/>
-            </a:solidFill>
-          </a:ln>
-          <a:effectLst/>
-        </p:spPr>
-        <p:style>
-          <a:lnRef idx="1">
-            <a:schemeClr val="accent1"/>
-          </a:lnRef>
-          <a:fillRef idx="3">
-            <a:schemeClr val="accent1"/>
-          </a:fillRef>
-          <a:effectRef idx="2">
-            <a:schemeClr val="accent1"/>
-          </a:effectRef>
-          <a:fontRef idx="minor">
-            <a:schemeClr val="lt1"/>
-          </a:fontRef>
-        </p:style>
-        <p:txBody>
-          <a:bodyPr rtlCol="0" anchor="ctr"/>
-          <a:lstStyle/>
-          <a:p>
-            <a:pPr algn="ctr"/>
-          </a:p>
-        </p:txBody>
-      </p:sp>
-      <p:sp>
-        <p:nvSpPr>
-          <p:cNvPr id="787" name="Oval 786"/>
-          <p:cNvSpPr/>
-          <p:nvPr/>
-        </p:nvSpPr>
-        <p:spPr>
-          <a:xfrm>
-            <a:off x="3216281" y="2965267"/>
-            <a:ext cx="92000" cy="92000"/>
-          </a:xfrm>
-          <a:prstGeom prst="ellipse">
-            <a:avLst/>
-          </a:prstGeom>
-          <a:noFill/>
-          <a:ln w="13970">
-            <a:solidFill>
-              <a:srgbClr val="D4A300"/>
-            </a:solidFill>
-          </a:ln>
-          <a:effectLst/>
-        </p:spPr>
-        <p:style>
-          <a:lnRef idx="1">
-            <a:schemeClr val="accent1"/>
-          </a:lnRef>
-          <a:fillRef idx="3">
-            <a:schemeClr val="accent1"/>
-          </a:fillRef>
-          <a:effectRef idx="2">
-            <a:schemeClr val="accent1"/>
-          </a:effectRef>
-          <a:fontRef idx="minor">
-            <a:schemeClr val="lt1"/>
-          </a:fontRef>
-        </p:style>
-        <p:txBody>
-          <a:bodyPr rtlCol="0" anchor="ctr"/>
-          <a:lstStyle/>
-          <a:p>
-            <a:pPr algn="ctr"/>
-          </a:p>
-        </p:txBody>
-      </p:sp>
-      <p:sp>
-        <p:nvSpPr>
-          <p:cNvPr id="788" name="Oval 787"/>
-          <p:cNvSpPr/>
-          <p:nvPr/>
-        </p:nvSpPr>
-        <p:spPr>
-          <a:xfrm>
-            <a:off x="5278778" y="2981617"/>
-            <a:ext cx="92000" cy="92000"/>
-          </a:xfrm>
-          <a:prstGeom prst="ellipse">
-            <a:avLst/>
-          </a:prstGeom>
-          <a:noFill/>
-          <a:ln w="13970">
-            <a:solidFill>
-              <a:srgbClr val="D4A300"/>
-            </a:solidFill>
-          </a:ln>
-          <a:effectLst/>
-        </p:spPr>
-        <p:style>
-          <a:lnRef idx="1">
-            <a:schemeClr val="accent1"/>
-          </a:lnRef>
-          <a:fillRef idx="3">
-            <a:schemeClr val="accent1"/>
-          </a:fillRef>
-          <a:effectRef idx="2">
-            <a:schemeClr val="accent1"/>
-          </a:effectRef>
-          <a:fontRef idx="minor">
-            <a:schemeClr val="lt1"/>
-          </a:fontRef>
-        </p:style>
-        <p:txBody>
-          <a:bodyPr rtlCol="0" anchor="ctr"/>
-          <a:lstStyle/>
-          <a:p>
-            <a:pPr algn="ctr"/>
-          </a:p>
-        </p:txBody>
-      </p:sp>
-      <p:sp>
-        <p:nvSpPr>
-          <p:cNvPr id="789" name="Oval 788"/>
-          <p:cNvSpPr/>
-          <p:nvPr/>
-        </p:nvSpPr>
-        <p:spPr>
-          <a:xfrm>
-            <a:off x="5175698" y="2986989"/>
-            <a:ext cx="92000" cy="92000"/>
-          </a:xfrm>
-          <a:prstGeom prst="ellipse">
-            <a:avLst/>
-          </a:prstGeom>
-          <a:noFill/>
-          <a:ln w="13970">
-            <a:solidFill>
-              <a:srgbClr val="D4A300"/>
-            </a:solidFill>
-          </a:ln>
-          <a:effectLst/>
-        </p:spPr>
-        <p:style>
-          <a:lnRef idx="1">
-            <a:schemeClr val="accent1"/>
-          </a:lnRef>
-          <a:fillRef idx="3">
-            <a:schemeClr val="accent1"/>
-          </a:fillRef>
-          <a:effectRef idx="2">
-            <a:schemeClr val="accent1"/>
-          </a:effectRef>
-          <a:fontRef idx="minor">
-            <a:schemeClr val="lt1"/>
-          </a:fontRef>
-        </p:style>
-        <p:txBody>
-          <a:bodyPr rtlCol="0" anchor="ctr"/>
-          <a:lstStyle/>
-          <a:p>
-            <a:pPr algn="ctr"/>
-          </a:p>
-        </p:txBody>
-      </p:sp>
-      <p:sp>
-        <p:nvSpPr>
-          <p:cNvPr id="790" name="Oval 789"/>
-          <p:cNvSpPr/>
-          <p:nvPr/>
-        </p:nvSpPr>
-        <p:spPr>
-          <a:xfrm>
-            <a:off x="5129147" y="3036502"/>
-            <a:ext cx="92000" cy="92000"/>
-          </a:xfrm>
-          <a:prstGeom prst="ellipse">
-            <a:avLst/>
-          </a:prstGeom>
-          <a:noFill/>
-          <a:ln w="13970">
-            <a:solidFill>
-              <a:srgbClr val="D4A300"/>
-            </a:solidFill>
-          </a:ln>
-          <a:effectLst/>
-        </p:spPr>
-        <p:style>
-          <a:lnRef idx="1">
-            <a:schemeClr val="accent1"/>
-          </a:lnRef>
-          <a:fillRef idx="3">
-            <a:schemeClr val="accent1"/>
-          </a:fillRef>
-          <a:effectRef idx="2">
-            <a:schemeClr val="accent1"/>
-          </a:effectRef>
-          <a:fontRef idx="minor">
-            <a:schemeClr val="lt1"/>
-          </a:fontRef>
-        </p:style>
-        <p:txBody>
-          <a:bodyPr rtlCol="0" anchor="ctr"/>
-          <a:lstStyle/>
-          <a:p>
-            <a:pPr algn="ctr"/>
-          </a:p>
-        </p:txBody>
-      </p:sp>
-      <p:sp>
-        <p:nvSpPr>
-          <p:cNvPr id="791" name="Oval 790"/>
-          <p:cNvSpPr/>
-          <p:nvPr/>
-        </p:nvSpPr>
-        <p:spPr>
-          <a:xfrm>
-            <a:off x="5437391" y="3042646"/>
-            <a:ext cx="92000" cy="92000"/>
-          </a:xfrm>
-          <a:prstGeom prst="ellipse">
-            <a:avLst/>
-          </a:prstGeom>
-          <a:noFill/>
-          <a:ln w="13970">
-            <a:solidFill>
-              <a:srgbClr val="D4A300"/>
-            </a:solidFill>
-          </a:ln>
-          <a:effectLst/>
-        </p:spPr>
-        <p:style>
-          <a:lnRef idx="1">
-            <a:schemeClr val="accent1"/>
-          </a:lnRef>
-          <a:fillRef idx="3">
-            <a:schemeClr val="accent1"/>
-          </a:fillRef>
-          <a:effectRef idx="2">
-            <a:schemeClr val="accent1"/>
-          </a:effectRef>
-          <a:fontRef idx="minor">
-            <a:schemeClr val="lt1"/>
-          </a:fontRef>
-        </p:style>
-        <p:txBody>
-          <a:bodyPr rtlCol="0" anchor="ctr"/>
-          <a:lstStyle/>
-          <a:p>
-            <a:pPr algn="ctr"/>
-          </a:p>
-        </p:txBody>
-      </p:sp>
-      <p:sp>
-        <p:nvSpPr>
-          <p:cNvPr id="792" name="Oval 791"/>
-          <p:cNvSpPr/>
-          <p:nvPr/>
-        </p:nvSpPr>
-        <p:spPr>
-          <a:xfrm>
-            <a:off x="6365936" y="3083877"/>
-            <a:ext cx="92000" cy="92000"/>
-          </a:xfrm>
-          <a:prstGeom prst="ellipse">
-            <a:avLst/>
-          </a:prstGeom>
-          <a:noFill/>
-          <a:ln w="13970">
-            <a:solidFill>
-              <a:srgbClr val="D4A300"/>
-            </a:solidFill>
-          </a:ln>
-          <a:effectLst/>
-        </p:spPr>
-        <p:style>
-          <a:lnRef idx="1">
-            <a:schemeClr val="accent1"/>
-          </a:lnRef>
-          <a:fillRef idx="3">
-            <a:schemeClr val="accent1"/>
-          </a:fillRef>
-          <a:effectRef idx="2">
-            <a:schemeClr val="accent1"/>
-          </a:effectRef>
-          <a:fontRef idx="minor">
-            <a:schemeClr val="lt1"/>
-          </a:fontRef>
-        </p:style>
-        <p:txBody>
-          <a:bodyPr rtlCol="0" anchor="ctr"/>
-          <a:lstStyle/>
-          <a:p>
-            <a:pPr algn="ctr"/>
-          </a:p>
-        </p:txBody>
-      </p:sp>
-      <p:sp>
-        <p:nvSpPr>
-          <p:cNvPr id="793" name="Oval 792"/>
-          <p:cNvSpPr/>
-          <p:nvPr/>
-        </p:nvSpPr>
-        <p:spPr>
-          <a:xfrm>
-            <a:off x="6038564" y="3105158"/>
-            <a:ext cx="92000" cy="92000"/>
-          </a:xfrm>
-          <a:prstGeom prst="ellipse">
-            <a:avLst/>
-          </a:prstGeom>
-          <a:noFill/>
-          <a:ln w="13970">
-            <a:solidFill>
-              <a:srgbClr val="D4A300"/>
-            </a:solidFill>
-          </a:ln>
-          <a:effectLst/>
-        </p:spPr>
-        <p:style>
-          <a:lnRef idx="1">
-            <a:schemeClr val="accent1"/>
-          </a:lnRef>
-          <a:fillRef idx="3">
-            <a:schemeClr val="accent1"/>
-          </a:fillRef>
-          <a:effectRef idx="2">
-            <a:schemeClr val="accent1"/>
-          </a:effectRef>
-          <a:fontRef idx="minor">
-            <a:schemeClr val="lt1"/>
-          </a:fontRef>
-        </p:style>
-        <p:txBody>
-          <a:bodyPr rtlCol="0" anchor="ctr"/>
-          <a:lstStyle/>
-          <a:p>
-            <a:pPr algn="ctr"/>
-          </a:p>
-        </p:txBody>
-      </p:sp>
-      <p:sp>
-        <p:nvSpPr>
-          <p:cNvPr id="794" name="Oval 793"/>
-          <p:cNvSpPr/>
-          <p:nvPr/>
-        </p:nvSpPr>
-        <p:spPr>
-          <a:xfrm>
-            <a:off x="3565481" y="3105291"/>
-            <a:ext cx="92000" cy="92000"/>
-          </a:xfrm>
-          <a:prstGeom prst="ellipse">
-            <a:avLst/>
-          </a:prstGeom>
-          <a:noFill/>
-          <a:ln w="13970">
-            <a:solidFill>
-              <a:srgbClr val="D4A300"/>
-            </a:solidFill>
-          </a:ln>
-          <a:effectLst/>
-        </p:spPr>
-        <p:style>
-          <a:lnRef idx="1">
-            <a:schemeClr val="accent1"/>
-          </a:lnRef>
-          <a:fillRef idx="3">
-            <a:schemeClr val="accent1"/>
-          </a:fillRef>
-          <a:effectRef idx="2">
-            <a:schemeClr val="accent1"/>
-          </a:effectRef>
-          <a:fontRef idx="minor">
-            <a:schemeClr val="lt1"/>
-          </a:fontRef>
-        </p:style>
-        <p:txBody>
-          <a:bodyPr rtlCol="0" anchor="ctr"/>
-          <a:lstStyle/>
-          <a:p>
-            <a:pPr algn="ctr"/>
-          </a:p>
-        </p:txBody>
-      </p:sp>
-      <p:sp>
-        <p:nvSpPr>
-          <p:cNvPr id="795" name="Oval 794"/>
-          <p:cNvSpPr/>
-          <p:nvPr/>
-        </p:nvSpPr>
-        <p:spPr>
-          <a:xfrm>
-            <a:off x="3799055" y="3111217"/>
-            <a:ext cx="92000" cy="92000"/>
-          </a:xfrm>
-          <a:prstGeom prst="ellipse">
-            <a:avLst/>
-          </a:prstGeom>
-          <a:noFill/>
-          <a:ln w="13970">
-            <a:solidFill>
-              <a:srgbClr val="D4A300"/>
-            </a:solidFill>
-          </a:ln>
-          <a:effectLst/>
-        </p:spPr>
-        <p:style>
-          <a:lnRef idx="1">
-            <a:schemeClr val="accent1"/>
-          </a:lnRef>
-          <a:fillRef idx="3">
-            <a:schemeClr val="accent1"/>
-          </a:fillRef>
-          <a:effectRef idx="2">
-            <a:schemeClr val="accent1"/>
-          </a:effectRef>
-          <a:fontRef idx="minor">
-            <a:schemeClr val="lt1"/>
-          </a:fontRef>
-        </p:style>
-        <p:txBody>
-          <a:bodyPr rtlCol="0" anchor="ctr"/>
-          <a:lstStyle/>
-          <a:p>
-            <a:pPr algn="ctr"/>
-          </a:p>
-        </p:txBody>
-      </p:sp>
-      <p:sp>
-        <p:nvSpPr>
-          <p:cNvPr id="796" name="Oval 795"/>
-          <p:cNvSpPr/>
-          <p:nvPr/>
-        </p:nvSpPr>
-        <p:spPr>
-          <a:xfrm>
-            <a:off x="5389710" y="3127980"/>
-            <a:ext cx="92000" cy="92000"/>
-          </a:xfrm>
-          <a:prstGeom prst="ellipse">
-            <a:avLst/>
-          </a:prstGeom>
-          <a:noFill/>
-          <a:ln w="13970">
-            <a:solidFill>
-              <a:srgbClr val="D4A300"/>
-            </a:solidFill>
-          </a:ln>
-          <a:effectLst/>
-        </p:spPr>
-        <p:style>
-          <a:lnRef idx="1">
-            <a:schemeClr val="accent1"/>
-          </a:lnRef>
-          <a:fillRef idx="3">
-            <a:schemeClr val="accent1"/>
-          </a:fillRef>
-          <a:effectRef idx="2">
-            <a:schemeClr val="accent1"/>
-          </a:effectRef>
-          <a:fontRef idx="minor">
-            <a:schemeClr val="lt1"/>
-          </a:fontRef>
-        </p:style>
-        <p:txBody>
-          <a:bodyPr rtlCol="0" anchor="ctr"/>
-          <a:lstStyle/>
-          <a:p>
-            <a:pPr algn="ctr"/>
-          </a:p>
-        </p:txBody>
-      </p:sp>
-      <p:sp>
-        <p:nvSpPr>
-          <p:cNvPr id="797" name="Oval 796"/>
-          <p:cNvSpPr/>
-          <p:nvPr/>
-        </p:nvSpPr>
-        <p:spPr>
-          <a:xfrm>
-            <a:off x="3761092" y="3135438"/>
-            <a:ext cx="92000" cy="92000"/>
-          </a:xfrm>
-          <a:prstGeom prst="ellipse">
-            <a:avLst/>
-          </a:prstGeom>
-          <a:noFill/>
-          <a:ln w="13970">
-            <a:solidFill>
-              <a:srgbClr val="D4A300"/>
-            </a:solidFill>
-          </a:ln>
-          <a:effectLst/>
-        </p:spPr>
-        <p:style>
-          <a:lnRef idx="1">
-            <a:schemeClr val="accent1"/>
-          </a:lnRef>
-          <a:fillRef idx="3">
-            <a:schemeClr val="accent1"/>
-          </a:fillRef>
-          <a:effectRef idx="2">
-            <a:schemeClr val="accent1"/>
-          </a:effectRef>
-          <a:fontRef idx="minor">
-            <a:schemeClr val="lt1"/>
-          </a:fontRef>
-        </p:style>
-        <p:txBody>
-          <a:bodyPr rtlCol="0" anchor="ctr"/>
-          <a:lstStyle/>
-          <a:p>
-            <a:pPr algn="ctr"/>
-          </a:p>
-        </p:txBody>
-      </p:sp>
-      <p:sp>
-        <p:nvSpPr>
-          <p:cNvPr id="798" name="Oval 797"/>
-          <p:cNvSpPr/>
-          <p:nvPr/>
-        </p:nvSpPr>
-        <p:spPr>
-          <a:xfrm>
-            <a:off x="3302238" y="3141104"/>
-            <a:ext cx="92000" cy="92000"/>
-          </a:xfrm>
-          <a:prstGeom prst="ellipse">
-            <a:avLst/>
-          </a:prstGeom>
-          <a:noFill/>
-          <a:ln w="13970">
-            <a:solidFill>
-              <a:srgbClr val="D4A300"/>
-            </a:solidFill>
-          </a:ln>
-          <a:effectLst/>
-        </p:spPr>
-        <p:style>
-          <a:lnRef idx="1">
-            <a:schemeClr val="accent1"/>
-          </a:lnRef>
-          <a:fillRef idx="3">
-            <a:schemeClr val="accent1"/>
-          </a:fillRef>
-          <a:effectRef idx="2">
-            <a:schemeClr val="accent1"/>
-          </a:effectRef>
-          <a:fontRef idx="minor">
-            <a:schemeClr val="lt1"/>
-          </a:fontRef>
-        </p:style>
-        <p:txBody>
-          <a:bodyPr rtlCol="0" anchor="ctr"/>
-          <a:lstStyle/>
-          <a:p>
-            <a:pPr algn="ctr"/>
-          </a:p>
-        </p:txBody>
-      </p:sp>
-      <p:sp>
-        <p:nvSpPr>
-          <p:cNvPr id="799" name="Oval 798"/>
-          <p:cNvSpPr/>
-          <p:nvPr/>
-        </p:nvSpPr>
-        <p:spPr>
-          <a:xfrm>
-            <a:off x="2873136" y="3168282"/>
-            <a:ext cx="92000" cy="92000"/>
-          </a:xfrm>
-          <a:prstGeom prst="ellipse">
-            <a:avLst/>
-          </a:prstGeom>
-          <a:noFill/>
-          <a:ln w="13970">
-            <a:solidFill>
-              <a:srgbClr val="D4A300"/>
-            </a:solidFill>
-          </a:ln>
-          <a:effectLst/>
-        </p:spPr>
-        <p:style>
-          <a:lnRef idx="1">
-            <a:schemeClr val="accent1"/>
-          </a:lnRef>
-          <a:fillRef idx="3">
-            <a:schemeClr val="accent1"/>
-          </a:fillRef>
-          <a:effectRef idx="2">
-            <a:schemeClr val="accent1"/>
-          </a:effectRef>
-          <a:fontRef idx="minor">
-            <a:schemeClr val="lt1"/>
-          </a:fontRef>
-        </p:style>
-        <p:txBody>
-          <a:bodyPr rtlCol="0" anchor="ctr"/>
-          <a:lstStyle/>
-          <a:p>
-            <a:pPr algn="ctr"/>
-          </a:p>
-        </p:txBody>
-      </p:sp>
-      <p:sp>
-        <p:nvSpPr>
-          <p:cNvPr id="800" name="Oval 799"/>
-          <p:cNvSpPr/>
-          <p:nvPr/>
-        </p:nvSpPr>
-        <p:spPr>
-          <a:xfrm>
-            <a:off x="3109387" y="3178158"/>
-            <a:ext cx="92000" cy="92000"/>
-          </a:xfrm>
-          <a:prstGeom prst="ellipse">
-            <a:avLst/>
-          </a:prstGeom>
-          <a:noFill/>
-          <a:ln w="13970">
-            <a:solidFill>
-              <a:srgbClr val="D4A300"/>
-            </a:solidFill>
-          </a:ln>
-          <a:effectLst/>
-        </p:spPr>
-        <p:style>
-          <a:lnRef idx="1">
-            <a:schemeClr val="accent1"/>
-          </a:lnRef>
-          <a:fillRef idx="3">
-            <a:schemeClr val="accent1"/>
-          </a:fillRef>
-          <a:effectRef idx="2">
-            <a:schemeClr val="accent1"/>
-          </a:effectRef>
-          <a:fontRef idx="minor">
-            <a:schemeClr val="lt1"/>
-          </a:fontRef>
-        </p:style>
-        <p:txBody>
-          <a:bodyPr rtlCol="0" anchor="ctr"/>
-          <a:lstStyle/>
-          <a:p>
-            <a:pPr algn="ctr"/>
-          </a:p>
-        </p:txBody>
-      </p:sp>
-      <p:sp>
-        <p:nvSpPr>
-          <p:cNvPr id="801" name="Oval 800"/>
-          <p:cNvSpPr/>
-          <p:nvPr/>
-        </p:nvSpPr>
-        <p:spPr>
-          <a:xfrm>
-            <a:off x="6446535" y="3185855"/>
-            <a:ext cx="92000" cy="92000"/>
-          </a:xfrm>
-          <a:prstGeom prst="ellipse">
-            <a:avLst/>
-          </a:prstGeom>
-          <a:noFill/>
-          <a:ln w="13970">
-            <a:solidFill>
-              <a:srgbClr val="D4A300"/>
-            </a:solidFill>
-          </a:ln>
-          <a:effectLst/>
-        </p:spPr>
-        <p:style>
-          <a:lnRef idx="1">
-            <a:schemeClr val="accent1"/>
-          </a:lnRef>
-          <a:fillRef idx="3">
-            <a:schemeClr val="accent1"/>
-          </a:fillRef>
-          <a:effectRef idx="2">
-            <a:schemeClr val="accent1"/>
-          </a:effectRef>
-          <a:fontRef idx="minor">
-            <a:schemeClr val="lt1"/>
-          </a:fontRef>
-        </p:style>
-        <p:txBody>
-          <a:bodyPr rtlCol="0" anchor="ctr"/>
-          <a:lstStyle/>
-          <a:p>
-            <a:pPr algn="ctr"/>
-          </a:p>
-        </p:txBody>
-      </p:sp>
-      <p:sp>
-        <p:nvSpPr>
-          <p:cNvPr id="802" name="Oval 801"/>
-          <p:cNvSpPr/>
-          <p:nvPr/>
-        </p:nvSpPr>
-        <p:spPr>
-          <a:xfrm>
-            <a:off x="2359922" y="3192125"/>
-            <a:ext cx="92000" cy="92000"/>
-          </a:xfrm>
-          <a:prstGeom prst="ellipse">
-            <a:avLst/>
-          </a:prstGeom>
-          <a:noFill/>
-          <a:ln w="13970">
-            <a:solidFill>
-              <a:srgbClr val="D4A300"/>
-            </a:solidFill>
-          </a:ln>
-          <a:effectLst/>
-        </p:spPr>
-        <p:style>
-          <a:lnRef idx="1">
-            <a:schemeClr val="accent1"/>
-          </a:lnRef>
-          <a:fillRef idx="3">
-            <a:schemeClr val="accent1"/>
-          </a:fillRef>
-          <a:effectRef idx="2">
-            <a:schemeClr val="accent1"/>
-          </a:effectRef>
-          <a:fontRef idx="minor">
-            <a:schemeClr val="lt1"/>
-          </a:fontRef>
-        </p:style>
-        <p:txBody>
-          <a:bodyPr rtlCol="0" anchor="ctr"/>
-          <a:lstStyle/>
-          <a:p>
-            <a:pPr algn="ctr"/>
-          </a:p>
-        </p:txBody>
-      </p:sp>
-      <p:sp>
-        <p:nvSpPr>
-          <p:cNvPr id="803" name="Oval 802"/>
-          <p:cNvSpPr/>
-          <p:nvPr/>
-        </p:nvSpPr>
-        <p:spPr>
-          <a:xfrm>
-            <a:off x="6038926" y="3200922"/>
-            <a:ext cx="92000" cy="92000"/>
-          </a:xfrm>
-          <a:prstGeom prst="ellipse">
-            <a:avLst/>
-          </a:prstGeom>
-          <a:noFill/>
-          <a:ln w="13970">
-            <a:solidFill>
-              <a:srgbClr val="D4A300"/>
-            </a:solidFill>
-          </a:ln>
-          <a:effectLst/>
-        </p:spPr>
-        <p:style>
-          <a:lnRef idx="1">
-            <a:schemeClr val="accent1"/>
-          </a:lnRef>
-          <a:fillRef idx="3">
-            <a:schemeClr val="accent1"/>
-          </a:fillRef>
-          <a:effectRef idx="2">
-            <a:schemeClr val="accent1"/>
-          </a:effectRef>
-          <a:fontRef idx="minor">
-            <a:schemeClr val="lt1"/>
-          </a:fontRef>
-        </p:style>
-        <p:txBody>
-          <a:bodyPr rtlCol="0" anchor="ctr"/>
-          <a:lstStyle/>
-          <a:p>
-            <a:pPr algn="ctr"/>
-          </a:p>
-        </p:txBody>
-      </p:sp>
-      <p:sp>
-        <p:nvSpPr>
-          <p:cNvPr id="804" name="Oval 803"/>
-          <p:cNvSpPr/>
-          <p:nvPr/>
-        </p:nvSpPr>
-        <p:spPr>
-          <a:xfrm>
-            <a:off x="3807071" y="3206146"/>
-            <a:ext cx="92000" cy="92000"/>
-          </a:xfrm>
-          <a:prstGeom prst="ellipse">
-            <a:avLst/>
-          </a:prstGeom>
-          <a:noFill/>
-          <a:ln w="13970">
-            <a:solidFill>
-              <a:srgbClr val="D4A300"/>
-            </a:solidFill>
-          </a:ln>
-          <a:effectLst/>
-        </p:spPr>
-        <p:style>
-          <a:lnRef idx="1">
-            <a:schemeClr val="accent1"/>
-          </a:lnRef>
-          <a:fillRef idx="3">
-            <a:schemeClr val="accent1"/>
-          </a:fillRef>
-          <a:effectRef idx="2">
-            <a:schemeClr val="accent1"/>
-          </a:effectRef>
-          <a:fontRef idx="minor">
-            <a:schemeClr val="lt1"/>
-          </a:fontRef>
-        </p:style>
-        <p:txBody>
-          <a:bodyPr rtlCol="0" anchor="ctr"/>
-          <a:lstStyle/>
-          <a:p>
-            <a:pPr algn="ctr"/>
-          </a:p>
-        </p:txBody>
-      </p:sp>
-      <p:sp>
-        <p:nvSpPr>
-          <p:cNvPr id="805" name="Oval 804"/>
-          <p:cNvSpPr/>
-          <p:nvPr/>
-        </p:nvSpPr>
-        <p:spPr>
-          <a:xfrm>
-            <a:off x="3415145" y="3210708"/>
-            <a:ext cx="92000" cy="92000"/>
-          </a:xfrm>
-          <a:prstGeom prst="ellipse">
-            <a:avLst/>
-          </a:prstGeom>
-          <a:noFill/>
-          <a:ln w="13970">
-            <a:solidFill>
-              <a:srgbClr val="D4A300"/>
-            </a:solidFill>
-          </a:ln>
-          <a:effectLst/>
-        </p:spPr>
-        <p:style>
-          <a:lnRef idx="1">
-            <a:schemeClr val="accent1"/>
-          </a:lnRef>
-          <a:fillRef idx="3">
-            <a:schemeClr val="accent1"/>
-          </a:fillRef>
-          <a:effectRef idx="2">
-            <a:schemeClr val="accent1"/>
-          </a:effectRef>
-          <a:fontRef idx="minor">
-            <a:schemeClr val="lt1"/>
-          </a:fontRef>
-        </p:style>
-        <p:txBody>
-          <a:bodyPr rtlCol="0" anchor="ctr"/>
-          <a:lstStyle/>
-          <a:p>
-            <a:pPr algn="ctr"/>
-          </a:p>
-        </p:txBody>
-      </p:sp>
-      <p:sp>
-        <p:nvSpPr>
-          <p:cNvPr id="806" name="Oval 805"/>
-          <p:cNvSpPr/>
-          <p:nvPr/>
-        </p:nvSpPr>
-        <p:spPr>
-          <a:xfrm>
-            <a:off x="2928569" y="3213366"/>
-            <a:ext cx="92000" cy="92000"/>
-          </a:xfrm>
-          <a:prstGeom prst="ellipse">
-            <a:avLst/>
-          </a:prstGeom>
-          <a:noFill/>
-          <a:ln w="13970">
-            <a:solidFill>
-              <a:srgbClr val="D4A300"/>
-            </a:solidFill>
-          </a:ln>
-          <a:effectLst/>
-        </p:spPr>
-        <p:style>
-          <a:lnRef idx="1">
-            <a:schemeClr val="accent1"/>
-          </a:lnRef>
-          <a:fillRef idx="3">
-            <a:schemeClr val="accent1"/>
-          </a:fillRef>
-          <a:effectRef idx="2">
-            <a:schemeClr val="accent1"/>
-          </a:effectRef>
-          <a:fontRef idx="minor">
-            <a:schemeClr val="lt1"/>
-          </a:fontRef>
-        </p:style>
-        <p:txBody>
-          <a:bodyPr rtlCol="0" anchor="ctr"/>
-          <a:lstStyle/>
-          <a:p>
-            <a:pPr algn="ctr"/>
-          </a:p>
-        </p:txBody>
-      </p:sp>
-      <p:sp>
-        <p:nvSpPr>
-          <p:cNvPr id="807" name="Oval 806"/>
-          <p:cNvSpPr/>
-          <p:nvPr/>
-        </p:nvSpPr>
-        <p:spPr>
-          <a:xfrm>
-            <a:off x="5171212" y="3221885"/>
-            <a:ext cx="92000" cy="92000"/>
-          </a:xfrm>
-          <a:prstGeom prst="ellipse">
-            <a:avLst/>
-          </a:prstGeom>
-          <a:noFill/>
-          <a:ln w="13970">
-            <a:solidFill>
-              <a:srgbClr val="D4A300"/>
-            </a:solidFill>
-          </a:ln>
-          <a:effectLst/>
-        </p:spPr>
-        <p:style>
-          <a:lnRef idx="1">
-            <a:schemeClr val="accent1"/>
-          </a:lnRef>
-          <a:fillRef idx="3">
-            <a:schemeClr val="accent1"/>
-          </a:fillRef>
-          <a:effectRef idx="2">
-            <a:schemeClr val="accent1"/>
-          </a:effectRef>
-          <a:fontRef idx="minor">
-            <a:schemeClr val="lt1"/>
-          </a:fontRef>
-        </p:style>
-        <p:txBody>
-          <a:bodyPr rtlCol="0" anchor="ctr"/>
-          <a:lstStyle/>
-          <a:p>
-            <a:pPr algn="ctr"/>
-          </a:p>
-        </p:txBody>
-      </p:sp>
-      <p:sp>
-        <p:nvSpPr>
-          <p:cNvPr id="808" name="Oval 807"/>
-          <p:cNvSpPr/>
-          <p:nvPr/>
-        </p:nvSpPr>
-        <p:spPr>
-          <a:xfrm>
-            <a:off x="3681902" y="3225709"/>
-            <a:ext cx="92000" cy="92000"/>
-          </a:xfrm>
-          <a:prstGeom prst="ellipse">
-            <a:avLst/>
-          </a:prstGeom>
-          <a:noFill/>
-          <a:ln w="13970">
-            <a:solidFill>
-              <a:srgbClr val="D4A300"/>
-            </a:solidFill>
-          </a:ln>
-          <a:effectLst/>
-        </p:spPr>
-        <p:style>
-          <a:lnRef idx="1">
-            <a:schemeClr val="accent1"/>
-          </a:lnRef>
-          <a:fillRef idx="3">
-            <a:schemeClr val="accent1"/>
-          </a:fillRef>
-          <a:effectRef idx="2">
-            <a:schemeClr val="accent1"/>
-          </a:effectRef>
-          <a:fontRef idx="minor">
-            <a:schemeClr val="lt1"/>
-          </a:fontRef>
-        </p:style>
-        <p:txBody>
-          <a:bodyPr rtlCol="0" anchor="ctr"/>
-          <a:lstStyle/>
-          <a:p>
-            <a:pPr algn="ctr"/>
-          </a:p>
-        </p:txBody>
-      </p:sp>
-      <p:sp>
-        <p:nvSpPr>
-          <p:cNvPr id="809" name="Oval 808"/>
-          <p:cNvSpPr/>
-          <p:nvPr/>
-        </p:nvSpPr>
-        <p:spPr>
-          <a:xfrm>
-            <a:off x="3288660" y="3238560"/>
-            <a:ext cx="92000" cy="92000"/>
-          </a:xfrm>
-          <a:prstGeom prst="ellipse">
-            <a:avLst/>
-          </a:prstGeom>
-          <a:noFill/>
-          <a:ln w="13970">
-            <a:solidFill>
-              <a:srgbClr val="D4A300"/>
-            </a:solidFill>
-          </a:ln>
-          <a:effectLst/>
-        </p:spPr>
-        <p:style>
-          <a:lnRef idx="1">
-            <a:schemeClr val="accent1"/>
-          </a:lnRef>
-          <a:fillRef idx="3">
-            <a:schemeClr val="accent1"/>
-          </a:fillRef>
-          <a:effectRef idx="2">
-            <a:schemeClr val="accent1"/>
-          </a:effectRef>
-          <a:fontRef idx="minor">
-            <a:schemeClr val="lt1"/>
-          </a:fontRef>
-        </p:style>
-        <p:txBody>
-          <a:bodyPr rtlCol="0" anchor="ctr"/>
-          <a:lstStyle/>
-          <a:p>
-            <a:pPr algn="ctr"/>
-          </a:p>
-        </p:txBody>
-      </p:sp>
-      <p:sp>
-        <p:nvSpPr>
-          <p:cNvPr id="810" name="Oval 809"/>
-          <p:cNvSpPr/>
-          <p:nvPr/>
-        </p:nvSpPr>
-        <p:spPr>
-          <a:xfrm>
-            <a:off x="2980452" y="3243798"/>
-            <a:ext cx="92000" cy="92000"/>
-          </a:xfrm>
-          <a:prstGeom prst="ellipse">
-            <a:avLst/>
-          </a:prstGeom>
-          <a:noFill/>
-          <a:ln w="13970">
-            <a:solidFill>
-              <a:srgbClr val="D4A300"/>
-            </a:solidFill>
-          </a:ln>
-          <a:effectLst/>
-        </p:spPr>
-        <p:style>
-          <a:lnRef idx="1">
-            <a:schemeClr val="accent1"/>
-          </a:lnRef>
-          <a:fillRef idx="3">
-            <a:schemeClr val="accent1"/>
-          </a:fillRef>
-          <a:effectRef idx="2">
-            <a:schemeClr val="accent1"/>
-          </a:effectRef>
-          <a:fontRef idx="minor">
-            <a:schemeClr val="lt1"/>
-          </a:fontRef>
-        </p:style>
-        <p:txBody>
-          <a:bodyPr rtlCol="0" anchor="ctr"/>
-          <a:lstStyle/>
-          <a:p>
-            <a:pPr algn="ctr"/>
-          </a:p>
-        </p:txBody>
-      </p:sp>
-      <p:sp>
-        <p:nvSpPr>
-          <p:cNvPr id="811" name="Oval 810"/>
-          <p:cNvSpPr/>
-          <p:nvPr/>
-        </p:nvSpPr>
-        <p:spPr>
-          <a:xfrm>
-            <a:off x="3254674" y="3251575"/>
-            <a:ext cx="92000" cy="92000"/>
-          </a:xfrm>
-          <a:prstGeom prst="ellipse">
-            <a:avLst/>
-          </a:prstGeom>
-          <a:noFill/>
-          <a:ln w="13970">
-            <a:solidFill>
-              <a:srgbClr val="D4A300"/>
-            </a:solidFill>
-          </a:ln>
-          <a:effectLst/>
-        </p:spPr>
-        <p:style>
-          <a:lnRef idx="1">
-            <a:schemeClr val="accent1"/>
-          </a:lnRef>
-          <a:fillRef idx="3">
-            <a:schemeClr val="accent1"/>
-          </a:fillRef>
-          <a:effectRef idx="2">
-            <a:schemeClr val="accent1"/>
-          </a:effectRef>
-          <a:fontRef idx="minor">
-            <a:schemeClr val="lt1"/>
-          </a:fontRef>
-        </p:style>
-        <p:txBody>
-          <a:bodyPr rtlCol="0" anchor="ctr"/>
-          <a:lstStyle/>
-          <a:p>
-            <a:pPr algn="ctr"/>
-          </a:p>
-        </p:txBody>
-      </p:sp>
-      <p:sp>
-        <p:nvSpPr>
-          <p:cNvPr id="812" name="Oval 811"/>
-          <p:cNvSpPr/>
-          <p:nvPr/>
-        </p:nvSpPr>
-        <p:spPr>
-          <a:xfrm>
-            <a:off x="3452095" y="3260315"/>
-            <a:ext cx="92000" cy="92000"/>
-          </a:xfrm>
-          <a:prstGeom prst="ellipse">
-            <a:avLst/>
-          </a:prstGeom>
-          <a:noFill/>
-          <a:ln w="13970">
-            <a:solidFill>
-              <a:srgbClr val="D4A300"/>
-            </a:solidFill>
-          </a:ln>
-          <a:effectLst/>
-        </p:spPr>
-        <p:style>
-          <a:lnRef idx="1">
-            <a:schemeClr val="accent1"/>
-          </a:lnRef>
-          <a:fillRef idx="3">
-            <a:schemeClr val="accent1"/>
-          </a:fillRef>
-          <a:effectRef idx="2">
-            <a:schemeClr val="accent1"/>
-          </a:effectRef>
-          <a:fontRef idx="minor">
-            <a:schemeClr val="lt1"/>
-          </a:fontRef>
-        </p:style>
-        <p:txBody>
-          <a:bodyPr rtlCol="0" anchor="ctr"/>
-          <a:lstStyle/>
-          <a:p>
-            <a:pPr algn="ctr"/>
-          </a:p>
-        </p:txBody>
-      </p:sp>
-      <p:sp>
-        <p:nvSpPr>
-          <p:cNvPr id="813" name="Oval 812"/>
-          <p:cNvSpPr/>
-          <p:nvPr/>
-        </p:nvSpPr>
-        <p:spPr>
-          <a:xfrm>
-            <a:off x="3328335" y="3262694"/>
-            <a:ext cx="92000" cy="92000"/>
-          </a:xfrm>
-          <a:prstGeom prst="ellipse">
-            <a:avLst/>
-          </a:prstGeom>
-          <a:noFill/>
-          <a:ln w="13970">
-            <a:solidFill>
-              <a:srgbClr val="D4A300"/>
-            </a:solidFill>
-          </a:ln>
-          <a:effectLst/>
-        </p:spPr>
-        <p:style>
-          <a:lnRef idx="1">
-            <a:schemeClr val="accent1"/>
-          </a:lnRef>
-          <a:fillRef idx="3">
-            <a:schemeClr val="accent1"/>
-          </a:fillRef>
-          <a:effectRef idx="2">
-            <a:schemeClr val="accent1"/>
-          </a:effectRef>
-          <a:fontRef idx="minor">
-            <a:schemeClr val="lt1"/>
-          </a:fontRef>
-        </p:style>
-        <p:txBody>
-          <a:bodyPr rtlCol="0" anchor="ctr"/>
-          <a:lstStyle/>
-          <a:p>
-            <a:pPr algn="ctr"/>
-          </a:p>
-        </p:txBody>
-      </p:sp>
-      <p:sp>
-        <p:nvSpPr>
-          <p:cNvPr id="814" name="Oval 813"/>
-          <p:cNvSpPr/>
-          <p:nvPr/>
-        </p:nvSpPr>
-        <p:spPr>
-          <a:xfrm>
-            <a:off x="2591379" y="3265457"/>
-            <a:ext cx="92000" cy="92000"/>
-          </a:xfrm>
-          <a:prstGeom prst="ellipse">
-            <a:avLst/>
-          </a:prstGeom>
-          <a:noFill/>
-          <a:ln w="13970">
-            <a:solidFill>
-              <a:srgbClr val="D4A300"/>
-            </a:solidFill>
-          </a:ln>
-          <a:effectLst/>
-        </p:spPr>
-        <p:style>
-          <a:lnRef idx="1">
-            <a:schemeClr val="accent1"/>
-          </a:lnRef>
-          <a:fillRef idx="3">
-            <a:schemeClr val="accent1"/>
-          </a:fillRef>
-          <a:effectRef idx="2">
-            <a:schemeClr val="accent1"/>
-          </a:effectRef>
-          <a:fontRef idx="minor">
-            <a:schemeClr val="lt1"/>
-          </a:fontRef>
-        </p:style>
-        <p:txBody>
-          <a:bodyPr rtlCol="0" anchor="ctr"/>
-          <a:lstStyle/>
-          <a:p>
-            <a:pPr algn="ctr"/>
-          </a:p>
-        </p:txBody>
-      </p:sp>
-      <p:sp>
-        <p:nvSpPr>
-          <p:cNvPr id="815" name="Oval 814"/>
-          <p:cNvSpPr/>
-          <p:nvPr/>
-        </p:nvSpPr>
-        <p:spPr>
-          <a:xfrm>
-            <a:off x="7689472" y="3269714"/>
-            <a:ext cx="92000" cy="92000"/>
-          </a:xfrm>
-          <a:prstGeom prst="ellipse">
-            <a:avLst/>
-          </a:prstGeom>
-          <a:noFill/>
-          <a:ln w="13970">
-            <a:solidFill>
-              <a:srgbClr val="D4A300"/>
-            </a:solidFill>
-          </a:ln>
-          <a:effectLst/>
-        </p:spPr>
-        <p:style>
-          <a:lnRef idx="1">
-            <a:schemeClr val="accent1"/>
-          </a:lnRef>
-          <a:fillRef idx="3">
-            <a:schemeClr val="accent1"/>
-          </a:fillRef>
-          <a:effectRef idx="2">
-            <a:schemeClr val="accent1"/>
-          </a:effectRef>
-          <a:fontRef idx="minor">
-            <a:schemeClr val="lt1"/>
-          </a:fontRef>
-        </p:style>
-        <p:txBody>
-          <a:bodyPr rtlCol="0" anchor="ctr"/>
-          <a:lstStyle/>
-          <a:p>
-            <a:pPr algn="ctr"/>
-          </a:p>
-        </p:txBody>
-      </p:sp>
-      <p:sp>
-        <p:nvSpPr>
-          <p:cNvPr id="816" name="Oval 815"/>
-          <p:cNvSpPr/>
-          <p:nvPr/>
-        </p:nvSpPr>
-        <p:spPr>
-          <a:xfrm>
-            <a:off x="2720492" y="3312759"/>
-            <a:ext cx="92000" cy="92000"/>
-          </a:xfrm>
-          <a:prstGeom prst="ellipse">
-            <a:avLst/>
-          </a:prstGeom>
-          <a:noFill/>
-          <a:ln w="13970">
-            <a:solidFill>
-              <a:srgbClr val="D4A300"/>
-            </a:solidFill>
-          </a:ln>
-          <a:effectLst/>
-        </p:spPr>
-        <p:style>
-          <a:lnRef idx="1">
-            <a:schemeClr val="accent1"/>
-          </a:lnRef>
-          <a:fillRef idx="3">
-            <a:schemeClr val="accent1"/>
-          </a:fillRef>
-          <a:effectRef idx="2">
-            <a:schemeClr val="accent1"/>
-          </a:effectRef>
-          <a:fontRef idx="minor">
-            <a:schemeClr val="lt1"/>
-          </a:fontRef>
-        </p:style>
-        <p:txBody>
-          <a:bodyPr rtlCol="0" anchor="ctr"/>
-          <a:lstStyle/>
-          <a:p>
-            <a:pPr algn="ctr"/>
-          </a:p>
-        </p:txBody>
-      </p:sp>
-      <p:sp>
-        <p:nvSpPr>
-          <p:cNvPr id="817" name="Oval 816"/>
-          <p:cNvSpPr/>
-          <p:nvPr/>
-        </p:nvSpPr>
-        <p:spPr>
-          <a:xfrm>
-            <a:off x="5229948" y="3315252"/>
-            <a:ext cx="92000" cy="92000"/>
-          </a:xfrm>
-          <a:prstGeom prst="ellipse">
-            <a:avLst/>
-          </a:prstGeom>
-          <a:noFill/>
-          <a:ln w="13970">
-            <a:solidFill>
-              <a:srgbClr val="D4A300"/>
-            </a:solidFill>
-          </a:ln>
-          <a:effectLst/>
-        </p:spPr>
-        <p:style>
-          <a:lnRef idx="1">
-            <a:schemeClr val="accent1"/>
-          </a:lnRef>
-          <a:fillRef idx="3">
-            <a:schemeClr val="accent1"/>
-          </a:fillRef>
-          <a:effectRef idx="2">
-            <a:schemeClr val="accent1"/>
-          </a:effectRef>
-          <a:fontRef idx="minor">
-            <a:schemeClr val="lt1"/>
-          </a:fontRef>
-        </p:style>
-        <p:txBody>
-          <a:bodyPr rtlCol="0" anchor="ctr"/>
-          <a:lstStyle/>
-          <a:p>
-            <a:pPr algn="ctr"/>
-          </a:p>
-        </p:txBody>
-      </p:sp>
-      <p:sp>
-        <p:nvSpPr>
-          <p:cNvPr id="818" name="Oval 817"/>
-          <p:cNvSpPr/>
-          <p:nvPr/>
-        </p:nvSpPr>
-        <p:spPr>
-          <a:xfrm>
-            <a:off x="7615138" y="3316346"/>
-            <a:ext cx="92000" cy="92000"/>
-          </a:xfrm>
-          <a:prstGeom prst="ellipse">
-            <a:avLst/>
-          </a:prstGeom>
-          <a:noFill/>
-          <a:ln w="13970">
-            <a:solidFill>
-              <a:srgbClr val="D4A300"/>
-            </a:solidFill>
-          </a:ln>
-          <a:effectLst/>
-        </p:spPr>
-        <p:style>
-          <a:lnRef idx="1">
-            <a:schemeClr val="accent1"/>
-          </a:lnRef>
-          <a:fillRef idx="3">
-            <a:schemeClr val="accent1"/>
-          </a:fillRef>
-          <a:effectRef idx="2">
-            <a:schemeClr val="accent1"/>
-          </a:effectRef>
-          <a:fontRef idx="minor">
-            <a:schemeClr val="lt1"/>
-          </a:fontRef>
-        </p:style>
-        <p:txBody>
-          <a:bodyPr rtlCol="0" anchor="ctr"/>
-          <a:lstStyle/>
-          <a:p>
-            <a:pPr algn="ctr"/>
-          </a:p>
-        </p:txBody>
-      </p:sp>
-      <p:sp>
-        <p:nvSpPr>
-          <p:cNvPr id="819" name="Oval 818"/>
-          <p:cNvSpPr/>
-          <p:nvPr/>
-        </p:nvSpPr>
-        <p:spPr>
-          <a:xfrm>
-            <a:off x="3461389" y="3317457"/>
-            <a:ext cx="92000" cy="92000"/>
-          </a:xfrm>
-          <a:prstGeom prst="ellipse">
-            <a:avLst/>
-          </a:prstGeom>
-          <a:noFill/>
-          <a:ln w="13970">
-            <a:solidFill>
-              <a:srgbClr val="D4A300"/>
-            </a:solidFill>
-          </a:ln>
-          <a:effectLst/>
-        </p:spPr>
-        <p:style>
-          <a:lnRef idx="1">
-            <a:schemeClr val="accent1"/>
-          </a:lnRef>
-          <a:fillRef idx="3">
-            <a:schemeClr val="accent1"/>
-          </a:fillRef>
-          <a:effectRef idx="2">
-            <a:schemeClr val="accent1"/>
-          </a:effectRef>
-          <a:fontRef idx="minor">
-            <a:schemeClr val="lt1"/>
-          </a:fontRef>
-        </p:style>
-        <p:txBody>
-          <a:bodyPr rtlCol="0" anchor="ctr"/>
-          <a:lstStyle/>
-          <a:p>
-            <a:pPr algn="ctr"/>
-          </a:p>
-        </p:txBody>
-      </p:sp>
-      <p:sp>
-        <p:nvSpPr>
-          <p:cNvPr id="820" name="Oval 819"/>
-          <p:cNvSpPr/>
-          <p:nvPr/>
-        </p:nvSpPr>
-        <p:spPr>
-          <a:xfrm>
-            <a:off x="2578077" y="3318910"/>
-            <a:ext cx="92000" cy="92000"/>
-          </a:xfrm>
-          <a:prstGeom prst="ellipse">
-            <a:avLst/>
-          </a:prstGeom>
-          <a:noFill/>
-          <a:ln w="13970">
-            <a:solidFill>
-              <a:srgbClr val="D4A300"/>
-            </a:solidFill>
-          </a:ln>
-          <a:effectLst/>
-        </p:spPr>
-        <p:style>
-          <a:lnRef idx="1">
-            <a:schemeClr val="accent1"/>
-          </a:lnRef>
-          <a:fillRef idx="3">
-            <a:schemeClr val="accent1"/>
-          </a:fillRef>
-          <a:effectRef idx="2">
-            <a:schemeClr val="accent1"/>
-          </a:effectRef>
-          <a:fontRef idx="minor">
-            <a:schemeClr val="lt1"/>
-          </a:fontRef>
-        </p:style>
-        <p:txBody>
-          <a:bodyPr rtlCol="0" anchor="ctr"/>
-          <a:lstStyle/>
-          <a:p>
-            <a:pPr algn="ctr"/>
-          </a:p>
-        </p:txBody>
-      </p:sp>
-      <p:sp>
-        <p:nvSpPr>
-          <p:cNvPr id="821" name="Oval 820"/>
-          <p:cNvSpPr/>
-          <p:nvPr/>
-        </p:nvSpPr>
-        <p:spPr>
-          <a:xfrm>
-            <a:off x="5457089" y="3329701"/>
-            <a:ext cx="92000" cy="92000"/>
-          </a:xfrm>
-          <a:prstGeom prst="ellipse">
-            <a:avLst/>
-          </a:prstGeom>
-          <a:noFill/>
-          <a:ln w="13970">
-            <a:solidFill>
-              <a:srgbClr val="D4A300"/>
-            </a:solidFill>
-          </a:ln>
-          <a:effectLst/>
-        </p:spPr>
-        <p:style>
-          <a:lnRef idx="1">
-            <a:schemeClr val="accent1"/>
-          </a:lnRef>
-          <a:fillRef idx="3">
-            <a:schemeClr val="accent1"/>
-          </a:fillRef>
-          <a:effectRef idx="2">
-            <a:schemeClr val="accent1"/>
-          </a:effectRef>
-          <a:fontRef idx="minor">
-            <a:schemeClr val="lt1"/>
-          </a:fontRef>
-        </p:style>
-        <p:txBody>
-          <a:bodyPr rtlCol="0" anchor="ctr"/>
-          <a:lstStyle/>
-          <a:p>
-            <a:pPr algn="ctr"/>
-          </a:p>
-        </p:txBody>
-      </p:sp>
-      <p:sp>
-        <p:nvSpPr>
-          <p:cNvPr id="822" name="Oval 821"/>
-          <p:cNvSpPr/>
-          <p:nvPr/>
-        </p:nvSpPr>
-        <p:spPr>
-          <a:xfrm>
-            <a:off x="3456534" y="3329804"/>
-            <a:ext cx="92000" cy="92000"/>
-          </a:xfrm>
-          <a:prstGeom prst="ellipse">
-            <a:avLst/>
-          </a:prstGeom>
-          <a:noFill/>
-          <a:ln w="13970">
-            <a:solidFill>
-              <a:srgbClr val="D4A300"/>
-            </a:solidFill>
-          </a:ln>
-          <a:effectLst/>
-        </p:spPr>
-        <p:style>
-          <a:lnRef idx="1">
-            <a:schemeClr val="accent1"/>
-          </a:lnRef>
-          <a:fillRef idx="3">
-            <a:schemeClr val="accent1"/>
-          </a:fillRef>
-          <a:effectRef idx="2">
-            <a:schemeClr val="accent1"/>
-          </a:effectRef>
-          <a:fontRef idx="minor">
-            <a:schemeClr val="lt1"/>
-          </a:fontRef>
-        </p:style>
-        <p:txBody>
-          <a:bodyPr rtlCol="0" anchor="ctr"/>
-          <a:lstStyle/>
-          <a:p>
-            <a:pPr algn="ctr"/>
-          </a:p>
-        </p:txBody>
-      </p:sp>
-      <p:sp>
-        <p:nvSpPr>
-          <p:cNvPr id="823" name="Oval 822"/>
-          <p:cNvSpPr/>
-          <p:nvPr/>
-        </p:nvSpPr>
-        <p:spPr>
-          <a:xfrm>
-            <a:off x="3281363" y="3339617"/>
-            <a:ext cx="92000" cy="92000"/>
-          </a:xfrm>
-          <a:prstGeom prst="ellipse">
-            <a:avLst/>
-          </a:prstGeom>
-          <a:noFill/>
-          <a:ln w="13970">
-            <a:solidFill>
-              <a:srgbClr val="D4A300"/>
-            </a:solidFill>
-          </a:ln>
-          <a:effectLst/>
-        </p:spPr>
-        <p:style>
-          <a:lnRef idx="1">
-            <a:schemeClr val="accent1"/>
-          </a:lnRef>
-          <a:fillRef idx="3">
-            <a:schemeClr val="accent1"/>
-          </a:fillRef>
-          <a:effectRef idx="2">
-            <a:schemeClr val="accent1"/>
-          </a:effectRef>
-          <a:fontRef idx="minor">
-            <a:schemeClr val="lt1"/>
-          </a:fontRef>
-        </p:style>
-        <p:txBody>
-          <a:bodyPr rtlCol="0" anchor="ctr"/>
-          <a:lstStyle/>
-          <a:p>
-            <a:pPr algn="ctr"/>
-          </a:p>
-        </p:txBody>
-      </p:sp>
-      <p:sp>
-        <p:nvSpPr>
-          <p:cNvPr id="824" name="Oval 823"/>
-          <p:cNvSpPr/>
-          <p:nvPr/>
-        </p:nvSpPr>
-        <p:spPr>
-          <a:xfrm>
-            <a:off x="5877428" y="3363129"/>
-            <a:ext cx="92000" cy="92000"/>
-          </a:xfrm>
-          <a:prstGeom prst="ellipse">
-            <a:avLst/>
-          </a:prstGeom>
-          <a:noFill/>
-          <a:ln w="13970">
-            <a:solidFill>
-              <a:srgbClr val="D4A300"/>
-            </a:solidFill>
-          </a:ln>
-          <a:effectLst/>
-        </p:spPr>
-        <p:style>
-          <a:lnRef idx="1">
-            <a:schemeClr val="accent1"/>
-          </a:lnRef>
-          <a:fillRef idx="3">
-            <a:schemeClr val="accent1"/>
-          </a:fillRef>
-          <a:effectRef idx="2">
-            <a:schemeClr val="accent1"/>
-          </a:effectRef>
-          <a:fontRef idx="minor">
-            <a:schemeClr val="lt1"/>
-          </a:fontRef>
-        </p:style>
-        <p:txBody>
-          <a:bodyPr rtlCol="0" anchor="ctr"/>
-          <a:lstStyle/>
-          <a:p>
-            <a:pPr algn="ctr"/>
-          </a:p>
-        </p:txBody>
-      </p:sp>
-      <p:sp>
-        <p:nvSpPr>
-          <p:cNvPr id="825" name="Oval 824"/>
-          <p:cNvSpPr/>
-          <p:nvPr/>
-        </p:nvSpPr>
-        <p:spPr>
-          <a:xfrm>
-            <a:off x="5953989" y="3367161"/>
-            <a:ext cx="92000" cy="92000"/>
-          </a:xfrm>
-          <a:prstGeom prst="ellipse">
-            <a:avLst/>
-          </a:prstGeom>
-          <a:noFill/>
-          <a:ln w="13970">
-            <a:solidFill>
-              <a:srgbClr val="D4A300"/>
-            </a:solidFill>
-          </a:ln>
-          <a:effectLst/>
-        </p:spPr>
-        <p:style>
-          <a:lnRef idx="1">
-            <a:schemeClr val="accent1"/>
-          </a:lnRef>
-          <a:fillRef idx="3">
-            <a:schemeClr val="accent1"/>
-          </a:fillRef>
-          <a:effectRef idx="2">
-            <a:schemeClr val="accent1"/>
-          </a:effectRef>
-          <a:fontRef idx="minor">
-            <a:schemeClr val="lt1"/>
-          </a:fontRef>
-        </p:style>
-        <p:txBody>
-          <a:bodyPr rtlCol="0" anchor="ctr"/>
-          <a:lstStyle/>
-          <a:p>
-            <a:pPr algn="ctr"/>
-          </a:p>
-        </p:txBody>
-      </p:sp>
-      <p:sp>
-        <p:nvSpPr>
-          <p:cNvPr id="826" name="Oval 825"/>
-          <p:cNvSpPr/>
-          <p:nvPr/>
-        </p:nvSpPr>
-        <p:spPr>
-          <a:xfrm>
-            <a:off x="5810646" y="3369333"/>
-            <a:ext cx="92000" cy="92000"/>
-          </a:xfrm>
-          <a:prstGeom prst="ellipse">
-            <a:avLst/>
-          </a:prstGeom>
-          <a:noFill/>
-          <a:ln w="13970">
-            <a:solidFill>
-              <a:srgbClr val="D4A300"/>
-            </a:solidFill>
-          </a:ln>
-          <a:effectLst/>
-        </p:spPr>
-        <p:style>
-          <a:lnRef idx="1">
-            <a:schemeClr val="accent1"/>
-          </a:lnRef>
-          <a:fillRef idx="3">
-            <a:schemeClr val="accent1"/>
-          </a:fillRef>
-          <a:effectRef idx="2">
-            <a:schemeClr val="accent1"/>
-          </a:effectRef>
-          <a:fontRef idx="minor">
-            <a:schemeClr val="lt1"/>
-          </a:fontRef>
-        </p:style>
-        <p:txBody>
-          <a:bodyPr rtlCol="0" anchor="ctr"/>
-          <a:lstStyle/>
-          <a:p>
-            <a:pPr algn="ctr"/>
-          </a:p>
-        </p:txBody>
-      </p:sp>
-      <p:sp>
-        <p:nvSpPr>
-          <p:cNvPr id="827" name="Oval 826"/>
-          <p:cNvSpPr/>
-          <p:nvPr/>
-        </p:nvSpPr>
-        <p:spPr>
-          <a:xfrm>
-            <a:off x="5937110" y="3371021"/>
-            <a:ext cx="92000" cy="92000"/>
-          </a:xfrm>
-          <a:prstGeom prst="ellipse">
-            <a:avLst/>
-          </a:prstGeom>
-          <a:noFill/>
-          <a:ln w="13970">
-            <a:solidFill>
-              <a:srgbClr val="D4A300"/>
-            </a:solidFill>
-          </a:ln>
-          <a:effectLst/>
-        </p:spPr>
-        <p:style>
-          <a:lnRef idx="1">
-            <a:schemeClr val="accent1"/>
-          </a:lnRef>
-          <a:fillRef idx="3">
-            <a:schemeClr val="accent1"/>
-          </a:fillRef>
-          <a:effectRef idx="2">
-            <a:schemeClr val="accent1"/>
-          </a:effectRef>
-          <a:fontRef idx="minor">
-            <a:schemeClr val="lt1"/>
-          </a:fontRef>
-        </p:style>
-        <p:txBody>
-          <a:bodyPr rtlCol="0" anchor="ctr"/>
-          <a:lstStyle/>
-          <a:p>
-            <a:pPr algn="ctr"/>
-          </a:p>
-        </p:txBody>
-      </p:sp>
-      <p:sp>
-        <p:nvSpPr>
-          <p:cNvPr id="828" name="Oval 827"/>
-          <p:cNvSpPr/>
-          <p:nvPr/>
-        </p:nvSpPr>
-        <p:spPr>
-          <a:xfrm>
-            <a:off x="3383821" y="3374152"/>
-            <a:ext cx="92000" cy="92000"/>
-          </a:xfrm>
-          <a:prstGeom prst="ellipse">
-            <a:avLst/>
-          </a:prstGeom>
-          <a:noFill/>
-          <a:ln w="13970">
-            <a:solidFill>
-              <a:srgbClr val="D4A300"/>
-            </a:solidFill>
-          </a:ln>
-          <a:effectLst/>
-        </p:spPr>
-        <p:style>
-          <a:lnRef idx="1">
-            <a:schemeClr val="accent1"/>
-          </a:lnRef>
-          <a:fillRef idx="3">
-            <a:schemeClr val="accent1"/>
-          </a:fillRef>
-          <a:effectRef idx="2">
-            <a:schemeClr val="accent1"/>
-          </a:effectRef>
-          <a:fontRef idx="minor">
-            <a:schemeClr val="lt1"/>
-          </a:fontRef>
-        </p:style>
-        <p:txBody>
-          <a:bodyPr rtlCol="0" anchor="ctr"/>
-          <a:lstStyle/>
-          <a:p>
-            <a:pPr algn="ctr"/>
-          </a:p>
-        </p:txBody>
-      </p:sp>
-      <p:sp>
-        <p:nvSpPr>
-          <p:cNvPr id="829" name="Oval 828"/>
-          <p:cNvSpPr/>
-          <p:nvPr/>
-        </p:nvSpPr>
-        <p:spPr>
-          <a:xfrm>
-            <a:off x="6494610" y="3384092"/>
-            <a:ext cx="92000" cy="92000"/>
-          </a:xfrm>
-          <a:prstGeom prst="ellipse">
-            <a:avLst/>
-          </a:prstGeom>
-          <a:noFill/>
-          <a:ln w="13970">
-            <a:solidFill>
-              <a:srgbClr val="D4A300"/>
-            </a:solidFill>
-          </a:ln>
-          <a:effectLst/>
-        </p:spPr>
-        <p:style>
-          <a:lnRef idx="1">
-            <a:schemeClr val="accent1"/>
-          </a:lnRef>
-          <a:fillRef idx="3">
-            <a:schemeClr val="accent1"/>
-          </a:fillRef>
-          <a:effectRef idx="2">
-            <a:schemeClr val="accent1"/>
-          </a:effectRef>
-          <a:fontRef idx="minor">
-            <a:schemeClr val="lt1"/>
-          </a:fontRef>
-        </p:style>
-        <p:txBody>
-          <a:bodyPr rtlCol="0" anchor="ctr"/>
-          <a:lstStyle/>
-          <a:p>
-            <a:pPr algn="ctr"/>
-          </a:p>
-        </p:txBody>
-      </p:sp>
-      <p:sp>
-        <p:nvSpPr>
-          <p:cNvPr id="830" name="Oval 829"/>
-          <p:cNvSpPr/>
-          <p:nvPr/>
-        </p:nvSpPr>
-        <p:spPr>
-          <a:xfrm>
-            <a:off x="1296196" y="3392045"/>
-            <a:ext cx="92000" cy="92000"/>
-          </a:xfrm>
-          <a:prstGeom prst="ellipse">
-            <a:avLst/>
-          </a:prstGeom>
-          <a:noFill/>
-          <a:ln w="13970">
-            <a:solidFill>
-              <a:srgbClr val="D4A300"/>
-            </a:solidFill>
-          </a:ln>
-          <a:effectLst/>
-        </p:spPr>
-        <p:style>
-          <a:lnRef idx="1">
-            <a:schemeClr val="accent1"/>
-          </a:lnRef>
-          <a:fillRef idx="3">
-            <a:schemeClr val="accent1"/>
-          </a:fillRef>
-          <a:effectRef idx="2">
-            <a:schemeClr val="accent1"/>
-          </a:effectRef>
-          <a:fontRef idx="minor">
-            <a:schemeClr val="lt1"/>
-          </a:fontRef>
-        </p:style>
-        <p:txBody>
-          <a:bodyPr rtlCol="0" anchor="ctr"/>
-          <a:lstStyle/>
-          <a:p>
-            <a:pPr algn="ctr"/>
-          </a:p>
-        </p:txBody>
-      </p:sp>
-      <p:sp>
-        <p:nvSpPr>
-          <p:cNvPr id="831" name="Oval 830"/>
-          <p:cNvSpPr/>
-          <p:nvPr/>
-        </p:nvSpPr>
-        <p:spPr>
-          <a:xfrm>
-            <a:off x="3160945" y="3397507"/>
-            <a:ext cx="92000" cy="92000"/>
-          </a:xfrm>
-          <a:prstGeom prst="ellipse">
-            <a:avLst/>
-          </a:prstGeom>
-          <a:noFill/>
-          <a:ln w="13970">
-            <a:solidFill>
-              <a:srgbClr val="D4A300"/>
-            </a:solidFill>
-          </a:ln>
-          <a:effectLst/>
-        </p:spPr>
-        <p:style>
-          <a:lnRef idx="1">
-            <a:schemeClr val="accent1"/>
-          </a:lnRef>
-          <a:fillRef idx="3">
-            <a:schemeClr val="accent1"/>
-          </a:fillRef>
-          <a:effectRef idx="2">
-            <a:schemeClr val="accent1"/>
-          </a:effectRef>
-          <a:fontRef idx="minor">
-            <a:schemeClr val="lt1"/>
-          </a:fontRef>
-        </p:style>
-        <p:txBody>
-          <a:bodyPr rtlCol="0" anchor="ctr"/>
-          <a:lstStyle/>
-          <a:p>
-            <a:pPr algn="ctr"/>
-          </a:p>
-        </p:txBody>
-      </p:sp>
-      <p:sp>
-        <p:nvSpPr>
-          <p:cNvPr id="832" name="Oval 831"/>
-          <p:cNvSpPr/>
-          <p:nvPr/>
-        </p:nvSpPr>
-        <p:spPr>
-          <a:xfrm>
-            <a:off x="3429213" y="3399016"/>
-            <a:ext cx="92000" cy="92000"/>
-          </a:xfrm>
-          <a:prstGeom prst="ellipse">
-            <a:avLst/>
-          </a:prstGeom>
-          <a:noFill/>
-          <a:ln w="13970">
-            <a:solidFill>
-              <a:srgbClr val="D4A300"/>
-            </a:solidFill>
-          </a:ln>
-          <a:effectLst/>
-        </p:spPr>
-        <p:style>
-          <a:lnRef idx="1">
-            <a:schemeClr val="accent1"/>
-          </a:lnRef>
-          <a:fillRef idx="3">
-            <a:schemeClr val="accent1"/>
-          </a:fillRef>
-          <a:effectRef idx="2">
-            <a:schemeClr val="accent1"/>
-          </a:effectRef>
-          <a:fontRef idx="minor">
-            <a:schemeClr val="lt1"/>
-          </a:fontRef>
-        </p:style>
-        <p:txBody>
-          <a:bodyPr rtlCol="0" anchor="ctr"/>
-          <a:lstStyle/>
-          <a:p>
-            <a:pPr algn="ctr"/>
-          </a:p>
-        </p:txBody>
-      </p:sp>
-      <p:sp>
-        <p:nvSpPr>
-          <p:cNvPr id="833" name="Oval 832"/>
-          <p:cNvSpPr/>
-          <p:nvPr/>
-        </p:nvSpPr>
-        <p:spPr>
-          <a:xfrm>
-            <a:off x="3282672" y="3418620"/>
-            <a:ext cx="92000" cy="92000"/>
-          </a:xfrm>
-          <a:prstGeom prst="ellipse">
-            <a:avLst/>
-          </a:prstGeom>
-          <a:noFill/>
-          <a:ln w="13970">
-            <a:solidFill>
-              <a:srgbClr val="D4A300"/>
-            </a:solidFill>
-          </a:ln>
-          <a:effectLst/>
-        </p:spPr>
-        <p:style>
-          <a:lnRef idx="1">
-            <a:schemeClr val="accent1"/>
-          </a:lnRef>
-          <a:fillRef idx="3">
-            <a:schemeClr val="accent1"/>
-          </a:fillRef>
-          <a:effectRef idx="2">
-            <a:schemeClr val="accent1"/>
-          </a:effectRef>
-          <a:fontRef idx="minor">
-            <a:schemeClr val="lt1"/>
-          </a:fontRef>
-        </p:style>
-        <p:txBody>
-          <a:bodyPr rtlCol="0" anchor="ctr"/>
-          <a:lstStyle/>
-          <a:p>
-            <a:pPr algn="ctr"/>
-          </a:p>
-        </p:txBody>
-      </p:sp>
-      <p:sp>
-        <p:nvSpPr>
-          <p:cNvPr id="834" name="Oval 833"/>
-          <p:cNvSpPr/>
-          <p:nvPr/>
-        </p:nvSpPr>
-        <p:spPr>
-          <a:xfrm>
-            <a:off x="1440344" y="3420772"/>
-            <a:ext cx="92000" cy="92000"/>
-          </a:xfrm>
-          <a:prstGeom prst="ellipse">
-            <a:avLst/>
-          </a:prstGeom>
-          <a:noFill/>
-          <a:ln w="13970">
-            <a:solidFill>
-              <a:srgbClr val="D4A300"/>
-            </a:solidFill>
-          </a:ln>
-          <a:effectLst/>
-        </p:spPr>
-        <p:style>
-          <a:lnRef idx="1">
-            <a:schemeClr val="accent1"/>
-          </a:lnRef>
-          <a:fillRef idx="3">
-            <a:schemeClr val="accent1"/>
-          </a:fillRef>
-          <a:effectRef idx="2">
-            <a:schemeClr val="accent1"/>
-          </a:effectRef>
-          <a:fontRef idx="minor">
-            <a:schemeClr val="lt1"/>
-          </a:fontRef>
-        </p:style>
-        <p:txBody>
-          <a:bodyPr rtlCol="0" anchor="ctr"/>
-          <a:lstStyle/>
-          <a:p>
-            <a:pPr algn="ctr"/>
-          </a:p>
-        </p:txBody>
-      </p:sp>
-      <p:sp>
-        <p:nvSpPr>
-          <p:cNvPr id="835" name="Oval 834"/>
-          <p:cNvSpPr/>
-          <p:nvPr/>
-        </p:nvSpPr>
-        <p:spPr>
-          <a:xfrm>
-            <a:off x="3482129" y="3434739"/>
-            <a:ext cx="92000" cy="92000"/>
-          </a:xfrm>
-          <a:prstGeom prst="ellipse">
-            <a:avLst/>
-          </a:prstGeom>
-          <a:noFill/>
-          <a:ln w="13970">
-            <a:solidFill>
-              <a:srgbClr val="D4A300"/>
-            </a:solidFill>
-          </a:ln>
-          <a:effectLst/>
-        </p:spPr>
-        <p:style>
-          <a:lnRef idx="1">
-            <a:schemeClr val="accent1"/>
-          </a:lnRef>
-          <a:fillRef idx="3">
-            <a:schemeClr val="accent1"/>
-          </a:fillRef>
-          <a:effectRef idx="2">
-            <a:schemeClr val="accent1"/>
-          </a:effectRef>
-          <a:fontRef idx="minor">
-            <a:schemeClr val="lt1"/>
-          </a:fontRef>
-        </p:style>
-        <p:txBody>
-          <a:bodyPr rtlCol="0" anchor="ctr"/>
-          <a:lstStyle/>
-          <a:p>
-            <a:pPr algn="ctr"/>
-          </a:p>
-        </p:txBody>
-      </p:sp>
-      <p:sp>
-        <p:nvSpPr>
-          <p:cNvPr id="836" name="Oval 835"/>
-          <p:cNvSpPr/>
-          <p:nvPr/>
-        </p:nvSpPr>
-        <p:spPr>
-          <a:xfrm>
-            <a:off x="5458477" y="3446134"/>
-            <a:ext cx="92000" cy="92000"/>
-          </a:xfrm>
-          <a:prstGeom prst="ellipse">
-            <a:avLst/>
-          </a:prstGeom>
-          <a:noFill/>
-          <a:ln w="13970">
-            <a:solidFill>
-              <a:srgbClr val="D4A300"/>
-            </a:solidFill>
-          </a:ln>
-          <a:effectLst/>
-        </p:spPr>
-        <p:style>
-          <a:lnRef idx="1">
-            <a:schemeClr val="accent1"/>
-          </a:lnRef>
-          <a:fillRef idx="3">
-            <a:schemeClr val="accent1"/>
-          </a:fillRef>
-          <a:effectRef idx="2">
-            <a:schemeClr val="accent1"/>
-          </a:effectRef>
-          <a:fontRef idx="minor">
-            <a:schemeClr val="lt1"/>
-          </a:fontRef>
-        </p:style>
-        <p:txBody>
-          <a:bodyPr rtlCol="0" anchor="ctr"/>
-          <a:lstStyle/>
-          <a:p>
-            <a:pPr algn="ctr"/>
-          </a:p>
-        </p:txBody>
-      </p:sp>
-      <p:sp>
-        <p:nvSpPr>
-          <p:cNvPr id="837" name="Oval 836"/>
-          <p:cNvSpPr/>
-          <p:nvPr/>
-        </p:nvSpPr>
-        <p:spPr>
-          <a:xfrm>
-            <a:off x="3293519" y="3462897"/>
-            <a:ext cx="92000" cy="92000"/>
-          </a:xfrm>
-          <a:prstGeom prst="ellipse">
-            <a:avLst/>
-          </a:prstGeom>
-          <a:noFill/>
-          <a:ln w="13970">
-            <a:solidFill>
-              <a:srgbClr val="D4A300"/>
-            </a:solidFill>
-          </a:ln>
-          <a:effectLst/>
-        </p:spPr>
-        <p:style>
-          <a:lnRef idx="1">
-            <a:schemeClr val="accent1"/>
-          </a:lnRef>
-          <a:fillRef idx="3">
-            <a:schemeClr val="accent1"/>
-          </a:fillRef>
-          <a:effectRef idx="2">
-            <a:schemeClr val="accent1"/>
-          </a:effectRef>
-          <a:fontRef idx="minor">
-            <a:schemeClr val="lt1"/>
-          </a:fontRef>
-        </p:style>
-        <p:txBody>
-          <a:bodyPr rtlCol="0" anchor="ctr"/>
-          <a:lstStyle/>
-          <a:p>
-            <a:pPr algn="ctr"/>
-          </a:p>
-        </p:txBody>
-      </p:sp>
-      <p:sp>
-        <p:nvSpPr>
-          <p:cNvPr id="838" name="Oval 837"/>
-          <p:cNvSpPr/>
-          <p:nvPr/>
-        </p:nvSpPr>
-        <p:spPr>
-          <a:xfrm>
-            <a:off x="2786333" y="3463666"/>
-            <a:ext cx="92000" cy="92000"/>
-          </a:xfrm>
-          <a:prstGeom prst="ellipse">
-            <a:avLst/>
-          </a:prstGeom>
-          <a:noFill/>
-          <a:ln w="13970">
-            <a:solidFill>
-              <a:srgbClr val="D4A300"/>
-            </a:solidFill>
-          </a:ln>
-          <a:effectLst/>
-        </p:spPr>
-        <p:style>
-          <a:lnRef idx="1">
-            <a:schemeClr val="accent1"/>
-          </a:lnRef>
-          <a:fillRef idx="3">
-            <a:schemeClr val="accent1"/>
-          </a:fillRef>
-          <a:effectRef idx="2">
-            <a:schemeClr val="accent1"/>
-          </a:effectRef>
-          <a:fontRef idx="minor">
-            <a:schemeClr val="lt1"/>
-          </a:fontRef>
-        </p:style>
-        <p:txBody>
-          <a:bodyPr rtlCol="0" anchor="ctr"/>
-          <a:lstStyle/>
-          <a:p>
-            <a:pPr algn="ctr"/>
-          </a:p>
-        </p:txBody>
-      </p:sp>
-      <p:sp>
-        <p:nvSpPr>
-          <p:cNvPr id="839" name="Oval 838"/>
-          <p:cNvSpPr/>
-          <p:nvPr/>
-        </p:nvSpPr>
-        <p:spPr>
-          <a:xfrm>
-            <a:off x="3474146" y="3470030"/>
-            <a:ext cx="92000" cy="92000"/>
-          </a:xfrm>
-          <a:prstGeom prst="ellipse">
-            <a:avLst/>
-          </a:prstGeom>
-          <a:noFill/>
-          <a:ln w="13970">
-            <a:solidFill>
-              <a:srgbClr val="D4A300"/>
-            </a:solidFill>
-          </a:ln>
-          <a:effectLst/>
-        </p:spPr>
-        <p:style>
-          <a:lnRef idx="1">
-            <a:schemeClr val="accent1"/>
-          </a:lnRef>
-          <a:fillRef idx="3">
-            <a:schemeClr val="accent1"/>
-          </a:fillRef>
-          <a:effectRef idx="2">
-            <a:schemeClr val="accent1"/>
-          </a:effectRef>
-          <a:fontRef idx="minor">
-            <a:schemeClr val="lt1"/>
-          </a:fontRef>
-        </p:style>
-        <p:txBody>
-          <a:bodyPr rtlCol="0" anchor="ctr"/>
-          <a:lstStyle/>
-          <a:p>
-            <a:pPr algn="ctr"/>
-          </a:p>
-        </p:txBody>
-      </p:sp>
-      <p:sp>
-        <p:nvSpPr>
-          <p:cNvPr id="840" name="Oval 839"/>
-          <p:cNvSpPr/>
-          <p:nvPr/>
-        </p:nvSpPr>
-        <p:spPr>
-          <a:xfrm>
-            <a:off x="3169200" y="3477873"/>
-            <a:ext cx="92000" cy="92000"/>
-          </a:xfrm>
-          <a:prstGeom prst="ellipse">
-            <a:avLst/>
-          </a:prstGeom>
-          <a:noFill/>
-          <a:ln w="13970">
-            <a:solidFill>
-              <a:srgbClr val="D4A300"/>
-            </a:solidFill>
-          </a:ln>
-          <a:effectLst/>
-        </p:spPr>
-        <p:style>
-          <a:lnRef idx="1">
-            <a:schemeClr val="accent1"/>
-          </a:lnRef>
-          <a:fillRef idx="3">
-            <a:schemeClr val="accent1"/>
-          </a:fillRef>
-          <a:effectRef idx="2">
-            <a:schemeClr val="accent1"/>
-          </a:effectRef>
-          <a:fontRef idx="minor">
-            <a:schemeClr val="lt1"/>
-          </a:fontRef>
-        </p:style>
-        <p:txBody>
-          <a:bodyPr rtlCol="0" anchor="ctr"/>
-          <a:lstStyle/>
-          <a:p>
-            <a:pPr algn="ctr"/>
-          </a:p>
-        </p:txBody>
-      </p:sp>
-      <p:sp>
-        <p:nvSpPr>
-          <p:cNvPr id="841" name="Oval 840"/>
-          <p:cNvSpPr/>
-          <p:nvPr/>
-        </p:nvSpPr>
-        <p:spPr>
-          <a:xfrm>
-            <a:off x="5677728" y="3478220"/>
-            <a:ext cx="92000" cy="92000"/>
-          </a:xfrm>
-          <a:prstGeom prst="ellipse">
-            <a:avLst/>
-          </a:prstGeom>
-          <a:noFill/>
-          <a:ln w="13970">
-            <a:solidFill>
-              <a:srgbClr val="D4A300"/>
-            </a:solidFill>
-          </a:ln>
-          <a:effectLst/>
-        </p:spPr>
-        <p:style>
-          <a:lnRef idx="1">
-            <a:schemeClr val="accent1"/>
-          </a:lnRef>
-          <a:fillRef idx="3">
-            <a:schemeClr val="accent1"/>
-          </a:fillRef>
-          <a:effectRef idx="2">
-            <a:schemeClr val="accent1"/>
-          </a:effectRef>
-          <a:fontRef idx="minor">
-            <a:schemeClr val="lt1"/>
-          </a:fontRef>
-        </p:style>
-        <p:txBody>
-          <a:bodyPr rtlCol="0" anchor="ctr"/>
-          <a:lstStyle/>
-          <a:p>
-            <a:pPr algn="ctr"/>
-          </a:p>
-        </p:txBody>
-      </p:sp>
-      <p:sp>
-        <p:nvSpPr>
-          <p:cNvPr id="842" name="Oval 841"/>
-          <p:cNvSpPr/>
-          <p:nvPr/>
-        </p:nvSpPr>
-        <p:spPr>
-          <a:xfrm>
-            <a:off x="3688267" y="3485063"/>
-            <a:ext cx="92000" cy="92000"/>
-          </a:xfrm>
-          <a:prstGeom prst="ellipse">
-            <a:avLst/>
-          </a:prstGeom>
-          <a:noFill/>
-          <a:ln w="13970">
-            <a:solidFill>
-              <a:srgbClr val="D4A300"/>
-            </a:solidFill>
-          </a:ln>
-          <a:effectLst/>
-        </p:spPr>
-        <p:style>
-          <a:lnRef idx="1">
-            <a:schemeClr val="accent1"/>
-          </a:lnRef>
-          <a:fillRef idx="3">
-            <a:schemeClr val="accent1"/>
-          </a:fillRef>
-          <a:effectRef idx="2">
-            <a:schemeClr val="accent1"/>
-          </a:effectRef>
-          <a:fontRef idx="minor">
-            <a:schemeClr val="lt1"/>
-          </a:fontRef>
-        </p:style>
-        <p:txBody>
-          <a:bodyPr rtlCol="0" anchor="ctr"/>
-          <a:lstStyle/>
-          <a:p>
-            <a:pPr algn="ctr"/>
-          </a:p>
-        </p:txBody>
-      </p:sp>
-      <p:sp>
-        <p:nvSpPr>
-          <p:cNvPr id="843" name="Oval 842"/>
-          <p:cNvSpPr/>
-          <p:nvPr/>
-        </p:nvSpPr>
-        <p:spPr>
-          <a:xfrm>
-            <a:off x="6300167" y="3491686"/>
-            <a:ext cx="92000" cy="92000"/>
-          </a:xfrm>
-          <a:prstGeom prst="ellipse">
-            <a:avLst/>
-          </a:prstGeom>
-          <a:noFill/>
-          <a:ln w="13970">
-            <a:solidFill>
-              <a:srgbClr val="D4A300"/>
-            </a:solidFill>
-          </a:ln>
-          <a:effectLst/>
-        </p:spPr>
-        <p:style>
-          <a:lnRef idx="1">
-            <a:schemeClr val="accent1"/>
-          </a:lnRef>
-          <a:fillRef idx="3">
-            <a:schemeClr val="accent1"/>
-          </a:fillRef>
-          <a:effectRef idx="2">
-            <a:schemeClr val="accent1"/>
-          </a:effectRef>
-          <a:fontRef idx="minor">
-            <a:schemeClr val="lt1"/>
-          </a:fontRef>
-        </p:style>
-        <p:txBody>
-          <a:bodyPr rtlCol="0" anchor="ctr"/>
-          <a:lstStyle/>
-          <a:p>
-            <a:pPr algn="ctr"/>
-          </a:p>
-        </p:txBody>
-      </p:sp>
-      <p:sp>
-        <p:nvSpPr>
-          <p:cNvPr id="844" name="Oval 843"/>
-          <p:cNvSpPr/>
-          <p:nvPr/>
-        </p:nvSpPr>
-        <p:spPr>
-          <a:xfrm>
-            <a:off x="6771422" y="3493301"/>
-            <a:ext cx="92000" cy="92000"/>
-          </a:xfrm>
-          <a:prstGeom prst="ellipse">
-            <a:avLst/>
-          </a:prstGeom>
-          <a:noFill/>
-          <a:ln w="13970">
-            <a:solidFill>
-              <a:srgbClr val="D4A300"/>
-            </a:solidFill>
-          </a:ln>
-          <a:effectLst/>
-        </p:spPr>
-        <p:style>
-          <a:lnRef idx="1">
-            <a:schemeClr val="accent1"/>
-          </a:lnRef>
-          <a:fillRef idx="3">
-            <a:schemeClr val="accent1"/>
-          </a:fillRef>
-          <a:effectRef idx="2">
-            <a:schemeClr val="accent1"/>
-          </a:effectRef>
-          <a:fontRef idx="minor">
-            <a:schemeClr val="lt1"/>
-          </a:fontRef>
-        </p:style>
-        <p:txBody>
-          <a:bodyPr rtlCol="0" anchor="ctr"/>
-          <a:lstStyle/>
-          <a:p>
-            <a:pPr algn="ctr"/>
-          </a:p>
-        </p:txBody>
-      </p:sp>
-      <p:sp>
-        <p:nvSpPr>
-          <p:cNvPr id="845" name="Oval 844"/>
-          <p:cNvSpPr/>
-          <p:nvPr/>
-        </p:nvSpPr>
-        <p:spPr>
-          <a:xfrm>
-            <a:off x="3386786" y="3506686"/>
-            <a:ext cx="92000" cy="92000"/>
-          </a:xfrm>
-          <a:prstGeom prst="ellipse">
-            <a:avLst/>
-          </a:prstGeom>
-          <a:noFill/>
-          <a:ln w="13970">
-            <a:solidFill>
-              <a:srgbClr val="D4A300"/>
-            </a:solidFill>
-          </a:ln>
-          <a:effectLst/>
-        </p:spPr>
-        <p:style>
-          <a:lnRef idx="1">
-            <a:schemeClr val="accent1"/>
-          </a:lnRef>
-          <a:fillRef idx="3">
-            <a:schemeClr val="accent1"/>
-          </a:fillRef>
-          <a:effectRef idx="2">
-            <a:schemeClr val="accent1"/>
-          </a:effectRef>
-          <a:fontRef idx="minor">
-            <a:schemeClr val="lt1"/>
-          </a:fontRef>
-        </p:style>
-        <p:txBody>
-          <a:bodyPr rtlCol="0" anchor="ctr"/>
-          <a:lstStyle/>
-          <a:p>
-            <a:pPr algn="ctr"/>
-          </a:p>
-        </p:txBody>
-      </p:sp>
-      <p:sp>
-        <p:nvSpPr>
-          <p:cNvPr id="846" name="Oval 845"/>
-          <p:cNvSpPr/>
-          <p:nvPr/>
-        </p:nvSpPr>
-        <p:spPr>
-          <a:xfrm>
-            <a:off x="2203539" y="3506689"/>
-            <a:ext cx="92000" cy="92000"/>
-          </a:xfrm>
-          <a:prstGeom prst="ellipse">
-            <a:avLst/>
-          </a:prstGeom>
-          <a:noFill/>
-          <a:ln w="13970">
-            <a:solidFill>
-              <a:srgbClr val="D4A300"/>
-            </a:solidFill>
-          </a:ln>
-          <a:effectLst/>
-        </p:spPr>
-        <p:style>
-          <a:lnRef idx="1">
-            <a:schemeClr val="accent1"/>
-          </a:lnRef>
-          <a:fillRef idx="3">
-            <a:schemeClr val="accent1"/>
-          </a:fillRef>
-          <a:effectRef idx="2">
-            <a:schemeClr val="accent1"/>
-          </a:effectRef>
-          <a:fontRef idx="minor">
-            <a:schemeClr val="lt1"/>
-          </a:fontRef>
-        </p:style>
-        <p:txBody>
-          <a:bodyPr rtlCol="0" anchor="ctr"/>
-          <a:lstStyle/>
-          <a:p>
-            <a:pPr algn="ctr"/>
-          </a:p>
-        </p:txBody>
-      </p:sp>
-      <p:sp>
-        <p:nvSpPr>
-          <p:cNvPr id="847" name="Oval 846"/>
-          <p:cNvSpPr/>
-          <p:nvPr/>
-        </p:nvSpPr>
-        <p:spPr>
-          <a:xfrm>
-            <a:off x="3542663" y="3510599"/>
-            <a:ext cx="92000" cy="92000"/>
-          </a:xfrm>
-          <a:prstGeom prst="ellipse">
-            <a:avLst/>
-          </a:prstGeom>
-          <a:noFill/>
-          <a:ln w="13970">
-            <a:solidFill>
-              <a:srgbClr val="D4A300"/>
-            </a:solidFill>
-          </a:ln>
-          <a:effectLst/>
-        </p:spPr>
-        <p:style>
-          <a:lnRef idx="1">
-            <a:schemeClr val="accent1"/>
-          </a:lnRef>
-          <a:fillRef idx="3">
-            <a:schemeClr val="accent1"/>
-          </a:fillRef>
-          <a:effectRef idx="2">
-            <a:schemeClr val="accent1"/>
-          </a:effectRef>
-          <a:fontRef idx="minor">
-            <a:schemeClr val="lt1"/>
-          </a:fontRef>
-        </p:style>
-        <p:txBody>
-          <a:bodyPr rtlCol="0" anchor="ctr"/>
-          <a:lstStyle/>
-          <a:p>
-            <a:pPr algn="ctr"/>
-          </a:p>
-        </p:txBody>
-      </p:sp>
-      <p:sp>
-        <p:nvSpPr>
-          <p:cNvPr id="848" name="Oval 847"/>
-          <p:cNvSpPr/>
-          <p:nvPr/>
-        </p:nvSpPr>
-        <p:spPr>
-          <a:xfrm>
-            <a:off x="3288812" y="3514648"/>
-            <a:ext cx="92000" cy="92000"/>
-          </a:xfrm>
-          <a:prstGeom prst="ellipse">
-            <a:avLst/>
-          </a:prstGeom>
-          <a:noFill/>
-          <a:ln w="13970">
-            <a:solidFill>
-              <a:srgbClr val="D4A300"/>
-            </a:solidFill>
-          </a:ln>
-          <a:effectLst/>
-        </p:spPr>
-        <p:style>
-          <a:lnRef idx="1">
-            <a:schemeClr val="accent1"/>
-          </a:lnRef>
-          <a:fillRef idx="3">
-            <a:schemeClr val="accent1"/>
-          </a:fillRef>
-          <a:effectRef idx="2">
-            <a:schemeClr val="accent1"/>
-          </a:effectRef>
-          <a:fontRef idx="minor">
-            <a:schemeClr val="lt1"/>
-          </a:fontRef>
-        </p:style>
-        <p:txBody>
-          <a:bodyPr rtlCol="0" anchor="ctr"/>
-          <a:lstStyle/>
-          <a:p>
-            <a:pPr algn="ctr"/>
-          </a:p>
-        </p:txBody>
-      </p:sp>
-      <p:sp>
-        <p:nvSpPr>
-          <p:cNvPr id="849" name="Oval 848"/>
-          <p:cNvSpPr/>
-          <p:nvPr/>
-        </p:nvSpPr>
-        <p:spPr>
-          <a:xfrm>
-            <a:off x="3469252" y="3518196"/>
-            <a:ext cx="92000" cy="92000"/>
-          </a:xfrm>
-          <a:prstGeom prst="ellipse">
-            <a:avLst/>
-          </a:prstGeom>
-          <a:noFill/>
-          <a:ln w="13970">
-            <a:solidFill>
-              <a:srgbClr val="D4A300"/>
-            </a:solidFill>
-          </a:ln>
-          <a:effectLst/>
-        </p:spPr>
-        <p:style>
-          <a:lnRef idx="1">
-            <a:schemeClr val="accent1"/>
-          </a:lnRef>
-          <a:fillRef idx="3">
-            <a:schemeClr val="accent1"/>
-          </a:fillRef>
-          <a:effectRef idx="2">
-            <a:schemeClr val="accent1"/>
-          </a:effectRef>
-          <a:fontRef idx="minor">
-            <a:schemeClr val="lt1"/>
-          </a:fontRef>
-        </p:style>
-        <p:txBody>
-          <a:bodyPr rtlCol="0" anchor="ctr"/>
-          <a:lstStyle/>
-          <a:p>
-            <a:pPr algn="ctr"/>
-          </a:p>
-        </p:txBody>
-      </p:sp>
-      <p:sp>
-        <p:nvSpPr>
-          <p:cNvPr id="850" name="Oval 849"/>
-          <p:cNvSpPr/>
-          <p:nvPr/>
-        </p:nvSpPr>
-        <p:spPr>
-          <a:xfrm>
-            <a:off x="5866398" y="3523688"/>
-            <a:ext cx="92000" cy="92000"/>
-          </a:xfrm>
-          <a:prstGeom prst="ellipse">
-            <a:avLst/>
-          </a:prstGeom>
-          <a:noFill/>
-          <a:ln w="13970">
-            <a:solidFill>
-              <a:srgbClr val="D4A300"/>
-            </a:solidFill>
-          </a:ln>
-          <a:effectLst/>
-        </p:spPr>
-        <p:style>
-          <a:lnRef idx="1">
-            <a:schemeClr val="accent1"/>
-          </a:lnRef>
-          <a:fillRef idx="3">
-            <a:schemeClr val="accent1"/>
-          </a:fillRef>
-          <a:effectRef idx="2">
-            <a:schemeClr val="accent1"/>
-          </a:effectRef>
-          <a:fontRef idx="minor">
-            <a:schemeClr val="lt1"/>
-          </a:fontRef>
-        </p:style>
-        <p:txBody>
-          <a:bodyPr rtlCol="0" anchor="ctr"/>
-          <a:lstStyle/>
-          <a:p>
-            <a:pPr algn="ctr"/>
-          </a:p>
-        </p:txBody>
-      </p:sp>
-      <p:sp>
-        <p:nvSpPr>
-          <p:cNvPr id="851" name="Oval 850"/>
-          <p:cNvSpPr/>
-          <p:nvPr/>
-        </p:nvSpPr>
-        <p:spPr>
-          <a:xfrm>
-            <a:off x="1682635" y="3526404"/>
-            <a:ext cx="92000" cy="92000"/>
-          </a:xfrm>
-          <a:prstGeom prst="ellipse">
-            <a:avLst/>
-          </a:prstGeom>
-          <a:noFill/>
-          <a:ln w="13970">
-            <a:solidFill>
-              <a:srgbClr val="D4A300"/>
-            </a:solidFill>
-          </a:ln>
-          <a:effectLst/>
-        </p:spPr>
-        <p:style>
-          <a:lnRef idx="1">
-            <a:schemeClr val="accent1"/>
-          </a:lnRef>
-          <a:fillRef idx="3">
-            <a:schemeClr val="accent1"/>
-          </a:fillRef>
-          <a:effectRef idx="2">
-            <a:schemeClr val="accent1"/>
-          </a:effectRef>
-          <a:fontRef idx="minor">
-            <a:schemeClr val="lt1"/>
-          </a:fontRef>
-        </p:style>
-        <p:txBody>
-          <a:bodyPr rtlCol="0" anchor="ctr"/>
-          <a:lstStyle/>
-          <a:p>
-            <a:pPr algn="ctr"/>
-          </a:p>
-        </p:txBody>
-      </p:sp>
-      <p:sp>
-        <p:nvSpPr>
-          <p:cNvPr id="852" name="Oval 851"/>
-          <p:cNvSpPr/>
-          <p:nvPr/>
-        </p:nvSpPr>
-        <p:spPr>
-          <a:xfrm>
-            <a:off x="3802054" y="3527532"/>
-            <a:ext cx="92000" cy="92000"/>
-          </a:xfrm>
-          <a:prstGeom prst="ellipse">
-            <a:avLst/>
-          </a:prstGeom>
-          <a:noFill/>
-          <a:ln w="13970">
-            <a:solidFill>
-              <a:srgbClr val="D4A300"/>
-            </a:solidFill>
-          </a:ln>
-          <a:effectLst/>
-        </p:spPr>
-        <p:style>
-          <a:lnRef idx="1">
-            <a:schemeClr val="accent1"/>
-          </a:lnRef>
-          <a:fillRef idx="3">
-            <a:schemeClr val="accent1"/>
-          </a:fillRef>
-          <a:effectRef idx="2">
-            <a:schemeClr val="accent1"/>
-          </a:effectRef>
-          <a:fontRef idx="minor">
-            <a:schemeClr val="lt1"/>
-          </a:fontRef>
-        </p:style>
-        <p:txBody>
-          <a:bodyPr rtlCol="0" anchor="ctr"/>
-          <a:lstStyle/>
-          <a:p>
-            <a:pPr algn="ctr"/>
-          </a:p>
-        </p:txBody>
-      </p:sp>
-      <p:sp>
-        <p:nvSpPr>
-          <p:cNvPr id="853" name="Oval 852"/>
-          <p:cNvSpPr/>
-          <p:nvPr/>
-        </p:nvSpPr>
-        <p:spPr>
-          <a:xfrm>
-            <a:off x="2417213" y="3533213"/>
-            <a:ext cx="92000" cy="92000"/>
-          </a:xfrm>
-          <a:prstGeom prst="ellipse">
-            <a:avLst/>
-          </a:prstGeom>
-          <a:noFill/>
-          <a:ln w="13970">
-            <a:solidFill>
-              <a:srgbClr val="D4A300"/>
-            </a:solidFill>
-          </a:ln>
-          <a:effectLst/>
-        </p:spPr>
-        <p:style>
-          <a:lnRef idx="1">
-            <a:schemeClr val="accent1"/>
-          </a:lnRef>
-          <a:fillRef idx="3">
-            <a:schemeClr val="accent1"/>
-          </a:fillRef>
-          <a:effectRef idx="2">
-            <a:schemeClr val="accent1"/>
-          </a:effectRef>
-          <a:fontRef idx="minor">
-            <a:schemeClr val="lt1"/>
-          </a:fontRef>
-        </p:style>
-        <p:txBody>
-          <a:bodyPr rtlCol="0" anchor="ctr"/>
-          <a:lstStyle/>
-          <a:p>
-            <a:pPr algn="ctr"/>
-          </a:p>
-        </p:txBody>
-      </p:sp>
-      <p:sp>
-        <p:nvSpPr>
-          <p:cNvPr id="854" name="Oval 853"/>
-          <p:cNvSpPr/>
-          <p:nvPr/>
-        </p:nvSpPr>
-        <p:spPr>
-          <a:xfrm>
-            <a:off x="6653282" y="3533792"/>
-            <a:ext cx="92000" cy="92000"/>
-          </a:xfrm>
-          <a:prstGeom prst="ellipse">
-            <a:avLst/>
-          </a:prstGeom>
-          <a:noFill/>
-          <a:ln w="13970">
-            <a:solidFill>
-              <a:srgbClr val="D4A300"/>
-            </a:solidFill>
-          </a:ln>
-          <a:effectLst/>
-        </p:spPr>
-        <p:style>
-          <a:lnRef idx="1">
-            <a:schemeClr val="accent1"/>
-          </a:lnRef>
-          <a:fillRef idx="3">
-            <a:schemeClr val="accent1"/>
-          </a:fillRef>
-          <a:effectRef idx="2">
-            <a:schemeClr val="accent1"/>
-          </a:effectRef>
-          <a:fontRef idx="minor">
-            <a:schemeClr val="lt1"/>
-          </a:fontRef>
-        </p:style>
-        <p:txBody>
-          <a:bodyPr rtlCol="0" anchor="ctr"/>
-          <a:lstStyle/>
-          <a:p>
-            <a:pPr algn="ctr"/>
-          </a:p>
-        </p:txBody>
-      </p:sp>
-      <p:sp>
-        <p:nvSpPr>
-          <p:cNvPr id="855" name="Oval 854"/>
-          <p:cNvSpPr/>
-          <p:nvPr/>
-        </p:nvSpPr>
-        <p:spPr>
-          <a:xfrm>
-            <a:off x="3751574" y="3538534"/>
-            <a:ext cx="92000" cy="92000"/>
-          </a:xfrm>
-          <a:prstGeom prst="ellipse">
-            <a:avLst/>
-          </a:prstGeom>
-          <a:noFill/>
-          <a:ln w="13970">
-            <a:solidFill>
-              <a:srgbClr val="D4A300"/>
-            </a:solidFill>
-          </a:ln>
-          <a:effectLst/>
-        </p:spPr>
-        <p:style>
-          <a:lnRef idx="1">
-            <a:schemeClr val="accent1"/>
-          </a:lnRef>
-          <a:fillRef idx="3">
-            <a:schemeClr val="accent1"/>
-          </a:fillRef>
-          <a:effectRef idx="2">
-            <a:schemeClr val="accent1"/>
-          </a:effectRef>
-          <a:fontRef idx="minor">
-            <a:schemeClr val="lt1"/>
-          </a:fontRef>
-        </p:style>
-        <p:txBody>
-          <a:bodyPr rtlCol="0" anchor="ctr"/>
-          <a:lstStyle/>
-          <a:p>
-            <a:pPr algn="ctr"/>
-          </a:p>
-        </p:txBody>
-      </p:sp>
-      <p:sp>
-        <p:nvSpPr>
-          <p:cNvPr id="856" name="Oval 855"/>
-          <p:cNvSpPr/>
-          <p:nvPr/>
-        </p:nvSpPr>
-        <p:spPr>
-          <a:xfrm>
-            <a:off x="6592930" y="3542793"/>
-            <a:ext cx="92000" cy="92000"/>
-          </a:xfrm>
-          <a:prstGeom prst="ellipse">
-            <a:avLst/>
-          </a:prstGeom>
-          <a:noFill/>
-          <a:ln w="13970">
-            <a:solidFill>
-              <a:srgbClr val="D4A300"/>
-            </a:solidFill>
-          </a:ln>
-          <a:effectLst/>
-        </p:spPr>
-        <p:style>
-          <a:lnRef idx="1">
-            <a:schemeClr val="accent1"/>
-          </a:lnRef>
-          <a:fillRef idx="3">
-            <a:schemeClr val="accent1"/>
-          </a:fillRef>
-          <a:effectRef idx="2">
-            <a:schemeClr val="accent1"/>
-          </a:effectRef>
-          <a:fontRef idx="minor">
-            <a:schemeClr val="lt1"/>
-          </a:fontRef>
-        </p:style>
-        <p:txBody>
-          <a:bodyPr rtlCol="0" anchor="ctr"/>
-          <a:lstStyle/>
-          <a:p>
-            <a:pPr algn="ctr"/>
-          </a:p>
-        </p:txBody>
-      </p:sp>
-      <p:sp>
-        <p:nvSpPr>
-          <p:cNvPr id="857" name="Oval 856"/>
-          <p:cNvSpPr/>
-          <p:nvPr/>
-        </p:nvSpPr>
-        <p:spPr>
-          <a:xfrm>
-            <a:off x="7110505" y="3545559"/>
-            <a:ext cx="92000" cy="92000"/>
-          </a:xfrm>
-          <a:prstGeom prst="ellipse">
-            <a:avLst/>
-          </a:prstGeom>
-          <a:noFill/>
-          <a:ln w="13970">
-            <a:solidFill>
-              <a:srgbClr val="D4A300"/>
-            </a:solidFill>
-          </a:ln>
-          <a:effectLst/>
-        </p:spPr>
-        <p:style>
-          <a:lnRef idx="1">
-            <a:schemeClr val="accent1"/>
-          </a:lnRef>
-          <a:fillRef idx="3">
-            <a:schemeClr val="accent1"/>
-          </a:fillRef>
-          <a:effectRef idx="2">
-            <a:schemeClr val="accent1"/>
-          </a:effectRef>
-          <a:fontRef idx="minor">
-            <a:schemeClr val="lt1"/>
-          </a:fontRef>
-        </p:style>
-        <p:txBody>
-          <a:bodyPr rtlCol="0" anchor="ctr"/>
-          <a:lstStyle/>
-          <a:p>
-            <a:pPr algn="ctr"/>
-          </a:p>
-        </p:txBody>
-      </p:sp>
-      <p:sp>
-        <p:nvSpPr>
-          <p:cNvPr id="858" name="Oval 857"/>
-          <p:cNvSpPr/>
-          <p:nvPr/>
-        </p:nvSpPr>
-        <p:spPr>
-          <a:xfrm>
-            <a:off x="1918335" y="3547835"/>
-            <a:ext cx="92000" cy="92000"/>
-          </a:xfrm>
-          <a:prstGeom prst="ellipse">
-            <a:avLst/>
-          </a:prstGeom>
-          <a:noFill/>
-          <a:ln w="13970">
-            <a:solidFill>
-              <a:srgbClr val="D4A300"/>
-            </a:solidFill>
-          </a:ln>
-          <a:effectLst/>
-        </p:spPr>
-        <p:style>
-          <a:lnRef idx="1">
-            <a:schemeClr val="accent1"/>
-          </a:lnRef>
-          <a:fillRef idx="3">
-            <a:schemeClr val="accent1"/>
-          </a:fillRef>
-          <a:effectRef idx="2">
-            <a:schemeClr val="accent1"/>
-          </a:effectRef>
-          <a:fontRef idx="minor">
-            <a:schemeClr val="lt1"/>
-          </a:fontRef>
-        </p:style>
-        <p:txBody>
-          <a:bodyPr rtlCol="0" anchor="ctr"/>
-          <a:lstStyle/>
-          <a:p>
-            <a:pPr algn="ctr"/>
-          </a:p>
-        </p:txBody>
-      </p:sp>
-      <p:sp>
-        <p:nvSpPr>
-          <p:cNvPr id="859" name="Oval 858"/>
-          <p:cNvSpPr/>
-          <p:nvPr/>
-        </p:nvSpPr>
-        <p:spPr>
-          <a:xfrm>
-            <a:off x="5641122" y="3550976"/>
-            <a:ext cx="92000" cy="92000"/>
-          </a:xfrm>
-          <a:prstGeom prst="ellipse">
-            <a:avLst/>
-          </a:prstGeom>
-          <a:noFill/>
-          <a:ln w="13970">
-            <a:solidFill>
-              <a:srgbClr val="D4A300"/>
-            </a:solidFill>
-          </a:ln>
-          <a:effectLst/>
-        </p:spPr>
-        <p:style>
-          <a:lnRef idx="1">
-            <a:schemeClr val="accent1"/>
-          </a:lnRef>
-          <a:fillRef idx="3">
-            <a:schemeClr val="accent1"/>
-          </a:fillRef>
-          <a:effectRef idx="2">
-            <a:schemeClr val="accent1"/>
-          </a:effectRef>
-          <a:fontRef idx="minor">
-            <a:schemeClr val="lt1"/>
-          </a:fontRef>
-        </p:style>
-        <p:txBody>
-          <a:bodyPr rtlCol="0" anchor="ctr"/>
-          <a:lstStyle/>
-          <a:p>
-            <a:pPr algn="ctr"/>
-          </a:p>
-        </p:txBody>
-      </p:sp>
-      <p:sp>
-        <p:nvSpPr>
-          <p:cNvPr id="860" name="Oval 859"/>
-          <p:cNvSpPr/>
-          <p:nvPr/>
-        </p:nvSpPr>
-        <p:spPr>
-          <a:xfrm>
-            <a:off x="3258596" y="3551826"/>
-            <a:ext cx="92000" cy="92000"/>
-          </a:xfrm>
-          <a:prstGeom prst="ellipse">
-            <a:avLst/>
-          </a:prstGeom>
-          <a:noFill/>
-          <a:ln w="13970">
-            <a:solidFill>
-              <a:srgbClr val="D4A300"/>
-            </a:solidFill>
-          </a:ln>
-          <a:effectLst/>
-        </p:spPr>
-        <p:style>
-          <a:lnRef idx="1">
-            <a:schemeClr val="accent1"/>
-          </a:lnRef>
-          <a:fillRef idx="3">
-            <a:schemeClr val="accent1"/>
-          </a:fillRef>
-          <a:effectRef idx="2">
-            <a:schemeClr val="accent1"/>
-          </a:effectRef>
-          <a:fontRef idx="minor">
-            <a:schemeClr val="lt1"/>
-          </a:fontRef>
-        </p:style>
-        <p:txBody>
-          <a:bodyPr rtlCol="0" anchor="ctr"/>
-          <a:lstStyle/>
-          <a:p>
-            <a:pPr algn="ctr"/>
-          </a:p>
-        </p:txBody>
-      </p:sp>
-      <p:sp>
-        <p:nvSpPr>
-          <p:cNvPr id="861" name="Oval 860"/>
-          <p:cNvSpPr/>
-          <p:nvPr/>
-        </p:nvSpPr>
-        <p:spPr>
-          <a:xfrm>
-            <a:off x="3529253" y="3553150"/>
-            <a:ext cx="92000" cy="92000"/>
-          </a:xfrm>
-          <a:prstGeom prst="ellipse">
-            <a:avLst/>
-          </a:prstGeom>
-          <a:noFill/>
-          <a:ln w="13970">
-            <a:solidFill>
-              <a:srgbClr val="D4A300"/>
-            </a:solidFill>
-          </a:ln>
-          <a:effectLst/>
-        </p:spPr>
-        <p:style>
-          <a:lnRef idx="1">
-            <a:schemeClr val="accent1"/>
-          </a:lnRef>
-          <a:fillRef idx="3">
-            <a:schemeClr val="accent1"/>
-          </a:fillRef>
-          <a:effectRef idx="2">
-            <a:schemeClr val="accent1"/>
-          </a:effectRef>
-          <a:fontRef idx="minor">
-            <a:schemeClr val="lt1"/>
-          </a:fontRef>
-        </p:style>
-        <p:txBody>
-          <a:bodyPr rtlCol="0" anchor="ctr"/>
-          <a:lstStyle/>
-          <a:p>
-            <a:pPr algn="ctr"/>
-          </a:p>
-        </p:txBody>
-      </p:sp>
-      <p:sp>
-        <p:nvSpPr>
-          <p:cNvPr id="862" name="Oval 861"/>
-          <p:cNvSpPr/>
-          <p:nvPr/>
-        </p:nvSpPr>
-        <p:spPr>
-          <a:xfrm>
-            <a:off x="6250970" y="3554593"/>
-            <a:ext cx="92000" cy="92000"/>
-          </a:xfrm>
-          <a:prstGeom prst="ellipse">
-            <a:avLst/>
-          </a:prstGeom>
-          <a:noFill/>
-          <a:ln w="13970">
-            <a:solidFill>
-              <a:srgbClr val="D4A300"/>
-            </a:solidFill>
-          </a:ln>
-          <a:effectLst/>
-        </p:spPr>
-        <p:style>
-          <a:lnRef idx="1">
-            <a:schemeClr val="accent1"/>
-          </a:lnRef>
-          <a:fillRef idx="3">
-            <a:schemeClr val="accent1"/>
-          </a:fillRef>
-          <a:effectRef idx="2">
-            <a:schemeClr val="accent1"/>
-          </a:effectRef>
-          <a:fontRef idx="minor">
-            <a:schemeClr val="lt1"/>
-          </a:fontRef>
-        </p:style>
-        <p:txBody>
-          <a:bodyPr rtlCol="0" anchor="ctr"/>
-          <a:lstStyle/>
-          <a:p>
-            <a:pPr algn="ctr"/>
-          </a:p>
-        </p:txBody>
-      </p:sp>
-      <p:sp>
-        <p:nvSpPr>
-          <p:cNvPr id="863" name="Oval 862"/>
-          <p:cNvSpPr/>
-          <p:nvPr/>
-        </p:nvSpPr>
-        <p:spPr>
-          <a:xfrm>
-            <a:off x="5655688" y="3555416"/>
-            <a:ext cx="92000" cy="92000"/>
-          </a:xfrm>
-          <a:prstGeom prst="ellipse">
-            <a:avLst/>
-          </a:prstGeom>
-          <a:noFill/>
-          <a:ln w="13970">
-            <a:solidFill>
-              <a:srgbClr val="D4A300"/>
-            </a:solidFill>
-          </a:ln>
-          <a:effectLst/>
-        </p:spPr>
-        <p:style>
-          <a:lnRef idx="1">
-            <a:schemeClr val="accent1"/>
-          </a:lnRef>
-          <a:fillRef idx="3">
-            <a:schemeClr val="accent1"/>
-          </a:fillRef>
-          <a:effectRef idx="2">
-            <a:schemeClr val="accent1"/>
-          </a:effectRef>
-          <a:fontRef idx="minor">
-            <a:schemeClr val="lt1"/>
-          </a:fontRef>
-        </p:style>
-        <p:txBody>
-          <a:bodyPr rtlCol="0" anchor="ctr"/>
-          <a:lstStyle/>
-          <a:p>
-            <a:pPr algn="ctr"/>
-          </a:p>
-        </p:txBody>
-      </p:sp>
-      <p:sp>
-        <p:nvSpPr>
-          <p:cNvPr id="864" name="Oval 863"/>
-          <p:cNvSpPr/>
-          <p:nvPr/>
-        </p:nvSpPr>
-        <p:spPr>
-          <a:xfrm>
-            <a:off x="5851085" y="3558830"/>
-            <a:ext cx="92000" cy="92000"/>
-          </a:xfrm>
-          <a:prstGeom prst="ellipse">
-            <a:avLst/>
-          </a:prstGeom>
-          <a:noFill/>
-          <a:ln w="13970">
-            <a:solidFill>
-              <a:srgbClr val="D4A300"/>
-            </a:solidFill>
-          </a:ln>
-          <a:effectLst/>
-        </p:spPr>
-        <p:style>
-          <a:lnRef idx="1">
-            <a:schemeClr val="accent1"/>
-          </a:lnRef>
-          <a:fillRef idx="3">
-            <a:schemeClr val="accent1"/>
-          </a:fillRef>
-          <a:effectRef idx="2">
-            <a:schemeClr val="accent1"/>
-          </a:effectRef>
-          <a:fontRef idx="minor">
-            <a:schemeClr val="lt1"/>
-          </a:fontRef>
-        </p:style>
-        <p:txBody>
-          <a:bodyPr rtlCol="0" anchor="ctr"/>
-          <a:lstStyle/>
-          <a:p>
-            <a:pPr algn="ctr"/>
-          </a:p>
-        </p:txBody>
-      </p:sp>
-      <p:sp>
-        <p:nvSpPr>
-          <p:cNvPr id="865" name="Oval 864"/>
-          <p:cNvSpPr/>
-          <p:nvPr/>
-        </p:nvSpPr>
-        <p:spPr>
-          <a:xfrm>
-            <a:off x="7689472" y="3561789"/>
-            <a:ext cx="92000" cy="92000"/>
-          </a:xfrm>
-          <a:prstGeom prst="ellipse">
-            <a:avLst/>
-          </a:prstGeom>
-          <a:noFill/>
-          <a:ln w="13970">
-            <a:solidFill>
-              <a:srgbClr val="D4A300"/>
-            </a:solidFill>
-          </a:ln>
-          <a:effectLst/>
-        </p:spPr>
-        <p:style>
-          <a:lnRef idx="1">
-            <a:schemeClr val="accent1"/>
-          </a:lnRef>
-          <a:fillRef idx="3">
-            <a:schemeClr val="accent1"/>
-          </a:fillRef>
-          <a:effectRef idx="2">
-            <a:schemeClr val="accent1"/>
-          </a:effectRef>
-          <a:fontRef idx="minor">
-            <a:schemeClr val="lt1"/>
-          </a:fontRef>
-        </p:style>
-        <p:txBody>
-          <a:bodyPr rtlCol="0" anchor="ctr"/>
-          <a:lstStyle/>
-          <a:p>
-            <a:pPr algn="ctr"/>
-          </a:p>
-        </p:txBody>
-      </p:sp>
-      <p:sp>
-        <p:nvSpPr>
-          <p:cNvPr id="866" name="Oval 865"/>
-          <p:cNvSpPr/>
-          <p:nvPr/>
-        </p:nvSpPr>
-        <p:spPr>
-          <a:xfrm>
-            <a:off x="2988062" y="3561837"/>
-            <a:ext cx="92000" cy="92000"/>
-          </a:xfrm>
-          <a:prstGeom prst="ellipse">
-            <a:avLst/>
-          </a:prstGeom>
-          <a:noFill/>
-          <a:ln w="13970">
-            <a:solidFill>
-              <a:srgbClr val="D4A300"/>
-            </a:solidFill>
-          </a:ln>
-          <a:effectLst/>
-        </p:spPr>
-        <p:style>
-          <a:lnRef idx="1">
-            <a:schemeClr val="accent1"/>
-          </a:lnRef>
-          <a:fillRef idx="3">
-            <a:schemeClr val="accent1"/>
-          </a:fillRef>
-          <a:effectRef idx="2">
-            <a:schemeClr val="accent1"/>
-          </a:effectRef>
-          <a:fontRef idx="minor">
-            <a:schemeClr val="lt1"/>
-          </a:fontRef>
-        </p:style>
-        <p:txBody>
-          <a:bodyPr rtlCol="0" anchor="ctr"/>
-          <a:lstStyle/>
-          <a:p>
-            <a:pPr algn="ctr"/>
-          </a:p>
-        </p:txBody>
-      </p:sp>
-      <p:sp>
-        <p:nvSpPr>
-          <p:cNvPr id="867" name="Oval 866"/>
-          <p:cNvSpPr/>
-          <p:nvPr/>
-        </p:nvSpPr>
-        <p:spPr>
-          <a:xfrm>
-            <a:off x="7689472" y="3564030"/>
-            <a:ext cx="92000" cy="92000"/>
-          </a:xfrm>
-          <a:prstGeom prst="ellipse">
-            <a:avLst/>
-          </a:prstGeom>
-          <a:noFill/>
-          <a:ln w="13970">
-            <a:solidFill>
-              <a:srgbClr val="D4A300"/>
-            </a:solidFill>
-          </a:ln>
-          <a:effectLst/>
-        </p:spPr>
-        <p:style>
-          <a:lnRef idx="1">
-            <a:schemeClr val="accent1"/>
-          </a:lnRef>
-          <a:fillRef idx="3">
-            <a:schemeClr val="accent1"/>
-          </a:fillRef>
-          <a:effectRef idx="2">
-            <a:schemeClr val="accent1"/>
-          </a:effectRef>
-          <a:fontRef idx="minor">
-            <a:schemeClr val="lt1"/>
-          </a:fontRef>
-        </p:style>
-        <p:txBody>
-          <a:bodyPr rtlCol="0" anchor="ctr"/>
-          <a:lstStyle/>
-          <a:p>
-            <a:pPr algn="ctr"/>
-          </a:p>
-        </p:txBody>
-      </p:sp>
-      <p:sp>
-        <p:nvSpPr>
-          <p:cNvPr id="868" name="Oval 867"/>
-          <p:cNvSpPr/>
-          <p:nvPr/>
-        </p:nvSpPr>
-        <p:spPr>
-          <a:xfrm>
-            <a:off x="3645385" y="3564137"/>
-            <a:ext cx="92000" cy="92000"/>
-          </a:xfrm>
-          <a:prstGeom prst="ellipse">
-            <a:avLst/>
-          </a:prstGeom>
-          <a:noFill/>
-          <a:ln w="13970">
-            <a:solidFill>
-              <a:srgbClr val="D4A300"/>
-            </a:solidFill>
-          </a:ln>
-          <a:effectLst/>
-        </p:spPr>
-        <p:style>
-          <a:lnRef idx="1">
-            <a:schemeClr val="accent1"/>
-          </a:lnRef>
-          <a:fillRef idx="3">
-            <a:schemeClr val="accent1"/>
-          </a:fillRef>
-          <a:effectRef idx="2">
-            <a:schemeClr val="accent1"/>
-          </a:effectRef>
-          <a:fontRef idx="minor">
-            <a:schemeClr val="lt1"/>
-          </a:fontRef>
-        </p:style>
-        <p:txBody>
-          <a:bodyPr rtlCol="0" anchor="ctr"/>
-          <a:lstStyle/>
-          <a:p>
-            <a:pPr algn="ctr"/>
-          </a:p>
-        </p:txBody>
-      </p:sp>
-      <p:sp>
-        <p:nvSpPr>
-          <p:cNvPr id="869" name="Oval 868"/>
-          <p:cNvSpPr/>
-          <p:nvPr/>
-        </p:nvSpPr>
-        <p:spPr>
-          <a:xfrm>
-            <a:off x="3690085" y="3568654"/>
-            <a:ext cx="92000" cy="92000"/>
-          </a:xfrm>
-          <a:prstGeom prst="ellipse">
-            <a:avLst/>
-          </a:prstGeom>
-          <a:noFill/>
-          <a:ln w="13970">
-            <a:solidFill>
-              <a:srgbClr val="D4A300"/>
-            </a:solidFill>
-          </a:ln>
-          <a:effectLst/>
-        </p:spPr>
-        <p:style>
-          <a:lnRef idx="1">
-            <a:schemeClr val="accent1"/>
-          </a:lnRef>
-          <a:fillRef idx="3">
-            <a:schemeClr val="accent1"/>
-          </a:fillRef>
-          <a:effectRef idx="2">
-            <a:schemeClr val="accent1"/>
-          </a:effectRef>
-          <a:fontRef idx="minor">
-            <a:schemeClr val="lt1"/>
-          </a:fontRef>
-        </p:style>
-        <p:txBody>
-          <a:bodyPr rtlCol="0" anchor="ctr"/>
-          <a:lstStyle/>
-          <a:p>
-            <a:pPr algn="ctr"/>
-          </a:p>
-        </p:txBody>
-      </p:sp>
-      <p:sp>
-        <p:nvSpPr>
-          <p:cNvPr id="870" name="Oval 869"/>
-          <p:cNvSpPr/>
-          <p:nvPr/>
-        </p:nvSpPr>
-        <p:spPr>
-          <a:xfrm>
-            <a:off x="6361111" y="3571533"/>
-            <a:ext cx="92000" cy="92000"/>
-          </a:xfrm>
-          <a:prstGeom prst="ellipse">
-            <a:avLst/>
-          </a:prstGeom>
-          <a:noFill/>
-          <a:ln w="13970">
-            <a:solidFill>
-              <a:srgbClr val="D4A300"/>
-            </a:solidFill>
-          </a:ln>
-          <a:effectLst/>
-        </p:spPr>
-        <p:style>
-          <a:lnRef idx="1">
-            <a:schemeClr val="accent1"/>
-          </a:lnRef>
-          <a:fillRef idx="3">
-            <a:schemeClr val="accent1"/>
-          </a:fillRef>
-          <a:effectRef idx="2">
-            <a:schemeClr val="accent1"/>
-          </a:effectRef>
-          <a:fontRef idx="minor">
-            <a:schemeClr val="lt1"/>
-          </a:fontRef>
-        </p:style>
-        <p:txBody>
-          <a:bodyPr rtlCol="0" anchor="ctr"/>
-          <a:lstStyle/>
-          <a:p>
-            <a:pPr algn="ctr"/>
-          </a:p>
-        </p:txBody>
-      </p:sp>
-      <p:sp>
-        <p:nvSpPr>
-          <p:cNvPr id="871" name="Oval 870"/>
-          <p:cNvSpPr/>
-          <p:nvPr/>
-        </p:nvSpPr>
-        <p:spPr>
-          <a:xfrm>
-            <a:off x="3172352" y="3573220"/>
-            <a:ext cx="92000" cy="92000"/>
-          </a:xfrm>
-          <a:prstGeom prst="ellipse">
-            <a:avLst/>
-          </a:prstGeom>
-          <a:noFill/>
-          <a:ln w="13970">
-            <a:solidFill>
-              <a:srgbClr val="D4A300"/>
-            </a:solidFill>
-          </a:ln>
-          <a:effectLst/>
-        </p:spPr>
-        <p:style>
-          <a:lnRef idx="1">
-            <a:schemeClr val="accent1"/>
-          </a:lnRef>
-          <a:fillRef idx="3">
-            <a:schemeClr val="accent1"/>
-          </a:fillRef>
-          <a:effectRef idx="2">
-            <a:schemeClr val="accent1"/>
-          </a:effectRef>
-          <a:fontRef idx="minor">
-            <a:schemeClr val="lt1"/>
-          </a:fontRef>
-        </p:style>
-        <p:txBody>
-          <a:bodyPr rtlCol="0" anchor="ctr"/>
-          <a:lstStyle/>
-          <a:p>
-            <a:pPr algn="ctr"/>
-          </a:p>
-        </p:txBody>
-      </p:sp>
-      <p:sp>
-        <p:nvSpPr>
-          <p:cNvPr id="872" name="Oval 871"/>
-          <p:cNvSpPr/>
-          <p:nvPr/>
-        </p:nvSpPr>
-        <p:spPr>
-          <a:xfrm>
-            <a:off x="3715830" y="3573310"/>
-            <a:ext cx="92000" cy="92000"/>
-          </a:xfrm>
-          <a:prstGeom prst="ellipse">
-            <a:avLst/>
-          </a:prstGeom>
-          <a:noFill/>
-          <a:ln w="13970">
-            <a:solidFill>
-              <a:srgbClr val="D4A300"/>
-            </a:solidFill>
-          </a:ln>
-          <a:effectLst/>
-        </p:spPr>
-        <p:style>
-          <a:lnRef idx="1">
-            <a:schemeClr val="accent1"/>
-          </a:lnRef>
-          <a:fillRef idx="3">
-            <a:schemeClr val="accent1"/>
-          </a:fillRef>
-          <a:effectRef idx="2">
-            <a:schemeClr val="accent1"/>
-          </a:effectRef>
-          <a:fontRef idx="minor">
-            <a:schemeClr val="lt1"/>
-          </a:fontRef>
-        </p:style>
-        <p:txBody>
-          <a:bodyPr rtlCol="0" anchor="ctr"/>
-          <a:lstStyle/>
-          <a:p>
-            <a:pPr algn="ctr"/>
-          </a:p>
-        </p:txBody>
-      </p:sp>
-      <p:sp>
-        <p:nvSpPr>
-          <p:cNvPr id="873" name="Oval 872"/>
-          <p:cNvSpPr/>
-          <p:nvPr/>
-        </p:nvSpPr>
-        <p:spPr>
-          <a:xfrm>
-            <a:off x="3715403" y="3574546"/>
-            <a:ext cx="92000" cy="92000"/>
-          </a:xfrm>
-          <a:prstGeom prst="ellipse">
-            <a:avLst/>
-          </a:prstGeom>
-          <a:noFill/>
-          <a:ln w="13970">
-            <a:solidFill>
-              <a:srgbClr val="D4A300"/>
-            </a:solidFill>
-          </a:ln>
-          <a:effectLst/>
-        </p:spPr>
-        <p:style>
-          <a:lnRef idx="1">
-            <a:schemeClr val="accent1"/>
-          </a:lnRef>
-          <a:fillRef idx="3">
-            <a:schemeClr val="accent1"/>
-          </a:fillRef>
-          <a:effectRef idx="2">
-            <a:schemeClr val="accent1"/>
-          </a:effectRef>
-          <a:fontRef idx="minor">
-            <a:schemeClr val="lt1"/>
-          </a:fontRef>
-        </p:style>
-        <p:txBody>
-          <a:bodyPr rtlCol="0" anchor="ctr"/>
-          <a:lstStyle/>
-          <a:p>
-            <a:pPr algn="ctr"/>
-          </a:p>
-        </p:txBody>
-      </p:sp>
-      <p:sp>
-        <p:nvSpPr>
-          <p:cNvPr id="874" name="Oval 873"/>
-          <p:cNvSpPr/>
-          <p:nvPr/>
-        </p:nvSpPr>
-        <p:spPr>
-          <a:xfrm>
-            <a:off x="5409486" y="3575924"/>
-            <a:ext cx="92000" cy="92000"/>
-          </a:xfrm>
-          <a:prstGeom prst="ellipse">
-            <a:avLst/>
-          </a:prstGeom>
-          <a:noFill/>
-          <a:ln w="13970">
-            <a:solidFill>
-              <a:srgbClr val="D4A300"/>
-            </a:solidFill>
-          </a:ln>
-          <a:effectLst/>
-        </p:spPr>
-        <p:style>
-          <a:lnRef idx="1">
-            <a:schemeClr val="accent1"/>
-          </a:lnRef>
-          <a:fillRef idx="3">
-            <a:schemeClr val="accent1"/>
-          </a:fillRef>
-          <a:effectRef idx="2">
-            <a:schemeClr val="accent1"/>
-          </a:effectRef>
-          <a:fontRef idx="minor">
-            <a:schemeClr val="lt1"/>
-          </a:fontRef>
-        </p:style>
-        <p:txBody>
-          <a:bodyPr rtlCol="0" anchor="ctr"/>
-          <a:lstStyle/>
-          <a:p>
-            <a:pPr algn="ctr"/>
-          </a:p>
-        </p:txBody>
-      </p:sp>
-      <p:sp>
-        <p:nvSpPr>
-          <p:cNvPr id="875" name="Oval 874"/>
-          <p:cNvSpPr/>
-          <p:nvPr/>
-        </p:nvSpPr>
-        <p:spPr>
-          <a:xfrm>
-            <a:off x="2291052" y="3578981"/>
-            <a:ext cx="92000" cy="92000"/>
-          </a:xfrm>
-          <a:prstGeom prst="ellipse">
-            <a:avLst/>
-          </a:prstGeom>
-          <a:noFill/>
-          <a:ln w="13970">
-            <a:solidFill>
-              <a:srgbClr val="D4A300"/>
-            </a:solidFill>
-          </a:ln>
-          <a:effectLst/>
-        </p:spPr>
-        <p:style>
-          <a:lnRef idx="1">
-            <a:schemeClr val="accent1"/>
-          </a:lnRef>
-          <a:fillRef idx="3">
-            <a:schemeClr val="accent1"/>
-          </a:fillRef>
-          <a:effectRef idx="2">
-            <a:schemeClr val="accent1"/>
-          </a:effectRef>
-          <a:fontRef idx="minor">
-            <a:schemeClr val="lt1"/>
-          </a:fontRef>
-        </p:style>
-        <p:txBody>
-          <a:bodyPr rtlCol="0" anchor="ctr"/>
-          <a:lstStyle/>
-          <a:p>
-            <a:pPr algn="ctr"/>
-          </a:p>
-        </p:txBody>
-      </p:sp>
-      <p:sp>
-        <p:nvSpPr>
-          <p:cNvPr id="876" name="Oval 875"/>
-          <p:cNvSpPr/>
-          <p:nvPr/>
-        </p:nvSpPr>
-        <p:spPr>
-          <a:xfrm>
-            <a:off x="6089070" y="3580947"/>
-            <a:ext cx="92000" cy="92000"/>
-          </a:xfrm>
-          <a:prstGeom prst="ellipse">
-            <a:avLst/>
-          </a:prstGeom>
-          <a:noFill/>
-          <a:ln w="13970">
-            <a:solidFill>
-              <a:srgbClr val="D4A300"/>
-            </a:solidFill>
-          </a:ln>
-          <a:effectLst/>
-        </p:spPr>
-        <p:style>
-          <a:lnRef idx="1">
-            <a:schemeClr val="accent1"/>
-          </a:lnRef>
-          <a:fillRef idx="3">
-            <a:schemeClr val="accent1"/>
-          </a:fillRef>
-          <a:effectRef idx="2">
-            <a:schemeClr val="accent1"/>
-          </a:effectRef>
-          <a:fontRef idx="minor">
-            <a:schemeClr val="lt1"/>
-          </a:fontRef>
-        </p:style>
-        <p:txBody>
-          <a:bodyPr rtlCol="0" anchor="ctr"/>
-          <a:lstStyle/>
-          <a:p>
-            <a:pPr algn="ctr"/>
-          </a:p>
-        </p:txBody>
-      </p:sp>
-      <p:sp>
-        <p:nvSpPr>
-          <p:cNvPr id="877" name="Oval 876"/>
-          <p:cNvSpPr/>
-          <p:nvPr/>
-        </p:nvSpPr>
-        <p:spPr>
-          <a:xfrm>
-            <a:off x="1492251" y="3583048"/>
-            <a:ext cx="92000" cy="92000"/>
-          </a:xfrm>
-          <a:prstGeom prst="ellipse">
-            <a:avLst/>
-          </a:prstGeom>
-          <a:noFill/>
-          <a:ln w="13970">
-            <a:solidFill>
-              <a:srgbClr val="D4A300"/>
-            </a:solidFill>
-          </a:ln>
-          <a:effectLst/>
-        </p:spPr>
-        <p:style>
-          <a:lnRef idx="1">
-            <a:schemeClr val="accent1"/>
-          </a:lnRef>
-          <a:fillRef idx="3">
-            <a:schemeClr val="accent1"/>
-          </a:fillRef>
-          <a:effectRef idx="2">
-            <a:schemeClr val="accent1"/>
-          </a:effectRef>
-          <a:fontRef idx="minor">
-            <a:schemeClr val="lt1"/>
-          </a:fontRef>
-        </p:style>
-        <p:txBody>
-          <a:bodyPr rtlCol="0" anchor="ctr"/>
-          <a:lstStyle/>
-          <a:p>
-            <a:pPr algn="ctr"/>
-          </a:p>
-        </p:txBody>
-      </p:sp>
-      <p:sp>
-        <p:nvSpPr>
-          <p:cNvPr id="878" name="Oval 877"/>
-          <p:cNvSpPr/>
-          <p:nvPr/>
-        </p:nvSpPr>
-        <p:spPr>
-          <a:xfrm>
-            <a:off x="3723578" y="3584141"/>
-            <a:ext cx="92000" cy="92000"/>
-          </a:xfrm>
-          <a:prstGeom prst="ellipse">
-            <a:avLst/>
-          </a:prstGeom>
-          <a:noFill/>
-          <a:ln w="13970">
-            <a:solidFill>
-              <a:srgbClr val="D4A300"/>
-            </a:solidFill>
-          </a:ln>
-          <a:effectLst/>
-        </p:spPr>
-        <p:style>
-          <a:lnRef idx="1">
-            <a:schemeClr val="accent1"/>
-          </a:lnRef>
-          <a:fillRef idx="3">
-            <a:schemeClr val="accent1"/>
-          </a:fillRef>
-          <a:effectRef idx="2">
-            <a:schemeClr val="accent1"/>
-          </a:effectRef>
-          <a:fontRef idx="minor">
-            <a:schemeClr val="lt1"/>
-          </a:fontRef>
-        </p:style>
-        <p:txBody>
-          <a:bodyPr rtlCol="0" anchor="ctr"/>
-          <a:lstStyle/>
-          <a:p>
-            <a:pPr algn="ctr"/>
-          </a:p>
-        </p:txBody>
-      </p:sp>
-      <p:sp>
-        <p:nvSpPr>
-          <p:cNvPr id="879" name="Oval 878"/>
-          <p:cNvSpPr/>
-          <p:nvPr/>
-        </p:nvSpPr>
-        <p:spPr>
-          <a:xfrm>
-            <a:off x="3699420" y="3584679"/>
-            <a:ext cx="92000" cy="92000"/>
-          </a:xfrm>
-          <a:prstGeom prst="ellipse">
-            <a:avLst/>
-          </a:prstGeom>
-          <a:noFill/>
-          <a:ln w="13970">
-            <a:solidFill>
-              <a:srgbClr val="D4A300"/>
-            </a:solidFill>
-          </a:ln>
-          <a:effectLst/>
-        </p:spPr>
-        <p:style>
-          <a:lnRef idx="1">
-            <a:schemeClr val="accent1"/>
-          </a:lnRef>
-          <a:fillRef idx="3">
-            <a:schemeClr val="accent1"/>
-          </a:fillRef>
-          <a:effectRef idx="2">
-            <a:schemeClr val="accent1"/>
-          </a:effectRef>
-          <a:fontRef idx="minor">
-            <a:schemeClr val="lt1"/>
-          </a:fontRef>
-        </p:style>
-        <p:txBody>
-          <a:bodyPr rtlCol="0" anchor="ctr"/>
-          <a:lstStyle/>
-          <a:p>
-            <a:pPr algn="ctr"/>
-          </a:p>
-        </p:txBody>
-      </p:sp>
-      <p:sp>
-        <p:nvSpPr>
-          <p:cNvPr id="880" name="Oval 879"/>
-          <p:cNvSpPr/>
-          <p:nvPr/>
-        </p:nvSpPr>
-        <p:spPr>
-          <a:xfrm>
-            <a:off x="7258814" y="3586180"/>
-            <a:ext cx="92000" cy="92000"/>
-          </a:xfrm>
-          <a:prstGeom prst="ellipse">
-            <a:avLst/>
-          </a:prstGeom>
-          <a:noFill/>
-          <a:ln w="13970">
-            <a:solidFill>
-              <a:srgbClr val="D4A300"/>
-            </a:solidFill>
-          </a:ln>
-          <a:effectLst/>
-        </p:spPr>
-        <p:style>
-          <a:lnRef idx="1">
-            <a:schemeClr val="accent1"/>
-          </a:lnRef>
-          <a:fillRef idx="3">
-            <a:schemeClr val="accent1"/>
-          </a:fillRef>
-          <a:effectRef idx="2">
-            <a:schemeClr val="accent1"/>
-          </a:effectRef>
-          <a:fontRef idx="minor">
-            <a:schemeClr val="lt1"/>
-          </a:fontRef>
-        </p:style>
-        <p:txBody>
-          <a:bodyPr rtlCol="0" anchor="ctr"/>
-          <a:lstStyle/>
-          <a:p>
-            <a:pPr algn="ctr"/>
-          </a:p>
-        </p:txBody>
-      </p:sp>
-      <p:sp>
-        <p:nvSpPr>
-          <p:cNvPr id="881" name="Oval 880"/>
-          <p:cNvSpPr/>
-          <p:nvPr/>
-        </p:nvSpPr>
-        <p:spPr>
-          <a:xfrm>
-            <a:off x="5630558" y="3586415"/>
-            <a:ext cx="92000" cy="92000"/>
-          </a:xfrm>
-          <a:prstGeom prst="ellipse">
-            <a:avLst/>
-          </a:prstGeom>
-          <a:noFill/>
-          <a:ln w="13970">
-            <a:solidFill>
-              <a:srgbClr val="D4A300"/>
-            </a:solidFill>
-          </a:ln>
-          <a:effectLst/>
-        </p:spPr>
-        <p:style>
-          <a:lnRef idx="1">
-            <a:schemeClr val="accent1"/>
-          </a:lnRef>
-          <a:fillRef idx="3">
-            <a:schemeClr val="accent1"/>
-          </a:fillRef>
-          <a:effectRef idx="2">
-            <a:schemeClr val="accent1"/>
-          </a:effectRef>
-          <a:fontRef idx="minor">
-            <a:schemeClr val="lt1"/>
-          </a:fontRef>
-        </p:style>
-        <p:txBody>
-          <a:bodyPr rtlCol="0" anchor="ctr"/>
-          <a:lstStyle/>
-          <a:p>
-            <a:pPr algn="ctr"/>
-          </a:p>
-        </p:txBody>
-      </p:sp>
-      <p:sp>
-        <p:nvSpPr>
-          <p:cNvPr id="882" name="Oval 881"/>
-          <p:cNvSpPr/>
-          <p:nvPr/>
-        </p:nvSpPr>
-        <p:spPr>
-          <a:xfrm>
-            <a:off x="3101099" y="3586707"/>
-            <a:ext cx="92000" cy="92000"/>
-          </a:xfrm>
-          <a:prstGeom prst="ellipse">
-            <a:avLst/>
-          </a:prstGeom>
-          <a:noFill/>
-          <a:ln w="13970">
-            <a:solidFill>
-              <a:srgbClr val="D4A300"/>
-            </a:solidFill>
-          </a:ln>
-          <a:effectLst/>
-        </p:spPr>
-        <p:style>
-          <a:lnRef idx="1">
-            <a:schemeClr val="accent1"/>
-          </a:lnRef>
-          <a:fillRef idx="3">
-            <a:schemeClr val="accent1"/>
-          </a:fillRef>
-          <a:effectRef idx="2">
-            <a:schemeClr val="accent1"/>
-          </a:effectRef>
-          <a:fontRef idx="minor">
-            <a:schemeClr val="lt1"/>
-          </a:fontRef>
-        </p:style>
-        <p:txBody>
-          <a:bodyPr rtlCol="0" anchor="ctr"/>
-          <a:lstStyle/>
-          <a:p>
-            <a:pPr algn="ctr"/>
-          </a:p>
-        </p:txBody>
-      </p:sp>
-      <p:sp>
-        <p:nvSpPr>
-          <p:cNvPr id="883" name="Oval 882"/>
-          <p:cNvSpPr/>
-          <p:nvPr/>
-        </p:nvSpPr>
-        <p:spPr>
-          <a:xfrm>
-            <a:off x="7689472" y="3587367"/>
-            <a:ext cx="92000" cy="92000"/>
-          </a:xfrm>
-          <a:prstGeom prst="ellipse">
-            <a:avLst/>
-          </a:prstGeom>
-          <a:noFill/>
-          <a:ln w="13970">
-            <a:solidFill>
-              <a:srgbClr val="D4A300"/>
-            </a:solidFill>
-          </a:ln>
-          <a:effectLst/>
-        </p:spPr>
-        <p:style>
-          <a:lnRef idx="1">
-            <a:schemeClr val="accent1"/>
-          </a:lnRef>
-          <a:fillRef idx="3">
-            <a:schemeClr val="accent1"/>
-          </a:fillRef>
-          <a:effectRef idx="2">
-            <a:schemeClr val="accent1"/>
-          </a:effectRef>
-          <a:fontRef idx="minor">
-            <a:schemeClr val="lt1"/>
-          </a:fontRef>
-        </p:style>
-        <p:txBody>
-          <a:bodyPr rtlCol="0" anchor="ctr"/>
-          <a:lstStyle/>
-          <a:p>
-            <a:pPr algn="ctr"/>
-          </a:p>
-        </p:txBody>
-      </p:sp>
-      <p:sp>
-        <p:nvSpPr>
-          <p:cNvPr id="884" name="Oval 883"/>
-          <p:cNvSpPr/>
-          <p:nvPr/>
-        </p:nvSpPr>
-        <p:spPr>
-          <a:xfrm>
-            <a:off x="5125416" y="3591272"/>
-            <a:ext cx="92000" cy="92000"/>
-          </a:xfrm>
-          <a:prstGeom prst="ellipse">
-            <a:avLst/>
-          </a:prstGeom>
-          <a:noFill/>
-          <a:ln w="13970">
-            <a:solidFill>
-              <a:srgbClr val="D4A300"/>
-            </a:solidFill>
-          </a:ln>
-          <a:effectLst/>
-        </p:spPr>
-        <p:style>
-          <a:lnRef idx="1">
-            <a:schemeClr val="accent1"/>
-          </a:lnRef>
-          <a:fillRef idx="3">
-            <a:schemeClr val="accent1"/>
-          </a:fillRef>
-          <a:effectRef idx="2">
-            <a:schemeClr val="accent1"/>
-          </a:effectRef>
-          <a:fontRef idx="minor">
-            <a:schemeClr val="lt1"/>
-          </a:fontRef>
-        </p:style>
-        <p:txBody>
-          <a:bodyPr rtlCol="0" anchor="ctr"/>
-          <a:lstStyle/>
-          <a:p>
-            <a:pPr algn="ctr"/>
-          </a:p>
-        </p:txBody>
-      </p:sp>
-      <p:sp>
-        <p:nvSpPr>
-          <p:cNvPr id="885" name="Oval 884"/>
-          <p:cNvSpPr/>
-          <p:nvPr/>
-        </p:nvSpPr>
-        <p:spPr>
-          <a:xfrm>
-            <a:off x="6148494" y="3591356"/>
-            <a:ext cx="92000" cy="92000"/>
-          </a:xfrm>
-          <a:prstGeom prst="ellipse">
-            <a:avLst/>
-          </a:prstGeom>
-          <a:noFill/>
-          <a:ln w="13970">
-            <a:solidFill>
-              <a:srgbClr val="D4A300"/>
-            </a:solidFill>
-          </a:ln>
-          <a:effectLst/>
-        </p:spPr>
-        <p:style>
-          <a:lnRef idx="1">
-            <a:schemeClr val="accent1"/>
-          </a:lnRef>
-          <a:fillRef idx="3">
-            <a:schemeClr val="accent1"/>
-          </a:fillRef>
-          <a:effectRef idx="2">
-            <a:schemeClr val="accent1"/>
-          </a:effectRef>
-          <a:fontRef idx="minor">
-            <a:schemeClr val="lt1"/>
-          </a:fontRef>
-        </p:style>
-        <p:txBody>
-          <a:bodyPr rtlCol="0" anchor="ctr"/>
-          <a:lstStyle/>
-          <a:p>
-            <a:pPr algn="ctr"/>
-          </a:p>
-        </p:txBody>
-      </p:sp>
-      <p:sp>
-        <p:nvSpPr>
-          <p:cNvPr id="886" name="Oval 885"/>
-          <p:cNvSpPr/>
-          <p:nvPr/>
-        </p:nvSpPr>
-        <p:spPr>
-          <a:xfrm>
-            <a:off x="6827528" y="3592145"/>
-            <a:ext cx="92000" cy="92000"/>
-          </a:xfrm>
-          <a:prstGeom prst="ellipse">
-            <a:avLst/>
-          </a:prstGeom>
-          <a:noFill/>
-          <a:ln w="13970">
-            <a:solidFill>
-              <a:srgbClr val="D4A300"/>
-            </a:solidFill>
-          </a:ln>
-          <a:effectLst/>
-        </p:spPr>
-        <p:style>
-          <a:lnRef idx="1">
-            <a:schemeClr val="accent1"/>
-          </a:lnRef>
-          <a:fillRef idx="3">
-            <a:schemeClr val="accent1"/>
-          </a:fillRef>
-          <a:effectRef idx="2">
-            <a:schemeClr val="accent1"/>
-          </a:effectRef>
-          <a:fontRef idx="minor">
-            <a:schemeClr val="lt1"/>
-          </a:fontRef>
-        </p:style>
-        <p:txBody>
-          <a:bodyPr rtlCol="0" anchor="ctr"/>
-          <a:lstStyle/>
-          <a:p>
-            <a:pPr algn="ctr"/>
-          </a:p>
-        </p:txBody>
-      </p:sp>
-      <p:sp>
-        <p:nvSpPr>
-          <p:cNvPr id="887" name="Oval 886"/>
-          <p:cNvSpPr/>
-          <p:nvPr/>
-        </p:nvSpPr>
-        <p:spPr>
-          <a:xfrm>
-            <a:off x="5642045" y="3592671"/>
-            <a:ext cx="92000" cy="92000"/>
-          </a:xfrm>
-          <a:prstGeom prst="ellipse">
-            <a:avLst/>
-          </a:prstGeom>
-          <a:noFill/>
-          <a:ln w="13970">
-            <a:solidFill>
-              <a:srgbClr val="D4A300"/>
-            </a:solidFill>
-          </a:ln>
-          <a:effectLst/>
-        </p:spPr>
-        <p:style>
-          <a:lnRef idx="1">
-            <a:schemeClr val="accent1"/>
-          </a:lnRef>
-          <a:fillRef idx="3">
-            <a:schemeClr val="accent1"/>
-          </a:fillRef>
-          <a:effectRef idx="2">
-            <a:schemeClr val="accent1"/>
-          </a:effectRef>
-          <a:fontRef idx="minor">
-            <a:schemeClr val="lt1"/>
-          </a:fontRef>
-        </p:style>
-        <p:txBody>
-          <a:bodyPr rtlCol="0" anchor="ctr"/>
-          <a:lstStyle/>
-          <a:p>
-            <a:pPr algn="ctr"/>
-          </a:p>
-        </p:txBody>
-      </p:sp>
-      <p:sp>
-        <p:nvSpPr>
-          <p:cNvPr id="888" name="Oval 887"/>
-          <p:cNvSpPr/>
-          <p:nvPr/>
-        </p:nvSpPr>
-        <p:spPr>
-          <a:xfrm>
-            <a:off x="2532479" y="3597957"/>
-            <a:ext cx="92000" cy="92000"/>
-          </a:xfrm>
-          <a:prstGeom prst="ellipse">
-            <a:avLst/>
-          </a:prstGeom>
-          <a:noFill/>
-          <a:ln w="13970">
-            <a:solidFill>
-              <a:srgbClr val="D4A300"/>
-            </a:solidFill>
-          </a:ln>
-          <a:effectLst/>
-        </p:spPr>
-        <p:style>
-          <a:lnRef idx="1">
-            <a:schemeClr val="accent1"/>
-          </a:lnRef>
-          <a:fillRef idx="3">
-            <a:schemeClr val="accent1"/>
-          </a:fillRef>
-          <a:effectRef idx="2">
-            <a:schemeClr val="accent1"/>
-          </a:effectRef>
-          <a:fontRef idx="minor">
-            <a:schemeClr val="lt1"/>
-          </a:fontRef>
-        </p:style>
-        <p:txBody>
-          <a:bodyPr rtlCol="0" anchor="ctr"/>
-          <a:lstStyle/>
-          <a:p>
-            <a:pPr algn="ctr"/>
-          </a:p>
-        </p:txBody>
-      </p:sp>
-      <p:sp>
-        <p:nvSpPr>
-          <p:cNvPr id="889" name="Oval 888"/>
-          <p:cNvSpPr/>
-          <p:nvPr/>
-        </p:nvSpPr>
-        <p:spPr>
-          <a:xfrm>
-            <a:off x="3364029" y="3600162"/>
-            <a:ext cx="92000" cy="92000"/>
-          </a:xfrm>
-          <a:prstGeom prst="ellipse">
-            <a:avLst/>
-          </a:prstGeom>
-          <a:noFill/>
-          <a:ln w="13970">
-            <a:solidFill>
-              <a:srgbClr val="D4A300"/>
-            </a:solidFill>
-          </a:ln>
-          <a:effectLst/>
-        </p:spPr>
-        <p:style>
-          <a:lnRef idx="1">
-            <a:schemeClr val="accent1"/>
-          </a:lnRef>
-          <a:fillRef idx="3">
-            <a:schemeClr val="accent1"/>
-          </a:fillRef>
-          <a:effectRef idx="2">
-            <a:schemeClr val="accent1"/>
-          </a:effectRef>
-          <a:fontRef idx="minor">
-            <a:schemeClr val="lt1"/>
-          </a:fontRef>
-        </p:style>
-        <p:txBody>
-          <a:bodyPr rtlCol="0" anchor="ctr"/>
-          <a:lstStyle/>
-          <a:p>
-            <a:pPr algn="ctr"/>
-          </a:p>
-        </p:txBody>
-      </p:sp>
-      <p:sp>
-        <p:nvSpPr>
-          <p:cNvPr id="890" name="Oval 889"/>
-          <p:cNvSpPr/>
-          <p:nvPr/>
-        </p:nvSpPr>
-        <p:spPr>
-          <a:xfrm>
-            <a:off x="3025102" y="3601458"/>
-            <a:ext cx="92000" cy="92000"/>
-          </a:xfrm>
-          <a:prstGeom prst="ellipse">
-            <a:avLst/>
-          </a:prstGeom>
-          <a:noFill/>
-          <a:ln w="13970">
-            <a:solidFill>
-              <a:srgbClr val="D4A300"/>
-            </a:solidFill>
-          </a:ln>
-          <a:effectLst/>
-        </p:spPr>
-        <p:style>
-          <a:lnRef idx="1">
-            <a:schemeClr val="accent1"/>
-          </a:lnRef>
-          <a:fillRef idx="3">
-            <a:schemeClr val="accent1"/>
-          </a:fillRef>
-          <a:effectRef idx="2">
-            <a:schemeClr val="accent1"/>
-          </a:effectRef>
-          <a:fontRef idx="minor">
-            <a:schemeClr val="lt1"/>
-          </a:fontRef>
-        </p:style>
-        <p:txBody>
-          <a:bodyPr rtlCol="0" anchor="ctr"/>
-          <a:lstStyle/>
-          <a:p>
-            <a:pPr algn="ctr"/>
-          </a:p>
-        </p:txBody>
-      </p:sp>
-      <p:sp>
-        <p:nvSpPr>
-          <p:cNvPr id="891" name="Oval 890"/>
-          <p:cNvSpPr/>
-          <p:nvPr/>
-        </p:nvSpPr>
-        <p:spPr>
-          <a:xfrm>
-            <a:off x="3397725" y="3607411"/>
-            <a:ext cx="92000" cy="92000"/>
-          </a:xfrm>
-          <a:prstGeom prst="ellipse">
-            <a:avLst/>
-          </a:prstGeom>
-          <a:noFill/>
-          <a:ln w="13970">
-            <a:solidFill>
-              <a:srgbClr val="D4A300"/>
-            </a:solidFill>
-          </a:ln>
-          <a:effectLst/>
-        </p:spPr>
-        <p:style>
-          <a:lnRef idx="1">
-            <a:schemeClr val="accent1"/>
-          </a:lnRef>
-          <a:fillRef idx="3">
-            <a:schemeClr val="accent1"/>
-          </a:fillRef>
-          <a:effectRef idx="2">
-            <a:schemeClr val="accent1"/>
-          </a:effectRef>
-          <a:fontRef idx="minor">
-            <a:schemeClr val="lt1"/>
-          </a:fontRef>
-        </p:style>
-        <p:txBody>
-          <a:bodyPr rtlCol="0" anchor="ctr"/>
-          <a:lstStyle/>
-          <a:p>
-            <a:pPr algn="ctr"/>
-          </a:p>
-        </p:txBody>
-      </p:sp>
-      <p:sp>
-        <p:nvSpPr>
-          <p:cNvPr id="892" name="Oval 891"/>
-          <p:cNvSpPr/>
-          <p:nvPr/>
-        </p:nvSpPr>
-        <p:spPr>
-          <a:xfrm>
-            <a:off x="1877365" y="3608008"/>
-            <a:ext cx="92000" cy="92000"/>
-          </a:xfrm>
-          <a:prstGeom prst="ellipse">
-            <a:avLst/>
-          </a:prstGeom>
-          <a:noFill/>
-          <a:ln w="13970">
-            <a:solidFill>
-              <a:srgbClr val="D4A300"/>
-            </a:solidFill>
-          </a:ln>
-          <a:effectLst/>
-        </p:spPr>
-        <p:style>
-          <a:lnRef idx="1">
-            <a:schemeClr val="accent1"/>
-          </a:lnRef>
-          <a:fillRef idx="3">
-            <a:schemeClr val="accent1"/>
-          </a:fillRef>
-          <a:effectRef idx="2">
-            <a:schemeClr val="accent1"/>
-          </a:effectRef>
-          <a:fontRef idx="minor">
-            <a:schemeClr val="lt1"/>
-          </a:fontRef>
-        </p:style>
-        <p:txBody>
-          <a:bodyPr rtlCol="0" anchor="ctr"/>
-          <a:lstStyle/>
-          <a:p>
-            <a:pPr algn="ctr"/>
-          </a:p>
-        </p:txBody>
-      </p:sp>
-      <p:sp>
-        <p:nvSpPr>
-          <p:cNvPr id="893" name="Oval 892"/>
-          <p:cNvSpPr/>
-          <p:nvPr/>
-        </p:nvSpPr>
-        <p:spPr>
-          <a:xfrm>
-            <a:off x="3603208" y="3611657"/>
-            <a:ext cx="92000" cy="92000"/>
-          </a:xfrm>
-          <a:prstGeom prst="ellipse">
-            <a:avLst/>
-          </a:prstGeom>
-          <a:noFill/>
-          <a:ln w="13970">
-            <a:solidFill>
-              <a:srgbClr val="D4A300"/>
-            </a:solidFill>
-          </a:ln>
-          <a:effectLst/>
-        </p:spPr>
-        <p:style>
-          <a:lnRef idx="1">
-            <a:schemeClr val="accent1"/>
-          </a:lnRef>
-          <a:fillRef idx="3">
-            <a:schemeClr val="accent1"/>
-          </a:fillRef>
-          <a:effectRef idx="2">
-            <a:schemeClr val="accent1"/>
-          </a:effectRef>
-          <a:fontRef idx="minor">
-            <a:schemeClr val="lt1"/>
-          </a:fontRef>
-        </p:style>
-        <p:txBody>
-          <a:bodyPr rtlCol="0" anchor="ctr"/>
-          <a:lstStyle/>
-          <a:p>
-            <a:pPr algn="ctr"/>
-          </a:p>
-        </p:txBody>
-      </p:sp>
-      <p:sp>
-        <p:nvSpPr>
-          <p:cNvPr id="894" name="Oval 893"/>
-          <p:cNvSpPr/>
-          <p:nvPr/>
-        </p:nvSpPr>
-        <p:spPr>
-          <a:xfrm>
-            <a:off x="2982291" y="3613191"/>
-            <a:ext cx="92000" cy="92000"/>
-          </a:xfrm>
-          <a:prstGeom prst="ellipse">
-            <a:avLst/>
-          </a:prstGeom>
-          <a:noFill/>
-          <a:ln w="13970">
-            <a:solidFill>
-              <a:srgbClr val="D4A300"/>
-            </a:solidFill>
-          </a:ln>
-          <a:effectLst/>
-        </p:spPr>
-        <p:style>
-          <a:lnRef idx="1">
-            <a:schemeClr val="accent1"/>
-          </a:lnRef>
-          <a:fillRef idx="3">
-            <a:schemeClr val="accent1"/>
-          </a:fillRef>
-          <a:effectRef idx="2">
-            <a:schemeClr val="accent1"/>
-          </a:effectRef>
-          <a:fontRef idx="minor">
-            <a:schemeClr val="lt1"/>
-          </a:fontRef>
-        </p:style>
-        <p:txBody>
-          <a:bodyPr rtlCol="0" anchor="ctr"/>
-          <a:lstStyle/>
-          <a:p>
-            <a:pPr algn="ctr"/>
-          </a:p>
-        </p:txBody>
-      </p:sp>
-      <p:sp>
-        <p:nvSpPr>
-          <p:cNvPr id="895" name="Oval 894"/>
-          <p:cNvSpPr/>
-          <p:nvPr/>
-        </p:nvSpPr>
-        <p:spPr>
-          <a:xfrm>
-            <a:off x="3432293" y="3613820"/>
-            <a:ext cx="92000" cy="92000"/>
-          </a:xfrm>
-          <a:prstGeom prst="ellipse">
-            <a:avLst/>
-          </a:prstGeom>
-          <a:noFill/>
-          <a:ln w="13970">
-            <a:solidFill>
-              <a:srgbClr val="D4A300"/>
-            </a:solidFill>
-          </a:ln>
-          <a:effectLst/>
-        </p:spPr>
-        <p:style>
-          <a:lnRef idx="1">
-            <a:schemeClr val="accent1"/>
-          </a:lnRef>
-          <a:fillRef idx="3">
-            <a:schemeClr val="accent1"/>
-          </a:fillRef>
-          <a:effectRef idx="2">
-            <a:schemeClr val="accent1"/>
-          </a:effectRef>
-          <a:fontRef idx="minor">
-            <a:schemeClr val="lt1"/>
-          </a:fontRef>
-        </p:style>
-        <p:txBody>
-          <a:bodyPr rtlCol="0" anchor="ctr"/>
-          <a:lstStyle/>
-          <a:p>
-            <a:pPr algn="ctr"/>
-          </a:p>
-        </p:txBody>
-      </p:sp>
-      <p:sp>
-        <p:nvSpPr>
-          <p:cNvPr id="896" name="Oval 895"/>
-          <p:cNvSpPr/>
-          <p:nvPr/>
-        </p:nvSpPr>
-        <p:spPr>
-          <a:xfrm>
-            <a:off x="5166380" y="3616792"/>
-            <a:ext cx="92000" cy="92000"/>
-          </a:xfrm>
-          <a:prstGeom prst="ellipse">
-            <a:avLst/>
-          </a:prstGeom>
-          <a:noFill/>
-          <a:ln w="13970">
-            <a:solidFill>
-              <a:srgbClr val="D4A300"/>
-            </a:solidFill>
-          </a:ln>
-          <a:effectLst/>
-        </p:spPr>
-        <p:style>
-          <a:lnRef idx="1">
-            <a:schemeClr val="accent1"/>
-          </a:lnRef>
-          <a:fillRef idx="3">
-            <a:schemeClr val="accent1"/>
-          </a:fillRef>
-          <a:effectRef idx="2">
-            <a:schemeClr val="accent1"/>
-          </a:effectRef>
-          <a:fontRef idx="minor">
-            <a:schemeClr val="lt1"/>
-          </a:fontRef>
-        </p:style>
-        <p:txBody>
-          <a:bodyPr rtlCol="0" anchor="ctr"/>
-          <a:lstStyle/>
-          <a:p>
-            <a:pPr algn="ctr"/>
-          </a:p>
-        </p:txBody>
-      </p:sp>
-      <p:sp>
-        <p:nvSpPr>
-          <p:cNvPr id="897" name="Oval 896"/>
-          <p:cNvSpPr/>
-          <p:nvPr/>
-        </p:nvSpPr>
-        <p:spPr>
-          <a:xfrm>
-            <a:off x="2403020" y="3617166"/>
-            <a:ext cx="92000" cy="92000"/>
-          </a:xfrm>
-          <a:prstGeom prst="ellipse">
-            <a:avLst/>
-          </a:prstGeom>
-          <a:noFill/>
-          <a:ln w="13970">
-            <a:solidFill>
-              <a:srgbClr val="D4A300"/>
-            </a:solidFill>
-          </a:ln>
-          <a:effectLst/>
-        </p:spPr>
-        <p:style>
-          <a:lnRef idx="1">
-            <a:schemeClr val="accent1"/>
-          </a:lnRef>
-          <a:fillRef idx="3">
-            <a:schemeClr val="accent1"/>
-          </a:fillRef>
-          <a:effectRef idx="2">
-            <a:schemeClr val="accent1"/>
-          </a:effectRef>
-          <a:fontRef idx="minor">
-            <a:schemeClr val="lt1"/>
-          </a:fontRef>
-        </p:style>
-        <p:txBody>
-          <a:bodyPr rtlCol="0" anchor="ctr"/>
-          <a:lstStyle/>
-          <a:p>
-            <a:pPr algn="ctr"/>
-          </a:p>
-        </p:txBody>
-      </p:sp>
-      <p:sp>
-        <p:nvSpPr>
-          <p:cNvPr id="898" name="Oval 897"/>
-          <p:cNvSpPr/>
-          <p:nvPr/>
-        </p:nvSpPr>
-        <p:spPr>
-          <a:xfrm>
-            <a:off x="3838051" y="3622409"/>
-            <a:ext cx="92000" cy="92000"/>
-          </a:xfrm>
-          <a:prstGeom prst="ellipse">
-            <a:avLst/>
-          </a:prstGeom>
-          <a:noFill/>
-          <a:ln w="13970">
-            <a:solidFill>
-              <a:srgbClr val="D4A300"/>
-            </a:solidFill>
-          </a:ln>
-          <a:effectLst/>
-        </p:spPr>
-        <p:style>
-          <a:lnRef idx="1">
-            <a:schemeClr val="accent1"/>
-          </a:lnRef>
-          <a:fillRef idx="3">
-            <a:schemeClr val="accent1"/>
-          </a:fillRef>
-          <a:effectRef idx="2">
-            <a:schemeClr val="accent1"/>
-          </a:effectRef>
-          <a:fontRef idx="minor">
-            <a:schemeClr val="lt1"/>
-          </a:fontRef>
-        </p:style>
-        <p:txBody>
-          <a:bodyPr rtlCol="0" anchor="ctr"/>
-          <a:lstStyle/>
-          <a:p>
-            <a:pPr algn="ctr"/>
-          </a:p>
-        </p:txBody>
-      </p:sp>
-      <p:sp>
-        <p:nvSpPr>
-          <p:cNvPr id="899" name="Oval 898"/>
-          <p:cNvSpPr/>
-          <p:nvPr/>
-        </p:nvSpPr>
-        <p:spPr>
-          <a:xfrm>
-            <a:off x="3831413" y="3626069"/>
-            <a:ext cx="92000" cy="92000"/>
-          </a:xfrm>
-          <a:prstGeom prst="ellipse">
-            <a:avLst/>
-          </a:prstGeom>
-          <a:noFill/>
-          <a:ln w="13970">
-            <a:solidFill>
-              <a:srgbClr val="D4A300"/>
-            </a:solidFill>
-          </a:ln>
-          <a:effectLst/>
-        </p:spPr>
-        <p:style>
-          <a:lnRef idx="1">
-            <a:schemeClr val="accent1"/>
-          </a:lnRef>
-          <a:fillRef idx="3">
-            <a:schemeClr val="accent1"/>
-          </a:fillRef>
-          <a:effectRef idx="2">
-            <a:schemeClr val="accent1"/>
-          </a:effectRef>
-          <a:fontRef idx="minor">
-            <a:schemeClr val="lt1"/>
-          </a:fontRef>
-        </p:style>
-        <p:txBody>
-          <a:bodyPr rtlCol="0" anchor="ctr"/>
-          <a:lstStyle/>
-          <a:p>
-            <a:pPr algn="ctr"/>
-          </a:p>
-        </p:txBody>
-      </p:sp>
-      <p:sp>
-        <p:nvSpPr>
-          <p:cNvPr id="900" name="Oval 899"/>
-          <p:cNvSpPr/>
-          <p:nvPr/>
-        </p:nvSpPr>
-        <p:spPr>
-          <a:xfrm>
-            <a:off x="5209066" y="3626460"/>
-            <a:ext cx="92000" cy="92000"/>
-          </a:xfrm>
-          <a:prstGeom prst="ellipse">
-            <a:avLst/>
-          </a:prstGeom>
-          <a:noFill/>
-          <a:ln w="13970">
-            <a:solidFill>
-              <a:srgbClr val="D4A300"/>
-            </a:solidFill>
-          </a:ln>
-          <a:effectLst/>
-        </p:spPr>
-        <p:style>
-          <a:lnRef idx="1">
-            <a:schemeClr val="accent1"/>
-          </a:lnRef>
-          <a:fillRef idx="3">
-            <a:schemeClr val="accent1"/>
-          </a:fillRef>
-          <a:effectRef idx="2">
-            <a:schemeClr val="accent1"/>
-          </a:effectRef>
-          <a:fontRef idx="minor">
-            <a:schemeClr val="lt1"/>
-          </a:fontRef>
-        </p:style>
-        <p:txBody>
-          <a:bodyPr rtlCol="0" anchor="ctr"/>
-          <a:lstStyle/>
-          <a:p>
-            <a:pPr algn="ctr"/>
-          </a:p>
-        </p:txBody>
-      </p:sp>
-      <p:sp>
-        <p:nvSpPr>
-          <p:cNvPr id="901" name="Oval 900"/>
-          <p:cNvSpPr/>
-          <p:nvPr/>
-        </p:nvSpPr>
-        <p:spPr>
-          <a:xfrm>
-            <a:off x="6605665" y="3637303"/>
-            <a:ext cx="92000" cy="92000"/>
-          </a:xfrm>
-          <a:prstGeom prst="ellipse">
-            <a:avLst/>
-          </a:prstGeom>
-          <a:noFill/>
-          <a:ln w="13970">
-            <a:solidFill>
-              <a:srgbClr val="D4A300"/>
-            </a:solidFill>
-          </a:ln>
-          <a:effectLst/>
-        </p:spPr>
-        <p:style>
-          <a:lnRef idx="1">
-            <a:schemeClr val="accent1"/>
-          </a:lnRef>
-          <a:fillRef idx="3">
-            <a:schemeClr val="accent1"/>
-          </a:fillRef>
-          <a:effectRef idx="2">
-            <a:schemeClr val="accent1"/>
-          </a:effectRef>
-          <a:fontRef idx="minor">
-            <a:schemeClr val="lt1"/>
-          </a:fontRef>
-        </p:style>
-        <p:txBody>
-          <a:bodyPr rtlCol="0" anchor="ctr"/>
-          <a:lstStyle/>
-          <a:p>
-            <a:pPr algn="ctr"/>
-          </a:p>
-        </p:txBody>
-      </p:sp>
-      <p:sp>
-        <p:nvSpPr>
-          <p:cNvPr id="902" name="Oval 901"/>
-          <p:cNvSpPr/>
-          <p:nvPr/>
-        </p:nvSpPr>
-        <p:spPr>
-          <a:xfrm>
-            <a:off x="5571399" y="3638592"/>
-            <a:ext cx="92000" cy="92000"/>
-          </a:xfrm>
-          <a:prstGeom prst="ellipse">
-            <a:avLst/>
-          </a:prstGeom>
-          <a:noFill/>
-          <a:ln w="13970">
-            <a:solidFill>
-              <a:srgbClr val="D4A300"/>
-            </a:solidFill>
-          </a:ln>
-          <a:effectLst/>
-        </p:spPr>
-        <p:style>
-          <a:lnRef idx="1">
-            <a:schemeClr val="accent1"/>
-          </a:lnRef>
-          <a:fillRef idx="3">
-            <a:schemeClr val="accent1"/>
-          </a:fillRef>
-          <a:effectRef idx="2">
-            <a:schemeClr val="accent1"/>
-          </a:effectRef>
-          <a:fontRef idx="minor">
-            <a:schemeClr val="lt1"/>
-          </a:fontRef>
-        </p:style>
-        <p:txBody>
-          <a:bodyPr rtlCol="0" anchor="ctr"/>
-          <a:lstStyle/>
-          <a:p>
-            <a:pPr algn="ctr"/>
-          </a:p>
-        </p:txBody>
-      </p:sp>
-      <p:sp>
-        <p:nvSpPr>
-          <p:cNvPr id="903" name="Oval 902"/>
-          <p:cNvSpPr/>
-          <p:nvPr/>
-        </p:nvSpPr>
-        <p:spPr>
-          <a:xfrm>
-            <a:off x="3703297" y="3641073"/>
-            <a:ext cx="92000" cy="92000"/>
-          </a:xfrm>
-          <a:prstGeom prst="ellipse">
-            <a:avLst/>
-          </a:prstGeom>
-          <a:noFill/>
-          <a:ln w="13970">
-            <a:solidFill>
-              <a:srgbClr val="D4A300"/>
-            </a:solidFill>
-          </a:ln>
-          <a:effectLst/>
-        </p:spPr>
-        <p:style>
-          <a:lnRef idx="1">
-            <a:schemeClr val="accent1"/>
-          </a:lnRef>
-          <a:fillRef idx="3">
-            <a:schemeClr val="accent1"/>
-          </a:fillRef>
-          <a:effectRef idx="2">
-            <a:schemeClr val="accent1"/>
-          </a:effectRef>
-          <a:fontRef idx="minor">
-            <a:schemeClr val="lt1"/>
-          </a:fontRef>
-        </p:style>
-        <p:txBody>
-          <a:bodyPr rtlCol="0" anchor="ctr"/>
-          <a:lstStyle/>
-          <a:p>
-            <a:pPr algn="ctr"/>
-          </a:p>
-        </p:txBody>
-      </p:sp>
-      <p:sp>
-        <p:nvSpPr>
-          <p:cNvPr id="904" name="Oval 903"/>
-          <p:cNvSpPr/>
-          <p:nvPr/>
-        </p:nvSpPr>
-        <p:spPr>
-          <a:xfrm>
-            <a:off x="5292479" y="3641132"/>
-            <a:ext cx="92000" cy="92000"/>
-          </a:xfrm>
-          <a:prstGeom prst="ellipse">
-            <a:avLst/>
-          </a:prstGeom>
-          <a:noFill/>
-          <a:ln w="13970">
-            <a:solidFill>
-              <a:srgbClr val="D4A300"/>
-            </a:solidFill>
-          </a:ln>
-          <a:effectLst/>
-        </p:spPr>
-        <p:style>
-          <a:lnRef idx="1">
-            <a:schemeClr val="accent1"/>
-          </a:lnRef>
-          <a:fillRef idx="3">
-            <a:schemeClr val="accent1"/>
-          </a:fillRef>
-          <a:effectRef idx="2">
-            <a:schemeClr val="accent1"/>
-          </a:effectRef>
-          <a:fontRef idx="minor">
-            <a:schemeClr val="lt1"/>
-          </a:fontRef>
-        </p:style>
-        <p:txBody>
-          <a:bodyPr rtlCol="0" anchor="ctr"/>
-          <a:lstStyle/>
-          <a:p>
-            <a:pPr algn="ctr"/>
-          </a:p>
-        </p:txBody>
-      </p:sp>
-      <p:sp>
-        <p:nvSpPr>
-          <p:cNvPr id="905" name="Oval 904"/>
-          <p:cNvSpPr/>
-          <p:nvPr/>
-        </p:nvSpPr>
-        <p:spPr>
-          <a:xfrm>
-            <a:off x="7689472" y="3642400"/>
-            <a:ext cx="92000" cy="92000"/>
-          </a:xfrm>
-          <a:prstGeom prst="ellipse">
-            <a:avLst/>
-          </a:prstGeom>
-          <a:noFill/>
-          <a:ln w="13970">
-            <a:solidFill>
-              <a:srgbClr val="D4A300"/>
-            </a:solidFill>
-          </a:ln>
-          <a:effectLst/>
-        </p:spPr>
-        <p:style>
-          <a:lnRef idx="1">
-            <a:schemeClr val="accent1"/>
-          </a:lnRef>
-          <a:fillRef idx="3">
-            <a:schemeClr val="accent1"/>
-          </a:fillRef>
-          <a:effectRef idx="2">
-            <a:schemeClr val="accent1"/>
-          </a:effectRef>
-          <a:fontRef idx="minor">
-            <a:schemeClr val="lt1"/>
-          </a:fontRef>
-        </p:style>
-        <p:txBody>
-          <a:bodyPr rtlCol="0" anchor="ctr"/>
-          <a:lstStyle/>
-          <a:p>
-            <a:pPr algn="ctr"/>
-          </a:p>
-        </p:txBody>
-      </p:sp>
-      <p:sp>
-        <p:nvSpPr>
-          <p:cNvPr id="906" name="Oval 905"/>
-          <p:cNvSpPr/>
-          <p:nvPr/>
-        </p:nvSpPr>
-        <p:spPr>
-          <a:xfrm>
-            <a:off x="3568512" y="3645078"/>
-            <a:ext cx="92000" cy="92000"/>
-          </a:xfrm>
-          <a:prstGeom prst="ellipse">
-            <a:avLst/>
-          </a:prstGeom>
-          <a:noFill/>
-          <a:ln w="13970">
-            <a:solidFill>
-              <a:srgbClr val="D4A300"/>
-            </a:solidFill>
-          </a:ln>
-          <a:effectLst/>
-        </p:spPr>
-        <p:style>
-          <a:lnRef idx="1">
-            <a:schemeClr val="accent1"/>
-          </a:lnRef>
-          <a:fillRef idx="3">
-            <a:schemeClr val="accent1"/>
-          </a:fillRef>
-          <a:effectRef idx="2">
-            <a:schemeClr val="accent1"/>
-          </a:effectRef>
-          <a:fontRef idx="minor">
-            <a:schemeClr val="lt1"/>
-          </a:fontRef>
-        </p:style>
-        <p:txBody>
-          <a:bodyPr rtlCol="0" anchor="ctr"/>
-          <a:lstStyle/>
-          <a:p>
-            <a:pPr algn="ctr"/>
-          </a:p>
-        </p:txBody>
-      </p:sp>
-      <p:sp>
-        <p:nvSpPr>
-          <p:cNvPr id="907" name="Oval 906"/>
-          <p:cNvSpPr/>
-          <p:nvPr/>
-        </p:nvSpPr>
-        <p:spPr>
-          <a:xfrm>
-            <a:off x="5179330" y="3646571"/>
-            <a:ext cx="92000" cy="92000"/>
-          </a:xfrm>
-          <a:prstGeom prst="ellipse">
-            <a:avLst/>
-          </a:prstGeom>
-          <a:noFill/>
-          <a:ln w="13970">
-            <a:solidFill>
-              <a:srgbClr val="D4A300"/>
-            </a:solidFill>
-          </a:ln>
-          <a:effectLst/>
-        </p:spPr>
-        <p:style>
-          <a:lnRef idx="1">
-            <a:schemeClr val="accent1"/>
-          </a:lnRef>
-          <a:fillRef idx="3">
-            <a:schemeClr val="accent1"/>
-          </a:fillRef>
-          <a:effectRef idx="2">
-            <a:schemeClr val="accent1"/>
-          </a:effectRef>
-          <a:fontRef idx="minor">
-            <a:schemeClr val="lt1"/>
-          </a:fontRef>
-        </p:style>
-        <p:txBody>
-          <a:bodyPr rtlCol="0" anchor="ctr"/>
-          <a:lstStyle/>
-          <a:p>
-            <a:pPr algn="ctr"/>
-          </a:p>
-        </p:txBody>
-      </p:sp>
-      <p:sp>
-        <p:nvSpPr>
-          <p:cNvPr id="908" name="Oval 907"/>
-          <p:cNvSpPr/>
-          <p:nvPr/>
-        </p:nvSpPr>
-        <p:spPr>
-          <a:xfrm>
-            <a:off x="5810913" y="3648768"/>
-            <a:ext cx="92000" cy="92000"/>
-          </a:xfrm>
-          <a:prstGeom prst="ellipse">
-            <a:avLst/>
-          </a:prstGeom>
-          <a:noFill/>
-          <a:ln w="13970">
-            <a:solidFill>
-              <a:srgbClr val="D4A300"/>
-            </a:solidFill>
-          </a:ln>
-          <a:effectLst/>
-        </p:spPr>
-        <p:style>
-          <a:lnRef idx="1">
-            <a:schemeClr val="accent1"/>
-          </a:lnRef>
-          <a:fillRef idx="3">
-            <a:schemeClr val="accent1"/>
-          </a:fillRef>
-          <a:effectRef idx="2">
-            <a:schemeClr val="accent1"/>
-          </a:effectRef>
-          <a:fontRef idx="minor">
-            <a:schemeClr val="lt1"/>
-          </a:fontRef>
-        </p:style>
-        <p:txBody>
-          <a:bodyPr rtlCol="0" anchor="ctr"/>
-          <a:lstStyle/>
-          <a:p>
-            <a:pPr algn="ctr"/>
-          </a:p>
-        </p:txBody>
-      </p:sp>
-      <p:sp>
-        <p:nvSpPr>
-          <p:cNvPr id="909" name="TextBox 908"/>
+          <p:cNvPr id="777" name="TextBox 776"/>
           <p:cNvSpPr txBox="1"/>
           <p:nvPr/>
         </p:nvSpPr>
@@ -43104,7 +37296,7 @@
             <a:r>
               <a:rPr sz="700" b="1" i="0">
                 <a:solidFill>
-                  <a:srgbClr val="C11456"/>
+                  <a:srgbClr val="118AB2"/>
                 </a:solidFill>
                 <a:latin typeface="Arial"/>
               </a:rPr>
@@ -43115,7 +37307,7 @@
       </p:sp>
       <p:sp>
         <p:nvSpPr>
-          <p:cNvPr id="910" name="TextBox 909"/>
+          <p:cNvPr id="778" name="TextBox 777"/>
           <p:cNvSpPr txBox="1"/>
           <p:nvPr/>
         </p:nvSpPr>
@@ -43140,7 +37332,7 @@
             <a:r>
               <a:rPr sz="700" b="1" i="0">
                 <a:solidFill>
-                  <a:srgbClr val="B03219"/>
+                  <a:srgbClr val="5A8261"/>
                 </a:solidFill>
                 <a:latin typeface="Arial"/>
               </a:rPr>
@@ -43151,7 +37343,7 @@
       </p:sp>
       <p:sp>
         <p:nvSpPr>
-          <p:cNvPr id="911" name="TextBox 910"/>
+          <p:cNvPr id="779" name="TextBox 778"/>
           <p:cNvSpPr txBox="1"/>
           <p:nvPr/>
         </p:nvSpPr>
@@ -43176,7 +37368,7 @@
             <a:r>
               <a:rPr sz="700" b="1" i="0">
                 <a:solidFill>
-                  <a:srgbClr val="00567D"/>
+                  <a:srgbClr val="A24E78"/>
                 </a:solidFill>
                 <a:latin typeface="Arial"/>
               </a:rPr>
@@ -43187,7 +37379,7 @@
       </p:sp>
       <p:sp>
         <p:nvSpPr>
-          <p:cNvPr id="912" name="TextBox 911"/>
+          <p:cNvPr id="780" name="TextBox 779"/>
           <p:cNvSpPr txBox="1"/>
           <p:nvPr/>
         </p:nvSpPr>
@@ -43212,7 +37404,7 @@
             <a:r>
               <a:rPr sz="700" b="1" i="0">
                 <a:solidFill>
-                  <a:srgbClr val="B03219"/>
+                  <a:srgbClr val="5A8261"/>
                 </a:solidFill>
                 <a:latin typeface="Arial"/>
               </a:rPr>
@@ -43223,7 +37415,7 @@
       </p:sp>
       <p:sp>
         <p:nvSpPr>
-          <p:cNvPr id="913" name="TextBox 912"/>
+          <p:cNvPr id="781" name="TextBox 780"/>
           <p:cNvSpPr txBox="1"/>
           <p:nvPr/>
         </p:nvSpPr>
@@ -43248,7 +37440,7 @@
             <a:r>
               <a:rPr sz="700" b="1" i="0">
                 <a:solidFill>
-                  <a:srgbClr val="00567D"/>
+                  <a:srgbClr val="A24E78"/>
                 </a:solidFill>
                 <a:latin typeface="Arial"/>
               </a:rPr>
@@ -43259,7 +37451,7 @@
       </p:sp>
       <p:sp>
         <p:nvSpPr>
-          <p:cNvPr id="914" name="TextBox 913"/>
+          <p:cNvPr id="782" name="TextBox 781"/>
           <p:cNvSpPr txBox="1"/>
           <p:nvPr/>
         </p:nvSpPr>
@@ -43284,7 +37476,7 @@
             <a:r>
               <a:rPr sz="700" b="1" i="0">
                 <a:solidFill>
-                  <a:srgbClr val="C11456"/>
+                  <a:srgbClr val="118AB2"/>
                 </a:solidFill>
                 <a:latin typeface="Arial"/>
               </a:rPr>
@@ -43295,7 +37487,7 @@
       </p:sp>
       <p:sp>
         <p:nvSpPr>
-          <p:cNvPr id="915" name="TextBox 914"/>
+          <p:cNvPr id="783" name="TextBox 782"/>
           <p:cNvSpPr txBox="1"/>
           <p:nvPr/>
         </p:nvSpPr>
@@ -43320,7 +37512,7 @@
             <a:r>
               <a:rPr sz="700" b="1" i="0">
                 <a:solidFill>
-                  <a:srgbClr val="B03219"/>
+                  <a:srgbClr val="5A8261"/>
                 </a:solidFill>
                 <a:latin typeface="Arial"/>
               </a:rPr>
@@ -43331,7 +37523,7 @@
       </p:sp>
       <p:sp>
         <p:nvSpPr>
-          <p:cNvPr id="916" name="TextBox 915"/>
+          <p:cNvPr id="784" name="TextBox 783"/>
           <p:cNvSpPr txBox="1"/>
           <p:nvPr/>
         </p:nvSpPr>
@@ -43356,7 +37548,7 @@
             <a:r>
               <a:rPr sz="700" b="1" i="0">
                 <a:solidFill>
-                  <a:srgbClr val="B03219"/>
+                  <a:srgbClr val="5A8261"/>
                 </a:solidFill>
                 <a:latin typeface="Arial"/>
               </a:rPr>
@@ -43367,7 +37559,7 @@
       </p:sp>
       <p:sp>
         <p:nvSpPr>
-          <p:cNvPr id="917" name="TextBox 916"/>
+          <p:cNvPr id="785" name="TextBox 784"/>
           <p:cNvSpPr txBox="1"/>
           <p:nvPr/>
         </p:nvSpPr>
@@ -43392,7 +37584,7 @@
             <a:r>
               <a:rPr sz="700" b="1" i="0">
                 <a:solidFill>
-                  <a:srgbClr val="B03219"/>
+                  <a:srgbClr val="5A8261"/>
                 </a:solidFill>
                 <a:latin typeface="Arial"/>
               </a:rPr>
@@ -43403,7 +37595,7 @@
       </p:sp>
       <p:sp>
         <p:nvSpPr>
-          <p:cNvPr id="918" name="TextBox 917"/>
+          <p:cNvPr id="786" name="TextBox 785"/>
           <p:cNvSpPr txBox="1"/>
           <p:nvPr/>
         </p:nvSpPr>
@@ -43428,7 +37620,7 @@
             <a:r>
               <a:rPr sz="700" b="1" i="0">
                 <a:solidFill>
-                  <a:srgbClr val="C11456"/>
+                  <a:srgbClr val="118AB2"/>
                 </a:solidFill>
                 <a:latin typeface="Arial"/>
               </a:rPr>
@@ -43439,7 +37631,7 @@
       </p:sp>
       <p:sp>
         <p:nvSpPr>
-          <p:cNvPr id="919" name="TextBox 918"/>
+          <p:cNvPr id="787" name="TextBox 786"/>
           <p:cNvSpPr txBox="1"/>
           <p:nvPr/>
         </p:nvSpPr>
@@ -43464,7 +37656,7 @@
             <a:r>
               <a:rPr sz="700" b="1" i="0">
                 <a:solidFill>
-                  <a:srgbClr val="C11456"/>
+                  <a:srgbClr val="118AB2"/>
                 </a:solidFill>
                 <a:latin typeface="Arial"/>
               </a:rPr>
@@ -43475,7 +37667,7 @@
       </p:sp>
       <p:sp>
         <p:nvSpPr>
-          <p:cNvPr id="920" name="TextBox 919"/>
+          <p:cNvPr id="788" name="TextBox 787"/>
           <p:cNvSpPr txBox="1"/>
           <p:nvPr/>
         </p:nvSpPr>
@@ -43500,7 +37692,7 @@
             <a:r>
               <a:rPr sz="700" b="1" i="0">
                 <a:solidFill>
-                  <a:srgbClr val="C11456"/>
+                  <a:srgbClr val="118AB2"/>
                 </a:solidFill>
                 <a:latin typeface="Arial"/>
               </a:rPr>
@@ -43511,7 +37703,7 @@
       </p:sp>
       <p:sp>
         <p:nvSpPr>
-          <p:cNvPr id="921" name="TextBox 920"/>
+          <p:cNvPr id="789" name="TextBox 788"/>
           <p:cNvSpPr txBox="1"/>
           <p:nvPr/>
         </p:nvSpPr>
@@ -43536,7 +37728,7 @@
             <a:r>
               <a:rPr sz="700" b="1" i="0">
                 <a:solidFill>
-                  <a:srgbClr val="C11456"/>
+                  <a:srgbClr val="118AB2"/>
                 </a:solidFill>
                 <a:latin typeface="Arial"/>
               </a:rPr>
@@ -43547,7 +37739,7 @@
       </p:sp>
       <p:sp>
         <p:nvSpPr>
-          <p:cNvPr id="922" name="TextBox 921"/>
+          <p:cNvPr id="790" name="TextBox 789"/>
           <p:cNvSpPr txBox="1"/>
           <p:nvPr/>
         </p:nvSpPr>
@@ -43572,7 +37764,7 @@
             <a:r>
               <a:rPr sz="700" b="1" i="0">
                 <a:solidFill>
-                  <a:srgbClr val="C11456"/>
+                  <a:srgbClr val="118AB2"/>
                 </a:solidFill>
                 <a:latin typeface="Arial"/>
               </a:rPr>
@@ -43583,7 +37775,7 @@
       </p:sp>
       <p:sp>
         <p:nvSpPr>
-          <p:cNvPr id="923" name="TextBox 922"/>
+          <p:cNvPr id="791" name="TextBox 790"/>
           <p:cNvSpPr txBox="1"/>
           <p:nvPr/>
         </p:nvSpPr>
@@ -43608,7 +37800,7 @@
             <a:r>
               <a:rPr sz="700" b="1" i="0">
                 <a:solidFill>
-                  <a:srgbClr val="00567D"/>
+                  <a:srgbClr val="A24E78"/>
                 </a:solidFill>
                 <a:latin typeface="Arial"/>
               </a:rPr>
@@ -43619,7 +37811,7 @@
       </p:sp>
       <p:sp>
         <p:nvSpPr>
-          <p:cNvPr id="924" name="TextBox 923"/>
+          <p:cNvPr id="792" name="TextBox 791"/>
           <p:cNvSpPr txBox="1"/>
           <p:nvPr/>
         </p:nvSpPr>
@@ -43655,7 +37847,7 @@
       </p:sp>
       <p:sp>
         <p:nvSpPr>
-          <p:cNvPr id="925" name="TextBox 924"/>
+          <p:cNvPr id="793" name="TextBox 792"/>
           <p:cNvSpPr txBox="1"/>
           <p:nvPr/>
         </p:nvSpPr>
@@ -43691,7 +37883,7 @@
       </p:sp>
       <p:sp>
         <p:nvSpPr>
-          <p:cNvPr id="926" name="TextBox 925"/>
+          <p:cNvPr id="794" name="TextBox 793"/>
           <p:cNvSpPr txBox="1"/>
           <p:nvPr/>
         </p:nvSpPr>
@@ -43727,7 +37919,7 @@
       </p:sp>
       <p:sp>
         <p:nvSpPr>
-          <p:cNvPr id="927" name="TextBox 926"/>
+          <p:cNvPr id="795" name="TextBox 794"/>
           <p:cNvSpPr txBox="1"/>
           <p:nvPr/>
         </p:nvSpPr>
@@ -43763,7 +37955,7 @@
       </p:sp>
       <p:sp>
         <p:nvSpPr>
-          <p:cNvPr id="928" name="TextBox 927"/>
+          <p:cNvPr id="796" name="TextBox 795"/>
           <p:cNvSpPr txBox="1"/>
           <p:nvPr/>
         </p:nvSpPr>
@@ -43799,7 +37991,7 @@
       </p:sp>
       <p:sp>
         <p:nvSpPr>
-          <p:cNvPr id="929" name="TextBox 928"/>
+          <p:cNvPr id="797" name="TextBox 796"/>
           <p:cNvSpPr txBox="1"/>
           <p:nvPr/>
         </p:nvSpPr>
@@ -43835,7 +38027,7 @@
       </p:sp>
       <p:sp>
         <p:nvSpPr>
-          <p:cNvPr id="930" name="TextBox 929"/>
+          <p:cNvPr id="798" name="TextBox 797"/>
           <p:cNvSpPr txBox="1"/>
           <p:nvPr/>
         </p:nvSpPr>
@@ -43871,7 +38063,7 @@
       </p:sp>
       <p:sp>
         <p:nvSpPr>
-          <p:cNvPr id="931" name="TextBox 930"/>
+          <p:cNvPr id="799" name="TextBox 798"/>
           <p:cNvSpPr txBox="1"/>
           <p:nvPr/>
         </p:nvSpPr>
@@ -43907,7 +38099,7 @@
       </p:sp>
       <p:sp>
         <p:nvSpPr>
-          <p:cNvPr id="932" name="TextBox 931"/>
+          <p:cNvPr id="800" name="TextBox 799"/>
           <p:cNvSpPr txBox="1"/>
           <p:nvPr/>
         </p:nvSpPr>
@@ -43943,7 +38135,7 @@
       </p:sp>
       <p:sp>
         <p:nvSpPr>
-          <p:cNvPr id="933" name="TextBox 932"/>
+          <p:cNvPr id="801" name="TextBox 800"/>
           <p:cNvSpPr txBox="1"/>
           <p:nvPr/>
         </p:nvSpPr>
@@ -43979,7 +38171,7 @@
       </p:sp>
       <p:cxnSp>
         <p:nvCxnSpPr>
-          <p:cNvPr id="934" name="Connector 933"/>
+          <p:cNvPr id="802" name="Connector 801"/>
           <p:cNvCxnSpPr/>
           <p:nvPr/>
         </p:nvCxnSpPr>
@@ -44015,7 +38207,7 @@
       </p:cxnSp>
       <p:sp>
         <p:nvSpPr>
-          <p:cNvPr id="935" name="Right Triangle 934"/>
+          <p:cNvPr id="803" name="Right Triangle 802"/>
           <p:cNvSpPr/>
           <p:nvPr/>
         </p:nvSpPr>
@@ -44059,7 +38251,7 @@
       </p:sp>
       <p:sp>
         <p:nvSpPr>
-          <p:cNvPr id="936" name="TextBox 935"/>
+          <p:cNvPr id="804" name="TextBox 803"/>
           <p:cNvSpPr txBox="1"/>
           <p:nvPr/>
         </p:nvSpPr>
@@ -44095,7 +38287,7 @@
       </p:sp>
       <p:cxnSp>
         <p:nvCxnSpPr>
-          <p:cNvPr id="937" name="Connector 936"/>
+          <p:cNvPr id="805" name="Connector 804"/>
           <p:cNvCxnSpPr/>
           <p:nvPr/>
         </p:nvCxnSpPr>
@@ -44131,7 +38323,7 @@
       </p:cxnSp>
       <p:sp>
         <p:nvSpPr>
-          <p:cNvPr id="938" name="Right Triangle 937"/>
+          <p:cNvPr id="806" name="Right Triangle 805"/>
           <p:cNvSpPr/>
           <p:nvPr/>
         </p:nvSpPr>
@@ -44175,7 +38367,7 @@
       </p:sp>
       <p:sp>
         <p:nvSpPr>
-          <p:cNvPr id="939" name="TextBox 938"/>
+          <p:cNvPr id="807" name="TextBox 806"/>
           <p:cNvSpPr txBox="1"/>
           <p:nvPr/>
         </p:nvSpPr>
@@ -44211,7 +38403,7 @@
       </p:sp>
       <p:sp>
         <p:nvSpPr>
-          <p:cNvPr id="940" name="Oval 939"/>
+          <p:cNvPr id="808" name="Oval 807"/>
           <p:cNvSpPr/>
           <p:nvPr/>
         </p:nvSpPr>
@@ -44224,7 +38416,7 @@
             <a:avLst/>
           </a:prstGeom>
           <a:solidFill>
-            <a:srgbClr val="057A64"/>
+            <a:srgbClr val="E39A1E"/>
           </a:solidFill>
           <a:ln w="3810">
             <a:solidFill>
@@ -44257,7 +38449,7 @@
       </p:sp>
       <p:sp>
         <p:nvSpPr>
-          <p:cNvPr id="941" name="TextBox 940"/>
+          <p:cNvPr id="809" name="TextBox 808"/>
           <p:cNvSpPr txBox="1"/>
           <p:nvPr/>
         </p:nvSpPr>
@@ -44293,7 +38485,7 @@
       </p:sp>
       <p:sp>
         <p:nvSpPr>
-          <p:cNvPr id="942" name="Oval 941"/>
+          <p:cNvPr id="810" name="Oval 809"/>
           <p:cNvSpPr/>
           <p:nvPr/>
         </p:nvSpPr>
@@ -44306,7 +38498,7 @@
             <a:avLst/>
           </a:prstGeom>
           <a:solidFill>
-            <a:srgbClr val="00567D"/>
+            <a:srgbClr val="A24E78"/>
           </a:solidFill>
           <a:ln w="3810">
             <a:solidFill>
@@ -44339,7 +38531,7 @@
       </p:sp>
       <p:sp>
         <p:nvSpPr>
-          <p:cNvPr id="943" name="TextBox 942"/>
+          <p:cNvPr id="811" name="TextBox 810"/>
           <p:cNvSpPr txBox="1"/>
           <p:nvPr/>
         </p:nvSpPr>
@@ -44375,7 +38567,7 @@
       </p:sp>
       <p:sp>
         <p:nvSpPr>
-          <p:cNvPr id="944" name="Oval 943"/>
+          <p:cNvPr id="812" name="Oval 811"/>
           <p:cNvSpPr/>
           <p:nvPr/>
         </p:nvSpPr>
@@ -44388,7 +38580,7 @@
             <a:avLst/>
           </a:prstGeom>
           <a:solidFill>
-            <a:srgbClr val="C11456"/>
+            <a:srgbClr val="118AB2"/>
           </a:solidFill>
           <a:ln w="3810">
             <a:solidFill>
@@ -44421,7 +38613,7 @@
       </p:sp>
       <p:sp>
         <p:nvSpPr>
-          <p:cNvPr id="945" name="TextBox 944"/>
+          <p:cNvPr id="813" name="TextBox 812"/>
           <p:cNvSpPr txBox="1"/>
           <p:nvPr/>
         </p:nvSpPr>
@@ -44457,7 +38649,7 @@
       </p:sp>
       <p:sp>
         <p:nvSpPr>
-          <p:cNvPr id="946" name="Oval 945"/>
+          <p:cNvPr id="814" name="Oval 813"/>
           <p:cNvSpPr/>
           <p:nvPr/>
         </p:nvSpPr>
@@ -44470,7 +38662,7 @@
             <a:avLst/>
           </a:prstGeom>
           <a:solidFill>
-            <a:srgbClr val="B03219"/>
+            <a:srgbClr val="5A8261"/>
           </a:solidFill>
           <a:ln w="3810">
             <a:solidFill>
@@ -44503,7 +38695,7 @@
       </p:sp>
       <p:sp>
         <p:nvSpPr>
-          <p:cNvPr id="947" name="TextBox 946"/>
+          <p:cNvPr id="815" name="TextBox 814"/>
           <p:cNvSpPr txBox="1"/>
           <p:nvPr/>
         </p:nvSpPr>
@@ -44539,7 +38731,7 @@
       </p:sp>
       <p:sp>
         <p:nvSpPr>
-          <p:cNvPr id="948" name="Oval 947"/>
+          <p:cNvPr id="816" name="Oval 815"/>
           <p:cNvSpPr/>
           <p:nvPr/>
         </p:nvSpPr>
@@ -44585,7 +38777,7 @@
       </p:sp>
       <p:sp>
         <p:nvSpPr>
-          <p:cNvPr id="949" name="TextBox 948"/>
+          <p:cNvPr id="817" name="TextBox 816"/>
           <p:cNvSpPr txBox="1"/>
           <p:nvPr/>
         </p:nvSpPr>
@@ -44621,7 +38813,7 @@
       </p:sp>
       <p:sp>
         <p:nvSpPr>
-          <p:cNvPr id="950" name="Oval 949"/>
+          <p:cNvPr id="818" name="Oval 817"/>
           <p:cNvSpPr/>
           <p:nvPr/>
         </p:nvSpPr>
@@ -44667,7 +38859,7 @@
       </p:sp>
       <p:sp>
         <p:nvSpPr>
-          <p:cNvPr id="951" name="TextBox 950"/>
+          <p:cNvPr id="819" name="TextBox 818"/>
           <p:cNvSpPr txBox="1"/>
           <p:nvPr/>
         </p:nvSpPr>
@@ -44703,93 +38895,13 @@
       </p:sp>
       <p:sp>
         <p:nvSpPr>
-          <p:cNvPr id="952" name="Oval 951"/>
-          <p:cNvSpPr/>
-          <p:nvPr/>
-        </p:nvSpPr>
-        <p:spPr>
-          <a:xfrm>
-            <a:off x="1295880" y="5803872"/>
-            <a:ext cx="60000" cy="60000"/>
-          </a:xfrm>
-          <a:prstGeom prst="ellipse">
-            <a:avLst/>
-          </a:prstGeom>
-          <a:noFill/>
-          <a:ln w="12700">
-            <a:solidFill>
-              <a:srgbClr val="D4A300"/>
-            </a:solidFill>
-          </a:ln>
-          <a:effectLst/>
-        </p:spPr>
-        <p:style>
-          <a:lnRef idx="1">
-            <a:schemeClr val="accent1"/>
-          </a:lnRef>
-          <a:fillRef idx="3">
-            <a:schemeClr val="accent1"/>
-          </a:fillRef>
-          <a:effectRef idx="2">
-            <a:schemeClr val="accent1"/>
-          </a:effectRef>
-          <a:fontRef idx="minor">
-            <a:schemeClr val="lt1"/>
-          </a:fontRef>
-        </p:style>
-        <p:txBody>
-          <a:bodyPr rtlCol="0" anchor="ctr"/>
-          <a:lstStyle/>
-          <a:p>
-            <a:pPr algn="ctr"/>
-          </a:p>
-        </p:txBody>
-      </p:sp>
-      <p:sp>
-        <p:nvSpPr>
-          <p:cNvPr id="953" name="TextBox 952"/>
-          <p:cNvSpPr txBox="1"/>
-          <p:nvPr/>
-        </p:nvSpPr>
-        <p:spPr>
-          <a:xfrm>
-            <a:off x="1463040" y="5751576"/>
-            <a:ext cx="1950720" cy="164592"/>
-          </a:xfrm>
-          <a:prstGeom prst="rect">
-            <a:avLst/>
-          </a:prstGeom>
-          <a:noFill/>
-          <a:effectLst/>
-        </p:spPr>
-        <p:txBody>
-          <a:bodyPr wrap="square" lIns="0" rIns="0" tIns="0" bIns="0" anchor="ctr">
-            <a:spAutoFit/>
-          </a:bodyPr>
-          <a:lstStyle/>
-          <a:p>
-            <a:pPr algn="l"/>
-            <a:r>
-              <a:rPr sz="750" b="0" i="0">
-                <a:solidFill>
-                  <a:srgbClr val="0E2A47"/>
-                </a:solidFill>
-                <a:latin typeface="Arial"/>
-              </a:rPr>
-              <a:t>|log₂ FC| ≥ 1  (n = 132)</a:t>
-            </a:r>
-          </a:p>
-        </p:txBody>
-      </p:sp>
-      <p:sp>
-        <p:nvSpPr>
-          <p:cNvPr id="954" name="Oval 953"/>
-          <p:cNvSpPr/>
-          <p:nvPr/>
-        </p:nvSpPr>
-        <p:spPr>
-          <a:xfrm>
-            <a:off x="3532920" y="5815872"/>
+          <p:cNvPr id="820" name="Oval 819"/>
+          <p:cNvSpPr/>
+          <p:nvPr/>
+        </p:nvSpPr>
+        <p:spPr>
+          <a:xfrm>
+            <a:off x="1307880" y="5815872"/>
             <a:ext cx="36000" cy="36000"/>
           </a:xfrm>
           <a:prstGeom prst="ellipse">
@@ -44829,13 +38941,13 @@
       </p:sp>
       <p:sp>
         <p:nvSpPr>
-          <p:cNvPr id="955" name="TextBox 954"/>
+          <p:cNvPr id="821" name="TextBox 820"/>
           <p:cNvSpPr txBox="1"/>
           <p:nvPr/>
         </p:nvSpPr>
         <p:spPr>
           <a:xfrm>
-            <a:off x="3688080" y="5751576"/>
+            <a:off x="1463040" y="5751576"/>
             <a:ext cx="1950720" cy="164592"/>
           </a:xfrm>
           <a:prstGeom prst="rect">

--- a/260418_add/ppt/Fig4D_volcano_gene_pathwaycat_native_editable.pptx
+++ b/260418_add/ppt/Fig4D_volcano_gene_pathwaycat_native_editable.pptx
@@ -26796,7 +26796,7 @@
             <a:avLst/>
           </a:prstGeom>
           <a:solidFill>
-            <a:srgbClr val="C53E1F"/>
+            <a:srgbClr val="6C757D"/>
           </a:solidFill>
           <a:ln w="4445">
             <a:solidFill>
@@ -26842,7 +26842,7 @@
             <a:avLst/>
           </a:prstGeom>
           <a:solidFill>
-            <a:srgbClr val="0A7D6E"/>
+            <a:srgbClr val="6C757D"/>
           </a:solidFill>
           <a:ln w="4445">
             <a:solidFill>
@@ -26888,7 +26888,7 @@
             <a:avLst/>
           </a:prstGeom>
           <a:solidFill>
-            <a:srgbClr val="C53E1F"/>
+            <a:srgbClr val="6C757D"/>
           </a:solidFill>
           <a:ln w="4445">
             <a:solidFill>
@@ -26934,7 +26934,7 @@
             <a:avLst/>
           </a:prstGeom>
           <a:solidFill>
-            <a:srgbClr val="0A7D6E"/>
+            <a:srgbClr val="6C757D"/>
           </a:solidFill>
           <a:ln w="4445">
             <a:solidFill>
@@ -26980,7 +26980,7 @@
             <a:avLst/>
           </a:prstGeom>
           <a:solidFill>
-            <a:srgbClr val="C53E1F"/>
+            <a:srgbClr val="6C757D"/>
           </a:solidFill>
           <a:ln w="4445">
             <a:solidFill>
@@ -27026,7 +27026,7 @@
             <a:avLst/>
           </a:prstGeom>
           <a:solidFill>
-            <a:srgbClr val="0A7D6E"/>
+            <a:srgbClr val="6C757D"/>
           </a:solidFill>
           <a:ln w="4445">
             <a:solidFill>
@@ -27072,7 +27072,7 @@
             <a:avLst/>
           </a:prstGeom>
           <a:solidFill>
-            <a:srgbClr val="C53E1F"/>
+            <a:srgbClr val="6C757D"/>
           </a:solidFill>
           <a:ln w="4445">
             <a:solidFill>
@@ -27118,7 +27118,7 @@
             <a:avLst/>
           </a:prstGeom>
           <a:solidFill>
-            <a:srgbClr val="0A7D6E"/>
+            <a:srgbClr val="6C757D"/>
           </a:solidFill>
           <a:ln w="4445">
             <a:solidFill>
@@ -27164,7 +27164,7 @@
             <a:avLst/>
           </a:prstGeom>
           <a:solidFill>
-            <a:srgbClr val="0A7D6E"/>
+            <a:srgbClr val="6C757D"/>
           </a:solidFill>
           <a:ln w="4445">
             <a:solidFill>
@@ -27210,7 +27210,7 @@
             <a:avLst/>
           </a:prstGeom>
           <a:solidFill>
-            <a:srgbClr val="C53E1F"/>
+            <a:srgbClr val="6C757D"/>
           </a:solidFill>
           <a:ln w="4445">
             <a:solidFill>
@@ -27256,7 +27256,7 @@
             <a:avLst/>
           </a:prstGeom>
           <a:solidFill>
-            <a:srgbClr val="0A7D6E"/>
+            <a:srgbClr val="6C757D"/>
           </a:solidFill>
           <a:ln w="4445">
             <a:solidFill>
@@ -27302,7 +27302,7 @@
             <a:avLst/>
           </a:prstGeom>
           <a:solidFill>
-            <a:srgbClr val="C53E1F"/>
+            <a:srgbClr val="6C757D"/>
           </a:solidFill>
           <a:ln w="4445">
             <a:solidFill>
@@ -27348,7 +27348,7 @@
             <a:avLst/>
           </a:prstGeom>
           <a:solidFill>
-            <a:srgbClr val="0A7D6E"/>
+            <a:srgbClr val="6C757D"/>
           </a:solidFill>
           <a:ln w="4445">
             <a:solidFill>
@@ -27394,7 +27394,7 @@
             <a:avLst/>
           </a:prstGeom>
           <a:solidFill>
-            <a:srgbClr val="0A7D6E"/>
+            <a:srgbClr val="6C757D"/>
           </a:solidFill>
           <a:ln w="4445">
             <a:solidFill>
@@ -27440,7 +27440,7 @@
             <a:avLst/>
           </a:prstGeom>
           <a:solidFill>
-            <a:srgbClr val="C53E1F"/>
+            <a:srgbClr val="6C757D"/>
           </a:solidFill>
           <a:ln w="4445">
             <a:solidFill>
@@ -27486,7 +27486,7 @@
             <a:avLst/>
           </a:prstGeom>
           <a:solidFill>
-            <a:srgbClr val="0A7D6E"/>
+            <a:srgbClr val="6C757D"/>
           </a:solidFill>
           <a:ln w="4445">
             <a:solidFill>
@@ -27532,7 +27532,7 @@
             <a:avLst/>
           </a:prstGeom>
           <a:solidFill>
-            <a:srgbClr val="0A7D6E"/>
+            <a:srgbClr val="6C757D"/>
           </a:solidFill>
           <a:ln w="4445">
             <a:solidFill>
@@ -27578,7 +27578,7 @@
             <a:avLst/>
           </a:prstGeom>
           <a:solidFill>
-            <a:srgbClr val="0A7D6E"/>
+            <a:srgbClr val="6C757D"/>
           </a:solidFill>
           <a:ln w="4445">
             <a:solidFill>
@@ -27624,7 +27624,7 @@
             <a:avLst/>
           </a:prstGeom>
           <a:solidFill>
-            <a:srgbClr val="C53E1F"/>
+            <a:srgbClr val="6C757D"/>
           </a:solidFill>
           <a:ln w="4445">
             <a:solidFill>
@@ -27670,7 +27670,7 @@
             <a:avLst/>
           </a:prstGeom>
           <a:solidFill>
-            <a:srgbClr val="0A7D6E"/>
+            <a:srgbClr val="6C757D"/>
           </a:solidFill>
           <a:ln w="4445">
             <a:solidFill>
@@ -27716,7 +27716,7 @@
             <a:avLst/>
           </a:prstGeom>
           <a:solidFill>
-            <a:srgbClr val="0A7D6E"/>
+            <a:srgbClr val="6C757D"/>
           </a:solidFill>
           <a:ln w="4445">
             <a:solidFill>
@@ -27762,7 +27762,7 @@
             <a:avLst/>
           </a:prstGeom>
           <a:solidFill>
-            <a:srgbClr val="0A7D6E"/>
+            <a:srgbClr val="6C757D"/>
           </a:solidFill>
           <a:ln w="4445">
             <a:solidFill>
@@ -27808,7 +27808,7 @@
             <a:avLst/>
           </a:prstGeom>
           <a:solidFill>
-            <a:srgbClr val="0A7D6E"/>
+            <a:srgbClr val="6C757D"/>
           </a:solidFill>
           <a:ln w="4445">
             <a:solidFill>
@@ -27854,7 +27854,7 @@
             <a:avLst/>
           </a:prstGeom>
           <a:solidFill>
-            <a:srgbClr val="0A7D6E"/>
+            <a:srgbClr val="6C757D"/>
           </a:solidFill>
           <a:ln w="4445">
             <a:solidFill>
@@ -27900,7 +27900,7 @@
             <a:avLst/>
           </a:prstGeom>
           <a:solidFill>
-            <a:srgbClr val="C53E1F"/>
+            <a:srgbClr val="6C757D"/>
           </a:solidFill>
           <a:ln w="4445">
             <a:solidFill>
@@ -27946,7 +27946,7 @@
             <a:avLst/>
           </a:prstGeom>
           <a:solidFill>
-            <a:srgbClr val="C53E1F"/>
+            <a:srgbClr val="6C757D"/>
           </a:solidFill>
           <a:ln w="4445">
             <a:solidFill>
@@ -27992,7 +27992,7 @@
             <a:avLst/>
           </a:prstGeom>
           <a:solidFill>
-            <a:srgbClr val="0A7D6E"/>
+            <a:srgbClr val="6C757D"/>
           </a:solidFill>
           <a:ln w="4445">
             <a:solidFill>
@@ -28038,7 +28038,7 @@
             <a:avLst/>
           </a:prstGeom>
           <a:solidFill>
-            <a:srgbClr val="C53E1F"/>
+            <a:srgbClr val="6C757D"/>
           </a:solidFill>
           <a:ln w="4445">
             <a:solidFill>
@@ -28084,7 +28084,7 @@
             <a:avLst/>
           </a:prstGeom>
           <a:solidFill>
-            <a:srgbClr val="C53E1F"/>
+            <a:srgbClr val="6C757D"/>
           </a:solidFill>
           <a:ln w="4445">
             <a:solidFill>
@@ -28130,7 +28130,7 @@
             <a:avLst/>
           </a:prstGeom>
           <a:solidFill>
-            <a:srgbClr val="C53E1F"/>
+            <a:srgbClr val="6C757D"/>
           </a:solidFill>
           <a:ln w="4445">
             <a:solidFill>
@@ -28176,7 +28176,7 @@
             <a:avLst/>
           </a:prstGeom>
           <a:solidFill>
-            <a:srgbClr val="C53E1F"/>
+            <a:srgbClr val="6C757D"/>
           </a:solidFill>
           <a:ln w="4445">
             <a:solidFill>
@@ -28222,7 +28222,7 @@
             <a:avLst/>
           </a:prstGeom>
           <a:solidFill>
-            <a:srgbClr val="0A7D6E"/>
+            <a:srgbClr val="6C757D"/>
           </a:solidFill>
           <a:ln w="4445">
             <a:solidFill>
@@ -28268,7 +28268,7 @@
             <a:avLst/>
           </a:prstGeom>
           <a:solidFill>
-            <a:srgbClr val="0A7D6E"/>
+            <a:srgbClr val="6C757D"/>
           </a:solidFill>
           <a:ln w="4445">
             <a:solidFill>
@@ -28314,7 +28314,7 @@
             <a:avLst/>
           </a:prstGeom>
           <a:solidFill>
-            <a:srgbClr val="C53E1F"/>
+            <a:srgbClr val="6C757D"/>
           </a:solidFill>
           <a:ln w="4445">
             <a:solidFill>
@@ -28360,7 +28360,7 @@
             <a:avLst/>
           </a:prstGeom>
           <a:solidFill>
-            <a:srgbClr val="C53E1F"/>
+            <a:srgbClr val="6C757D"/>
           </a:solidFill>
           <a:ln w="4445">
             <a:solidFill>
@@ -28406,7 +28406,7 @@
             <a:avLst/>
           </a:prstGeom>
           <a:solidFill>
-            <a:srgbClr val="0A7D6E"/>
+            <a:srgbClr val="6C757D"/>
           </a:solidFill>
           <a:ln w="4445">
             <a:solidFill>
@@ -28452,7 +28452,7 @@
             <a:avLst/>
           </a:prstGeom>
           <a:solidFill>
-            <a:srgbClr val="0A7D6E"/>
+            <a:srgbClr val="6C757D"/>
           </a:solidFill>
           <a:ln w="4445">
             <a:solidFill>
@@ -28498,7 +28498,7 @@
             <a:avLst/>
           </a:prstGeom>
           <a:solidFill>
-            <a:srgbClr val="C53E1F"/>
+            <a:srgbClr val="6C757D"/>
           </a:solidFill>
           <a:ln w="4445">
             <a:solidFill>
@@ -28544,7 +28544,7 @@
             <a:avLst/>
           </a:prstGeom>
           <a:solidFill>
-            <a:srgbClr val="C53E1F"/>
+            <a:srgbClr val="6C757D"/>
           </a:solidFill>
           <a:ln w="4445">
             <a:solidFill>
@@ -28590,7 +28590,7 @@
             <a:avLst/>
           </a:prstGeom>
           <a:solidFill>
-            <a:srgbClr val="C53E1F"/>
+            <a:srgbClr val="6C757D"/>
           </a:solidFill>
           <a:ln w="4445">
             <a:solidFill>
@@ -28636,7 +28636,7 @@
             <a:avLst/>
           </a:prstGeom>
           <a:solidFill>
-            <a:srgbClr val="0A7D6E"/>
+            <a:srgbClr val="6C757D"/>
           </a:solidFill>
           <a:ln w="4445">
             <a:solidFill>
@@ -28682,7 +28682,7 @@
             <a:avLst/>
           </a:prstGeom>
           <a:solidFill>
-            <a:srgbClr val="0A7D6E"/>
+            <a:srgbClr val="6C757D"/>
           </a:solidFill>
           <a:ln w="4445">
             <a:solidFill>
@@ -28728,7 +28728,7 @@
             <a:avLst/>
           </a:prstGeom>
           <a:solidFill>
-            <a:srgbClr val="C53E1F"/>
+            <a:srgbClr val="6C757D"/>
           </a:solidFill>
           <a:ln w="4445">
             <a:solidFill>
@@ -28774,7 +28774,7 @@
             <a:avLst/>
           </a:prstGeom>
           <a:solidFill>
-            <a:srgbClr val="C53E1F"/>
+            <a:srgbClr val="6C757D"/>
           </a:solidFill>
           <a:ln w="4445">
             <a:solidFill>
@@ -28820,7 +28820,7 @@
             <a:avLst/>
           </a:prstGeom>
           <a:solidFill>
-            <a:srgbClr val="C53E1F"/>
+            <a:srgbClr val="6C757D"/>
           </a:solidFill>
           <a:ln w="4445">
             <a:solidFill>
@@ -28866,7 +28866,7 @@
             <a:avLst/>
           </a:prstGeom>
           <a:solidFill>
-            <a:srgbClr val="C53E1F"/>
+            <a:srgbClr val="6C757D"/>
           </a:solidFill>
           <a:ln w="4445">
             <a:solidFill>
@@ -28912,7 +28912,7 @@
             <a:avLst/>
           </a:prstGeom>
           <a:solidFill>
-            <a:srgbClr val="C53E1F"/>
+            <a:srgbClr val="6C757D"/>
           </a:solidFill>
           <a:ln w="4445">
             <a:solidFill>
@@ -28958,7 +28958,7 @@
             <a:avLst/>
           </a:prstGeom>
           <a:solidFill>
-            <a:srgbClr val="C53E1F"/>
+            <a:srgbClr val="6C757D"/>
           </a:solidFill>
           <a:ln w="4445">
             <a:solidFill>
@@ -29004,7 +29004,7 @@
             <a:avLst/>
           </a:prstGeom>
           <a:solidFill>
-            <a:srgbClr val="C53E1F"/>
+            <a:srgbClr val="6C757D"/>
           </a:solidFill>
           <a:ln w="4445">
             <a:solidFill>
@@ -29050,7 +29050,7 @@
             <a:avLst/>
           </a:prstGeom>
           <a:solidFill>
-            <a:srgbClr val="0A7D6E"/>
+            <a:srgbClr val="6C757D"/>
           </a:solidFill>
           <a:ln w="4445">
             <a:solidFill>
@@ -29096,7 +29096,7 @@
             <a:avLst/>
           </a:prstGeom>
           <a:solidFill>
-            <a:srgbClr val="0A7D6E"/>
+            <a:srgbClr val="6C757D"/>
           </a:solidFill>
           <a:ln w="4445">
             <a:solidFill>
@@ -29142,7 +29142,7 @@
             <a:avLst/>
           </a:prstGeom>
           <a:solidFill>
-            <a:srgbClr val="0A7D6E"/>
+            <a:srgbClr val="6C757D"/>
           </a:solidFill>
           <a:ln w="4445">
             <a:solidFill>
@@ -29188,7 +29188,7 @@
             <a:avLst/>
           </a:prstGeom>
           <a:solidFill>
-            <a:srgbClr val="0A7D6E"/>
+            <a:srgbClr val="6C757D"/>
           </a:solidFill>
           <a:ln w="4445">
             <a:solidFill>
@@ -29234,7 +29234,7 @@
             <a:avLst/>
           </a:prstGeom>
           <a:solidFill>
-            <a:srgbClr val="C53E1F"/>
+            <a:srgbClr val="6C757D"/>
           </a:solidFill>
           <a:ln w="4445">
             <a:solidFill>
@@ -29280,7 +29280,7 @@
             <a:avLst/>
           </a:prstGeom>
           <a:solidFill>
-            <a:srgbClr val="C53E1F"/>
+            <a:srgbClr val="6C757D"/>
           </a:solidFill>
           <a:ln w="4445">
             <a:solidFill>
@@ -29326,7 +29326,7 @@
             <a:avLst/>
           </a:prstGeom>
           <a:solidFill>
-            <a:srgbClr val="C53E1F"/>
+            <a:srgbClr val="6C757D"/>
           </a:solidFill>
           <a:ln w="4445">
             <a:solidFill>
@@ -29372,7 +29372,7 @@
             <a:avLst/>
           </a:prstGeom>
           <a:solidFill>
-            <a:srgbClr val="C53E1F"/>
+            <a:srgbClr val="6C757D"/>
           </a:solidFill>
           <a:ln w="4445">
             <a:solidFill>
@@ -29418,7 +29418,7 @@
             <a:avLst/>
           </a:prstGeom>
           <a:solidFill>
-            <a:srgbClr val="0A7D6E"/>
+            <a:srgbClr val="6C757D"/>
           </a:solidFill>
           <a:ln w="4445">
             <a:solidFill>
@@ -29464,7 +29464,7 @@
             <a:avLst/>
           </a:prstGeom>
           <a:solidFill>
-            <a:srgbClr val="C53E1F"/>
+            <a:srgbClr val="6C757D"/>
           </a:solidFill>
           <a:ln w="4445">
             <a:solidFill>
@@ -29510,7 +29510,7 @@
             <a:avLst/>
           </a:prstGeom>
           <a:solidFill>
-            <a:srgbClr val="0A7D6E"/>
+            <a:srgbClr val="6C757D"/>
           </a:solidFill>
           <a:ln w="4445">
             <a:solidFill>
@@ -29556,7 +29556,7 @@
             <a:avLst/>
           </a:prstGeom>
           <a:solidFill>
-            <a:srgbClr val="0A7D6E"/>
+            <a:srgbClr val="6C757D"/>
           </a:solidFill>
           <a:ln w="4445">
             <a:solidFill>
@@ -29602,7 +29602,7 @@
             <a:avLst/>
           </a:prstGeom>
           <a:solidFill>
-            <a:srgbClr val="C53E1F"/>
+            <a:srgbClr val="6C757D"/>
           </a:solidFill>
           <a:ln w="4445">
             <a:solidFill>
@@ -29648,7 +29648,7 @@
             <a:avLst/>
           </a:prstGeom>
           <a:solidFill>
-            <a:srgbClr val="0A7D6E"/>
+            <a:srgbClr val="6C757D"/>
           </a:solidFill>
           <a:ln w="4445">
             <a:solidFill>
@@ -29694,7 +29694,7 @@
             <a:avLst/>
           </a:prstGeom>
           <a:solidFill>
-            <a:srgbClr val="0A7D6E"/>
+            <a:srgbClr val="6C757D"/>
           </a:solidFill>
           <a:ln w="4445">
             <a:solidFill>
@@ -29740,7 +29740,7 @@
             <a:avLst/>
           </a:prstGeom>
           <a:solidFill>
-            <a:srgbClr val="0A7D6E"/>
+            <a:srgbClr val="6C757D"/>
           </a:solidFill>
           <a:ln w="4445">
             <a:solidFill>
@@ -29786,7 +29786,7 @@
             <a:avLst/>
           </a:prstGeom>
           <a:solidFill>
-            <a:srgbClr val="0A7D6E"/>
+            <a:srgbClr val="6C757D"/>
           </a:solidFill>
           <a:ln w="4445">
             <a:solidFill>
@@ -29832,7 +29832,7 @@
             <a:avLst/>
           </a:prstGeom>
           <a:solidFill>
-            <a:srgbClr val="0A7D6E"/>
+            <a:srgbClr val="6C757D"/>
           </a:solidFill>
           <a:ln w="4445">
             <a:solidFill>
@@ -29878,7 +29878,7 @@
             <a:avLst/>
           </a:prstGeom>
           <a:solidFill>
-            <a:srgbClr val="C53E1F"/>
+            <a:srgbClr val="6C757D"/>
           </a:solidFill>
           <a:ln w="4445">
             <a:solidFill>
@@ -29924,7 +29924,7 @@
             <a:avLst/>
           </a:prstGeom>
           <a:solidFill>
-            <a:srgbClr val="0A7D6E"/>
+            <a:srgbClr val="6C757D"/>
           </a:solidFill>
           <a:ln w="4445">
             <a:solidFill>
@@ -29970,7 +29970,7 @@
             <a:avLst/>
           </a:prstGeom>
           <a:solidFill>
-            <a:srgbClr val="0A7D6E"/>
+            <a:srgbClr val="6C757D"/>
           </a:solidFill>
           <a:ln w="4445">
             <a:solidFill>
@@ -30016,7 +30016,7 @@
             <a:avLst/>
           </a:prstGeom>
           <a:solidFill>
-            <a:srgbClr val="C53E1F"/>
+            <a:srgbClr val="6C757D"/>
           </a:solidFill>
           <a:ln w="4445">
             <a:solidFill>
@@ -30062,7 +30062,7 @@
             <a:avLst/>
           </a:prstGeom>
           <a:solidFill>
-            <a:srgbClr val="C53E1F"/>
+            <a:srgbClr val="6C757D"/>
           </a:solidFill>
           <a:ln w="4445">
             <a:solidFill>
@@ -30108,7 +30108,7 @@
             <a:avLst/>
           </a:prstGeom>
           <a:solidFill>
-            <a:srgbClr val="0A7D6E"/>
+            <a:srgbClr val="6C757D"/>
           </a:solidFill>
           <a:ln w="4445">
             <a:solidFill>
@@ -30154,7 +30154,7 @@
             <a:avLst/>
           </a:prstGeom>
           <a:solidFill>
-            <a:srgbClr val="0A7D6E"/>
+            <a:srgbClr val="6C757D"/>
           </a:solidFill>
           <a:ln w="4445">
             <a:solidFill>
@@ -30200,7 +30200,7 @@
             <a:avLst/>
           </a:prstGeom>
           <a:solidFill>
-            <a:srgbClr val="0A7D6E"/>
+            <a:srgbClr val="6C757D"/>
           </a:solidFill>
           <a:ln w="4445">
             <a:solidFill>
@@ -30246,7 +30246,7 @@
             <a:avLst/>
           </a:prstGeom>
           <a:solidFill>
-            <a:srgbClr val="C53E1F"/>
+            <a:srgbClr val="6C757D"/>
           </a:solidFill>
           <a:ln w="4445">
             <a:solidFill>
@@ -30292,7 +30292,7 @@
             <a:avLst/>
           </a:prstGeom>
           <a:solidFill>
-            <a:srgbClr val="C53E1F"/>
+            <a:srgbClr val="6C757D"/>
           </a:solidFill>
           <a:ln w="4445">
             <a:solidFill>
@@ -30338,7 +30338,7 @@
             <a:avLst/>
           </a:prstGeom>
           <a:solidFill>
-            <a:srgbClr val="C53E1F"/>
+            <a:srgbClr val="6C757D"/>
           </a:solidFill>
           <a:ln w="4445">
             <a:solidFill>
@@ -30384,7 +30384,7 @@
             <a:avLst/>
           </a:prstGeom>
           <a:solidFill>
-            <a:srgbClr val="0A7D6E"/>
+            <a:srgbClr val="6C757D"/>
           </a:solidFill>
           <a:ln w="4445">
             <a:solidFill>
@@ -30430,7 +30430,7 @@
             <a:avLst/>
           </a:prstGeom>
           <a:solidFill>
-            <a:srgbClr val="C53E1F"/>
+            <a:srgbClr val="6C757D"/>
           </a:solidFill>
           <a:ln w="4445">
             <a:solidFill>
@@ -30476,7 +30476,7 @@
             <a:avLst/>
           </a:prstGeom>
           <a:solidFill>
-            <a:srgbClr val="C53E1F"/>
+            <a:srgbClr val="6C757D"/>
           </a:solidFill>
           <a:ln w="4445">
             <a:solidFill>
@@ -30522,7 +30522,7 @@
             <a:avLst/>
           </a:prstGeom>
           <a:solidFill>
-            <a:srgbClr val="0A7D6E"/>
+            <a:srgbClr val="6C757D"/>
           </a:solidFill>
           <a:ln w="4445">
             <a:solidFill>
@@ -30568,7 +30568,7 @@
             <a:avLst/>
           </a:prstGeom>
           <a:solidFill>
-            <a:srgbClr val="0A7D6E"/>
+            <a:srgbClr val="6C757D"/>
           </a:solidFill>
           <a:ln w="4445">
             <a:solidFill>
@@ -30614,7 +30614,7 @@
             <a:avLst/>
           </a:prstGeom>
           <a:solidFill>
-            <a:srgbClr val="C53E1F"/>
+            <a:srgbClr val="6C757D"/>
           </a:solidFill>
           <a:ln w="4445">
             <a:solidFill>
@@ -30660,7 +30660,7 @@
             <a:avLst/>
           </a:prstGeom>
           <a:solidFill>
-            <a:srgbClr val="0A7D6E"/>
+            <a:srgbClr val="6C757D"/>
           </a:solidFill>
           <a:ln w="4445">
             <a:solidFill>
@@ -30706,7 +30706,7 @@
             <a:avLst/>
           </a:prstGeom>
           <a:solidFill>
-            <a:srgbClr val="0A7D6E"/>
+            <a:srgbClr val="6C757D"/>
           </a:solidFill>
           <a:ln w="4445">
             <a:solidFill>
@@ -30752,7 +30752,7 @@
             <a:avLst/>
           </a:prstGeom>
           <a:solidFill>
-            <a:srgbClr val="C53E1F"/>
+            <a:srgbClr val="6C757D"/>
           </a:solidFill>
           <a:ln w="4445">
             <a:solidFill>
@@ -30798,7 +30798,7 @@
             <a:avLst/>
           </a:prstGeom>
           <a:solidFill>
-            <a:srgbClr val="0A7D6E"/>
+            <a:srgbClr val="6C757D"/>
           </a:solidFill>
           <a:ln w="4445">
             <a:solidFill>
@@ -30844,7 +30844,7 @@
             <a:avLst/>
           </a:prstGeom>
           <a:solidFill>
-            <a:srgbClr val="0A7D6E"/>
+            <a:srgbClr val="6C757D"/>
           </a:solidFill>
           <a:ln w="4445">
             <a:solidFill>
@@ -30890,7 +30890,7 @@
             <a:avLst/>
           </a:prstGeom>
           <a:solidFill>
-            <a:srgbClr val="C53E1F"/>
+            <a:srgbClr val="6C757D"/>
           </a:solidFill>
           <a:ln w="4445">
             <a:solidFill>
@@ -30936,7 +30936,7 @@
             <a:avLst/>
           </a:prstGeom>
           <a:solidFill>
-            <a:srgbClr val="0A7D6E"/>
+            <a:srgbClr val="6C757D"/>
           </a:solidFill>
           <a:ln w="4445">
             <a:solidFill>
@@ -30982,7 +30982,7 @@
             <a:avLst/>
           </a:prstGeom>
           <a:solidFill>
-            <a:srgbClr val="C53E1F"/>
+            <a:srgbClr val="6C757D"/>
           </a:solidFill>
           <a:ln w="4445">
             <a:solidFill>
@@ -31028,7 +31028,7 @@
             <a:avLst/>
           </a:prstGeom>
           <a:solidFill>
-            <a:srgbClr val="C53E1F"/>
+            <a:srgbClr val="6C757D"/>
           </a:solidFill>
           <a:ln w="4445">
             <a:solidFill>
@@ -31074,7 +31074,7 @@
             <a:avLst/>
           </a:prstGeom>
           <a:solidFill>
-            <a:srgbClr val="C53E1F"/>
+            <a:srgbClr val="6C757D"/>
           </a:solidFill>
           <a:ln w="4445">
             <a:solidFill>
@@ -31120,7 +31120,7 @@
             <a:avLst/>
           </a:prstGeom>
           <a:solidFill>
-            <a:srgbClr val="C53E1F"/>
+            <a:srgbClr val="6C757D"/>
           </a:solidFill>
           <a:ln w="4445">
             <a:solidFill>
@@ -31166,7 +31166,7 @@
             <a:avLst/>
           </a:prstGeom>
           <a:solidFill>
-            <a:srgbClr val="0A7D6E"/>
+            <a:srgbClr val="6C757D"/>
           </a:solidFill>
           <a:ln w="4445">
             <a:solidFill>
@@ -31212,7 +31212,7 @@
             <a:avLst/>
           </a:prstGeom>
           <a:solidFill>
-            <a:srgbClr val="0A7D6E"/>
+            <a:srgbClr val="6C757D"/>
           </a:solidFill>
           <a:ln w="4445">
             <a:solidFill>
@@ -31258,7 +31258,7 @@
             <a:avLst/>
           </a:prstGeom>
           <a:solidFill>
-            <a:srgbClr val="C53E1F"/>
+            <a:srgbClr val="6C757D"/>
           </a:solidFill>
           <a:ln w="4445">
             <a:solidFill>
@@ -31304,7 +31304,7 @@
             <a:avLst/>
           </a:prstGeom>
           <a:solidFill>
-            <a:srgbClr val="0A7D6E"/>
+            <a:srgbClr val="6C757D"/>
           </a:solidFill>
           <a:ln w="4445">
             <a:solidFill>
@@ -31350,7 +31350,7 @@
             <a:avLst/>
           </a:prstGeom>
           <a:solidFill>
-            <a:srgbClr val="0A7D6E"/>
+            <a:srgbClr val="6C757D"/>
           </a:solidFill>
           <a:ln w="4445">
             <a:solidFill>
@@ -31396,7 +31396,7 @@
             <a:avLst/>
           </a:prstGeom>
           <a:solidFill>
-            <a:srgbClr val="0A7D6E"/>
+            <a:srgbClr val="6C757D"/>
           </a:solidFill>
           <a:ln w="4445">
             <a:solidFill>
@@ -31442,7 +31442,7 @@
             <a:avLst/>
           </a:prstGeom>
           <a:solidFill>
-            <a:srgbClr val="0A7D6E"/>
+            <a:srgbClr val="6C757D"/>
           </a:solidFill>
           <a:ln w="4445">
             <a:solidFill>
@@ -31488,7 +31488,7 @@
             <a:avLst/>
           </a:prstGeom>
           <a:solidFill>
-            <a:srgbClr val="0A7D6E"/>
+            <a:srgbClr val="6C757D"/>
           </a:solidFill>
           <a:ln w="4445">
             <a:solidFill>
@@ -31534,7 +31534,7 @@
             <a:avLst/>
           </a:prstGeom>
           <a:solidFill>
-            <a:srgbClr val="C53E1F"/>
+            <a:srgbClr val="6C757D"/>
           </a:solidFill>
           <a:ln w="4445">
             <a:solidFill>
@@ -31580,7 +31580,7 @@
             <a:avLst/>
           </a:prstGeom>
           <a:solidFill>
-            <a:srgbClr val="C53E1F"/>
+            <a:srgbClr val="6C757D"/>
           </a:solidFill>
           <a:ln w="4445">
             <a:solidFill>
@@ -31626,7 +31626,7 @@
             <a:avLst/>
           </a:prstGeom>
           <a:solidFill>
-            <a:srgbClr val="C53E1F"/>
+            <a:srgbClr val="6C757D"/>
           </a:solidFill>
           <a:ln w="4445">
             <a:solidFill>
@@ -31672,7 +31672,7 @@
             <a:avLst/>
           </a:prstGeom>
           <a:solidFill>
-            <a:srgbClr val="C53E1F"/>
+            <a:srgbClr val="6C757D"/>
           </a:solidFill>
           <a:ln w="4445">
             <a:solidFill>
@@ -31718,7 +31718,7 @@
             <a:avLst/>
           </a:prstGeom>
           <a:solidFill>
-            <a:srgbClr val="0A7D6E"/>
+            <a:srgbClr val="6C757D"/>
           </a:solidFill>
           <a:ln w="4445">
             <a:solidFill>
@@ -31764,7 +31764,7 @@
             <a:avLst/>
           </a:prstGeom>
           <a:solidFill>
-            <a:srgbClr val="0A7D6E"/>
+            <a:srgbClr val="6C757D"/>
           </a:solidFill>
           <a:ln w="4445">
             <a:solidFill>
@@ -31810,7 +31810,7 @@
             <a:avLst/>
           </a:prstGeom>
           <a:solidFill>
-            <a:srgbClr val="C53E1F"/>
+            <a:srgbClr val="6C757D"/>
           </a:solidFill>
           <a:ln w="4445">
             <a:solidFill>
@@ -31856,7 +31856,7 @@
             <a:avLst/>
           </a:prstGeom>
           <a:solidFill>
-            <a:srgbClr val="C53E1F"/>
+            <a:srgbClr val="6C757D"/>
           </a:solidFill>
           <a:ln w="4445">
             <a:solidFill>
@@ -31902,7 +31902,7 @@
             <a:avLst/>
           </a:prstGeom>
           <a:solidFill>
-            <a:srgbClr val="C53E1F"/>
+            <a:srgbClr val="6C757D"/>
           </a:solidFill>
           <a:ln w="4445">
             <a:solidFill>
@@ -31948,7 +31948,7 @@
             <a:avLst/>
           </a:prstGeom>
           <a:solidFill>
-            <a:srgbClr val="C53E1F"/>
+            <a:srgbClr val="6C757D"/>
           </a:solidFill>
           <a:ln w="4445">
             <a:solidFill>
@@ -31994,7 +31994,7 @@
             <a:avLst/>
           </a:prstGeom>
           <a:solidFill>
-            <a:srgbClr val="0A7D6E"/>
+            <a:srgbClr val="6C757D"/>
           </a:solidFill>
           <a:ln w="4445">
             <a:solidFill>
@@ -32040,7 +32040,7 @@
             <a:avLst/>
           </a:prstGeom>
           <a:solidFill>
-            <a:srgbClr val="C53E1F"/>
+            <a:srgbClr val="6C757D"/>
           </a:solidFill>
           <a:ln w="4445">
             <a:solidFill>
@@ -32086,7 +32086,7 @@
             <a:avLst/>
           </a:prstGeom>
           <a:solidFill>
-            <a:srgbClr val="C53E1F"/>
+            <a:srgbClr val="6C757D"/>
           </a:solidFill>
           <a:ln w="4445">
             <a:solidFill>
@@ -32132,7 +32132,7 @@
             <a:avLst/>
           </a:prstGeom>
           <a:solidFill>
-            <a:srgbClr val="0A7D6E"/>
+            <a:srgbClr val="6C757D"/>
           </a:solidFill>
           <a:ln w="4445">
             <a:solidFill>
@@ -32178,7 +32178,7 @@
             <a:avLst/>
           </a:prstGeom>
           <a:solidFill>
-            <a:srgbClr val="C53E1F"/>
+            <a:srgbClr val="6C757D"/>
           </a:solidFill>
           <a:ln w="4445">
             <a:solidFill>
@@ -32224,7 +32224,7 @@
             <a:avLst/>
           </a:prstGeom>
           <a:solidFill>
-            <a:srgbClr val="C53E1F"/>
+            <a:srgbClr val="6C757D"/>
           </a:solidFill>
           <a:ln w="4445">
             <a:solidFill>
@@ -32270,7 +32270,7 @@
             <a:avLst/>
           </a:prstGeom>
           <a:solidFill>
-            <a:srgbClr val="0A7D6E"/>
+            <a:srgbClr val="6C757D"/>
           </a:solidFill>
           <a:ln w="4445">
             <a:solidFill>
@@ -32316,7 +32316,7 @@
             <a:avLst/>
           </a:prstGeom>
           <a:solidFill>
-            <a:srgbClr val="0A7D6E"/>
+            <a:srgbClr val="6C757D"/>
           </a:solidFill>
           <a:ln w="4445">
             <a:solidFill>
@@ -32362,7 +32362,7 @@
             <a:avLst/>
           </a:prstGeom>
           <a:solidFill>
-            <a:srgbClr val="C53E1F"/>
+            <a:srgbClr val="6C757D"/>
           </a:solidFill>
           <a:ln w="4445">
             <a:solidFill>
@@ -32408,7 +32408,7 @@
             <a:avLst/>
           </a:prstGeom>
           <a:solidFill>
-            <a:srgbClr val="C53E1F"/>
+            <a:srgbClr val="6C757D"/>
           </a:solidFill>
           <a:ln w="4445">
             <a:solidFill>
@@ -32454,7 +32454,7 @@
             <a:avLst/>
           </a:prstGeom>
           <a:solidFill>
-            <a:srgbClr val="0A7D6E"/>
+            <a:srgbClr val="6C757D"/>
           </a:solidFill>
           <a:ln w="4445">
             <a:solidFill>
@@ -32500,7 +32500,7 @@
             <a:avLst/>
           </a:prstGeom>
           <a:solidFill>
-            <a:srgbClr val="0A7D6E"/>
+            <a:srgbClr val="6C757D"/>
           </a:solidFill>
           <a:ln w="4445">
             <a:solidFill>
@@ -32546,7 +32546,7 @@
             <a:avLst/>
           </a:prstGeom>
           <a:solidFill>
-            <a:srgbClr val="0A7D6E"/>
+            <a:srgbClr val="6C757D"/>
           </a:solidFill>
           <a:ln w="4445">
             <a:solidFill>
@@ -32592,7 +32592,7 @@
             <a:avLst/>
           </a:prstGeom>
           <a:solidFill>
-            <a:srgbClr val="0A7D6E"/>
+            <a:srgbClr val="6C757D"/>
           </a:solidFill>
           <a:ln w="4445">
             <a:solidFill>
@@ -32638,7 +32638,7 @@
             <a:avLst/>
           </a:prstGeom>
           <a:solidFill>
-            <a:srgbClr val="C53E1F"/>
+            <a:srgbClr val="6C757D"/>
           </a:solidFill>
           <a:ln w="4445">
             <a:solidFill>
@@ -32684,7 +32684,7 @@
             <a:avLst/>
           </a:prstGeom>
           <a:solidFill>
-            <a:srgbClr val="0A7D6E"/>
+            <a:srgbClr val="6C757D"/>
           </a:solidFill>
           <a:ln w="4445">
             <a:solidFill>
@@ -32730,7 +32730,7 @@
             <a:avLst/>
           </a:prstGeom>
           <a:solidFill>
-            <a:srgbClr val="0A7D6E"/>
+            <a:srgbClr val="6C757D"/>
           </a:solidFill>
           <a:ln w="4445">
             <a:solidFill>
@@ -32776,7 +32776,7 @@
             <a:avLst/>
           </a:prstGeom>
           <a:solidFill>
-            <a:srgbClr val="0A7D6E"/>
+            <a:srgbClr val="6C757D"/>
           </a:solidFill>
           <a:ln w="4445">
             <a:solidFill>
@@ -32822,7 +32822,7 @@
             <a:avLst/>
           </a:prstGeom>
           <a:solidFill>
-            <a:srgbClr val="C53E1F"/>
+            <a:srgbClr val="6C757D"/>
           </a:solidFill>
           <a:ln w="4445">
             <a:solidFill>
@@ -32868,7 +32868,7 @@
             <a:avLst/>
           </a:prstGeom>
           <a:solidFill>
-            <a:srgbClr val="0A7D6E"/>
+            <a:srgbClr val="6C757D"/>
           </a:solidFill>
           <a:ln w="4445">
             <a:solidFill>
@@ -32914,7 +32914,7 @@
             <a:avLst/>
           </a:prstGeom>
           <a:solidFill>
-            <a:srgbClr val="0A7D6E"/>
+            <a:srgbClr val="6C757D"/>
           </a:solidFill>
           <a:ln w="4445">
             <a:solidFill>
@@ -32960,7 +32960,7 @@
             <a:avLst/>
           </a:prstGeom>
           <a:solidFill>
-            <a:srgbClr val="0A7D6E"/>
+            <a:srgbClr val="6C757D"/>
           </a:solidFill>
           <a:ln w="4445">
             <a:solidFill>
@@ -33006,7 +33006,7 @@
             <a:avLst/>
           </a:prstGeom>
           <a:solidFill>
-            <a:srgbClr val="0A7D6E"/>
+            <a:srgbClr val="6C757D"/>
           </a:solidFill>
           <a:ln w="4445">
             <a:solidFill>
@@ -33052,7 +33052,7 @@
             <a:avLst/>
           </a:prstGeom>
           <a:solidFill>
-            <a:srgbClr val="C53E1F"/>
+            <a:srgbClr val="6C757D"/>
           </a:solidFill>
           <a:ln w="4445">
             <a:solidFill>
@@ -33098,7 +33098,7 @@
             <a:avLst/>
           </a:prstGeom>
           <a:solidFill>
-            <a:srgbClr val="C53E1F"/>
+            <a:srgbClr val="6C757D"/>
           </a:solidFill>
           <a:ln w="4445">
             <a:solidFill>
@@ -33144,7 +33144,7 @@
             <a:avLst/>
           </a:prstGeom>
           <a:solidFill>
-            <a:srgbClr val="0A7D6E"/>
+            <a:srgbClr val="6C757D"/>
           </a:solidFill>
           <a:ln w="4445">
             <a:solidFill>
@@ -33190,7 +33190,7 @@
             <a:avLst/>
           </a:prstGeom>
           <a:solidFill>
-            <a:srgbClr val="C53E1F"/>
+            <a:srgbClr val="6C757D"/>
           </a:solidFill>
           <a:ln w="4445">
             <a:solidFill>
@@ -33236,7 +33236,7 @@
             <a:avLst/>
           </a:prstGeom>
           <a:solidFill>
-            <a:srgbClr val="C53E1F"/>
+            <a:srgbClr val="6C757D"/>
           </a:solidFill>
           <a:ln w="4445">
             <a:solidFill>
@@ -33282,7 +33282,7 @@
             <a:avLst/>
           </a:prstGeom>
           <a:solidFill>
-            <a:srgbClr val="0A7D6E"/>
+            <a:srgbClr val="6C757D"/>
           </a:solidFill>
           <a:ln w="4445">
             <a:solidFill>
@@ -33328,7 +33328,7 @@
             <a:avLst/>
           </a:prstGeom>
           <a:solidFill>
-            <a:srgbClr val="C53E1F"/>
+            <a:srgbClr val="6C757D"/>
           </a:solidFill>
           <a:ln w="4445">
             <a:solidFill>
@@ -33374,7 +33374,7 @@
             <a:avLst/>
           </a:prstGeom>
           <a:solidFill>
-            <a:srgbClr val="0A7D6E"/>
+            <a:srgbClr val="6C757D"/>
           </a:solidFill>
           <a:ln w="4445">
             <a:solidFill>
@@ -33420,7 +33420,7 @@
             <a:avLst/>
           </a:prstGeom>
           <a:solidFill>
-            <a:srgbClr val="0A7D6E"/>
+            <a:srgbClr val="6C757D"/>
           </a:solidFill>
           <a:ln w="4445">
             <a:solidFill>
@@ -33466,7 +33466,7 @@
             <a:avLst/>
           </a:prstGeom>
           <a:solidFill>
-            <a:srgbClr val="C53E1F"/>
+            <a:srgbClr val="6C757D"/>
           </a:solidFill>
           <a:ln w="4445">
             <a:solidFill>
@@ -33512,7 +33512,7 @@
             <a:avLst/>
           </a:prstGeom>
           <a:solidFill>
-            <a:srgbClr val="0A7D6E"/>
+            <a:srgbClr val="6C757D"/>
           </a:solidFill>
           <a:ln w="4445">
             <a:solidFill>
@@ -33558,7 +33558,7 @@
             <a:avLst/>
           </a:prstGeom>
           <a:solidFill>
-            <a:srgbClr val="0A7D6E"/>
+            <a:srgbClr val="6C757D"/>
           </a:solidFill>
           <a:ln w="4445">
             <a:solidFill>
@@ -33604,7 +33604,7 @@
             <a:avLst/>
           </a:prstGeom>
           <a:solidFill>
-            <a:srgbClr val="C53E1F"/>
+            <a:srgbClr val="6C757D"/>
           </a:solidFill>
           <a:ln w="4445">
             <a:solidFill>
@@ -33650,7 +33650,7 @@
             <a:avLst/>
           </a:prstGeom>
           <a:solidFill>
-            <a:srgbClr val="C53E1F"/>
+            <a:srgbClr val="6C757D"/>
           </a:solidFill>
           <a:ln w="4445">
             <a:solidFill>
@@ -33696,7 +33696,7 @@
             <a:avLst/>
           </a:prstGeom>
           <a:solidFill>
-            <a:srgbClr val="C53E1F"/>
+            <a:srgbClr val="6C757D"/>
           </a:solidFill>
           <a:ln w="4445">
             <a:solidFill>
@@ -33742,7 +33742,7 @@
             <a:avLst/>
           </a:prstGeom>
           <a:solidFill>
-            <a:srgbClr val="0A7D6E"/>
+            <a:srgbClr val="6C757D"/>
           </a:solidFill>
           <a:ln w="4445">
             <a:solidFill>
@@ -33788,7 +33788,7 @@
             <a:avLst/>
           </a:prstGeom>
           <a:solidFill>
-            <a:srgbClr val="C53E1F"/>
+            <a:srgbClr val="6C757D"/>
           </a:solidFill>
           <a:ln w="4445">
             <a:solidFill>
@@ -33834,7 +33834,7 @@
             <a:avLst/>
           </a:prstGeom>
           <a:solidFill>
-            <a:srgbClr val="0A7D6E"/>
+            <a:srgbClr val="6C757D"/>
           </a:solidFill>
           <a:ln w="4445">
             <a:solidFill>
@@ -33880,7 +33880,7 @@
             <a:avLst/>
           </a:prstGeom>
           <a:solidFill>
-            <a:srgbClr val="C53E1F"/>
+            <a:srgbClr val="6C757D"/>
           </a:solidFill>
           <a:ln w="4445">
             <a:solidFill>
@@ -33926,7 +33926,7 @@
             <a:avLst/>
           </a:prstGeom>
           <a:solidFill>
-            <a:srgbClr val="0A7D6E"/>
+            <a:srgbClr val="6C757D"/>
           </a:solidFill>
           <a:ln w="4445">
             <a:solidFill>
@@ -33972,7 +33972,7 @@
             <a:avLst/>
           </a:prstGeom>
           <a:solidFill>
-            <a:srgbClr val="0A7D6E"/>
+            <a:srgbClr val="6C757D"/>
           </a:solidFill>
           <a:ln w="4445">
             <a:solidFill>
@@ -34018,7 +34018,7 @@
             <a:avLst/>
           </a:prstGeom>
           <a:solidFill>
-            <a:srgbClr val="C53E1F"/>
+            <a:srgbClr val="6C757D"/>
           </a:solidFill>
           <a:ln w="4445">
             <a:solidFill>
@@ -34064,7 +34064,7 @@
             <a:avLst/>
           </a:prstGeom>
           <a:solidFill>
-            <a:srgbClr val="C53E1F"/>
+            <a:srgbClr val="6C757D"/>
           </a:solidFill>
           <a:ln w="4445">
             <a:solidFill>
@@ -34110,7 +34110,7 @@
             <a:avLst/>
           </a:prstGeom>
           <a:solidFill>
-            <a:srgbClr val="0A7D6E"/>
+            <a:srgbClr val="6C757D"/>
           </a:solidFill>
           <a:ln w="4445">
             <a:solidFill>
@@ -34156,7 +34156,7 @@
             <a:avLst/>
           </a:prstGeom>
           <a:solidFill>
-            <a:srgbClr val="0A7D6E"/>
+            <a:srgbClr val="6C757D"/>
           </a:solidFill>
           <a:ln w="4445">
             <a:solidFill>
@@ -34202,7 +34202,7 @@
             <a:avLst/>
           </a:prstGeom>
           <a:solidFill>
-            <a:srgbClr val="0A7D6E"/>
+            <a:srgbClr val="6C757D"/>
           </a:solidFill>
           <a:ln w="4445">
             <a:solidFill>
@@ -34248,7 +34248,7 @@
             <a:avLst/>
           </a:prstGeom>
           <a:solidFill>
-            <a:srgbClr val="C53E1F"/>
+            <a:srgbClr val="6C757D"/>
           </a:solidFill>
           <a:ln w="4445">
             <a:solidFill>
@@ -34294,7 +34294,7 @@
             <a:avLst/>
           </a:prstGeom>
           <a:solidFill>
-            <a:srgbClr val="0A7D6E"/>
+            <a:srgbClr val="6C757D"/>
           </a:solidFill>
           <a:ln w="4445">
             <a:solidFill>
@@ -34340,7 +34340,7 @@
             <a:avLst/>
           </a:prstGeom>
           <a:solidFill>
-            <a:srgbClr val="0A7D6E"/>
+            <a:srgbClr val="6C757D"/>
           </a:solidFill>
           <a:ln w="4445">
             <a:solidFill>
@@ -34386,7 +34386,7 @@
             <a:avLst/>
           </a:prstGeom>
           <a:solidFill>
-            <a:srgbClr val="0A7D6E"/>
+            <a:srgbClr val="6C757D"/>
           </a:solidFill>
           <a:ln w="4445">
             <a:solidFill>
@@ -34432,7 +34432,7 @@
             <a:avLst/>
           </a:prstGeom>
           <a:solidFill>
-            <a:srgbClr val="C53E1F"/>
+            <a:srgbClr val="6C757D"/>
           </a:solidFill>
           <a:ln w="4445">
             <a:solidFill>
@@ -34478,7 +34478,7 @@
             <a:avLst/>
           </a:prstGeom>
           <a:solidFill>
-            <a:srgbClr val="0A7D6E"/>
+            <a:srgbClr val="6C757D"/>
           </a:solidFill>
           <a:ln w="4445">
             <a:solidFill>
@@ -34524,7 +34524,7 @@
             <a:avLst/>
           </a:prstGeom>
           <a:solidFill>
-            <a:srgbClr val="0A7D6E"/>
+            <a:srgbClr val="6C757D"/>
           </a:solidFill>
           <a:ln w="4445">
             <a:solidFill>
@@ -34570,7 +34570,7 @@
             <a:avLst/>
           </a:prstGeom>
           <a:solidFill>
-            <a:srgbClr val="0A7D6E"/>
+            <a:srgbClr val="6C757D"/>
           </a:solidFill>
           <a:ln w="4445">
             <a:solidFill>
@@ -34616,7 +34616,7 @@
             <a:avLst/>
           </a:prstGeom>
           <a:solidFill>
-            <a:srgbClr val="0A7D6E"/>
+            <a:srgbClr val="6C757D"/>
           </a:solidFill>
           <a:ln w="4445">
             <a:solidFill>
@@ -34662,7 +34662,7 @@
             <a:avLst/>
           </a:prstGeom>
           <a:solidFill>
-            <a:srgbClr val="0A7D6E"/>
+            <a:srgbClr val="6C757D"/>
           </a:solidFill>
           <a:ln w="4445">
             <a:solidFill>
@@ -34708,7 +34708,7 @@
             <a:avLst/>
           </a:prstGeom>
           <a:solidFill>
-            <a:srgbClr val="C53E1F"/>
+            <a:srgbClr val="6C757D"/>
           </a:solidFill>
           <a:ln w="4445">
             <a:solidFill>
@@ -34754,7 +34754,7 @@
             <a:avLst/>
           </a:prstGeom>
           <a:solidFill>
-            <a:srgbClr val="C53E1F"/>
+            <a:srgbClr val="6C757D"/>
           </a:solidFill>
           <a:ln w="4445">
             <a:solidFill>
@@ -34800,7 +34800,7 @@
             <a:avLst/>
           </a:prstGeom>
           <a:solidFill>
-            <a:srgbClr val="0A7D6E"/>
+            <a:srgbClr val="6C757D"/>
           </a:solidFill>
           <a:ln w="4445">
             <a:solidFill>
@@ -34846,7 +34846,7 @@
             <a:avLst/>
           </a:prstGeom>
           <a:solidFill>
-            <a:srgbClr val="C53E1F"/>
+            <a:srgbClr val="6C757D"/>
           </a:solidFill>
           <a:ln w="4445">
             <a:solidFill>
@@ -34892,7 +34892,7 @@
             <a:avLst/>
           </a:prstGeom>
           <a:solidFill>
-            <a:srgbClr val="C53E1F"/>
+            <a:srgbClr val="6C757D"/>
           </a:solidFill>
           <a:ln w="4445">
             <a:solidFill>
@@ -34938,7 +34938,7 @@
             <a:avLst/>
           </a:prstGeom>
           <a:solidFill>
-            <a:srgbClr val="C53E1F"/>
+            <a:srgbClr val="6C757D"/>
           </a:solidFill>
           <a:ln w="4445">
             <a:solidFill>
@@ -34984,7 +34984,7 @@
             <a:avLst/>
           </a:prstGeom>
           <a:solidFill>
-            <a:srgbClr val="C53E1F"/>
+            <a:srgbClr val="6C757D"/>
           </a:solidFill>
           <a:ln w="4445">
             <a:solidFill>
@@ -35030,7 +35030,7 @@
             <a:avLst/>
           </a:prstGeom>
           <a:solidFill>
-            <a:srgbClr val="C53E1F"/>
+            <a:srgbClr val="6C757D"/>
           </a:solidFill>
           <a:ln w="4445">
             <a:solidFill>
@@ -35076,7 +35076,7 @@
             <a:avLst/>
           </a:prstGeom>
           <a:solidFill>
-            <a:srgbClr val="C53E1F"/>
+            <a:srgbClr val="6C757D"/>
           </a:solidFill>
           <a:ln w="4445">
             <a:solidFill>
@@ -35122,7 +35122,7 @@
             <a:avLst/>
           </a:prstGeom>
           <a:solidFill>
-            <a:srgbClr val="C53E1F"/>
+            <a:srgbClr val="6C757D"/>
           </a:solidFill>
           <a:ln w="4445">
             <a:solidFill>
@@ -35168,7 +35168,7 @@
             <a:avLst/>
           </a:prstGeom>
           <a:solidFill>
-            <a:srgbClr val="C53E1F"/>
+            <a:srgbClr val="6C757D"/>
           </a:solidFill>
           <a:ln w="4445">
             <a:solidFill>
@@ -35214,7 +35214,7 @@
             <a:avLst/>
           </a:prstGeom>
           <a:solidFill>
-            <a:srgbClr val="0A7D6E"/>
+            <a:srgbClr val="6C757D"/>
           </a:solidFill>
           <a:ln w="4445">
             <a:solidFill>
@@ -35260,7 +35260,7 @@
             <a:avLst/>
           </a:prstGeom>
           <a:solidFill>
-            <a:srgbClr val="C53E1F"/>
+            <a:srgbClr val="6C757D"/>
           </a:solidFill>
           <a:ln w="4445">
             <a:solidFill>
@@ -35306,7 +35306,7 @@
             <a:avLst/>
           </a:prstGeom>
           <a:solidFill>
-            <a:srgbClr val="0A7D6E"/>
+            <a:srgbClr val="6C757D"/>
           </a:solidFill>
           <a:ln w="4445">
             <a:solidFill>
@@ -35352,7 +35352,7 @@
             <a:avLst/>
           </a:prstGeom>
           <a:solidFill>
-            <a:srgbClr val="0A7D6E"/>
+            <a:srgbClr val="6C757D"/>
           </a:solidFill>
           <a:ln w="4445">
             <a:solidFill>
@@ -35398,7 +35398,7 @@
             <a:avLst/>
           </a:prstGeom>
           <a:solidFill>
-            <a:srgbClr val="C53E1F"/>
+            <a:srgbClr val="6C757D"/>
           </a:solidFill>
           <a:ln w="4445">
             <a:solidFill>
@@ -35444,7 +35444,7 @@
             <a:avLst/>
           </a:prstGeom>
           <a:solidFill>
-            <a:srgbClr val="C53E1F"/>
+            <a:srgbClr val="6C757D"/>
           </a:solidFill>
           <a:ln w="4445">
             <a:solidFill>
@@ -35490,7 +35490,7 @@
             <a:avLst/>
           </a:prstGeom>
           <a:solidFill>
-            <a:srgbClr val="0A7D6E"/>
+            <a:srgbClr val="6C757D"/>
           </a:solidFill>
           <a:ln w="4445">
             <a:solidFill>
@@ -35536,7 +35536,7 @@
             <a:avLst/>
           </a:prstGeom>
           <a:solidFill>
-            <a:srgbClr val="C53E1F"/>
+            <a:srgbClr val="6C757D"/>
           </a:solidFill>
           <a:ln w="4445">
             <a:solidFill>
@@ -35582,7 +35582,7 @@
             <a:avLst/>
           </a:prstGeom>
           <a:solidFill>
-            <a:srgbClr val="0A7D6E"/>
+            <a:srgbClr val="6C757D"/>
           </a:solidFill>
           <a:ln w="4445">
             <a:solidFill>
@@ -35628,7 +35628,7 @@
             <a:avLst/>
           </a:prstGeom>
           <a:solidFill>
-            <a:srgbClr val="C53E1F"/>
+            <a:srgbClr val="6C757D"/>
           </a:solidFill>
           <a:ln w="4445">
             <a:solidFill>
@@ -35674,7 +35674,7 @@
             <a:avLst/>
           </a:prstGeom>
           <a:solidFill>
-            <a:srgbClr val="C53E1F"/>
+            <a:srgbClr val="6C757D"/>
           </a:solidFill>
           <a:ln w="4445">
             <a:solidFill>
@@ -35720,7 +35720,7 @@
             <a:avLst/>
           </a:prstGeom>
           <a:solidFill>
-            <a:srgbClr val="C53E1F"/>
+            <a:srgbClr val="6C757D"/>
           </a:solidFill>
           <a:ln w="4445">
             <a:solidFill>
@@ -35766,7 +35766,7 @@
             <a:avLst/>
           </a:prstGeom>
           <a:solidFill>
-            <a:srgbClr val="0A7D6E"/>
+            <a:srgbClr val="6C757D"/>
           </a:solidFill>
           <a:ln w="4445">
             <a:solidFill>
@@ -35812,7 +35812,7 @@
             <a:avLst/>
           </a:prstGeom>
           <a:solidFill>
-            <a:srgbClr val="0A7D6E"/>
+            <a:srgbClr val="6C757D"/>
           </a:solidFill>
           <a:ln w="4445">
             <a:solidFill>
@@ -35858,7 +35858,7 @@
             <a:avLst/>
           </a:prstGeom>
           <a:solidFill>
-            <a:srgbClr val="C53E1F"/>
+            <a:srgbClr val="6C757D"/>
           </a:solidFill>
           <a:ln w="4445">
             <a:solidFill>
@@ -35904,7 +35904,7 @@
             <a:avLst/>
           </a:prstGeom>
           <a:solidFill>
-            <a:srgbClr val="0A7D6E"/>
+            <a:srgbClr val="6C757D"/>
           </a:solidFill>
           <a:ln w="4445">
             <a:solidFill>
@@ -35950,7 +35950,7 @@
             <a:avLst/>
           </a:prstGeom>
           <a:solidFill>
-            <a:srgbClr val="0A7D6E"/>
+            <a:srgbClr val="6C757D"/>
           </a:solidFill>
           <a:ln w="4445">
             <a:solidFill>
@@ -35996,7 +35996,7 @@
             <a:avLst/>
           </a:prstGeom>
           <a:solidFill>
-            <a:srgbClr val="0A7D6E"/>
+            <a:srgbClr val="6C757D"/>
           </a:solidFill>
           <a:ln w="4445">
             <a:solidFill>
@@ -36042,7 +36042,7 @@
             <a:avLst/>
           </a:prstGeom>
           <a:solidFill>
-            <a:srgbClr val="C53E1F"/>
+            <a:srgbClr val="6C757D"/>
           </a:solidFill>
           <a:ln w="4445">
             <a:solidFill>
@@ -36088,7 +36088,7 @@
             <a:avLst/>
           </a:prstGeom>
           <a:solidFill>
-            <a:srgbClr val="0A7D6E"/>
+            <a:srgbClr val="6C757D"/>
           </a:solidFill>
           <a:ln w="4445">
             <a:solidFill>
@@ -36134,7 +36134,7 @@
             <a:avLst/>
           </a:prstGeom>
           <a:solidFill>
-            <a:srgbClr val="C53E1F"/>
+            <a:srgbClr val="6C757D"/>
           </a:solidFill>
           <a:ln w="4445">
             <a:solidFill>
@@ -36180,7 +36180,7 @@
             <a:avLst/>
           </a:prstGeom>
           <a:solidFill>
-            <a:srgbClr val="0A7D6E"/>
+            <a:srgbClr val="6C757D"/>
           </a:solidFill>
           <a:ln w="4445">
             <a:solidFill>
@@ -36226,7 +36226,7 @@
             <a:avLst/>
           </a:prstGeom>
           <a:solidFill>
-            <a:srgbClr val="C53E1F"/>
+            <a:srgbClr val="6C757D"/>
           </a:solidFill>
           <a:ln w="4445">
             <a:solidFill>
@@ -37836,7 +37836,7 @@
             <a:r>
               <a:rPr sz="700" b="1" i="0">
                 <a:solidFill>
-                  <a:srgbClr val="C53E1F"/>
+                  <a:srgbClr val="6C757D"/>
                 </a:solidFill>
                 <a:latin typeface="Arial"/>
               </a:rPr>
@@ -37872,7 +37872,7 @@
             <a:r>
               <a:rPr sz="700" b="1" i="0">
                 <a:solidFill>
-                  <a:srgbClr val="0A7D6E"/>
+                  <a:srgbClr val="6C757D"/>
                 </a:solidFill>
                 <a:latin typeface="Arial"/>
               </a:rPr>
@@ -37908,7 +37908,7 @@
             <a:r>
               <a:rPr sz="700" b="1" i="0">
                 <a:solidFill>
-                  <a:srgbClr val="0A7D6E"/>
+                  <a:srgbClr val="6C757D"/>
                 </a:solidFill>
                 <a:latin typeface="Arial"/>
               </a:rPr>
@@ -37944,7 +37944,7 @@
             <a:r>
               <a:rPr sz="700" b="1" i="0">
                 <a:solidFill>
-                  <a:srgbClr val="0A7D6E"/>
+                  <a:srgbClr val="6C757D"/>
                 </a:solidFill>
                 <a:latin typeface="Arial"/>
               </a:rPr>
@@ -37980,7 +37980,7 @@
             <a:r>
               <a:rPr sz="700" b="1" i="0">
                 <a:solidFill>
-                  <a:srgbClr val="0A7D6E"/>
+                  <a:srgbClr val="6C757D"/>
                 </a:solidFill>
                 <a:latin typeface="Arial"/>
               </a:rPr>
@@ -38016,7 +38016,7 @@
             <a:r>
               <a:rPr sz="700" b="1" i="0">
                 <a:solidFill>
-                  <a:srgbClr val="C53E1F"/>
+                  <a:srgbClr val="6C757D"/>
                 </a:solidFill>
                 <a:latin typeface="Arial"/>
               </a:rPr>
@@ -38052,7 +38052,7 @@
             <a:r>
               <a:rPr sz="700" b="1" i="0">
                 <a:solidFill>
-                  <a:srgbClr val="C53E1F"/>
+                  <a:srgbClr val="6C757D"/>
                 </a:solidFill>
                 <a:latin typeface="Arial"/>
               </a:rPr>
@@ -38088,7 +38088,7 @@
             <a:r>
               <a:rPr sz="700" b="1" i="0">
                 <a:solidFill>
-                  <a:srgbClr val="0A7D6E"/>
+                  <a:srgbClr val="6C757D"/>
                 </a:solidFill>
                 <a:latin typeface="Arial"/>
               </a:rPr>
@@ -38124,7 +38124,7 @@
             <a:r>
               <a:rPr sz="700" b="1" i="0">
                 <a:solidFill>
-                  <a:srgbClr val="0A7D6E"/>
+                  <a:srgbClr val="6C757D"/>
                 </a:solidFill>
                 <a:latin typeface="Arial"/>
               </a:rPr>
@@ -38160,7 +38160,7 @@
             <a:r>
               <a:rPr sz="700" b="1" i="0">
                 <a:solidFill>
-                  <a:srgbClr val="0A7D6E"/>
+                  <a:srgbClr val="6C757D"/>
                 </a:solidFill>
                 <a:latin typeface="Arial"/>
               </a:rPr>
@@ -38744,7 +38744,7 @@
             <a:avLst/>
           </a:prstGeom>
           <a:solidFill>
-            <a:srgbClr val="0A7D6E"/>
+            <a:srgbClr val="6C757D"/>
           </a:solidFill>
           <a:ln w="3810">
             <a:solidFill>
@@ -38806,7 +38806,7 @@
                 </a:solidFill>
                 <a:latin typeface="Arial"/>
               </a:rPr>
-              <a:t>Other, up-good  (n = 106)</a:t>
+              <a:t>Other (no pathway)  (n = 206)</a:t>
             </a:r>
           </a:p>
         </p:txBody>
@@ -38819,14 +38819,14 @@
         </p:nvSpPr>
         <p:spPr>
           <a:xfrm>
-            <a:off x="5753960" y="5564984"/>
-            <a:ext cx="44000" cy="44000"/>
-          </a:xfrm>
-          <a:prstGeom prst="ellipse">
-            <a:avLst/>
-          </a:prstGeom>
-          <a:solidFill>
-            <a:srgbClr val="C53E1F"/>
+            <a:off x="5757960" y="5568984"/>
+            <a:ext cx="36000" cy="36000"/>
+          </a:xfrm>
+          <a:prstGeom prst="ellipse">
+            <a:avLst/>
+          </a:prstGeom>
+          <a:solidFill>
+            <a:srgbClr val="DDE2E8"/>
           </a:solidFill>
           <a:ln w="3810">
             <a:solidFill>
@@ -38866,88 +38866,6 @@
         <p:spPr>
           <a:xfrm>
             <a:off x="5913120" y="5504688"/>
-            <a:ext cx="1950720" cy="164592"/>
-          </a:xfrm>
-          <a:prstGeom prst="rect">
-            <a:avLst/>
-          </a:prstGeom>
-          <a:noFill/>
-          <a:effectLst/>
-        </p:spPr>
-        <p:txBody>
-          <a:bodyPr wrap="square" lIns="0" rIns="0" tIns="0" bIns="0" anchor="ctr">
-            <a:spAutoFit/>
-          </a:bodyPr>
-          <a:lstStyle/>
-          <a:p>
-            <a:pPr algn="l"/>
-            <a:r>
-              <a:rPr sz="750" b="0" i="0">
-                <a:solidFill>
-                  <a:srgbClr val="0E2A47"/>
-                </a:solidFill>
-                <a:latin typeface="Arial"/>
-              </a:rPr>
-              <a:t>Other, up-poor  (n = 100)</a:t>
-            </a:r>
-          </a:p>
-        </p:txBody>
-      </p:sp>
-      <p:sp>
-        <p:nvSpPr>
-          <p:cNvPr id="820" name="Oval 819"/>
-          <p:cNvSpPr/>
-          <p:nvPr/>
-        </p:nvSpPr>
-        <p:spPr>
-          <a:xfrm>
-            <a:off x="1307880" y="5815872"/>
-            <a:ext cx="36000" cy="36000"/>
-          </a:xfrm>
-          <a:prstGeom prst="ellipse">
-            <a:avLst/>
-          </a:prstGeom>
-          <a:solidFill>
-            <a:srgbClr val="DDE2E8"/>
-          </a:solidFill>
-          <a:ln w="3810">
-            <a:solidFill>
-              <a:srgbClr val="0E2A47"/>
-            </a:solidFill>
-          </a:ln>
-          <a:effectLst/>
-        </p:spPr>
-        <p:style>
-          <a:lnRef idx="1">
-            <a:schemeClr val="accent1"/>
-          </a:lnRef>
-          <a:fillRef idx="3">
-            <a:schemeClr val="accent1"/>
-          </a:fillRef>
-          <a:effectRef idx="2">
-            <a:schemeClr val="accent1"/>
-          </a:effectRef>
-          <a:fontRef idx="minor">
-            <a:schemeClr val="lt1"/>
-          </a:fontRef>
-        </p:style>
-        <p:txBody>
-          <a:bodyPr rtlCol="0" anchor="ctr"/>
-          <a:lstStyle/>
-          <a:p>
-            <a:pPr algn="ctr"/>
-          </a:p>
-        </p:txBody>
-      </p:sp>
-      <p:sp>
-        <p:nvSpPr>
-          <p:cNvPr id="821" name="TextBox 820"/>
-          <p:cNvSpPr txBox="1"/>
-          <p:nvPr/>
-        </p:nvSpPr>
-        <p:spPr>
-          <a:xfrm>
-            <a:off x="1463040" y="5751576"/>
             <a:ext cx="1950720" cy="164592"/>
           </a:xfrm>
           <a:prstGeom prst="rect">

--- a/260418_add/ppt/Fig4D_volcano_gene_pathwaycat_native_editable.pptx
+++ b/260418_add/ppt/Fig4D_volcano_gene_pathwaycat_native_editable.pptx
@@ -7,7 +7,7 @@
   <p:sldIdLst>
     <p:sldId id="256" r:id="rId7"/>
   </p:sldIdLst>
-  <p:sldSz cx="8229600" cy="6583680" type="screen4x3"/>
+  <p:sldSz cx="11430000" cy="6766560" type="screen4x3"/>
   <p:notesSz cx="6858000" cy="9144000"/>
   <p:defaultTextStyle>
     <a:defPPr>
@@ -3096,7 +3096,7 @@
         </p:nvCxnSpPr>
         <p:spPr>
           <a:xfrm>
-            <a:off x="1188720" y="4709160"/>
+            <a:off x="2560320" y="4800600"/>
             <a:ext cx="6675120" cy="0"/>
           </a:xfrm>
           <a:prstGeom prst="line">
@@ -3132,8 +3132,8 @@
         </p:nvCxnSpPr>
         <p:spPr>
           <a:xfrm>
-            <a:off x="1188720" y="411480"/>
-            <a:ext cx="0" cy="4297680"/>
+            <a:off x="2560320" y="411480"/>
+            <a:ext cx="0" cy="4389120"/>
           </a:xfrm>
           <a:prstGeom prst="line">
             <a:avLst/>
@@ -3168,7 +3168,7 @@
         </p:nvCxnSpPr>
         <p:spPr>
           <a:xfrm>
-            <a:off x="1317087" y="4709160"/>
+            <a:off x="2688687" y="4800600"/>
             <a:ext cx="0" cy="45720"/>
           </a:xfrm>
           <a:prstGeom prst="line">
@@ -3204,7 +3204,7 @@
         </p:nvSpPr>
         <p:spPr>
           <a:xfrm>
-            <a:off x="1134207" y="4764024"/>
+            <a:off x="2505807" y="4855464"/>
             <a:ext cx="365760" cy="164592"/>
           </a:xfrm>
           <a:prstGeom prst="rect">
@@ -3240,7 +3240,7 @@
         </p:nvCxnSpPr>
         <p:spPr>
           <a:xfrm>
-            <a:off x="1958926" y="4709160"/>
+            <a:off x="3330526" y="4800600"/>
             <a:ext cx="0" cy="45720"/>
           </a:xfrm>
           <a:prstGeom prst="line">
@@ -3276,7 +3276,7 @@
         </p:nvSpPr>
         <p:spPr>
           <a:xfrm>
-            <a:off x="1776046" y="4764024"/>
+            <a:off x="3147646" y="4855464"/>
             <a:ext cx="365760" cy="164592"/>
           </a:xfrm>
           <a:prstGeom prst="rect">
@@ -3312,7 +3312,7 @@
         </p:nvCxnSpPr>
         <p:spPr>
           <a:xfrm>
-            <a:off x="2600764" y="4709160"/>
+            <a:off x="3972364" y="4800600"/>
             <a:ext cx="0" cy="45720"/>
           </a:xfrm>
           <a:prstGeom prst="line">
@@ -3348,7 +3348,7 @@
         </p:nvSpPr>
         <p:spPr>
           <a:xfrm>
-            <a:off x="2417884" y="4764024"/>
+            <a:off x="3789484" y="4855464"/>
             <a:ext cx="365760" cy="164592"/>
           </a:xfrm>
           <a:prstGeom prst="rect">
@@ -3384,7 +3384,7 @@
         </p:nvCxnSpPr>
         <p:spPr>
           <a:xfrm>
-            <a:off x="3242603" y="4709160"/>
+            <a:off x="4614203" y="4800600"/>
             <a:ext cx="0" cy="45720"/>
           </a:xfrm>
           <a:prstGeom prst="line">
@@ -3420,7 +3420,7 @@
         </p:nvSpPr>
         <p:spPr>
           <a:xfrm>
-            <a:off x="3059723" y="4764024"/>
+            <a:off x="4431323" y="4855464"/>
             <a:ext cx="365760" cy="164592"/>
           </a:xfrm>
           <a:prstGeom prst="rect">
@@ -3456,7 +3456,7 @@
         </p:nvCxnSpPr>
         <p:spPr>
           <a:xfrm>
-            <a:off x="3884441" y="4709160"/>
+            <a:off x="5256041" y="4800600"/>
             <a:ext cx="0" cy="45720"/>
           </a:xfrm>
           <a:prstGeom prst="line">
@@ -3492,7 +3492,7 @@
         </p:nvSpPr>
         <p:spPr>
           <a:xfrm>
-            <a:off x="3701561" y="4764024"/>
+            <a:off x="5073161" y="4855464"/>
             <a:ext cx="365760" cy="164592"/>
           </a:xfrm>
           <a:prstGeom prst="rect">
@@ -3528,7 +3528,7 @@
         </p:nvCxnSpPr>
         <p:spPr>
           <a:xfrm>
-            <a:off x="4526280" y="4709160"/>
+            <a:off x="5897880" y="4800600"/>
             <a:ext cx="0" cy="45720"/>
           </a:xfrm>
           <a:prstGeom prst="line">
@@ -3564,7 +3564,7 @@
         </p:nvSpPr>
         <p:spPr>
           <a:xfrm>
-            <a:off x="4343400" y="4764024"/>
+            <a:off x="5715000" y="4855464"/>
             <a:ext cx="365760" cy="164592"/>
           </a:xfrm>
           <a:prstGeom prst="rect">
@@ -3600,7 +3600,7 @@
         </p:nvCxnSpPr>
         <p:spPr>
           <a:xfrm>
-            <a:off x="5168118" y="4709160"/>
+            <a:off x="6539718" y="4800600"/>
             <a:ext cx="0" cy="45720"/>
           </a:xfrm>
           <a:prstGeom prst="line">
@@ -3636,7 +3636,7 @@
         </p:nvSpPr>
         <p:spPr>
           <a:xfrm>
-            <a:off x="4985238" y="4764024"/>
+            <a:off x="6356838" y="4855464"/>
             <a:ext cx="365760" cy="164592"/>
           </a:xfrm>
           <a:prstGeom prst="rect">
@@ -3672,7 +3672,7 @@
         </p:nvCxnSpPr>
         <p:spPr>
           <a:xfrm>
-            <a:off x="5809956" y="4709160"/>
+            <a:off x="7181556" y="4800600"/>
             <a:ext cx="0" cy="45720"/>
           </a:xfrm>
           <a:prstGeom prst="line">
@@ -3708,7 +3708,7 @@
         </p:nvSpPr>
         <p:spPr>
           <a:xfrm>
-            <a:off x="5627076" y="4764024"/>
+            <a:off x="6998676" y="4855464"/>
             <a:ext cx="365760" cy="164592"/>
           </a:xfrm>
           <a:prstGeom prst="rect">
@@ -3744,7 +3744,7 @@
         </p:nvCxnSpPr>
         <p:spPr>
           <a:xfrm>
-            <a:off x="6451795" y="4709160"/>
+            <a:off x="7823395" y="4800600"/>
             <a:ext cx="0" cy="45720"/>
           </a:xfrm>
           <a:prstGeom prst="line">
@@ -3780,7 +3780,7 @@
         </p:nvSpPr>
         <p:spPr>
           <a:xfrm>
-            <a:off x="6268915" y="4764024"/>
+            <a:off x="7640515" y="4855464"/>
             <a:ext cx="365760" cy="164592"/>
           </a:xfrm>
           <a:prstGeom prst="rect">
@@ -3816,7 +3816,7 @@
         </p:nvCxnSpPr>
         <p:spPr>
           <a:xfrm>
-            <a:off x="7093633" y="4709160"/>
+            <a:off x="8465233" y="4800600"/>
             <a:ext cx="0" cy="45720"/>
           </a:xfrm>
           <a:prstGeom prst="line">
@@ -3852,7 +3852,7 @@
         </p:nvSpPr>
         <p:spPr>
           <a:xfrm>
-            <a:off x="6910753" y="4764024"/>
+            <a:off x="8282353" y="4855464"/>
             <a:ext cx="365760" cy="164592"/>
           </a:xfrm>
           <a:prstGeom prst="rect">
@@ -3888,7 +3888,7 @@
         </p:nvCxnSpPr>
         <p:spPr>
           <a:xfrm>
-            <a:off x="7735472" y="4709160"/>
+            <a:off x="9107072" y="4800600"/>
             <a:ext cx="0" cy="45720"/>
           </a:xfrm>
           <a:prstGeom prst="line">
@@ -3924,7 +3924,7 @@
         </p:nvSpPr>
         <p:spPr>
           <a:xfrm>
-            <a:off x="7552592" y="4764024"/>
+            <a:off x="8924192" y="4855464"/>
             <a:ext cx="365760" cy="164592"/>
           </a:xfrm>
           <a:prstGeom prst="rect">
@@ -3960,7 +3960,7 @@
         </p:nvCxnSpPr>
         <p:spPr>
           <a:xfrm>
-            <a:off x="1143000" y="4709160"/>
+            <a:off x="2514600" y="4800600"/>
             <a:ext cx="45720" cy="0"/>
           </a:xfrm>
           <a:prstGeom prst="line">
@@ -3996,7 +3996,7 @@
         </p:nvSpPr>
         <p:spPr>
           <a:xfrm>
-            <a:off x="777240" y="4626864"/>
+            <a:off x="2148840" y="4718304"/>
             <a:ext cx="347472" cy="164592"/>
           </a:xfrm>
           <a:prstGeom prst="rect">
@@ -4032,7 +4032,7 @@
         </p:nvCxnSpPr>
         <p:spPr>
           <a:xfrm>
-            <a:off x="1143000" y="4203550"/>
+            <a:off x="2514600" y="4284232"/>
             <a:ext cx="45720" cy="0"/>
           </a:xfrm>
           <a:prstGeom prst="line">
@@ -4068,7 +4068,7 @@
         </p:nvSpPr>
         <p:spPr>
           <a:xfrm>
-            <a:off x="777240" y="4121254"/>
+            <a:off x="2148840" y="4201936"/>
             <a:ext cx="347472" cy="164592"/>
           </a:xfrm>
           <a:prstGeom prst="rect">
@@ -4104,7 +4104,7 @@
         </p:nvCxnSpPr>
         <p:spPr>
           <a:xfrm>
-            <a:off x="1143000" y="3697941"/>
+            <a:off x="2514600" y="3767865"/>
             <a:ext cx="45720" cy="0"/>
           </a:xfrm>
           <a:prstGeom prst="line">
@@ -4140,7 +4140,7 @@
         </p:nvSpPr>
         <p:spPr>
           <a:xfrm>
-            <a:off x="777240" y="3615645"/>
+            <a:off x="2148840" y="3685569"/>
             <a:ext cx="347472" cy="164592"/>
           </a:xfrm>
           <a:prstGeom prst="rect">
@@ -4176,7 +4176,7 @@
         </p:nvCxnSpPr>
         <p:spPr>
           <a:xfrm>
-            <a:off x="1143000" y="3192331"/>
+            <a:off x="2514600" y="3251498"/>
             <a:ext cx="45720" cy="0"/>
           </a:xfrm>
           <a:prstGeom prst="line">
@@ -4212,7 +4212,7 @@
         </p:nvSpPr>
         <p:spPr>
           <a:xfrm>
-            <a:off x="777240" y="3110035"/>
+            <a:off x="2148840" y="3169202"/>
             <a:ext cx="347472" cy="164592"/>
           </a:xfrm>
           <a:prstGeom prst="rect">
@@ -4248,7 +4248,7 @@
         </p:nvCxnSpPr>
         <p:spPr>
           <a:xfrm>
-            <a:off x="1143000" y="2686722"/>
+            <a:off x="2514600" y="2735131"/>
             <a:ext cx="45720" cy="0"/>
           </a:xfrm>
           <a:prstGeom prst="line">
@@ -4284,7 +4284,7 @@
         </p:nvSpPr>
         <p:spPr>
           <a:xfrm>
-            <a:off x="777240" y="2604426"/>
+            <a:off x="2148840" y="2652835"/>
             <a:ext cx="347472" cy="164592"/>
           </a:xfrm>
           <a:prstGeom prst="rect">
@@ -4320,7 +4320,7 @@
         </p:nvCxnSpPr>
         <p:spPr>
           <a:xfrm>
-            <a:off x="1143000" y="2181112"/>
+            <a:off x="2514600" y="2218764"/>
             <a:ext cx="45720" cy="0"/>
           </a:xfrm>
           <a:prstGeom prst="line">
@@ -4356,7 +4356,7 @@
         </p:nvSpPr>
         <p:spPr>
           <a:xfrm>
-            <a:off x="777240" y="2098816"/>
+            <a:off x="2148840" y="2136468"/>
             <a:ext cx="347472" cy="164592"/>
           </a:xfrm>
           <a:prstGeom prst="rect">
@@ -4392,7 +4392,7 @@
         </p:nvCxnSpPr>
         <p:spPr>
           <a:xfrm>
-            <a:off x="1143000" y="1675503"/>
+            <a:off x="2514600" y="1702397"/>
             <a:ext cx="45720" cy="0"/>
           </a:xfrm>
           <a:prstGeom prst="line">
@@ -4428,7 +4428,7 @@
         </p:nvSpPr>
         <p:spPr>
           <a:xfrm>
-            <a:off x="777240" y="1593207"/>
+            <a:off x="2148840" y="1620101"/>
             <a:ext cx="347472" cy="164592"/>
           </a:xfrm>
           <a:prstGeom prst="rect">
@@ -4464,7 +4464,7 @@
         </p:nvCxnSpPr>
         <p:spPr>
           <a:xfrm>
-            <a:off x="1143000" y="1169894"/>
+            <a:off x="2514600" y="1186030"/>
             <a:ext cx="45720" cy="0"/>
           </a:xfrm>
           <a:prstGeom prst="line">
@@ -4500,7 +4500,7 @@
         </p:nvSpPr>
         <p:spPr>
           <a:xfrm>
-            <a:off x="777240" y="1087598"/>
+            <a:off x="2148840" y="1103734"/>
             <a:ext cx="347472" cy="164592"/>
           </a:xfrm>
           <a:prstGeom prst="rect">
@@ -4536,7 +4536,7 @@
         </p:nvCxnSpPr>
         <p:spPr>
           <a:xfrm>
-            <a:off x="1143000" y="664284"/>
+            <a:off x="2514600" y="669663"/>
             <a:ext cx="45720" cy="0"/>
           </a:xfrm>
           <a:prstGeom prst="line">
@@ -4572,7 +4572,7 @@
         </p:nvSpPr>
         <p:spPr>
           <a:xfrm>
-            <a:off x="777240" y="581988"/>
+            <a:off x="2148840" y="587367"/>
             <a:ext cx="347472" cy="164592"/>
           </a:xfrm>
           <a:prstGeom prst="rect">
@@ -4608,7 +4608,7 @@
         </p:nvSpPr>
         <p:spPr>
           <a:xfrm>
-            <a:off x="1188720" y="4965192"/>
+            <a:off x="2560320" y="5056632"/>
             <a:ext cx="6675120" cy="201168"/>
           </a:xfrm>
           <a:prstGeom prst="rect">
@@ -4644,7 +4644,7 @@
         </p:nvSpPr>
         <p:spPr>
           <a:xfrm rot="16200000">
-            <a:off x="45720" y="2459736"/>
+            <a:off x="1417320" y="2505456"/>
             <a:ext cx="1280160" cy="201168"/>
           </a:xfrm>
           <a:prstGeom prst="rect">
@@ -4680,8 +4680,8 @@
         </p:nvCxnSpPr>
         <p:spPr>
           <a:xfrm>
-            <a:off x="4526280" y="411480"/>
-            <a:ext cx="0" cy="4297680"/>
+            <a:off x="5897880" y="411480"/>
+            <a:ext cx="0" cy="4389120"/>
           </a:xfrm>
           <a:prstGeom prst="line">
             <a:avLst/>
@@ -4716,7 +4716,7 @@
         </p:nvCxnSpPr>
         <p:spPr>
           <a:xfrm>
-            <a:off x="1188720" y="3697941"/>
+            <a:off x="2560320" y="3767865"/>
             <a:ext cx="6675120" cy="0"/>
           </a:xfrm>
           <a:prstGeom prst="line">
@@ -4753,7 +4753,7 @@
         </p:nvSpPr>
         <p:spPr>
           <a:xfrm>
-            <a:off x="1234440" y="3515061"/>
+            <a:off x="2606040" y="3584985"/>
             <a:ext cx="822960" cy="164592"/>
           </a:xfrm>
           <a:prstGeom prst="rect">
@@ -4789,7 +4789,7 @@
         </p:nvSpPr>
         <p:spPr>
           <a:xfrm>
-            <a:off x="4514421" y="4688526"/>
+            <a:off x="5886021" y="4779867"/>
             <a:ext cx="32000" cy="32000"/>
           </a:xfrm>
           <a:prstGeom prst="ellipse">
@@ -4833,7 +4833,7 @@
         </p:nvSpPr>
         <p:spPr>
           <a:xfrm>
-            <a:off x="3825052" y="4284819"/>
+            <a:off x="5196652" y="4367571"/>
             <a:ext cx="32000" cy="32000"/>
           </a:xfrm>
           <a:prstGeom prst="ellipse">
@@ -4877,7 +4877,7 @@
         </p:nvSpPr>
         <p:spPr>
           <a:xfrm>
-            <a:off x="4675248" y="4661893"/>
+            <a:off x="6046848" y="4752667"/>
             <a:ext cx="32000" cy="32000"/>
           </a:xfrm>
           <a:prstGeom prst="ellipse">
@@ -4921,7 +4921,7 @@
         </p:nvSpPr>
         <p:spPr>
           <a:xfrm>
-            <a:off x="4394517" y="4459701"/>
+            <a:off x="5766117" y="4546174"/>
             <a:ext cx="32000" cy="32000"/>
           </a:xfrm>
           <a:prstGeom prst="ellipse">
@@ -4965,7 +4965,7 @@
         </p:nvSpPr>
         <p:spPr>
           <a:xfrm>
-            <a:off x="4355448" y="4572730"/>
+            <a:off x="5727048" y="4661608"/>
             <a:ext cx="32000" cy="32000"/>
           </a:xfrm>
           <a:prstGeom prst="ellipse">
@@ -5009,7 +5009,7 @@
         </p:nvSpPr>
         <p:spPr>
           <a:xfrm>
-            <a:off x="4500933" y="4677828"/>
+            <a:off x="5872533" y="4768941"/>
             <a:ext cx="32000" cy="32000"/>
           </a:xfrm>
           <a:prstGeom prst="ellipse">
@@ -5053,7 +5053,7 @@
         </p:nvSpPr>
         <p:spPr>
           <a:xfrm>
-            <a:off x="4158709" y="4496501"/>
+            <a:off x="5530309" y="4583757"/>
             <a:ext cx="32000" cy="32000"/>
           </a:xfrm>
           <a:prstGeom prst="ellipse">
@@ -5097,7 +5097,7 @@
         </p:nvSpPr>
         <p:spPr>
           <a:xfrm>
-            <a:off x="4617505" y="4641983"/>
+            <a:off x="5989105" y="4732334"/>
             <a:ext cx="32000" cy="32000"/>
           </a:xfrm>
           <a:prstGeom prst="ellipse">
@@ -5141,7 +5141,7 @@
         </p:nvSpPr>
         <p:spPr>
           <a:xfrm>
-            <a:off x="4662306" y="4646925"/>
+            <a:off x="6033906" y="4737381"/>
             <a:ext cx="32000" cy="32000"/>
           </a:xfrm>
           <a:prstGeom prst="ellipse">
@@ -5185,7 +5185,7 @@
         </p:nvSpPr>
         <p:spPr>
           <a:xfrm>
-            <a:off x="4529881" y="4673285"/>
+            <a:off x="5901481" y="4764302"/>
             <a:ext cx="32000" cy="32000"/>
           </a:xfrm>
           <a:prstGeom prst="ellipse">
@@ -5229,7 +5229,7 @@
         </p:nvSpPr>
         <p:spPr>
           <a:xfrm>
-            <a:off x="4480171" y="4651429"/>
+            <a:off x="5851771" y="4741981"/>
             <a:ext cx="32000" cy="32000"/>
           </a:xfrm>
           <a:prstGeom prst="ellipse">
@@ -5273,7 +5273,7 @@
         </p:nvSpPr>
         <p:spPr>
           <a:xfrm>
-            <a:off x="3832882" y="4467377"/>
+            <a:off x="5204482" y="4554013"/>
             <a:ext cx="32000" cy="32000"/>
           </a:xfrm>
           <a:prstGeom prst="ellipse">
@@ -5317,7 +5317,7 @@
         </p:nvSpPr>
         <p:spPr>
           <a:xfrm>
-            <a:off x="4162570" y="4406269"/>
+            <a:off x="5534170" y="4491605"/>
             <a:ext cx="32000" cy="32000"/>
           </a:xfrm>
           <a:prstGeom prst="ellipse">
@@ -5361,7 +5361,7 @@
         </p:nvSpPr>
         <p:spPr>
           <a:xfrm>
-            <a:off x="4643120" y="4374717"/>
+            <a:off x="6014720" y="4459382"/>
             <a:ext cx="32000" cy="32000"/>
           </a:xfrm>
           <a:prstGeom prst="ellipse">
@@ -5405,7 +5405,7 @@
         </p:nvSpPr>
         <p:spPr>
           <a:xfrm>
-            <a:off x="4227365" y="4358201"/>
+            <a:off x="5598965" y="4442514"/>
             <a:ext cx="32000" cy="32000"/>
           </a:xfrm>
           <a:prstGeom prst="ellipse">
@@ -5449,7 +5449,7 @@
         </p:nvSpPr>
         <p:spPr>
           <a:xfrm>
-            <a:off x="5178539" y="4471879"/>
+            <a:off x="6550139" y="4558611"/>
             <a:ext cx="32000" cy="32000"/>
           </a:xfrm>
           <a:prstGeom prst="ellipse">
@@ -5493,7 +5493,7 @@
         </p:nvSpPr>
         <p:spPr>
           <a:xfrm>
-            <a:off x="4122735" y="4507104"/>
+            <a:off x="5494335" y="4594585"/>
             <a:ext cx="32000" cy="32000"/>
           </a:xfrm>
           <a:prstGeom prst="ellipse">
@@ -5537,7 +5537,7 @@
         </p:nvSpPr>
         <p:spPr>
           <a:xfrm>
-            <a:off x="4453820" y="4602188"/>
+            <a:off x="5825420" y="4691693"/>
             <a:ext cx="32000" cy="32000"/>
           </a:xfrm>
           <a:prstGeom prst="ellipse">
@@ -5581,7 +5581,7 @@
         </p:nvSpPr>
         <p:spPr>
           <a:xfrm>
-            <a:off x="4395864" y="4645816"/>
+            <a:off x="5767464" y="4736249"/>
             <a:ext cx="32000" cy="32000"/>
           </a:xfrm>
           <a:prstGeom prst="ellipse">
@@ -5625,7 +5625,7 @@
         </p:nvSpPr>
         <p:spPr>
           <a:xfrm>
-            <a:off x="4571804" y="4611407"/>
+            <a:off x="5943404" y="4701107"/>
             <a:ext cx="32000" cy="32000"/>
           </a:xfrm>
           <a:prstGeom prst="ellipse">
@@ -5669,7 +5669,7 @@
         </p:nvSpPr>
         <p:spPr>
           <a:xfrm>
-            <a:off x="4249042" y="4396261"/>
+            <a:off x="5620642" y="4481384"/>
             <a:ext cx="32000" cy="32000"/>
           </a:xfrm>
           <a:prstGeom prst="ellipse">
@@ -5713,7 +5713,7 @@
         </p:nvSpPr>
         <p:spPr>
           <a:xfrm>
-            <a:off x="4720168" y="4106250"/>
+            <a:off x="6091768" y="4185203"/>
             <a:ext cx="32000" cy="32000"/>
           </a:xfrm>
           <a:prstGeom prst="ellipse">
@@ -5757,7 +5757,7 @@
         </p:nvSpPr>
         <p:spPr>
           <a:xfrm>
-            <a:off x="4997382" y="4378539"/>
+            <a:off x="6368982" y="4463285"/>
             <a:ext cx="32000" cy="32000"/>
           </a:xfrm>
           <a:prstGeom prst="ellipse">
@@ -5801,7 +5801,7 @@
         </p:nvSpPr>
         <p:spPr>
           <a:xfrm>
-            <a:off x="5133719" y="3914816"/>
+            <a:off x="6505319" y="3989695"/>
             <a:ext cx="32000" cy="32000"/>
           </a:xfrm>
           <a:prstGeom prst="ellipse">
@@ -5845,7 +5845,7 @@
         </p:nvSpPr>
         <p:spPr>
           <a:xfrm>
-            <a:off x="4545883" y="4670783"/>
+            <a:off x="5917483" y="4761747"/>
             <a:ext cx="32000" cy="32000"/>
           </a:xfrm>
           <a:prstGeom prst="ellipse">
@@ -5889,7 +5889,7 @@
         </p:nvSpPr>
         <p:spPr>
           <a:xfrm>
-            <a:off x="5347471" y="4362449"/>
+            <a:off x="6719071" y="4446853"/>
             <a:ext cx="32000" cy="32000"/>
           </a:xfrm>
           <a:prstGeom prst="ellipse">
@@ -5933,7 +5933,7 @@
         </p:nvSpPr>
         <p:spPr>
           <a:xfrm>
-            <a:off x="5048269" y="4312244"/>
+            <a:off x="6419869" y="4395580"/>
             <a:ext cx="32000" cy="32000"/>
           </a:xfrm>
           <a:prstGeom prst="ellipse">
@@ -5977,7 +5977,7 @@
         </p:nvSpPr>
         <p:spPr>
           <a:xfrm>
-            <a:off x="3849380" y="4180587"/>
+            <a:off x="5220980" y="4261121"/>
             <a:ext cx="32000" cy="32000"/>
           </a:xfrm>
           <a:prstGeom prst="ellipse">
@@ -6021,7 +6021,7 @@
         </p:nvSpPr>
         <p:spPr>
           <a:xfrm>
-            <a:off x="3936844" y="4552107"/>
+            <a:off x="5308444" y="4640545"/>
             <a:ext cx="32000" cy="32000"/>
           </a:xfrm>
           <a:prstGeom prst="ellipse">
@@ -6065,7 +6065,7 @@
         </p:nvSpPr>
         <p:spPr>
           <a:xfrm>
-            <a:off x="4187840" y="4221311"/>
+            <a:off x="5559440" y="4302712"/>
             <a:ext cx="32000" cy="32000"/>
           </a:xfrm>
           <a:prstGeom prst="ellipse">
@@ -6109,7 +6109,7 @@
         </p:nvSpPr>
         <p:spPr>
           <a:xfrm>
-            <a:off x="4377105" y="4566966"/>
+            <a:off x="5748705" y="4655721"/>
             <a:ext cx="32000" cy="32000"/>
           </a:xfrm>
           <a:prstGeom prst="ellipse">
@@ -6153,7 +6153,7 @@
         </p:nvSpPr>
         <p:spPr>
           <a:xfrm>
-            <a:off x="4601515" y="4496503"/>
+            <a:off x="5973115" y="4583759"/>
             <a:ext cx="32000" cy="32000"/>
           </a:xfrm>
           <a:prstGeom prst="ellipse">
@@ -6197,7 +6197,7 @@
         </p:nvSpPr>
         <p:spPr>
           <a:xfrm>
-            <a:off x="4523546" y="4673501"/>
+            <a:off x="5895146" y="4764523"/>
             <a:ext cx="32000" cy="32000"/>
           </a:xfrm>
           <a:prstGeom prst="ellipse">
@@ -6241,7 +6241,7 @@
         </p:nvSpPr>
         <p:spPr>
           <a:xfrm>
-            <a:off x="4446512" y="4598732"/>
+            <a:off x="5818112" y="4688163"/>
             <a:ext cx="32000" cy="32000"/>
           </a:xfrm>
           <a:prstGeom prst="ellipse">
@@ -6285,7 +6285,7 @@
         </p:nvSpPr>
         <p:spPr>
           <a:xfrm>
-            <a:off x="4399101" y="4540539"/>
+            <a:off x="5770701" y="4628731"/>
             <a:ext cx="32000" cy="32000"/>
           </a:xfrm>
           <a:prstGeom prst="ellipse">
@@ -6329,7 +6329,7 @@
         </p:nvSpPr>
         <p:spPr>
           <a:xfrm>
-            <a:off x="4477977" y="4667822"/>
+            <a:off x="5849577" y="4758723"/>
             <a:ext cx="32000" cy="32000"/>
           </a:xfrm>
           <a:prstGeom prst="ellipse">
@@ -6373,7 +6373,7 @@
         </p:nvSpPr>
         <p:spPr>
           <a:xfrm>
-            <a:off x="4650932" y="4400827"/>
+            <a:off x="6022532" y="4486048"/>
             <a:ext cx="32000" cy="32000"/>
           </a:xfrm>
           <a:prstGeom prst="ellipse">
@@ -6417,7 +6417,7 @@
         </p:nvSpPr>
         <p:spPr>
           <a:xfrm>
-            <a:off x="4722252" y="4589170"/>
+            <a:off x="6093852" y="4678398"/>
             <a:ext cx="32000" cy="32000"/>
           </a:xfrm>
           <a:prstGeom prst="ellipse">
@@ -6461,7 +6461,7 @@
         </p:nvSpPr>
         <p:spPr>
           <a:xfrm>
-            <a:off x="4541475" y="4681143"/>
+            <a:off x="5913075" y="4772327"/>
             <a:ext cx="32000" cy="32000"/>
           </a:xfrm>
           <a:prstGeom prst="ellipse">
@@ -6505,7 +6505,7 @@
         </p:nvSpPr>
         <p:spPr>
           <a:xfrm>
-            <a:off x="4552275" y="4609998"/>
+            <a:off x="5923875" y="4699669"/>
             <a:ext cx="32000" cy="32000"/>
           </a:xfrm>
           <a:prstGeom prst="ellipse">
@@ -6549,7 +6549,7 @@
         </p:nvSpPr>
         <p:spPr>
           <a:xfrm>
-            <a:off x="4726351" y="4606612"/>
+            <a:off x="6097951" y="4696210"/>
             <a:ext cx="32000" cy="32000"/>
           </a:xfrm>
           <a:prstGeom prst="ellipse">
@@ -6593,7 +6593,7 @@
         </p:nvSpPr>
         <p:spPr>
           <a:xfrm>
-            <a:off x="4741543" y="4055107"/>
+            <a:off x="6113143" y="4132971"/>
             <a:ext cx="32000" cy="32000"/>
           </a:xfrm>
           <a:prstGeom prst="ellipse">
@@ -6637,7 +6637,7 @@
         </p:nvSpPr>
         <p:spPr>
           <a:xfrm>
-            <a:off x="4823245" y="4051450"/>
+            <a:off x="6194845" y="4129236"/>
             <a:ext cx="32000" cy="32000"/>
           </a:xfrm>
           <a:prstGeom prst="ellipse">
@@ -6681,7 +6681,7 @@
         </p:nvSpPr>
         <p:spPr>
           <a:xfrm>
-            <a:off x="4365704" y="4654833"/>
+            <a:off x="5737304" y="4745458"/>
             <a:ext cx="32000" cy="32000"/>
           </a:xfrm>
           <a:prstGeom prst="ellipse">
@@ -6725,7 +6725,7 @@
         </p:nvSpPr>
         <p:spPr>
           <a:xfrm>
-            <a:off x="4644764" y="4463983"/>
+            <a:off x="6016364" y="4550547"/>
             <a:ext cx="32000" cy="32000"/>
           </a:xfrm>
           <a:prstGeom prst="ellipse">
@@ -6769,7 +6769,7 @@
         </p:nvSpPr>
         <p:spPr>
           <a:xfrm>
-            <a:off x="4563704" y="4668203"/>
+            <a:off x="5935304" y="4759112"/>
             <a:ext cx="32000" cy="32000"/>
           </a:xfrm>
           <a:prstGeom prst="ellipse">
@@ -6813,7 +6813,7 @@
         </p:nvSpPr>
         <p:spPr>
           <a:xfrm>
-            <a:off x="4641893" y="4374220"/>
+            <a:off x="6013493" y="4458874"/>
             <a:ext cx="32000" cy="32000"/>
           </a:xfrm>
           <a:prstGeom prst="ellipse">
@@ -6857,7 +6857,7 @@
         </p:nvSpPr>
         <p:spPr>
           <a:xfrm>
-            <a:off x="4025068" y="4315511"/>
+            <a:off x="5396668" y="4398916"/>
             <a:ext cx="32000" cy="32000"/>
           </a:xfrm>
           <a:prstGeom prst="ellipse">
@@ -6901,7 +6901,7 @@
         </p:nvSpPr>
         <p:spPr>
           <a:xfrm>
-            <a:off x="4507906" y="4690295"/>
+            <a:off x="5879506" y="4781674"/>
             <a:ext cx="32000" cy="32000"/>
           </a:xfrm>
           <a:prstGeom prst="ellipse">
@@ -6945,7 +6945,7 @@
         </p:nvSpPr>
         <p:spPr>
           <a:xfrm>
-            <a:off x="4642410" y="4642530"/>
+            <a:off x="6014010" y="4732893"/>
             <a:ext cx="32000" cy="32000"/>
           </a:xfrm>
           <a:prstGeom prst="ellipse">
@@ -6989,7 +6989,7 @@
         </p:nvSpPr>
         <p:spPr>
           <a:xfrm>
-            <a:off x="4450550" y="4625061"/>
+            <a:off x="5822150" y="4715053"/>
             <a:ext cx="32000" cy="32000"/>
           </a:xfrm>
           <a:prstGeom prst="ellipse">
@@ -7033,7 +7033,7 @@
         </p:nvSpPr>
         <p:spPr>
           <a:xfrm>
-            <a:off x="4441931" y="4666008"/>
+            <a:off x="5813531" y="4756870"/>
             <a:ext cx="32000" cy="32000"/>
           </a:xfrm>
           <a:prstGeom prst="ellipse">
@@ -7077,7 +7077,7 @@
         </p:nvSpPr>
         <p:spPr>
           <a:xfrm>
-            <a:off x="4409540" y="4499557"/>
+            <a:off x="5781140" y="4586878"/>
             <a:ext cx="32000" cy="32000"/>
           </a:xfrm>
           <a:prstGeom prst="ellipse">
@@ -7121,7 +7121,7 @@
         </p:nvSpPr>
         <p:spPr>
           <a:xfrm>
-            <a:off x="4617267" y="4254594"/>
+            <a:off x="5988867" y="4336703"/>
             <a:ext cx="32000" cy="32000"/>
           </a:xfrm>
           <a:prstGeom prst="ellipse">
@@ -7165,7 +7165,7 @@
         </p:nvSpPr>
         <p:spPr>
           <a:xfrm>
-            <a:off x="4427698" y="4587456"/>
+            <a:off x="5799298" y="4676647"/>
             <a:ext cx="32000" cy="32000"/>
           </a:xfrm>
           <a:prstGeom prst="ellipse">
@@ -7209,7 +7209,7 @@
         </p:nvSpPr>
         <p:spPr>
           <a:xfrm>
-            <a:off x="4003029" y="4252935"/>
+            <a:off x="5374629" y="4335009"/>
             <a:ext cx="32000" cy="32000"/>
           </a:xfrm>
           <a:prstGeom prst="ellipse">
@@ -7253,7 +7253,7 @@
         </p:nvSpPr>
         <p:spPr>
           <a:xfrm>
-            <a:off x="4554203" y="4624506"/>
+            <a:off x="5925803" y="4714486"/>
             <a:ext cx="32000" cy="32000"/>
           </a:xfrm>
           <a:prstGeom prst="ellipse">
@@ -7297,7 +7297,7 @@
         </p:nvSpPr>
         <p:spPr>
           <a:xfrm>
-            <a:off x="4615166" y="4526303"/>
+            <a:off x="5986766" y="4614193"/>
             <a:ext cx="32000" cy="32000"/>
           </a:xfrm>
           <a:prstGeom prst="ellipse">
@@ -7341,7 +7341,7 @@
         </p:nvSpPr>
         <p:spPr>
           <a:xfrm>
-            <a:off x="4743193" y="4372289"/>
+            <a:off x="6114793" y="4456902"/>
             <a:ext cx="32000" cy="32000"/>
           </a:xfrm>
           <a:prstGeom prst="ellipse">
@@ -7385,7 +7385,7 @@
         </p:nvSpPr>
         <p:spPr>
           <a:xfrm>
-            <a:off x="3845593" y="4458558"/>
+            <a:off x="5217193" y="4545007"/>
             <a:ext cx="32000" cy="32000"/>
           </a:xfrm>
           <a:prstGeom prst="ellipse">
@@ -7429,7 +7429,7 @@
         </p:nvSpPr>
         <p:spPr>
           <a:xfrm>
-            <a:off x="4980946" y="4412728"/>
+            <a:off x="6352546" y="4498201"/>
             <a:ext cx="32000" cy="32000"/>
           </a:xfrm>
           <a:prstGeom prst="ellipse">
@@ -7473,7 +7473,7 @@
         </p:nvSpPr>
         <p:spPr>
           <a:xfrm>
-            <a:off x="4270595" y="4331080"/>
+            <a:off x="5642195" y="4414816"/>
             <a:ext cx="32000" cy="32000"/>
           </a:xfrm>
           <a:prstGeom prst="ellipse">
@@ -7517,7 +7517,7 @@
         </p:nvSpPr>
         <p:spPr>
           <a:xfrm>
-            <a:off x="4904814" y="4611517"/>
+            <a:off x="6276414" y="4701220"/>
             <a:ext cx="32000" cy="32000"/>
           </a:xfrm>
           <a:prstGeom prst="ellipse">
@@ -7561,7 +7561,7 @@
         </p:nvSpPr>
         <p:spPr>
           <a:xfrm>
-            <a:off x="4784390" y="4546825"/>
+            <a:off x="6155990" y="4635151"/>
             <a:ext cx="32000" cy="32000"/>
           </a:xfrm>
           <a:prstGeom prst="ellipse">
@@ -7605,7 +7605,7 @@
         </p:nvSpPr>
         <p:spPr>
           <a:xfrm>
-            <a:off x="4469215" y="4639210"/>
+            <a:off x="5840815" y="4729503"/>
             <a:ext cx="32000" cy="32000"/>
           </a:xfrm>
           <a:prstGeom prst="ellipse">
@@ -7649,7 +7649,7 @@
         </p:nvSpPr>
         <p:spPr>
           <a:xfrm>
-            <a:off x="4608769" y="4340846"/>
+            <a:off x="5980369" y="4424790"/>
             <a:ext cx="32000" cy="32000"/>
           </a:xfrm>
           <a:prstGeom prst="ellipse">
@@ -7693,7 +7693,7 @@
         </p:nvSpPr>
         <p:spPr>
           <a:xfrm>
-            <a:off x="4471777" y="4597087"/>
+            <a:off x="5843377" y="4686483"/>
             <a:ext cx="32000" cy="32000"/>
           </a:xfrm>
           <a:prstGeom prst="ellipse">
@@ -7737,7 +7737,7 @@
         </p:nvSpPr>
         <p:spPr>
           <a:xfrm>
-            <a:off x="4601918" y="4554267"/>
+            <a:off x="5973518" y="4642751"/>
             <a:ext cx="32000" cy="32000"/>
           </a:xfrm>
           <a:prstGeom prst="ellipse">
@@ -7781,7 +7781,7 @@
         </p:nvSpPr>
         <p:spPr>
           <a:xfrm>
-            <a:off x="4401635" y="4559912"/>
+            <a:off x="5773235" y="4648517"/>
             <a:ext cx="32000" cy="32000"/>
           </a:xfrm>
           <a:prstGeom prst="ellipse">
@@ -7825,7 +7825,7 @@
         </p:nvSpPr>
         <p:spPr>
           <a:xfrm>
-            <a:off x="4556842" y="4629732"/>
+            <a:off x="5928442" y="4719823"/>
             <a:ext cx="32000" cy="32000"/>
           </a:xfrm>
           <a:prstGeom prst="ellipse">
@@ -7869,7 +7869,7 @@
         </p:nvSpPr>
         <p:spPr>
           <a:xfrm>
-            <a:off x="4646398" y="4525505"/>
+            <a:off x="6017998" y="4613378"/>
             <a:ext cx="32000" cy="32000"/>
           </a:xfrm>
           <a:prstGeom prst="ellipse">
@@ -7913,7 +7913,7 @@
         </p:nvSpPr>
         <p:spPr>
           <a:xfrm>
-            <a:off x="4546949" y="4646876"/>
+            <a:off x="5918549" y="4737331"/>
             <a:ext cx="32000" cy="32000"/>
           </a:xfrm>
           <a:prstGeom prst="ellipse">
@@ -7957,7 +7957,7 @@
         </p:nvSpPr>
         <p:spPr>
           <a:xfrm>
-            <a:off x="4305550" y="4592022"/>
+            <a:off x="5677150" y="4681310"/>
             <a:ext cx="32000" cy="32000"/>
           </a:xfrm>
           <a:prstGeom prst="ellipse">
@@ -8001,7 +8001,7 @@
         </p:nvSpPr>
         <p:spPr>
           <a:xfrm>
-            <a:off x="4382136" y="4544166"/>
+            <a:off x="5753736" y="4632436"/>
             <a:ext cx="32000" cy="32000"/>
           </a:xfrm>
           <a:prstGeom prst="ellipse">
@@ -8045,7 +8045,7 @@
         </p:nvSpPr>
         <p:spPr>
           <a:xfrm>
-            <a:off x="4437172" y="4581041"/>
+            <a:off x="5808772" y="4670096"/>
             <a:ext cx="32000" cy="32000"/>
           </a:xfrm>
           <a:prstGeom prst="ellipse">
@@ -8089,7 +8089,7 @@
         </p:nvSpPr>
         <p:spPr>
           <a:xfrm>
-            <a:off x="4681720" y="4640627"/>
+            <a:off x="6053320" y="4730949"/>
             <a:ext cx="32000" cy="32000"/>
           </a:xfrm>
           <a:prstGeom prst="ellipse">
@@ -8133,7 +8133,7 @@
         </p:nvSpPr>
         <p:spPr>
           <a:xfrm>
-            <a:off x="4702614" y="4424446"/>
+            <a:off x="6074214" y="4510169"/>
             <a:ext cx="32000" cy="32000"/>
           </a:xfrm>
           <a:prstGeom prst="ellipse">
@@ -8177,7 +8177,7 @@
         </p:nvSpPr>
         <p:spPr>
           <a:xfrm>
-            <a:off x="4322587" y="4493192"/>
+            <a:off x="5694187" y="4580377"/>
             <a:ext cx="32000" cy="32000"/>
           </a:xfrm>
           <a:prstGeom prst="ellipse">
@@ -8221,7 +8221,7 @@
         </p:nvSpPr>
         <p:spPr>
           <a:xfrm>
-            <a:off x="4318340" y="4538408"/>
+            <a:off x="5689940" y="4626555"/>
             <a:ext cx="32000" cy="32000"/>
           </a:xfrm>
           <a:prstGeom prst="ellipse">
@@ -8265,7 +8265,7 @@
         </p:nvSpPr>
         <p:spPr>
           <a:xfrm>
-            <a:off x="4689180" y="4255699"/>
+            <a:off x="6060780" y="4337831"/>
             <a:ext cx="32000" cy="32000"/>
           </a:xfrm>
           <a:prstGeom prst="ellipse">
@@ -8309,7 +8309,7 @@
         </p:nvSpPr>
         <p:spPr>
           <a:xfrm>
-            <a:off x="4595613" y="4488320"/>
+            <a:off x="5967213" y="4575401"/>
             <a:ext cx="32000" cy="32000"/>
           </a:xfrm>
           <a:prstGeom prst="ellipse">
@@ -8353,7 +8353,7 @@
         </p:nvSpPr>
         <p:spPr>
           <a:xfrm>
-            <a:off x="4976091" y="4516297"/>
+            <a:off x="6347691" y="4603974"/>
             <a:ext cx="32000" cy="32000"/>
           </a:xfrm>
           <a:prstGeom prst="ellipse">
@@ -8397,7 +8397,7 @@
         </p:nvSpPr>
         <p:spPr>
           <a:xfrm>
-            <a:off x="4431268" y="4592778"/>
+            <a:off x="5802868" y="4682082"/>
             <a:ext cx="32000" cy="32000"/>
           </a:xfrm>
           <a:prstGeom prst="ellipse">
@@ -8441,7 +8441,7 @@
         </p:nvSpPr>
         <p:spPr>
           <a:xfrm>
-            <a:off x="4490941" y="4654683"/>
+            <a:off x="5862541" y="4745304"/>
             <a:ext cx="32000" cy="32000"/>
           </a:xfrm>
           <a:prstGeom prst="ellipse">
@@ -8485,7 +8485,7 @@
         </p:nvSpPr>
         <p:spPr>
           <a:xfrm>
-            <a:off x="4470878" y="4646051"/>
+            <a:off x="5842478" y="4736489"/>
             <a:ext cx="32000" cy="32000"/>
           </a:xfrm>
           <a:prstGeom prst="ellipse">
@@ -8529,7 +8529,7 @@
         </p:nvSpPr>
         <p:spPr>
           <a:xfrm>
-            <a:off x="4327388" y="4539012"/>
+            <a:off x="5698988" y="4627173"/>
             <a:ext cx="32000" cy="32000"/>
           </a:xfrm>
           <a:prstGeom prst="ellipse">
@@ -8573,7 +8573,7 @@
         </p:nvSpPr>
         <p:spPr>
           <a:xfrm>
-            <a:off x="3617542" y="4222257"/>
+            <a:off x="4989142" y="4303678"/>
             <a:ext cx="32000" cy="32000"/>
           </a:xfrm>
           <a:prstGeom prst="ellipse">
@@ -8617,7 +8617,7 @@
         </p:nvSpPr>
         <p:spPr>
           <a:xfrm>
-            <a:off x="3292559" y="3791252"/>
+            <a:off x="4664159" y="3863503"/>
             <a:ext cx="32000" cy="32000"/>
           </a:xfrm>
           <a:prstGeom prst="ellipse">
@@ -8661,7 +8661,7 @@
         </p:nvSpPr>
         <p:spPr>
           <a:xfrm>
-            <a:off x="4593288" y="4577099"/>
+            <a:off x="5964888" y="4666070"/>
             <a:ext cx="32000" cy="32000"/>
           </a:xfrm>
           <a:prstGeom prst="ellipse">
@@ -8705,7 +8705,7 @@
         </p:nvSpPr>
         <p:spPr>
           <a:xfrm>
-            <a:off x="4008860" y="4619248"/>
+            <a:off x="5380460" y="4709115"/>
             <a:ext cx="32000" cy="32000"/>
           </a:xfrm>
           <a:prstGeom prst="ellipse">
@@ -8749,7 +8749,7 @@
         </p:nvSpPr>
         <p:spPr>
           <a:xfrm>
-            <a:off x="3536939" y="4312254"/>
+            <a:off x="4908539" y="4395590"/>
             <a:ext cx="32000" cy="32000"/>
           </a:xfrm>
           <a:prstGeom prst="ellipse">
@@ -8793,7 +8793,7 @@
         </p:nvSpPr>
         <p:spPr>
           <a:xfrm>
-            <a:off x="4260414" y="4464323"/>
+            <a:off x="5632014" y="4550894"/>
             <a:ext cx="32000" cy="32000"/>
           </a:xfrm>
           <a:prstGeom prst="ellipse">
@@ -8837,7 +8837,7 @@
         </p:nvSpPr>
         <p:spPr>
           <a:xfrm>
-            <a:off x="4440857" y="4579466"/>
+            <a:off x="5812457" y="4668487"/>
             <a:ext cx="32000" cy="32000"/>
           </a:xfrm>
           <a:prstGeom prst="ellipse">
@@ -8881,7 +8881,7 @@
         </p:nvSpPr>
         <p:spPr>
           <a:xfrm>
-            <a:off x="4626222" y="4251294"/>
+            <a:off x="5997822" y="4333333"/>
             <a:ext cx="32000" cy="32000"/>
           </a:xfrm>
           <a:prstGeom prst="ellipse">
@@ -8925,7 +8925,7 @@
         </p:nvSpPr>
         <p:spPr>
           <a:xfrm>
-            <a:off x="3992791" y="4307764"/>
+            <a:off x="5364391" y="4391004"/>
             <a:ext cx="32000" cy="32000"/>
           </a:xfrm>
           <a:prstGeom prst="ellipse">
@@ -8969,7 +8969,7 @@
         </p:nvSpPr>
         <p:spPr>
           <a:xfrm>
-            <a:off x="4564279" y="4614991"/>
+            <a:off x="5935879" y="4704767"/>
             <a:ext cx="32000" cy="32000"/>
           </a:xfrm>
           <a:prstGeom prst="ellipse">
@@ -9013,7 +9013,7 @@
         </p:nvSpPr>
         <p:spPr>
           <a:xfrm>
-            <a:off x="4423966" y="4641963"/>
+            <a:off x="5795566" y="4732314"/>
             <a:ext cx="32000" cy="32000"/>
           </a:xfrm>
           <a:prstGeom prst="ellipse">
@@ -9057,7 +9057,7 @@
         </p:nvSpPr>
         <p:spPr>
           <a:xfrm>
-            <a:off x="4689084" y="4448839"/>
+            <a:off x="6060684" y="4535081"/>
             <a:ext cx="32000" cy="32000"/>
           </a:xfrm>
           <a:prstGeom prst="ellipse">
@@ -9101,7 +9101,7 @@
         </p:nvSpPr>
         <p:spPr>
           <a:xfrm>
-            <a:off x="4345493" y="4618280"/>
+            <a:off x="5717093" y="4708127"/>
             <a:ext cx="32000" cy="32000"/>
           </a:xfrm>
           <a:prstGeom prst="ellipse">
@@ -9145,7 +9145,7 @@
         </p:nvSpPr>
         <p:spPr>
           <a:xfrm>
-            <a:off x="4485931" y="4675201"/>
+            <a:off x="5857531" y="4766259"/>
             <a:ext cx="32000" cy="32000"/>
           </a:xfrm>
           <a:prstGeom prst="ellipse">
@@ -9189,7 +9189,7 @@
         </p:nvSpPr>
         <p:spPr>
           <a:xfrm>
-            <a:off x="4585042" y="4497159"/>
+            <a:off x="5956642" y="4584428"/>
             <a:ext cx="32000" cy="32000"/>
           </a:xfrm>
           <a:prstGeom prst="ellipse">
@@ -9233,7 +9233,7 @@
         </p:nvSpPr>
         <p:spPr>
           <a:xfrm>
-            <a:off x="4472609" y="4630991"/>
+            <a:off x="5844209" y="4721108"/>
             <a:ext cx="32000" cy="32000"/>
           </a:xfrm>
           <a:prstGeom prst="ellipse">
@@ -9277,7 +9277,7 @@
         </p:nvSpPr>
         <p:spPr>
           <a:xfrm>
-            <a:off x="4378993" y="4661447"/>
+            <a:off x="5750593" y="4752212"/>
             <a:ext cx="32000" cy="32000"/>
           </a:xfrm>
           <a:prstGeom prst="ellipse">
@@ -9321,7 +9321,7 @@
         </p:nvSpPr>
         <p:spPr>
           <a:xfrm>
-            <a:off x="3148923" y="4416888"/>
+            <a:off x="4520523" y="4502450"/>
             <a:ext cx="32000" cy="32000"/>
           </a:xfrm>
           <a:prstGeom prst="ellipse">
@@ -9365,7 +9365,7 @@
         </p:nvSpPr>
         <p:spPr>
           <a:xfrm>
-            <a:off x="4474497" y="4675818"/>
+            <a:off x="5846097" y="4766889"/>
             <a:ext cx="32000" cy="32000"/>
           </a:xfrm>
           <a:prstGeom prst="ellipse">
@@ -9409,7 +9409,7 @@
         </p:nvSpPr>
         <p:spPr>
           <a:xfrm>
-            <a:off x="5016896" y="3945555"/>
+            <a:off x="6388496" y="4021089"/>
             <a:ext cx="32000" cy="32000"/>
           </a:xfrm>
           <a:prstGeom prst="ellipse">
@@ -9453,7 +9453,7 @@
         </p:nvSpPr>
         <p:spPr>
           <a:xfrm>
-            <a:off x="4501662" y="4690900"/>
+            <a:off x="5873262" y="4782292"/>
             <a:ext cx="32000" cy="32000"/>
           </a:xfrm>
           <a:prstGeom prst="ellipse">
@@ -9497,7 +9497,7 @@
         </p:nvSpPr>
         <p:spPr>
           <a:xfrm>
-            <a:off x="3929816" y="4458648"/>
+            <a:off x="5301416" y="4545098"/>
             <a:ext cx="32000" cy="32000"/>
           </a:xfrm>
           <a:prstGeom prst="ellipse">
@@ -9541,7 +9541,7 @@
         </p:nvSpPr>
         <p:spPr>
           <a:xfrm>
-            <a:off x="4479149" y="4603620"/>
+            <a:off x="5850749" y="4693155"/>
             <a:ext cx="32000" cy="32000"/>
           </a:xfrm>
           <a:prstGeom prst="ellipse">
@@ -9585,7 +9585,7 @@
         </p:nvSpPr>
         <p:spPr>
           <a:xfrm>
-            <a:off x="2732248" y="4478251"/>
+            <a:off x="4103848" y="4565118"/>
             <a:ext cx="32000" cy="32000"/>
           </a:xfrm>
           <a:prstGeom prst="ellipse">
@@ -9629,7 +9629,7 @@
         </p:nvSpPr>
         <p:spPr>
           <a:xfrm>
-            <a:off x="4685549" y="4650158"/>
+            <a:off x="6057149" y="4740683"/>
             <a:ext cx="32000" cy="32000"/>
           </a:xfrm>
           <a:prstGeom prst="ellipse">
@@ -9673,7 +9673,7 @@
         </p:nvSpPr>
         <p:spPr>
           <a:xfrm>
-            <a:off x="3921809" y="4311478"/>
+            <a:off x="5293409" y="4394797"/>
             <a:ext cx="32000" cy="32000"/>
           </a:xfrm>
           <a:prstGeom prst="ellipse">
@@ -9717,7 +9717,7 @@
         </p:nvSpPr>
         <p:spPr>
           <a:xfrm>
-            <a:off x="4147553" y="4132046"/>
+            <a:off x="5519153" y="4211548"/>
             <a:ext cx="32000" cy="32000"/>
           </a:xfrm>
           <a:prstGeom prst="ellipse">
@@ -9761,7 +9761,7 @@
         </p:nvSpPr>
         <p:spPr>
           <a:xfrm>
-            <a:off x="4590096" y="4631769"/>
+            <a:off x="5961696" y="4721903"/>
             <a:ext cx="32000" cy="32000"/>
           </a:xfrm>
           <a:prstGeom prst="ellipse">
@@ -9805,7 +9805,7 @@
         </p:nvSpPr>
         <p:spPr>
           <a:xfrm>
-            <a:off x="3928447" y="4300325"/>
+            <a:off x="5300047" y="4383407"/>
             <a:ext cx="32000" cy="32000"/>
           </a:xfrm>
           <a:prstGeom prst="ellipse">
@@ -9849,7 +9849,7 @@
         </p:nvSpPr>
         <p:spPr>
           <a:xfrm>
-            <a:off x="4067876" y="4573399"/>
+            <a:off x="5439476" y="4662291"/>
             <a:ext cx="32000" cy="32000"/>
           </a:xfrm>
           <a:prstGeom prst="ellipse">
@@ -9893,7 +9893,7 @@
         </p:nvSpPr>
         <p:spPr>
           <a:xfrm>
-            <a:off x="4417652" y="4636936"/>
+            <a:off x="5789252" y="4727179"/>
             <a:ext cx="32000" cy="32000"/>
           </a:xfrm>
           <a:prstGeom prst="ellipse">
@@ -9937,7 +9937,7 @@
         </p:nvSpPr>
         <p:spPr>
           <a:xfrm>
-            <a:off x="4055688" y="4344030"/>
+            <a:off x="5427288" y="4428041"/>
             <a:ext cx="32000" cy="32000"/>
           </a:xfrm>
           <a:prstGeom prst="ellipse">
@@ -9981,7 +9981,7 @@
         </p:nvSpPr>
         <p:spPr>
           <a:xfrm>
-            <a:off x="4303678" y="4465893"/>
+            <a:off x="5675278" y="4552498"/>
             <a:ext cx="32000" cy="32000"/>
           </a:xfrm>
           <a:prstGeom prst="ellipse">
@@ -10025,7 +10025,7 @@
         </p:nvSpPr>
         <p:spPr>
           <a:xfrm>
-            <a:off x="4510596" y="4692636"/>
+            <a:off x="5882196" y="4784065"/>
             <a:ext cx="32000" cy="32000"/>
           </a:xfrm>
           <a:prstGeom prst="ellipse">
@@ -10069,7 +10069,7 @@
         </p:nvSpPr>
         <p:spPr>
           <a:xfrm>
-            <a:off x="4249444" y="4465723"/>
+            <a:off x="5621044" y="4552324"/>
             <a:ext cx="32000" cy="32000"/>
           </a:xfrm>
           <a:prstGeom prst="ellipse">
@@ -10113,7 +10113,7 @@
         </p:nvSpPr>
         <p:spPr>
           <a:xfrm>
-            <a:off x="4259018" y="4266039"/>
+            <a:off x="5630618" y="4348391"/>
             <a:ext cx="32000" cy="32000"/>
           </a:xfrm>
           <a:prstGeom prst="ellipse">
@@ -10157,7 +10157,7 @@
         </p:nvSpPr>
         <p:spPr>
           <a:xfrm>
-            <a:off x="4425507" y="4488914"/>
+            <a:off x="5797107" y="4576009"/>
             <a:ext cx="32000" cy="32000"/>
           </a:xfrm>
           <a:prstGeom prst="ellipse">
@@ -10201,7 +10201,7 @@
         </p:nvSpPr>
         <p:spPr>
           <a:xfrm>
-            <a:off x="4624715" y="4373027"/>
+            <a:off x="5996315" y="4457655"/>
             <a:ext cx="32000" cy="32000"/>
           </a:xfrm>
           <a:prstGeom prst="ellipse">
@@ -10245,7 +10245,7 @@
         </p:nvSpPr>
         <p:spPr>
           <a:xfrm>
-            <a:off x="4398541" y="4502885"/>
+            <a:off x="5770141" y="4590277"/>
             <a:ext cx="32000" cy="32000"/>
           </a:xfrm>
           <a:prstGeom prst="ellipse">
@@ -10289,7 +10289,7 @@
         </p:nvSpPr>
         <p:spPr>
           <a:xfrm>
-            <a:off x="4790061" y="4241600"/>
+            <a:off x="6161661" y="4323432"/>
             <a:ext cx="32000" cy="32000"/>
           </a:xfrm>
           <a:prstGeom prst="ellipse">
@@ -10333,7 +10333,7 @@
         </p:nvSpPr>
         <p:spPr>
           <a:xfrm>
-            <a:off x="4561847" y="4613224"/>
+            <a:off x="5933447" y="4702964"/>
             <a:ext cx="32000" cy="32000"/>
           </a:xfrm>
           <a:prstGeom prst="ellipse">
@@ -10377,7 +10377,7 @@
         </p:nvSpPr>
         <p:spPr>
           <a:xfrm>
-            <a:off x="4404195" y="4533844"/>
+            <a:off x="5775795" y="4621894"/>
             <a:ext cx="32000" cy="32000"/>
           </a:xfrm>
           <a:prstGeom prst="ellipse">
@@ -10421,7 +10421,7 @@
         </p:nvSpPr>
         <p:spPr>
           <a:xfrm>
-            <a:off x="4307418" y="4127168"/>
+            <a:off x="5679018" y="4206565"/>
             <a:ext cx="32000" cy="32000"/>
           </a:xfrm>
           <a:prstGeom prst="ellipse">
@@ -10465,7 +10465,7 @@
         </p:nvSpPr>
         <p:spPr>
           <a:xfrm>
-            <a:off x="5091333" y="4597536"/>
+            <a:off x="6462933" y="4686941"/>
             <a:ext cx="32000" cy="32000"/>
           </a:xfrm>
           <a:prstGeom prst="ellipse">
@@ -10509,7 +10509,7 @@
         </p:nvSpPr>
         <p:spPr>
           <a:xfrm>
-            <a:off x="4608414" y="4393843"/>
+            <a:off x="5980014" y="4478914"/>
             <a:ext cx="32000" cy="32000"/>
           </a:xfrm>
           <a:prstGeom prst="ellipse">
@@ -10553,7 +10553,7 @@
         </p:nvSpPr>
         <p:spPr>
           <a:xfrm>
-            <a:off x="4451016" y="4633984"/>
+            <a:off x="5822616" y="4724165"/>
             <a:ext cx="32000" cy="32000"/>
           </a:xfrm>
           <a:prstGeom prst="ellipse">
@@ -10597,7 +10597,7 @@
         </p:nvSpPr>
         <p:spPr>
           <a:xfrm>
-            <a:off x="4338613" y="4424479"/>
+            <a:off x="5710213" y="4510202"/>
             <a:ext cx="32000" cy="32000"/>
           </a:xfrm>
           <a:prstGeom prst="ellipse">
@@ -10641,7 +10641,7 @@
         </p:nvSpPr>
         <p:spPr>
           <a:xfrm>
-            <a:off x="4466683" y="4616561"/>
+            <a:off x="5838283" y="4706371"/>
             <a:ext cx="32000" cy="32000"/>
           </a:xfrm>
           <a:prstGeom prst="ellipse">
@@ -10685,7 +10685,7 @@
         </p:nvSpPr>
         <p:spPr>
           <a:xfrm>
-            <a:off x="4376013" y="4583790"/>
+            <a:off x="5747613" y="4672903"/>
             <a:ext cx="32000" cy="32000"/>
           </a:xfrm>
           <a:prstGeom prst="ellipse">
@@ -10729,7 +10729,7 @@
         </p:nvSpPr>
         <p:spPr>
           <a:xfrm>
-            <a:off x="4332760" y="4608298"/>
+            <a:off x="5704360" y="4697933"/>
             <a:ext cx="32000" cy="32000"/>
           </a:xfrm>
           <a:prstGeom prst="ellipse">
@@ -10773,7 +10773,7 @@
         </p:nvSpPr>
         <p:spPr>
           <a:xfrm>
-            <a:off x="4309256" y="4492502"/>
+            <a:off x="5680856" y="4579672"/>
             <a:ext cx="32000" cy="32000"/>
           </a:xfrm>
           <a:prstGeom prst="ellipse">
@@ -10817,7 +10817,7 @@
         </p:nvSpPr>
         <p:spPr>
           <a:xfrm>
-            <a:off x="4266756" y="4539003"/>
+            <a:off x="5638356" y="4627163"/>
             <a:ext cx="32000" cy="32000"/>
           </a:xfrm>
           <a:prstGeom prst="ellipse">
@@ -10861,7 +10861,7 @@
         </p:nvSpPr>
         <p:spPr>
           <a:xfrm>
-            <a:off x="4372968" y="4601329"/>
+            <a:off x="5744568" y="4690815"/>
             <a:ext cx="32000" cy="32000"/>
           </a:xfrm>
           <a:prstGeom prst="ellipse">
@@ -10905,7 +10905,7 @@
         </p:nvSpPr>
         <p:spPr>
           <a:xfrm>
-            <a:off x="4519042" y="4678303"/>
+            <a:off x="5890642" y="4769427"/>
             <a:ext cx="32000" cy="32000"/>
           </a:xfrm>
           <a:prstGeom prst="ellipse">
@@ -10949,7 +10949,7 @@
         </p:nvSpPr>
         <p:spPr>
           <a:xfrm>
-            <a:off x="4565719" y="4663666"/>
+            <a:off x="5937319" y="4754478"/>
             <a:ext cx="32000" cy="32000"/>
           </a:xfrm>
           <a:prstGeom prst="ellipse">
@@ -10993,7 +10993,7 @@
         </p:nvSpPr>
         <p:spPr>
           <a:xfrm>
-            <a:off x="4609199" y="4596238"/>
+            <a:off x="5980799" y="4685616"/>
             <a:ext cx="32000" cy="32000"/>
           </a:xfrm>
           <a:prstGeom prst="ellipse">
@@ -11037,7 +11037,7 @@
         </p:nvSpPr>
         <p:spPr>
           <a:xfrm>
-            <a:off x="4480641" y="4665206"/>
+            <a:off x="5852241" y="4756052"/>
             <a:ext cx="32000" cy="32000"/>
           </a:xfrm>
           <a:prstGeom prst="ellipse">
@@ -11081,7 +11081,7 @@
         </p:nvSpPr>
         <p:spPr>
           <a:xfrm>
-            <a:off x="4116041" y="4531248"/>
+            <a:off x="5487641" y="4619243"/>
             <a:ext cx="32000" cy="32000"/>
           </a:xfrm>
           <a:prstGeom prst="ellipse">
@@ -11125,7 +11125,7 @@
         </p:nvSpPr>
         <p:spPr>
           <a:xfrm>
-            <a:off x="3978063" y="4261481"/>
+            <a:off x="5349663" y="4343737"/>
             <a:ext cx="32000" cy="32000"/>
           </a:xfrm>
           <a:prstGeom prst="ellipse">
@@ -11169,7 +11169,7 @@
         </p:nvSpPr>
         <p:spPr>
           <a:xfrm>
-            <a:off x="4612242" y="4407328"/>
+            <a:off x="5983842" y="4492686"/>
             <a:ext cx="32000" cy="32000"/>
           </a:xfrm>
           <a:prstGeom prst="ellipse">
@@ -11213,7 +11213,7 @@
         </p:nvSpPr>
         <p:spPr>
           <a:xfrm>
-            <a:off x="4458229" y="4612375"/>
+            <a:off x="5829829" y="4702097"/>
             <a:ext cx="32000" cy="32000"/>
           </a:xfrm>
           <a:prstGeom prst="ellipse">
@@ -11257,7 +11257,7 @@
         </p:nvSpPr>
         <p:spPr>
           <a:xfrm>
-            <a:off x="4557794" y="4597395"/>
+            <a:off x="5929394" y="4686797"/>
             <a:ext cx="32000" cy="32000"/>
           </a:xfrm>
           <a:prstGeom prst="ellipse">
@@ -11301,7 +11301,7 @@
         </p:nvSpPr>
         <p:spPr>
           <a:xfrm>
-            <a:off x="4662148" y="4438488"/>
+            <a:off x="6033748" y="4524510"/>
             <a:ext cx="32000" cy="32000"/>
           </a:xfrm>
           <a:prstGeom prst="ellipse">
@@ -11345,7 +11345,7 @@
         </p:nvSpPr>
         <p:spPr>
           <a:xfrm>
-            <a:off x="5391561" y="4289161"/>
+            <a:off x="6763161" y="4372005"/>
             <a:ext cx="32000" cy="32000"/>
           </a:xfrm>
           <a:prstGeom prst="ellipse">
@@ -11389,7 +11389,7 @@
         </p:nvSpPr>
         <p:spPr>
           <a:xfrm>
-            <a:off x="4602594" y="4547271"/>
+            <a:off x="5974194" y="4635607"/>
             <a:ext cx="32000" cy="32000"/>
           </a:xfrm>
           <a:prstGeom prst="ellipse">
@@ -11433,7 +11433,7 @@
         </p:nvSpPr>
         <p:spPr>
           <a:xfrm>
-            <a:off x="4392603" y="4559819"/>
+            <a:off x="5764203" y="4648422"/>
             <a:ext cx="32000" cy="32000"/>
           </a:xfrm>
           <a:prstGeom prst="ellipse">
@@ -11477,7 +11477,7 @@
         </p:nvSpPr>
         <p:spPr>
           <a:xfrm>
-            <a:off x="4617528" y="4369356"/>
+            <a:off x="5989128" y="4453907"/>
             <a:ext cx="32000" cy="32000"/>
           </a:xfrm>
           <a:prstGeom prst="ellipse">
@@ -11521,7 +11521,7 @@
         </p:nvSpPr>
         <p:spPr>
           <a:xfrm>
-            <a:off x="4643661" y="4575293"/>
+            <a:off x="6015261" y="4664225"/>
             <a:ext cx="32000" cy="32000"/>
           </a:xfrm>
           <a:prstGeom prst="ellipse">
@@ -11565,7 +11565,7 @@
         </p:nvSpPr>
         <p:spPr>
           <a:xfrm>
-            <a:off x="4592927" y="4655335"/>
+            <a:off x="5964527" y="4745971"/>
             <a:ext cx="32000" cy="32000"/>
           </a:xfrm>
           <a:prstGeom prst="ellipse">
@@ -11609,7 +11609,7 @@
         </p:nvSpPr>
         <p:spPr>
           <a:xfrm>
-            <a:off x="4414098" y="4531487"/>
+            <a:off x="5785698" y="4619487"/>
             <a:ext cx="32000" cy="32000"/>
           </a:xfrm>
           <a:prstGeom prst="ellipse">
@@ -11653,7 +11653,7 @@
         </p:nvSpPr>
         <p:spPr>
           <a:xfrm>
-            <a:off x="4476959" y="4610434"/>
+            <a:off x="5848559" y="4700114"/>
             <a:ext cx="32000" cy="32000"/>
           </a:xfrm>
           <a:prstGeom prst="ellipse">
@@ -11697,7 +11697,7 @@
         </p:nvSpPr>
         <p:spPr>
           <a:xfrm>
-            <a:off x="4693994" y="4166047"/>
+            <a:off x="6065594" y="4246271"/>
             <a:ext cx="32000" cy="32000"/>
           </a:xfrm>
           <a:prstGeom prst="ellipse">
@@ -11741,7 +11741,7 @@
         </p:nvSpPr>
         <p:spPr>
           <a:xfrm>
-            <a:off x="4427677" y="4596905"/>
+            <a:off x="5799277" y="4686297"/>
             <a:ext cx="32000" cy="32000"/>
           </a:xfrm>
           <a:prstGeom prst="ellipse">
@@ -11785,7 +11785,7 @@
         </p:nvSpPr>
         <p:spPr>
           <a:xfrm>
-            <a:off x="4664309" y="4271032"/>
+            <a:off x="6035909" y="4353490"/>
             <a:ext cx="32000" cy="32000"/>
           </a:xfrm>
           <a:prstGeom prst="ellipse">
@@ -11829,7 +11829,7 @@
         </p:nvSpPr>
         <p:spPr>
           <a:xfrm>
-            <a:off x="4482169" y="4677602"/>
+            <a:off x="5853769" y="4768711"/>
             <a:ext cx="32000" cy="32000"/>
           </a:xfrm>
           <a:prstGeom prst="ellipse">
@@ -11873,7 +11873,7 @@
         </p:nvSpPr>
         <p:spPr>
           <a:xfrm>
-            <a:off x="4451141" y="4576254"/>
+            <a:off x="5822741" y="4665206"/>
             <a:ext cx="32000" cy="32000"/>
           </a:xfrm>
           <a:prstGeom prst="ellipse">
@@ -11917,7 +11917,7 @@
         </p:nvSpPr>
         <p:spPr>
           <a:xfrm>
-            <a:off x="4709203" y="4609550"/>
+            <a:off x="6080803" y="4699211"/>
             <a:ext cx="32000" cy="32000"/>
           </a:xfrm>
           <a:prstGeom prst="ellipse">
@@ -11961,7 +11961,7 @@
         </p:nvSpPr>
         <p:spPr>
           <a:xfrm>
-            <a:off x="4574557" y="4578535"/>
+            <a:off x="5946157" y="4667536"/>
             <a:ext cx="32000" cy="32000"/>
           </a:xfrm>
           <a:prstGeom prst="ellipse">
@@ -12005,7 +12005,7 @@
         </p:nvSpPr>
         <p:spPr>
           <a:xfrm>
-            <a:off x="4687329" y="4243774"/>
+            <a:off x="6058929" y="4325652"/>
             <a:ext cx="32000" cy="32000"/>
           </a:xfrm>
           <a:prstGeom prst="ellipse">
@@ -12049,7 +12049,7 @@
         </p:nvSpPr>
         <p:spPr>
           <a:xfrm>
-            <a:off x="4854396" y="4202744"/>
+            <a:off x="6225996" y="4283750"/>
             <a:ext cx="32000" cy="32000"/>
           </a:xfrm>
           <a:prstGeom prst="ellipse">
@@ -12093,7 +12093,7 @@
         </p:nvSpPr>
         <p:spPr>
           <a:xfrm>
-            <a:off x="4455228" y="4662452"/>
+            <a:off x="5826828" y="4753238"/>
             <a:ext cx="32000" cy="32000"/>
           </a:xfrm>
           <a:prstGeom prst="ellipse">
@@ -12137,7 +12137,7 @@
         </p:nvSpPr>
         <p:spPr>
           <a:xfrm>
-            <a:off x="4183632" y="4480375"/>
+            <a:off x="5555232" y="4567287"/>
             <a:ext cx="32000" cy="32000"/>
           </a:xfrm>
           <a:prstGeom prst="ellipse">
@@ -12181,7 +12181,7 @@
         </p:nvSpPr>
         <p:spPr>
           <a:xfrm>
-            <a:off x="3986655" y="4380355"/>
+            <a:off x="5358255" y="4465139"/>
             <a:ext cx="32000" cy="32000"/>
           </a:xfrm>
           <a:prstGeom prst="ellipse">
@@ -12225,7 +12225,7 @@
         </p:nvSpPr>
         <p:spPr>
           <a:xfrm>
-            <a:off x="4513112" y="4691900"/>
+            <a:off x="5884712" y="4783313"/>
             <a:ext cx="32000" cy="32000"/>
           </a:xfrm>
           <a:prstGeom prst="ellipse">
@@ -12269,7 +12269,7 @@
         </p:nvSpPr>
         <p:spPr>
           <a:xfrm>
-            <a:off x="4631640" y="4594790"/>
+            <a:off x="6003240" y="4684137"/>
             <a:ext cx="32000" cy="32000"/>
           </a:xfrm>
           <a:prstGeom prst="ellipse">
@@ -12313,7 +12313,7 @@
         </p:nvSpPr>
         <p:spPr>
           <a:xfrm>
-            <a:off x="4523178" y="4675035"/>
+            <a:off x="5894778" y="4766090"/>
             <a:ext cx="32000" cy="32000"/>
           </a:xfrm>
           <a:prstGeom prst="ellipse">
@@ -12357,7 +12357,7 @@
         </p:nvSpPr>
         <p:spPr>
           <a:xfrm>
-            <a:off x="3996808" y="4423849"/>
+            <a:off x="5368408" y="4509559"/>
             <a:ext cx="32000" cy="32000"/>
           </a:xfrm>
           <a:prstGeom prst="ellipse">
@@ -12401,7 +12401,7 @@
         </p:nvSpPr>
         <p:spPr>
           <a:xfrm>
-            <a:off x="4260156" y="4528765"/>
+            <a:off x="5631756" y="4616707"/>
             <a:ext cx="32000" cy="32000"/>
           </a:xfrm>
           <a:prstGeom prst="ellipse">
@@ -12445,7 +12445,7 @@
         </p:nvSpPr>
         <p:spPr>
           <a:xfrm>
-            <a:off x="4999091" y="4534265"/>
+            <a:off x="6370691" y="4622324"/>
             <a:ext cx="32000" cy="32000"/>
           </a:xfrm>
           <a:prstGeom prst="ellipse">
@@ -12489,7 +12489,7 @@
         </p:nvSpPr>
         <p:spPr>
           <a:xfrm>
-            <a:off x="4406764" y="4619927"/>
+            <a:off x="5778364" y="4709809"/>
             <a:ext cx="32000" cy="32000"/>
           </a:xfrm>
           <a:prstGeom prst="ellipse">
@@ -12533,7 +12533,7 @@
         </p:nvSpPr>
         <p:spPr>
           <a:xfrm>
-            <a:off x="5540518" y="4254674"/>
+            <a:off x="6912118" y="4336784"/>
             <a:ext cx="32000" cy="32000"/>
           </a:xfrm>
           <a:prstGeom prst="ellipse">
@@ -12577,7 +12577,7 @@
         </p:nvSpPr>
         <p:spPr>
           <a:xfrm>
-            <a:off x="3962851" y="4446244"/>
+            <a:off x="5334451" y="4532431"/>
             <a:ext cx="32000" cy="32000"/>
           </a:xfrm>
           <a:prstGeom prst="ellipse">
@@ -12621,7 +12621,7 @@
         </p:nvSpPr>
         <p:spPr>
           <a:xfrm>
-            <a:off x="4907023" y="4583842"/>
+            <a:off x="6278623" y="4672956"/>
             <a:ext cx="32000" cy="32000"/>
           </a:xfrm>
           <a:prstGeom prst="ellipse">
@@ -12665,7 +12665,7 @@
         </p:nvSpPr>
         <p:spPr>
           <a:xfrm>
-            <a:off x="4414941" y="4634028"/>
+            <a:off x="5786541" y="4724210"/>
             <a:ext cx="32000" cy="32000"/>
           </a:xfrm>
           <a:prstGeom prst="ellipse">
@@ -12709,7 +12709,7 @@
         </p:nvSpPr>
         <p:spPr>
           <a:xfrm>
-            <a:off x="4652295" y="4594734"/>
+            <a:off x="6023895" y="4684079"/>
             <a:ext cx="32000" cy="32000"/>
           </a:xfrm>
           <a:prstGeom prst="ellipse">
@@ -12753,7 +12753,7 @@
         </p:nvSpPr>
         <p:spPr>
           <a:xfrm>
-            <a:off x="4400398" y="4503073"/>
+            <a:off x="5771998" y="4590469"/>
             <a:ext cx="32000" cy="32000"/>
           </a:xfrm>
           <a:prstGeom prst="ellipse">
@@ -12797,7 +12797,7 @@
         </p:nvSpPr>
         <p:spPr>
           <a:xfrm>
-            <a:off x="4639591" y="4615485"/>
+            <a:off x="6011191" y="4705272"/>
             <a:ext cx="32000" cy="32000"/>
           </a:xfrm>
           <a:prstGeom prst="ellipse">
@@ -12841,7 +12841,7 @@
         </p:nvSpPr>
         <p:spPr>
           <a:xfrm>
-            <a:off x="4859967" y="4636524"/>
+            <a:off x="6231567" y="4726759"/>
             <a:ext cx="32000" cy="32000"/>
           </a:xfrm>
           <a:prstGeom prst="ellipse">
@@ -12885,7 +12885,7 @@
         </p:nvSpPr>
         <p:spPr>
           <a:xfrm>
-            <a:off x="4510164" y="4693072"/>
+            <a:off x="5881764" y="4784510"/>
             <a:ext cx="32000" cy="32000"/>
           </a:xfrm>
           <a:prstGeom prst="ellipse">
@@ -12929,7 +12929,7 @@
         </p:nvSpPr>
         <p:spPr>
           <a:xfrm>
-            <a:off x="4168636" y="4509779"/>
+            <a:off x="5540236" y="4597317"/>
             <a:ext cx="32000" cy="32000"/>
           </a:xfrm>
           <a:prstGeom prst="ellipse">
@@ -12973,7 +12973,7 @@
         </p:nvSpPr>
         <p:spPr>
           <a:xfrm>
-            <a:off x="4522347" y="4679815"/>
+            <a:off x="5893947" y="4770971"/>
             <a:ext cx="32000" cy="32000"/>
           </a:xfrm>
           <a:prstGeom prst="ellipse">
@@ -13017,7 +13017,7 @@
         </p:nvSpPr>
         <p:spPr>
           <a:xfrm>
-            <a:off x="3966116" y="4333284"/>
+            <a:off x="5337716" y="4417067"/>
             <a:ext cx="32000" cy="32000"/>
           </a:xfrm>
           <a:prstGeom prst="ellipse">
@@ -13061,7 +13061,7 @@
         </p:nvSpPr>
         <p:spPr>
           <a:xfrm>
-            <a:off x="4894086" y="4269244"/>
+            <a:off x="6265686" y="4351665"/>
             <a:ext cx="32000" cy="32000"/>
           </a:xfrm>
           <a:prstGeom prst="ellipse">
@@ -13105,7 +13105,7 @@
         </p:nvSpPr>
         <p:spPr>
           <a:xfrm>
-            <a:off x="3296544" y="4178974"/>
+            <a:off x="4668144" y="4259473"/>
             <a:ext cx="32000" cy="32000"/>
           </a:xfrm>
           <a:prstGeom prst="ellipse">
@@ -13149,7 +13149,7 @@
         </p:nvSpPr>
         <p:spPr>
           <a:xfrm>
-            <a:off x="4294487" y="4386229"/>
+            <a:off x="5666087" y="4471139"/>
             <a:ext cx="32000" cy="32000"/>
           </a:xfrm>
           <a:prstGeom prst="ellipse">
@@ -13193,7 +13193,7 @@
         </p:nvSpPr>
         <p:spPr>
           <a:xfrm>
-            <a:off x="4319355" y="4263740"/>
+            <a:off x="5690955" y="4346044"/>
             <a:ext cx="32000" cy="32000"/>
           </a:xfrm>
           <a:prstGeom prst="ellipse">
@@ -13237,7 +13237,7 @@
         </p:nvSpPr>
         <p:spPr>
           <a:xfrm>
-            <a:off x="4832550" y="4004276"/>
+            <a:off x="6204150" y="4081059"/>
             <a:ext cx="32000" cy="32000"/>
           </a:xfrm>
           <a:prstGeom prst="ellipse">
@@ -13281,7 +13281,7 @@
         </p:nvSpPr>
         <p:spPr>
           <a:xfrm>
-            <a:off x="4128516" y="4532535"/>
+            <a:off x="5500116" y="4620558"/>
             <a:ext cx="32000" cy="32000"/>
           </a:xfrm>
           <a:prstGeom prst="ellipse">
@@ -13325,7 +13325,7 @@
         </p:nvSpPr>
         <p:spPr>
           <a:xfrm>
-            <a:off x="5538005" y="4363901"/>
+            <a:off x="6909605" y="4448336"/>
             <a:ext cx="32000" cy="32000"/>
           </a:xfrm>
           <a:prstGeom prst="ellipse">
@@ -13369,7 +13369,7 @@
         </p:nvSpPr>
         <p:spPr>
           <a:xfrm>
-            <a:off x="4571588" y="4652077"/>
+            <a:off x="5943188" y="4742643"/>
             <a:ext cx="32000" cy="32000"/>
           </a:xfrm>
           <a:prstGeom prst="ellipse">
@@ -13413,7 +13413,7 @@
         </p:nvSpPr>
         <p:spPr>
           <a:xfrm>
-            <a:off x="4732577" y="4288871"/>
+            <a:off x="6104177" y="4371709"/>
             <a:ext cx="32000" cy="32000"/>
           </a:xfrm>
           <a:prstGeom prst="ellipse">
@@ -13457,7 +13457,7 @@
         </p:nvSpPr>
         <p:spPr>
           <a:xfrm>
-            <a:off x="4567613" y="4594266"/>
+            <a:off x="5939213" y="4683602"/>
             <a:ext cx="32000" cy="32000"/>
           </a:xfrm>
           <a:prstGeom prst="ellipse">
@@ -13501,7 +13501,7 @@
         </p:nvSpPr>
         <p:spPr>
           <a:xfrm>
-            <a:off x="4602204" y="4426627"/>
+            <a:off x="5973804" y="4512396"/>
             <a:ext cx="32000" cy="32000"/>
           </a:xfrm>
           <a:prstGeom prst="ellipse">
@@ -13545,7 +13545,7 @@
         </p:nvSpPr>
         <p:spPr>
           <a:xfrm>
-            <a:off x="4694625" y="4449508"/>
+            <a:off x="6066225" y="4535764"/>
             <a:ext cx="32000" cy="32000"/>
           </a:xfrm>
           <a:prstGeom prst="ellipse">
@@ -13589,7 +13589,7 @@
         </p:nvSpPr>
         <p:spPr>
           <a:xfrm>
-            <a:off x="4678471" y="4591984"/>
+            <a:off x="6050071" y="4681271"/>
             <a:ext cx="32000" cy="32000"/>
           </a:xfrm>
           <a:prstGeom prst="ellipse">
@@ -13633,7 +13633,7 @@
         </p:nvSpPr>
         <p:spPr>
           <a:xfrm>
-            <a:off x="4769164" y="4453106"/>
+            <a:off x="6140764" y="4539438"/>
             <a:ext cx="32000" cy="32000"/>
           </a:xfrm>
           <a:prstGeom prst="ellipse">
@@ -13677,7 +13677,7 @@
         </p:nvSpPr>
         <p:spPr>
           <a:xfrm>
-            <a:off x="4173804" y="4128064"/>
+            <a:off x="5545404" y="4207480"/>
             <a:ext cx="32000" cy="32000"/>
           </a:xfrm>
           <a:prstGeom prst="ellipse">
@@ -13721,7 +13721,7 @@
         </p:nvSpPr>
         <p:spPr>
           <a:xfrm>
-            <a:off x="4452965" y="4663539"/>
+            <a:off x="5824565" y="4754349"/>
             <a:ext cx="32000" cy="32000"/>
           </a:xfrm>
           <a:prstGeom prst="ellipse">
@@ -13765,7 +13765,7 @@
         </p:nvSpPr>
         <p:spPr>
           <a:xfrm>
-            <a:off x="4342008" y="4453650"/>
+            <a:off x="5713608" y="4539994"/>
             <a:ext cx="32000" cy="32000"/>
           </a:xfrm>
           <a:prstGeom prst="ellipse">
@@ -13809,7 +13809,7 @@
         </p:nvSpPr>
         <p:spPr>
           <a:xfrm>
-            <a:off x="4406580" y="4539848"/>
+            <a:off x="5778180" y="4628026"/>
             <a:ext cx="32000" cy="32000"/>
           </a:xfrm>
           <a:prstGeom prst="ellipse">
@@ -13853,7 +13853,7 @@
         </p:nvSpPr>
         <p:spPr>
           <a:xfrm>
-            <a:off x="4940711" y="4473695"/>
+            <a:off x="6312311" y="4560465"/>
             <a:ext cx="32000" cy="32000"/>
           </a:xfrm>
           <a:prstGeom prst="ellipse">
@@ -13897,7 +13897,7 @@
         </p:nvSpPr>
         <p:spPr>
           <a:xfrm>
-            <a:off x="4040023" y="4259433"/>
+            <a:off x="5411623" y="4341645"/>
             <a:ext cx="32000" cy="32000"/>
           </a:xfrm>
           <a:prstGeom prst="ellipse">
@@ -13941,7 +13941,7 @@
         </p:nvSpPr>
         <p:spPr>
           <a:xfrm>
-            <a:off x="4554654" y="4652973"/>
+            <a:off x="5926254" y="4743558"/>
             <a:ext cx="32000" cy="32000"/>
           </a:xfrm>
           <a:prstGeom prst="ellipse">
@@ -13985,7 +13985,7 @@
         </p:nvSpPr>
         <p:spPr>
           <a:xfrm>
-            <a:off x="4672690" y="4476559"/>
+            <a:off x="6044290" y="4563391"/>
             <a:ext cx="32000" cy="32000"/>
           </a:xfrm>
           <a:prstGeom prst="ellipse">
@@ -14029,7 +14029,7 @@
         </p:nvSpPr>
         <p:spPr>
           <a:xfrm>
-            <a:off x="4393663" y="4607344"/>
+            <a:off x="5765263" y="4696958"/>
             <a:ext cx="32000" cy="32000"/>
           </a:xfrm>
           <a:prstGeom prst="ellipse">
@@ -14073,7 +14073,7 @@
         </p:nvSpPr>
         <p:spPr>
           <a:xfrm>
-            <a:off x="4586590" y="4553110"/>
+            <a:off x="5958190" y="4641570"/>
             <a:ext cx="32000" cy="32000"/>
           </a:xfrm>
           <a:prstGeom prst="ellipse">
@@ -14117,7 +14117,7 @@
         </p:nvSpPr>
         <p:spPr>
           <a:xfrm>
-            <a:off x="4594751" y="4451061"/>
+            <a:off x="5966351" y="4537350"/>
             <a:ext cx="32000" cy="32000"/>
           </a:xfrm>
           <a:prstGeom prst="ellipse">
@@ -14161,7 +14161,7 @@
         </p:nvSpPr>
         <p:spPr>
           <a:xfrm>
-            <a:off x="4738557" y="4606716"/>
+            <a:off x="6110157" y="4696317"/>
             <a:ext cx="32000" cy="32000"/>
           </a:xfrm>
           <a:prstGeom prst="ellipse">
@@ -14205,7 +14205,7 @@
         </p:nvSpPr>
         <p:spPr>
           <a:xfrm>
-            <a:off x="4446525" y="4635574"/>
+            <a:off x="5818125" y="4725789"/>
             <a:ext cx="32000" cy="32000"/>
           </a:xfrm>
           <a:prstGeom prst="ellipse">
@@ -14249,7 +14249,7 @@
         </p:nvSpPr>
         <p:spPr>
           <a:xfrm>
-            <a:off x="4589710" y="4604393"/>
+            <a:off x="5961310" y="4693945"/>
             <a:ext cx="32000" cy="32000"/>
           </a:xfrm>
           <a:prstGeom prst="ellipse">
@@ -14293,7 +14293,7 @@
         </p:nvSpPr>
         <p:spPr>
           <a:xfrm>
-            <a:off x="4549493" y="4619786"/>
+            <a:off x="5921093" y="4709664"/>
             <a:ext cx="32000" cy="32000"/>
           </a:xfrm>
           <a:prstGeom prst="ellipse">
@@ -14337,7 +14337,7 @@
         </p:nvSpPr>
         <p:spPr>
           <a:xfrm>
-            <a:off x="4271174" y="4349099"/>
+            <a:off x="5642774" y="4433218"/>
             <a:ext cx="32000" cy="32000"/>
           </a:xfrm>
           <a:prstGeom prst="ellipse">
@@ -14381,7 +14381,7 @@
         </p:nvSpPr>
         <p:spPr>
           <a:xfrm>
-            <a:off x="4344955" y="4595008"/>
+            <a:off x="5716555" y="4684359"/>
             <a:ext cx="32000" cy="32000"/>
           </a:xfrm>
           <a:prstGeom prst="ellipse">
@@ -14425,7 +14425,7 @@
         </p:nvSpPr>
         <p:spPr>
           <a:xfrm>
-            <a:off x="4265376" y="4475702"/>
+            <a:off x="5636976" y="4562515"/>
             <a:ext cx="32000" cy="32000"/>
           </a:xfrm>
           <a:prstGeom prst="ellipse">
@@ -14469,7 +14469,7 @@
         </p:nvSpPr>
         <p:spPr>
           <a:xfrm>
-            <a:off x="4264716" y="4634512"/>
+            <a:off x="5636316" y="4724704"/>
             <a:ext cx="32000" cy="32000"/>
           </a:xfrm>
           <a:prstGeom prst="ellipse">
@@ -14513,7 +14513,7 @@
         </p:nvSpPr>
         <p:spPr>
           <a:xfrm>
-            <a:off x="3782807" y="4121324"/>
+            <a:off x="5154407" y="4200597"/>
             <a:ext cx="32000" cy="32000"/>
           </a:xfrm>
           <a:prstGeom prst="ellipse">
@@ -14557,7 +14557,7 @@
         </p:nvSpPr>
         <p:spPr>
           <a:xfrm>
-            <a:off x="4521817" y="4685866"/>
+            <a:off x="5893417" y="4777151"/>
             <a:ext cx="32000" cy="32000"/>
           </a:xfrm>
           <a:prstGeom prst="ellipse">
@@ -14601,7 +14601,7 @@
         </p:nvSpPr>
         <p:spPr>
           <a:xfrm>
-            <a:off x="4934146" y="4187070"/>
+            <a:off x="6305746" y="4267742"/>
             <a:ext cx="32000" cy="32000"/>
           </a:xfrm>
           <a:prstGeom prst="ellipse">
@@ -14645,7 +14645,7 @@
         </p:nvSpPr>
         <p:spPr>
           <a:xfrm>
-            <a:off x="4178935" y="4218602"/>
+            <a:off x="5550535" y="4299945"/>
             <a:ext cx="32000" cy="32000"/>
           </a:xfrm>
           <a:prstGeom prst="ellipse">
@@ -14689,7 +14689,7 @@
         </p:nvSpPr>
         <p:spPr>
           <a:xfrm>
-            <a:off x="4539035" y="4606694"/>
+            <a:off x="5910635" y="4696295"/>
             <a:ext cx="32000" cy="32000"/>
           </a:xfrm>
           <a:prstGeom prst="ellipse">
@@ -14733,7 +14733,7 @@
         </p:nvSpPr>
         <p:spPr>
           <a:xfrm>
-            <a:off x="3184634" y="4429355"/>
+            <a:off x="4556234" y="4515182"/>
             <a:ext cx="32000" cy="32000"/>
           </a:xfrm>
           <a:prstGeom prst="ellipse">
@@ -14777,7 +14777,7 @@
         </p:nvSpPr>
         <p:spPr>
           <a:xfrm>
-            <a:off x="4438063" y="4661183"/>
+            <a:off x="5809663" y="4751943"/>
             <a:ext cx="32000" cy="32000"/>
           </a:xfrm>
           <a:prstGeom prst="ellipse">
@@ -14821,7 +14821,7 @@
         </p:nvSpPr>
         <p:spPr>
           <a:xfrm>
-            <a:off x="4096651" y="4529376"/>
+            <a:off x="5468251" y="4617331"/>
             <a:ext cx="32000" cy="32000"/>
           </a:xfrm>
           <a:prstGeom prst="ellipse">
@@ -14865,7 +14865,7 @@
         </p:nvSpPr>
         <p:spPr>
           <a:xfrm>
-            <a:off x="4383767" y="4464786"/>
+            <a:off x="5755367" y="4551367"/>
             <a:ext cx="32000" cy="32000"/>
           </a:xfrm>
           <a:prstGeom prst="ellipse">
@@ -14909,7 +14909,7 @@
         </p:nvSpPr>
         <p:spPr>
           <a:xfrm>
-            <a:off x="4709973" y="4228191"/>
+            <a:off x="6081573" y="4309738"/>
             <a:ext cx="32000" cy="32000"/>
           </a:xfrm>
           <a:prstGeom prst="ellipse">
@@ -14953,7 +14953,7 @@
         </p:nvSpPr>
         <p:spPr>
           <a:xfrm>
-            <a:off x="4524921" y="4685077"/>
+            <a:off x="5896521" y="4776345"/>
             <a:ext cx="32000" cy="32000"/>
           </a:xfrm>
           <a:prstGeom prst="ellipse">
@@ -14997,7 +14997,7 @@
         </p:nvSpPr>
         <p:spPr>
           <a:xfrm>
-            <a:off x="4889703" y="4208357"/>
+            <a:off x="6261303" y="4289482"/>
             <a:ext cx="32000" cy="32000"/>
           </a:xfrm>
           <a:prstGeom prst="ellipse">
@@ -15041,7 +15041,7 @@
         </p:nvSpPr>
         <p:spPr>
           <a:xfrm>
-            <a:off x="3815490" y="4396354"/>
+            <a:off x="5187090" y="4481479"/>
             <a:ext cx="32000" cy="32000"/>
           </a:xfrm>
           <a:prstGeom prst="ellipse">
@@ -15085,7 +15085,7 @@
         </p:nvSpPr>
         <p:spPr>
           <a:xfrm>
-            <a:off x="4554324" y="4645252"/>
+            <a:off x="5925924" y="4735673"/>
             <a:ext cx="32000" cy="32000"/>
           </a:xfrm>
           <a:prstGeom prst="ellipse">
@@ -15129,7 +15129,7 @@
         </p:nvSpPr>
         <p:spPr>
           <a:xfrm>
-            <a:off x="4612889" y="4345700"/>
+            <a:off x="5984489" y="4429747"/>
             <a:ext cx="32000" cy="32000"/>
           </a:xfrm>
           <a:prstGeom prst="ellipse">
@@ -15173,7 +15173,7 @@
         </p:nvSpPr>
         <p:spPr>
           <a:xfrm>
-            <a:off x="4503082" y="4683869"/>
+            <a:off x="5874682" y="4775112"/>
             <a:ext cx="32000" cy="32000"/>
           </a:xfrm>
           <a:prstGeom prst="ellipse">
@@ -15217,7 +15217,7 @@
         </p:nvSpPr>
         <p:spPr>
           <a:xfrm>
-            <a:off x="4490443" y="4685378"/>
+            <a:off x="5862043" y="4776652"/>
             <a:ext cx="32000" cy="32000"/>
           </a:xfrm>
           <a:prstGeom prst="ellipse">
@@ -15261,7 +15261,7 @@
         </p:nvSpPr>
         <p:spPr>
           <a:xfrm>
-            <a:off x="4575551" y="4595951"/>
+            <a:off x="5947151" y="4685323"/>
             <a:ext cx="32000" cy="32000"/>
           </a:xfrm>
           <a:prstGeom prst="ellipse">
@@ -15305,7 +15305,7 @@
         </p:nvSpPr>
         <p:spPr>
           <a:xfrm>
-            <a:off x="4097375" y="4306559"/>
+            <a:off x="5468975" y="4389774"/>
             <a:ext cx="32000" cy="32000"/>
           </a:xfrm>
           <a:prstGeom prst="ellipse">
@@ -15349,7 +15349,7 @@
         </p:nvSpPr>
         <p:spPr>
           <a:xfrm>
-            <a:off x="4915417" y="4256368"/>
+            <a:off x="6287017" y="4338514"/>
             <a:ext cx="32000" cy="32000"/>
           </a:xfrm>
           <a:prstGeom prst="ellipse">
@@ -15393,7 +15393,7 @@
         </p:nvSpPr>
         <p:spPr>
           <a:xfrm>
-            <a:off x="4450329" y="4582457"/>
+            <a:off x="5821929" y="4671541"/>
             <a:ext cx="32000" cy="32000"/>
           </a:xfrm>
           <a:prstGeom prst="ellipse">
@@ -15437,7 +15437,7 @@
         </p:nvSpPr>
         <p:spPr>
           <a:xfrm>
-            <a:off x="3145169" y="3890863"/>
+            <a:off x="4516769" y="3965233"/>
             <a:ext cx="32000" cy="32000"/>
           </a:xfrm>
           <a:prstGeom prst="ellipse">
@@ -15481,7 +15481,7 @@
         </p:nvSpPr>
         <p:spPr>
           <a:xfrm>
-            <a:off x="4669306" y="4489520"/>
+            <a:off x="6040906" y="4576628"/>
             <a:ext cx="32000" cy="32000"/>
           </a:xfrm>
           <a:prstGeom prst="ellipse">
@@ -15525,7 +15525,7 @@
         </p:nvSpPr>
         <p:spPr>
           <a:xfrm>
-            <a:off x="4654465" y="4535686"/>
+            <a:off x="6026065" y="4623776"/>
             <a:ext cx="32000" cy="32000"/>
           </a:xfrm>
           <a:prstGeom prst="ellipse">
@@ -15569,7 +15569,7 @@
         </p:nvSpPr>
         <p:spPr>
           <a:xfrm>
-            <a:off x="4569795" y="4610561"/>
+            <a:off x="5941395" y="4700243"/>
             <a:ext cx="32000" cy="32000"/>
           </a:xfrm>
           <a:prstGeom prst="ellipse">
@@ -15613,7 +15613,7 @@
         </p:nvSpPr>
         <p:spPr>
           <a:xfrm>
-            <a:off x="4394198" y="4499858"/>
+            <a:off x="5765798" y="4587185"/>
             <a:ext cx="32000" cy="32000"/>
           </a:xfrm>
           <a:prstGeom prst="ellipse">
@@ -15657,7 +15657,7 @@
         </p:nvSpPr>
         <p:spPr>
           <a:xfrm>
-            <a:off x="4261614" y="4495326"/>
+            <a:off x="5633214" y="4582557"/>
             <a:ext cx="32000" cy="32000"/>
           </a:xfrm>
           <a:prstGeom prst="ellipse">
@@ -15701,7 +15701,7 @@
         </p:nvSpPr>
         <p:spPr>
           <a:xfrm>
-            <a:off x="4175092" y="4365260"/>
+            <a:off x="5546692" y="4449723"/>
             <a:ext cx="32000" cy="32000"/>
           </a:xfrm>
           <a:prstGeom prst="ellipse">
@@ -15745,7 +15745,7 @@
         </p:nvSpPr>
         <p:spPr>
           <a:xfrm>
-            <a:off x="4542379" y="4643112"/>
+            <a:off x="5913979" y="4733488"/>
             <a:ext cx="32000" cy="32000"/>
           </a:xfrm>
           <a:prstGeom prst="ellipse">
@@ -15789,7 +15789,7 @@
         </p:nvSpPr>
         <p:spPr>
           <a:xfrm>
-            <a:off x="4335986" y="4552717"/>
+            <a:off x="5707586" y="4641168"/>
             <a:ext cx="32000" cy="32000"/>
           </a:xfrm>
           <a:prstGeom prst="ellipse">
@@ -15833,7 +15833,7 @@
         </p:nvSpPr>
         <p:spPr>
           <a:xfrm>
-            <a:off x="4163335" y="4634240"/>
+            <a:off x="5534935" y="4724426"/>
             <a:ext cx="32000" cy="32000"/>
           </a:xfrm>
           <a:prstGeom prst="ellipse">
@@ -15877,7 +15877,7 @@
         </p:nvSpPr>
         <p:spPr>
           <a:xfrm>
-            <a:off x="4871489" y="3724021"/>
+            <a:off x="6243089" y="3794841"/>
             <a:ext cx="32000" cy="32000"/>
           </a:xfrm>
           <a:prstGeom prst="ellipse">
@@ -15921,7 +15921,7 @@
         </p:nvSpPr>
         <p:spPr>
           <a:xfrm>
-            <a:off x="4178938" y="4296986"/>
+            <a:off x="5550538" y="4379997"/>
             <a:ext cx="32000" cy="32000"/>
           </a:xfrm>
           <a:prstGeom prst="ellipse">
@@ -15965,7 +15965,7 @@
         </p:nvSpPr>
         <p:spPr>
           <a:xfrm>
-            <a:off x="4133111" y="4384727"/>
+            <a:off x="5504711" y="4469604"/>
             <a:ext cx="32000" cy="32000"/>
           </a:xfrm>
           <a:prstGeom prst="ellipse">
@@ -16009,7 +16009,7 @@
         </p:nvSpPr>
         <p:spPr>
           <a:xfrm>
-            <a:off x="4531893" y="4633654"/>
+            <a:off x="5903493" y="4723828"/>
             <a:ext cx="32000" cy="32000"/>
           </a:xfrm>
           <a:prstGeom prst="ellipse">
@@ -16053,7 +16053,7 @@
         </p:nvSpPr>
         <p:spPr>
           <a:xfrm>
-            <a:off x="5130066" y="4219734"/>
+            <a:off x="6501666" y="4301102"/>
             <a:ext cx="32000" cy="32000"/>
           </a:xfrm>
           <a:prstGeom prst="ellipse">
@@ -16097,7 +16097,7 @@
         </p:nvSpPr>
         <p:spPr>
           <a:xfrm>
-            <a:off x="4788602" y="4299856"/>
+            <a:off x="6160202" y="4382928"/>
             <a:ext cx="32000" cy="32000"/>
           </a:xfrm>
           <a:prstGeom prst="ellipse">
@@ -16141,7 +16141,7 @@
         </p:nvSpPr>
         <p:spPr>
           <a:xfrm>
-            <a:off x="4714393" y="4232586"/>
+            <a:off x="6085993" y="4314227"/>
             <a:ext cx="32000" cy="32000"/>
           </a:xfrm>
           <a:prstGeom prst="ellipse">
@@ -16185,7 +16185,7 @@
         </p:nvSpPr>
         <p:spPr>
           <a:xfrm>
-            <a:off x="4903344" y="4134417"/>
+            <a:off x="6274944" y="4213969"/>
             <a:ext cx="32000" cy="32000"/>
           </a:xfrm>
           <a:prstGeom prst="ellipse">
@@ -16229,7 +16229,7 @@
         </p:nvSpPr>
         <p:spPr>
           <a:xfrm>
-            <a:off x="4453877" y="4607446"/>
+            <a:off x="5825477" y="4697062"/>
             <a:ext cx="32000" cy="32000"/>
           </a:xfrm>
           <a:prstGeom prst="ellipse">
@@ -16273,7 +16273,7 @@
         </p:nvSpPr>
         <p:spPr>
           <a:xfrm>
-            <a:off x="4766115" y="4393805"/>
+            <a:off x="6137715" y="4478875"/>
             <a:ext cx="32000" cy="32000"/>
           </a:xfrm>
           <a:prstGeom prst="ellipse">
@@ -16317,7 +16317,7 @@
         </p:nvSpPr>
         <p:spPr>
           <a:xfrm>
-            <a:off x="4567533" y="4598185"/>
+            <a:off x="5939133" y="4687604"/>
             <a:ext cx="32000" cy="32000"/>
           </a:xfrm>
           <a:prstGeom prst="ellipse">
@@ -16361,7 +16361,7 @@
         </p:nvSpPr>
         <p:spPr>
           <a:xfrm>
-            <a:off x="4086993" y="4526383"/>
+            <a:off x="5458593" y="4614274"/>
             <a:ext cx="32000" cy="32000"/>
           </a:xfrm>
           <a:prstGeom prst="ellipse">
@@ -16405,7 +16405,7 @@
         </p:nvSpPr>
         <p:spPr>
           <a:xfrm>
-            <a:off x="4575828" y="4509692"/>
+            <a:off x="5947428" y="4597228"/>
             <a:ext cx="32000" cy="32000"/>
           </a:xfrm>
           <a:prstGeom prst="ellipse">
@@ -16449,7 +16449,7 @@
         </p:nvSpPr>
         <p:spPr>
           <a:xfrm>
-            <a:off x="4308452" y="4202315"/>
+            <a:off x="5680052" y="4283311"/>
             <a:ext cx="32000" cy="32000"/>
           </a:xfrm>
           <a:prstGeom prst="ellipse">
@@ -16493,7 +16493,7 @@
         </p:nvSpPr>
         <p:spPr>
           <a:xfrm>
-            <a:off x="4520495" y="4674188"/>
+            <a:off x="5892095" y="4765225"/>
             <a:ext cx="32000" cy="32000"/>
           </a:xfrm>
           <a:prstGeom prst="ellipse">
@@ -16537,7 +16537,7 @@
         </p:nvSpPr>
         <p:spPr>
           <a:xfrm>
-            <a:off x="4499415" y="4676049"/>
+            <a:off x="5871015" y="4767125"/>
             <a:ext cx="32000" cy="32000"/>
           </a:xfrm>
           <a:prstGeom prst="ellipse">
@@ -16581,7 +16581,7 @@
         </p:nvSpPr>
         <p:spPr>
           <a:xfrm>
-            <a:off x="4779135" y="4525861"/>
+            <a:off x="6150735" y="4613742"/>
             <a:ext cx="32000" cy="32000"/>
           </a:xfrm>
           <a:prstGeom prst="ellipse">
@@ -16625,7 +16625,7 @@
         </p:nvSpPr>
         <p:spPr>
           <a:xfrm>
-            <a:off x="4430705" y="4546322"/>
+            <a:off x="5802305" y="4634638"/>
             <a:ext cx="32000" cy="32000"/>
           </a:xfrm>
           <a:prstGeom prst="ellipse">
@@ -16669,7 +16669,7 @@
         </p:nvSpPr>
         <p:spPr>
           <a:xfrm>
-            <a:off x="4604050" y="4475119"/>
+            <a:off x="5975650" y="4561920"/>
             <a:ext cx="32000" cy="32000"/>
           </a:xfrm>
           <a:prstGeom prst="ellipse">
@@ -16713,7 +16713,7 @@
         </p:nvSpPr>
         <p:spPr>
           <a:xfrm>
-            <a:off x="4295675" y="4545952"/>
+            <a:off x="5667275" y="4634260"/>
             <a:ext cx="32000" cy="32000"/>
           </a:xfrm>
           <a:prstGeom prst="ellipse">
@@ -16757,7 +16757,7 @@
         </p:nvSpPr>
         <p:spPr>
           <a:xfrm>
-            <a:off x="4575483" y="4660836"/>
+            <a:off x="5947083" y="4751589"/>
             <a:ext cx="32000" cy="32000"/>
           </a:xfrm>
           <a:prstGeom prst="ellipse">
@@ -16801,7 +16801,7 @@
         </p:nvSpPr>
         <p:spPr>
           <a:xfrm>
-            <a:off x="4598788" y="4625375"/>
+            <a:off x="5970388" y="4715373"/>
             <a:ext cx="32000" cy="32000"/>
           </a:xfrm>
           <a:prstGeom prst="ellipse">
@@ -16845,7 +16845,7 @@
         </p:nvSpPr>
         <p:spPr>
           <a:xfrm>
-            <a:off x="4555650" y="4610032"/>
+            <a:off x="5927250" y="4699703"/>
             <a:ext cx="32000" cy="32000"/>
           </a:xfrm>
           <a:prstGeom prst="ellipse">
@@ -16889,7 +16889,7 @@
         </p:nvSpPr>
         <p:spPr>
           <a:xfrm>
-            <a:off x="3852793" y="4448715"/>
+            <a:off x="5224393" y="4534954"/>
             <a:ext cx="32000" cy="32000"/>
           </a:xfrm>
           <a:prstGeom prst="ellipse">
@@ -16933,7 +16933,7 @@
         </p:nvSpPr>
         <p:spPr>
           <a:xfrm>
-            <a:off x="4297928" y="4530170"/>
+            <a:off x="5669528" y="4618143"/>
             <a:ext cx="32000" cy="32000"/>
           </a:xfrm>
           <a:prstGeom prst="ellipse">
@@ -16977,7 +16977,7 @@
         </p:nvSpPr>
         <p:spPr>
           <a:xfrm>
-            <a:off x="4034226" y="4394931"/>
+            <a:off x="5405826" y="4480026"/>
             <a:ext cx="32000" cy="32000"/>
           </a:xfrm>
           <a:prstGeom prst="ellipse">
@@ -17021,7 +17021,7 @@
         </p:nvSpPr>
         <p:spPr>
           <a:xfrm>
-            <a:off x="4579502" y="4521999"/>
+            <a:off x="5951102" y="4609797"/>
             <a:ext cx="32000" cy="32000"/>
           </a:xfrm>
           <a:prstGeom prst="ellipse">
@@ -17065,7 +17065,7 @@
         </p:nvSpPr>
         <p:spPr>
           <a:xfrm>
-            <a:off x="4362254" y="4547286"/>
+            <a:off x="5733854" y="4635622"/>
             <a:ext cx="32000" cy="32000"/>
           </a:xfrm>
           <a:prstGeom prst="ellipse">
@@ -17109,7 +17109,7 @@
         </p:nvSpPr>
         <p:spPr>
           <a:xfrm>
-            <a:off x="4388923" y="4559548"/>
+            <a:off x="5760523" y="4648146"/>
             <a:ext cx="32000" cy="32000"/>
           </a:xfrm>
           <a:prstGeom prst="ellipse">
@@ -17153,7 +17153,7 @@
         </p:nvSpPr>
         <p:spPr>
           <a:xfrm>
-            <a:off x="4158017" y="4586012"/>
+            <a:off x="5529617" y="4675172"/>
             <a:ext cx="32000" cy="32000"/>
           </a:xfrm>
           <a:prstGeom prst="ellipse">
@@ -17197,7 +17197,7 @@
         </p:nvSpPr>
         <p:spPr>
           <a:xfrm>
-            <a:off x="4451523" y="4638839"/>
+            <a:off x="5823123" y="4729123"/>
             <a:ext cx="32000" cy="32000"/>
           </a:xfrm>
           <a:prstGeom prst="ellipse">
@@ -17241,7 +17241,7 @@
         </p:nvSpPr>
         <p:spPr>
           <a:xfrm>
-            <a:off x="4490269" y="4674783"/>
+            <a:off x="5861869" y="4765832"/>
             <a:ext cx="32000" cy="32000"/>
           </a:xfrm>
           <a:prstGeom prst="ellipse">
@@ -17285,7 +17285,7 @@
         </p:nvSpPr>
         <p:spPr>
           <a:xfrm>
-            <a:off x="4274425" y="4511685"/>
+            <a:off x="5646025" y="4599264"/>
             <a:ext cx="32000" cy="32000"/>
           </a:xfrm>
           <a:prstGeom prst="ellipse">
@@ -17329,7 +17329,7 @@
         </p:nvSpPr>
         <p:spPr>
           <a:xfrm>
-            <a:off x="4461179" y="4605915"/>
+            <a:off x="5832779" y="4695498"/>
             <a:ext cx="32000" cy="32000"/>
           </a:xfrm>
           <a:prstGeom prst="ellipse">
@@ -17373,7 +17373,7 @@
         </p:nvSpPr>
         <p:spPr>
           <a:xfrm>
-            <a:off x="4560014" y="4646733"/>
+            <a:off x="5931614" y="4737185"/>
             <a:ext cx="32000" cy="32000"/>
           </a:xfrm>
           <a:prstGeom prst="ellipse">
@@ -17417,7 +17417,7 @@
         </p:nvSpPr>
         <p:spPr>
           <a:xfrm>
-            <a:off x="4638423" y="4380345"/>
+            <a:off x="6010023" y="4465130"/>
             <a:ext cx="32000" cy="32000"/>
           </a:xfrm>
           <a:prstGeom prst="ellipse">
@@ -17461,7 +17461,7 @@
         </p:nvSpPr>
         <p:spPr>
           <a:xfrm>
-            <a:off x="4309053" y="4662351"/>
+            <a:off x="5680653" y="4753136"/>
             <a:ext cx="32000" cy="32000"/>
           </a:xfrm>
           <a:prstGeom prst="ellipse">
@@ -17505,7 +17505,7 @@
         </p:nvSpPr>
         <p:spPr>
           <a:xfrm>
-            <a:off x="4181612" y="4362582"/>
+            <a:off x="5553212" y="4446988"/>
             <a:ext cx="32000" cy="32000"/>
           </a:xfrm>
           <a:prstGeom prst="ellipse">
@@ -17549,7 +17549,7 @@
         </p:nvSpPr>
         <p:spPr>
           <a:xfrm>
-            <a:off x="4073818" y="4561763"/>
+            <a:off x="5445418" y="4650408"/>
             <a:ext cx="32000" cy="32000"/>
           </a:xfrm>
           <a:prstGeom prst="ellipse">
@@ -17593,7 +17593,7 @@
         </p:nvSpPr>
         <p:spPr>
           <a:xfrm>
-            <a:off x="4906500" y="4582533"/>
+            <a:off x="6278100" y="4671619"/>
             <a:ext cx="32000" cy="32000"/>
           </a:xfrm>
           <a:prstGeom prst="ellipse">
@@ -17637,7 +17637,7 @@
         </p:nvSpPr>
         <p:spPr>
           <a:xfrm>
-            <a:off x="4450689" y="4675492"/>
+            <a:off x="5822289" y="4766556"/>
             <a:ext cx="32000" cy="32000"/>
           </a:xfrm>
           <a:prstGeom prst="ellipse">
@@ -17681,7 +17681,7 @@
         </p:nvSpPr>
         <p:spPr>
           <a:xfrm>
-            <a:off x="4605402" y="4591218"/>
+            <a:off x="5977002" y="4680489"/>
             <a:ext cx="32000" cy="32000"/>
           </a:xfrm>
           <a:prstGeom prst="ellipse">
@@ -17725,7 +17725,7 @@
         </p:nvSpPr>
         <p:spPr>
           <a:xfrm>
-            <a:off x="4559683" y="4524089"/>
+            <a:off x="5931283" y="4611932"/>
             <a:ext cx="32000" cy="32000"/>
           </a:xfrm>
           <a:prstGeom prst="ellipse">
@@ -17769,7 +17769,7 @@
         </p:nvSpPr>
         <p:spPr>
           <a:xfrm>
-            <a:off x="4571019" y="4623033"/>
+            <a:off x="5942619" y="4712981"/>
             <a:ext cx="32000" cy="32000"/>
           </a:xfrm>
           <a:prstGeom prst="ellipse">
@@ -17813,7 +17813,7 @@
         </p:nvSpPr>
         <p:spPr>
           <a:xfrm>
-            <a:off x="4445474" y="4576277"/>
+            <a:off x="5817074" y="4665231"/>
             <a:ext cx="32000" cy="32000"/>
           </a:xfrm>
           <a:prstGeom prst="ellipse">
@@ -17857,7 +17857,7 @@
         </p:nvSpPr>
         <p:spPr>
           <a:xfrm>
-            <a:off x="4554748" y="4643730"/>
+            <a:off x="5926348" y="4734118"/>
             <a:ext cx="32000" cy="32000"/>
           </a:xfrm>
           <a:prstGeom prst="ellipse">
@@ -17901,7 +17901,7 @@
         </p:nvSpPr>
         <p:spPr>
           <a:xfrm>
-            <a:off x="4011859" y="4555588"/>
+            <a:off x="5383459" y="4644101"/>
             <a:ext cx="32000" cy="32000"/>
           </a:xfrm>
           <a:prstGeom prst="ellipse">
@@ -17945,7 +17945,7 @@
         </p:nvSpPr>
         <p:spPr>
           <a:xfrm>
-            <a:off x="4634612" y="4563320"/>
+            <a:off x="6006212" y="4651997"/>
             <a:ext cx="32000" cy="32000"/>
           </a:xfrm>
           <a:prstGeom prst="ellipse">
@@ -17989,7 +17989,7 @@
         </p:nvSpPr>
         <p:spPr>
           <a:xfrm>
-            <a:off x="4642414" y="4273035"/>
+            <a:off x="6014014" y="4355536"/>
             <a:ext cx="32000" cy="32000"/>
           </a:xfrm>
           <a:prstGeom prst="ellipse">
@@ -18033,7 +18033,7 @@
         </p:nvSpPr>
         <p:spPr>
           <a:xfrm>
-            <a:off x="4295401" y="4607508"/>
+            <a:off x="5667001" y="4697125"/>
             <a:ext cx="32000" cy="32000"/>
           </a:xfrm>
           <a:prstGeom prst="ellipse">
@@ -18077,7 +18077,7 @@
         </p:nvSpPr>
         <p:spPr>
           <a:xfrm>
-            <a:off x="5442235" y="4154201"/>
+            <a:off x="6813835" y="4234174"/>
             <a:ext cx="32000" cy="32000"/>
           </a:xfrm>
           <a:prstGeom prst="ellipse">
@@ -18121,7 +18121,7 @@
         </p:nvSpPr>
         <p:spPr>
           <a:xfrm>
-            <a:off x="4541948" y="4670444"/>
+            <a:off x="5913548" y="4761401"/>
             <a:ext cx="32000" cy="32000"/>
           </a:xfrm>
           <a:prstGeom prst="ellipse">
@@ -18165,7 +18165,7 @@
         </p:nvSpPr>
         <p:spPr>
           <a:xfrm>
-            <a:off x="4426624" y="4606855"/>
+            <a:off x="5798224" y="4696458"/>
             <a:ext cx="32000" cy="32000"/>
           </a:xfrm>
           <a:prstGeom prst="ellipse">
@@ -18209,7 +18209,7 @@
         </p:nvSpPr>
         <p:spPr>
           <a:xfrm>
-            <a:off x="4002870" y="4374025"/>
+            <a:off x="5374470" y="4458674"/>
             <a:ext cx="32000" cy="32000"/>
           </a:xfrm>
           <a:prstGeom prst="ellipse">
@@ -18253,7 +18253,7 @@
         </p:nvSpPr>
         <p:spPr>
           <a:xfrm>
-            <a:off x="3938749" y="4223238"/>
+            <a:off x="5310349" y="4304680"/>
             <a:ext cx="32000" cy="32000"/>
           </a:xfrm>
           <a:prstGeom prst="ellipse">
@@ -18297,7 +18297,7 @@
         </p:nvSpPr>
         <p:spPr>
           <a:xfrm>
-            <a:off x="4853309" y="4569333"/>
+            <a:off x="6224909" y="4658138"/>
             <a:ext cx="32000" cy="32000"/>
           </a:xfrm>
           <a:prstGeom prst="ellipse">
@@ -18341,7 +18341,7 @@
         </p:nvSpPr>
         <p:spPr>
           <a:xfrm>
-            <a:off x="4645123" y="4322724"/>
+            <a:off x="6016723" y="4406282"/>
             <a:ext cx="32000" cy="32000"/>
           </a:xfrm>
           <a:prstGeom prst="ellipse">
@@ -18385,7 +18385,7 @@
         </p:nvSpPr>
         <p:spPr>
           <a:xfrm>
-            <a:off x="4848668" y="4502629"/>
+            <a:off x="6220268" y="4590015"/>
             <a:ext cx="32000" cy="32000"/>
           </a:xfrm>
           <a:prstGeom prst="ellipse">
@@ -18429,7 +18429,7 @@
         </p:nvSpPr>
         <p:spPr>
           <a:xfrm>
-            <a:off x="4632607" y="4411374"/>
+            <a:off x="6004207" y="4496818"/>
             <a:ext cx="32000" cy="32000"/>
           </a:xfrm>
           <a:prstGeom prst="ellipse">
@@ -18473,7 +18473,7 @@
         </p:nvSpPr>
         <p:spPr>
           <a:xfrm>
-            <a:off x="4508338" y="4692015"/>
+            <a:off x="5879938" y="4783431"/>
             <a:ext cx="32000" cy="32000"/>
           </a:xfrm>
           <a:prstGeom prst="ellipse">
@@ -18517,7 +18517,7 @@
         </p:nvSpPr>
         <p:spPr>
           <a:xfrm>
-            <a:off x="3649272" y="4277649"/>
+            <a:off x="5020872" y="4360248"/>
             <a:ext cx="32000" cy="32000"/>
           </a:xfrm>
           <a:prstGeom prst="ellipse">
@@ -18561,7 +18561,7 @@
         </p:nvSpPr>
         <p:spPr>
           <a:xfrm>
-            <a:off x="4580057" y="4615333"/>
+            <a:off x="5951657" y="4705117"/>
             <a:ext cx="32000" cy="32000"/>
           </a:xfrm>
           <a:prstGeom prst="ellipse">
@@ -18605,7 +18605,7 @@
         </p:nvSpPr>
         <p:spPr>
           <a:xfrm>
-            <a:off x="4057916" y="4342455"/>
+            <a:off x="5429516" y="4426433"/>
             <a:ext cx="32000" cy="32000"/>
           </a:xfrm>
           <a:prstGeom prst="ellipse">
@@ -18649,7 +18649,7 @@
         </p:nvSpPr>
         <p:spPr>
           <a:xfrm>
-            <a:off x="4557622" y="4625652"/>
+            <a:off x="5929222" y="4715655"/>
             <a:ext cx="32000" cy="32000"/>
           </a:xfrm>
           <a:prstGeom prst="ellipse">
@@ -18693,7 +18693,7 @@
         </p:nvSpPr>
         <p:spPr>
           <a:xfrm>
-            <a:off x="4196445" y="4201192"/>
+            <a:off x="5568045" y="4282165"/>
             <a:ext cx="32000" cy="32000"/>
           </a:xfrm>
           <a:prstGeom prst="ellipse">
@@ -18737,7 +18737,7 @@
         </p:nvSpPr>
         <p:spPr>
           <a:xfrm>
-            <a:off x="4953089" y="4264508"/>
+            <a:off x="6324689" y="4346828"/>
             <a:ext cx="32000" cy="32000"/>
           </a:xfrm>
           <a:prstGeom prst="ellipse">
@@ -18781,7 +18781,7 @@
         </p:nvSpPr>
         <p:spPr>
           <a:xfrm>
-            <a:off x="4003506" y="4482923"/>
+            <a:off x="5375106" y="4569890"/>
             <a:ext cx="32000" cy="32000"/>
           </a:xfrm>
           <a:prstGeom prst="ellipse">
@@ -18825,7 +18825,7 @@
         </p:nvSpPr>
         <p:spPr>
           <a:xfrm>
-            <a:off x="4125152" y="4414842"/>
+            <a:off x="5496752" y="4500360"/>
             <a:ext cx="32000" cy="32000"/>
           </a:xfrm>
           <a:prstGeom prst="ellipse">
@@ -18869,7 +18869,7 @@
         </p:nvSpPr>
         <p:spPr>
           <a:xfrm>
-            <a:off x="4576428" y="4646272"/>
+            <a:off x="5948028" y="4736715"/>
             <a:ext cx="32000" cy="32000"/>
           </a:xfrm>
           <a:prstGeom prst="ellipse">
@@ -18913,7 +18913,7 @@
         </p:nvSpPr>
         <p:spPr>
           <a:xfrm>
-            <a:off x="4378941" y="4572676"/>
+            <a:off x="5750541" y="4661553"/>
             <a:ext cx="32000" cy="32000"/>
           </a:xfrm>
           <a:prstGeom prst="ellipse">
@@ -18957,7 +18957,7 @@
         </p:nvSpPr>
         <p:spPr>
           <a:xfrm>
-            <a:off x="4480450" y="4679286"/>
+            <a:off x="5852050" y="4770431"/>
             <a:ext cx="32000" cy="32000"/>
           </a:xfrm>
           <a:prstGeom prst="ellipse">
@@ -19001,7 +19001,7 @@
         </p:nvSpPr>
         <p:spPr>
           <a:xfrm>
-            <a:off x="4677086" y="4542401"/>
+            <a:off x="6048686" y="4630633"/>
             <a:ext cx="32000" cy="32000"/>
           </a:xfrm>
           <a:prstGeom prst="ellipse">
@@ -19045,7 +19045,7 @@
         </p:nvSpPr>
         <p:spPr>
           <a:xfrm>
-            <a:off x="4513747" y="4686999"/>
+            <a:off x="5885347" y="4778308"/>
             <a:ext cx="32000" cy="32000"/>
           </a:xfrm>
           <a:prstGeom prst="ellipse">
@@ -19089,7 +19089,7 @@
         </p:nvSpPr>
         <p:spPr>
           <a:xfrm>
-            <a:off x="4209538" y="4464780"/>
+            <a:off x="5581138" y="4551360"/>
             <a:ext cx="32000" cy="32000"/>
           </a:xfrm>
           <a:prstGeom prst="ellipse">
@@ -19133,7 +19133,7 @@
         </p:nvSpPr>
         <p:spPr>
           <a:xfrm>
-            <a:off x="2974587" y="4384731"/>
+            <a:off x="4346187" y="4469609"/>
             <a:ext cx="32000" cy="32000"/>
           </a:xfrm>
           <a:prstGeom prst="ellipse">
@@ -19177,7 +19177,7 @@
         </p:nvSpPr>
         <p:spPr>
           <a:xfrm>
-            <a:off x="4512745" y="4692042"/>
+            <a:off x="5884345" y="4783458"/>
             <a:ext cx="32000" cy="32000"/>
           </a:xfrm>
           <a:prstGeom prst="ellipse">
@@ -19221,7 +19221,7 @@
         </p:nvSpPr>
         <p:spPr>
           <a:xfrm>
-            <a:off x="3941886" y="4402351"/>
+            <a:off x="5313486" y="4487604"/>
             <a:ext cx="32000" cy="32000"/>
           </a:xfrm>
           <a:prstGeom prst="ellipse">
@@ -19265,7 +19265,7 @@
         </p:nvSpPr>
         <p:spPr>
           <a:xfrm>
-            <a:off x="4416667" y="4597293"/>
+            <a:off x="5788267" y="4686694"/>
             <a:ext cx="32000" cy="32000"/>
           </a:xfrm>
           <a:prstGeom prst="ellipse">
@@ -19309,7 +19309,7 @@
         </p:nvSpPr>
         <p:spPr>
           <a:xfrm>
-            <a:off x="4191486" y="4406755"/>
+            <a:off x="5563086" y="4492101"/>
             <a:ext cx="32000" cy="32000"/>
           </a:xfrm>
           <a:prstGeom prst="ellipse">
@@ -19353,7 +19353,7 @@
         </p:nvSpPr>
         <p:spPr>
           <a:xfrm>
-            <a:off x="4195913" y="3895585"/>
+            <a:off x="5567513" y="3970055"/>
             <a:ext cx="32000" cy="32000"/>
           </a:xfrm>
           <a:prstGeom prst="ellipse">
@@ -19397,7 +19397,7 @@
         </p:nvSpPr>
         <p:spPr>
           <a:xfrm>
-            <a:off x="4978826" y="4215476"/>
+            <a:off x="6350426" y="4296753"/>
             <a:ext cx="32000" cy="32000"/>
           </a:xfrm>
           <a:prstGeom prst="ellipse">
@@ -19441,7 +19441,7 @@
         </p:nvSpPr>
         <p:spPr>
           <a:xfrm>
-            <a:off x="4209278" y="4312003"/>
+            <a:off x="5580878" y="4395333"/>
             <a:ext cx="32000" cy="32000"/>
           </a:xfrm>
           <a:prstGeom prst="ellipse">
@@ -19485,7 +19485,7 @@
         </p:nvSpPr>
         <p:spPr>
           <a:xfrm>
-            <a:off x="4466366" y="4616317"/>
+            <a:off x="5837966" y="4706122"/>
             <a:ext cx="32000" cy="32000"/>
           </a:xfrm>
           <a:prstGeom prst="ellipse">
@@ -19529,7 +19529,7 @@
         </p:nvSpPr>
         <p:spPr>
           <a:xfrm>
-            <a:off x="4245164" y="4503201"/>
+            <a:off x="5616764" y="4590599"/>
             <a:ext cx="32000" cy="32000"/>
           </a:xfrm>
           <a:prstGeom prst="ellipse">
@@ -19573,7 +19573,7 @@
         </p:nvSpPr>
         <p:spPr>
           <a:xfrm>
-            <a:off x="4512522" y="4687268"/>
+            <a:off x="5884122" y="4778582"/>
             <a:ext cx="32000" cy="32000"/>
           </a:xfrm>
           <a:prstGeom prst="ellipse">
@@ -19617,7 +19617,7 @@
         </p:nvSpPr>
         <p:spPr>
           <a:xfrm>
-            <a:off x="4101055" y="4587051"/>
+            <a:off x="5472655" y="4676233"/>
             <a:ext cx="32000" cy="32000"/>
           </a:xfrm>
           <a:prstGeom prst="ellipse">
@@ -19661,7 +19661,7 @@
         </p:nvSpPr>
         <p:spPr>
           <a:xfrm>
-            <a:off x="3526387" y="4110169"/>
+            <a:off x="4897987" y="4189205"/>
             <a:ext cx="32000" cy="32000"/>
           </a:xfrm>
           <a:prstGeom prst="ellipse">
@@ -19705,7 +19705,7 @@
         </p:nvSpPr>
         <p:spPr>
           <a:xfrm>
-            <a:off x="4674619" y="3825761"/>
+            <a:off x="6046219" y="3898746"/>
             <a:ext cx="32000" cy="32000"/>
           </a:xfrm>
           <a:prstGeom prst="ellipse">
@@ -19749,7 +19749,7 @@
         </p:nvSpPr>
         <p:spPr>
           <a:xfrm>
-            <a:off x="4707839" y="4350728"/>
+            <a:off x="6079439" y="4434883"/>
             <a:ext cx="32000" cy="32000"/>
           </a:xfrm>
           <a:prstGeom prst="ellipse">
@@ -19793,7 +19793,7 @@
         </p:nvSpPr>
         <p:spPr>
           <a:xfrm>
-            <a:off x="4618384" y="4428104"/>
+            <a:off x="5989984" y="4513905"/>
             <a:ext cx="32000" cy="32000"/>
           </a:xfrm>
           <a:prstGeom prst="ellipse">
@@ -19837,7 +19837,7 @@
         </p:nvSpPr>
         <p:spPr>
           <a:xfrm>
-            <a:off x="4424977" y="4519884"/>
+            <a:off x="5796577" y="4607637"/>
             <a:ext cx="32000" cy="32000"/>
           </a:xfrm>
           <a:prstGeom prst="ellipse">
@@ -19881,7 +19881,7 @@
         </p:nvSpPr>
         <p:spPr>
           <a:xfrm>
-            <a:off x="4513396" y="4691773"/>
+            <a:off x="5884996" y="4783184"/>
             <a:ext cx="32000" cy="32000"/>
           </a:xfrm>
           <a:prstGeom prst="ellipse">
@@ -19925,7 +19925,7 @@
         </p:nvSpPr>
         <p:spPr>
           <a:xfrm>
-            <a:off x="4137345" y="4491292"/>
+            <a:off x="5508945" y="4578437"/>
             <a:ext cx="32000" cy="32000"/>
           </a:xfrm>
           <a:prstGeom prst="ellipse">
@@ -19969,7 +19969,7 @@
         </p:nvSpPr>
         <p:spPr>
           <a:xfrm>
-            <a:off x="4826146" y="4097865"/>
+            <a:off x="6197746" y="4176639"/>
             <a:ext cx="32000" cy="32000"/>
           </a:xfrm>
           <a:prstGeom prst="ellipse">
@@ -20013,7 +20013,7 @@
         </p:nvSpPr>
         <p:spPr>
           <a:xfrm>
-            <a:off x="4723434" y="4593340"/>
+            <a:off x="6095034" y="4682656"/>
             <a:ext cx="32000" cy="32000"/>
           </a:xfrm>
           <a:prstGeom prst="ellipse">
@@ -20057,7 +20057,7 @@
         </p:nvSpPr>
         <p:spPr>
           <a:xfrm>
-            <a:off x="4698092" y="4579868"/>
+            <a:off x="6069692" y="4668898"/>
             <a:ext cx="32000" cy="32000"/>
           </a:xfrm>
           <a:prstGeom prst="ellipse">
@@ -20101,7 +20101,7 @@
         </p:nvSpPr>
         <p:spPr>
           <a:xfrm>
-            <a:off x="4228098" y="4301809"/>
+            <a:off x="5599698" y="4384922"/>
             <a:ext cx="32000" cy="32000"/>
           </a:xfrm>
           <a:prstGeom prst="ellipse">
@@ -20145,7 +20145,7 @@
         </p:nvSpPr>
         <p:spPr>
           <a:xfrm>
-            <a:off x="4549161" y="4678500"/>
+            <a:off x="5920761" y="4769628"/>
             <a:ext cx="32000" cy="32000"/>
           </a:xfrm>
           <a:prstGeom prst="ellipse">
@@ -20189,7 +20189,7 @@
         </p:nvSpPr>
         <p:spPr>
           <a:xfrm>
-            <a:off x="4604150" y="4456088"/>
+            <a:off x="5975750" y="4542484"/>
             <a:ext cx="32000" cy="32000"/>
           </a:xfrm>
           <a:prstGeom prst="ellipse">
@@ -20233,7 +20233,7 @@
         </p:nvSpPr>
         <p:spPr>
           <a:xfrm>
-            <a:off x="4455968" y="4520466"/>
+            <a:off x="5827568" y="4608231"/>
             <a:ext cx="32000" cy="32000"/>
           </a:xfrm>
           <a:prstGeom prst="ellipse">
@@ -20277,7 +20277,7 @@
         </p:nvSpPr>
         <p:spPr>
           <a:xfrm>
-            <a:off x="4372340" y="4490095"/>
+            <a:off x="5743940" y="4577214"/>
             <a:ext cx="32000" cy="32000"/>
           </a:xfrm>
           <a:prstGeom prst="ellipse">
@@ -20321,7 +20321,7 @@
         </p:nvSpPr>
         <p:spPr>
           <a:xfrm>
-            <a:off x="4615336" y="4502196"/>
+            <a:off x="5986936" y="4589573"/>
             <a:ext cx="32000" cy="32000"/>
           </a:xfrm>
           <a:prstGeom prst="ellipse">
@@ -20365,7 +20365,7 @@
         </p:nvSpPr>
         <p:spPr>
           <a:xfrm>
-            <a:off x="3836291" y="3961850"/>
+            <a:off x="5207891" y="4037730"/>
             <a:ext cx="32000" cy="32000"/>
           </a:xfrm>
           <a:prstGeom prst="ellipse">
@@ -20409,7 +20409,7 @@
         </p:nvSpPr>
         <p:spPr>
           <a:xfrm>
-            <a:off x="4583783" y="4539394"/>
+            <a:off x="5955383" y="4627562"/>
             <a:ext cx="32000" cy="32000"/>
           </a:xfrm>
           <a:prstGeom prst="ellipse">
@@ -20453,7 +20453,7 @@
         </p:nvSpPr>
         <p:spPr>
           <a:xfrm>
-            <a:off x="4545021" y="4659808"/>
+            <a:off x="5916621" y="4750538"/>
             <a:ext cx="32000" cy="32000"/>
           </a:xfrm>
           <a:prstGeom prst="ellipse">
@@ -20497,7 +20497,7 @@
         </p:nvSpPr>
         <p:spPr>
           <a:xfrm>
-            <a:off x="4408127" y="4558511"/>
+            <a:off x="5779727" y="4647086"/>
             <a:ext cx="32000" cy="32000"/>
           </a:xfrm>
           <a:prstGeom prst="ellipse">
@@ -20541,7 +20541,7 @@
         </p:nvSpPr>
         <p:spPr>
           <a:xfrm>
-            <a:off x="4447880" y="4649768"/>
+            <a:off x="5819480" y="4740285"/>
             <a:ext cx="32000" cy="32000"/>
           </a:xfrm>
           <a:prstGeom prst="ellipse">
@@ -20585,7 +20585,7 @@
         </p:nvSpPr>
         <p:spPr>
           <a:xfrm>
-            <a:off x="4304958" y="4505784"/>
+            <a:off x="5676558" y="4593237"/>
             <a:ext cx="32000" cy="32000"/>
           </a:xfrm>
           <a:prstGeom prst="ellipse">
@@ -20629,7 +20629,7 @@
         </p:nvSpPr>
         <p:spPr>
           <a:xfrm>
-            <a:off x="4425910" y="4516624"/>
+            <a:off x="5797510" y="4604308"/>
             <a:ext cx="32000" cy="32000"/>
           </a:xfrm>
           <a:prstGeom prst="ellipse">
@@ -20673,7 +20673,7 @@
         </p:nvSpPr>
         <p:spPr>
           <a:xfrm>
-            <a:off x="4138891" y="4405951"/>
+            <a:off x="5510491" y="4491280"/>
             <a:ext cx="32000" cy="32000"/>
           </a:xfrm>
           <a:prstGeom prst="ellipse">
@@ -20717,7 +20717,7 @@
         </p:nvSpPr>
         <p:spPr>
           <a:xfrm>
-            <a:off x="4454288" y="4647150"/>
+            <a:off x="5825888" y="4737611"/>
             <a:ext cx="32000" cy="32000"/>
           </a:xfrm>
           <a:prstGeom prst="ellipse">
@@ -20761,7 +20761,7 @@
         </p:nvSpPr>
         <p:spPr>
           <a:xfrm>
-            <a:off x="4308184" y="4606119"/>
+            <a:off x="5679784" y="4695707"/>
             <a:ext cx="32000" cy="32000"/>
           </a:xfrm>
           <a:prstGeom prst="ellipse">
@@ -20805,7 +20805,7 @@
         </p:nvSpPr>
         <p:spPr>
           <a:xfrm>
-            <a:off x="4450879" y="4591930"/>
+            <a:off x="5822479" y="4681217"/>
             <a:ext cx="32000" cy="32000"/>
           </a:xfrm>
           <a:prstGeom prst="ellipse">
@@ -20849,7 +20849,7 @@
         </p:nvSpPr>
         <p:spPr>
           <a:xfrm>
-            <a:off x="4451633" y="4541948"/>
+            <a:off x="5823233" y="4630171"/>
             <a:ext cx="32000" cy="32000"/>
           </a:xfrm>
           <a:prstGeom prst="ellipse">
@@ -20893,7 +20893,7 @@
         </p:nvSpPr>
         <p:spPr>
           <a:xfrm>
-            <a:off x="3992486" y="4390980"/>
+            <a:off x="5364086" y="4475991"/>
             <a:ext cx="32000" cy="32000"/>
           </a:xfrm>
           <a:prstGeom prst="ellipse">
@@ -20937,7 +20937,7 @@
         </p:nvSpPr>
         <p:spPr>
           <a:xfrm>
-            <a:off x="4767237" y="4633411"/>
+            <a:off x="6138837" y="4723579"/>
             <a:ext cx="32000" cy="32000"/>
           </a:xfrm>
           <a:prstGeom prst="ellipse">
@@ -20981,7 +20981,7 @@
         </p:nvSpPr>
         <p:spPr>
           <a:xfrm>
-            <a:off x="4434580" y="4564103"/>
+            <a:off x="5806180" y="4652797"/>
             <a:ext cx="32000" cy="32000"/>
           </a:xfrm>
           <a:prstGeom prst="ellipse">
@@ -21025,7 +21025,7 @@
         </p:nvSpPr>
         <p:spPr>
           <a:xfrm>
-            <a:off x="4455003" y="4560030"/>
+            <a:off x="5826603" y="4648638"/>
             <a:ext cx="32000" cy="32000"/>
           </a:xfrm>
           <a:prstGeom prst="ellipse">
@@ -21069,7 +21069,7 @@
         </p:nvSpPr>
         <p:spPr>
           <a:xfrm>
-            <a:off x="4308824" y="4645273"/>
+            <a:off x="5680424" y="4735694"/>
             <a:ext cx="32000" cy="32000"/>
           </a:xfrm>
           <a:prstGeom prst="ellipse">
@@ -21113,7 +21113,7 @@
         </p:nvSpPr>
         <p:spPr>
           <a:xfrm>
-            <a:off x="4977665" y="4399586"/>
+            <a:off x="6349265" y="4484780"/>
             <a:ext cx="32000" cy="32000"/>
           </a:xfrm>
           <a:prstGeom prst="ellipse">
@@ -21157,7 +21157,7 @@
         </p:nvSpPr>
         <p:spPr>
           <a:xfrm>
-            <a:off x="4571023" y="4560546"/>
+            <a:off x="5942623" y="4649164"/>
             <a:ext cx="32000" cy="32000"/>
           </a:xfrm>
           <a:prstGeom prst="ellipse">
@@ -21201,7 +21201,7 @@
         </p:nvSpPr>
         <p:spPr>
           <a:xfrm>
-            <a:off x="4796092" y="4465226"/>
+            <a:off x="6167692" y="4551817"/>
             <a:ext cx="32000" cy="32000"/>
           </a:xfrm>
           <a:prstGeom prst="ellipse">
@@ -21245,7 +21245,7 @@
         </p:nvSpPr>
         <p:spPr>
           <a:xfrm>
-            <a:off x="4654533" y="4196521"/>
+            <a:off x="6026133" y="4277395"/>
             <a:ext cx="32000" cy="32000"/>
           </a:xfrm>
           <a:prstGeom prst="ellipse">
@@ -21289,7 +21289,7 @@
         </p:nvSpPr>
         <p:spPr>
           <a:xfrm>
-            <a:off x="4532007" y="4670339"/>
+            <a:off x="5903607" y="4761293"/>
             <a:ext cx="32000" cy="32000"/>
           </a:xfrm>
           <a:prstGeom prst="ellipse">
@@ -21333,7 +21333,7 @@
         </p:nvSpPr>
         <p:spPr>
           <a:xfrm>
-            <a:off x="4069134" y="4342696"/>
+            <a:off x="5440734" y="4426679"/>
             <a:ext cx="32000" cy="32000"/>
           </a:xfrm>
           <a:prstGeom prst="ellipse">
@@ -21377,7 +21377,7 @@
         </p:nvSpPr>
         <p:spPr>
           <a:xfrm>
-            <a:off x="4466933" y="4656195"/>
+            <a:off x="5838533" y="4746848"/>
             <a:ext cx="32000" cy="32000"/>
           </a:xfrm>
           <a:prstGeom prst="ellipse">
@@ -21421,7 +21421,7 @@
         </p:nvSpPr>
         <p:spPr>
           <a:xfrm>
-            <a:off x="4405273" y="4595240"/>
+            <a:off x="5776873" y="4684597"/>
             <a:ext cx="32000" cy="32000"/>
           </a:xfrm>
           <a:prstGeom prst="ellipse">
@@ -21465,7 +21465,7 @@
         </p:nvSpPr>
         <p:spPr>
           <a:xfrm>
-            <a:off x="4670558" y="4438651"/>
+            <a:off x="6042158" y="4524676"/>
             <a:ext cx="32000" cy="32000"/>
           </a:xfrm>
           <a:prstGeom prst="ellipse">
@@ -21509,7 +21509,7 @@
         </p:nvSpPr>
         <p:spPr>
           <a:xfrm>
-            <a:off x="3868054" y="4034226"/>
+            <a:off x="5239654" y="4111646"/>
             <a:ext cx="32000" cy="32000"/>
           </a:xfrm>
           <a:prstGeom prst="ellipse">
@@ -21553,7 +21553,7 @@
         </p:nvSpPr>
         <p:spPr>
           <a:xfrm>
-            <a:off x="4503381" y="4688648"/>
+            <a:off x="5874981" y="4779992"/>
             <a:ext cx="32000" cy="32000"/>
           </a:xfrm>
           <a:prstGeom prst="ellipse">
@@ -21597,7 +21597,7 @@
         </p:nvSpPr>
         <p:spPr>
           <a:xfrm>
-            <a:off x="4792877" y="4518158"/>
+            <a:off x="6164477" y="4605875"/>
             <a:ext cx="32000" cy="32000"/>
           </a:xfrm>
           <a:prstGeom prst="ellipse">
@@ -21641,7 +21641,7 @@
         </p:nvSpPr>
         <p:spPr>
           <a:xfrm>
-            <a:off x="4228512" y="4329140"/>
+            <a:off x="5600112" y="4412835"/>
             <a:ext cx="32000" cy="32000"/>
           </a:xfrm>
           <a:prstGeom prst="ellipse">
@@ -21685,7 +21685,7 @@
         </p:nvSpPr>
         <p:spPr>
           <a:xfrm>
-            <a:off x="4448236" y="4659961"/>
+            <a:off x="5819836" y="4750695"/>
             <a:ext cx="32000" cy="32000"/>
           </a:xfrm>
           <a:prstGeom prst="ellipse">
@@ -21729,7 +21729,7 @@
         </p:nvSpPr>
         <p:spPr>
           <a:xfrm>
-            <a:off x="4483089" y="4645879"/>
+            <a:off x="5854689" y="4736313"/>
             <a:ext cx="32000" cy="32000"/>
           </a:xfrm>
           <a:prstGeom prst="ellipse">
@@ -21773,7 +21773,7 @@
         </p:nvSpPr>
         <p:spPr>
           <a:xfrm>
-            <a:off x="4540838" y="4652252"/>
+            <a:off x="5912438" y="4742822"/>
             <a:ext cx="32000" cy="32000"/>
           </a:xfrm>
           <a:prstGeom prst="ellipse">
@@ -21817,7 +21817,7 @@
         </p:nvSpPr>
         <p:spPr>
           <a:xfrm>
-            <a:off x="4808151" y="4612601"/>
+            <a:off x="6179751" y="4702327"/>
             <a:ext cx="32000" cy="32000"/>
           </a:xfrm>
           <a:prstGeom prst="ellipse">
@@ -21861,7 +21861,7 @@
         </p:nvSpPr>
         <p:spPr>
           <a:xfrm>
-            <a:off x="4567670" y="4563436"/>
+            <a:off x="5939270" y="4652116"/>
             <a:ext cx="32000" cy="32000"/>
           </a:xfrm>
           <a:prstGeom prst="ellipse">
@@ -21905,7 +21905,7 @@
         </p:nvSpPr>
         <p:spPr>
           <a:xfrm>
-            <a:off x="4508686" y="4692400"/>
+            <a:off x="5880286" y="4783824"/>
             <a:ext cx="32000" cy="32000"/>
           </a:xfrm>
           <a:prstGeom prst="ellipse">
@@ -21949,7 +21949,7 @@
         </p:nvSpPr>
         <p:spPr>
           <a:xfrm>
-            <a:off x="3442907" y="3880304"/>
+            <a:off x="4814507" y="3954449"/>
             <a:ext cx="32000" cy="32000"/>
           </a:xfrm>
           <a:prstGeom prst="ellipse">
@@ -21993,7 +21993,7 @@
         </p:nvSpPr>
         <p:spPr>
           <a:xfrm>
-            <a:off x="3862102" y="4349464"/>
+            <a:off x="5233702" y="4433592"/>
             <a:ext cx="32000" cy="32000"/>
           </a:xfrm>
           <a:prstGeom prst="ellipse">
@@ -22037,7 +22037,7 @@
         </p:nvSpPr>
         <p:spPr>
           <a:xfrm>
-            <a:off x="4388031" y="4512271"/>
+            <a:off x="5759631" y="4599862"/>
             <a:ext cx="32000" cy="32000"/>
           </a:xfrm>
           <a:prstGeom prst="ellipse">
@@ -22081,7 +22081,7 @@
         </p:nvSpPr>
         <p:spPr>
           <a:xfrm>
-            <a:off x="4634313" y="4535780"/>
+            <a:off x="6005913" y="4623871"/>
             <a:ext cx="32000" cy="32000"/>
           </a:xfrm>
           <a:prstGeom prst="ellipse">
@@ -22125,7 +22125,7 @@
         </p:nvSpPr>
         <p:spPr>
           <a:xfrm>
-            <a:off x="4284162" y="4523477"/>
+            <a:off x="5655762" y="4611307"/>
             <a:ext cx="32000" cy="32000"/>
           </a:xfrm>
           <a:prstGeom prst="ellipse">
@@ -22169,7 +22169,7 @@
         </p:nvSpPr>
         <p:spPr>
           <a:xfrm>
-            <a:off x="4350715" y="4214812"/>
+            <a:off x="5722315" y="4296074"/>
             <a:ext cx="32000" cy="32000"/>
           </a:xfrm>
           <a:prstGeom prst="ellipse">
@@ -22213,7 +22213,7 @@
         </p:nvSpPr>
         <p:spPr>
           <a:xfrm>
-            <a:off x="4525495" y="4669765"/>
+            <a:off x="5897095" y="4760708"/>
             <a:ext cx="32000" cy="32000"/>
           </a:xfrm>
           <a:prstGeom prst="ellipse">
@@ -22257,7 +22257,7 @@
         </p:nvSpPr>
         <p:spPr>
           <a:xfrm>
-            <a:off x="4267004" y="4447535"/>
+            <a:off x="5638604" y="4533749"/>
             <a:ext cx="32000" cy="32000"/>
           </a:xfrm>
           <a:prstGeom prst="ellipse">
@@ -22301,7 +22301,7 @@
         </p:nvSpPr>
         <p:spPr>
           <a:xfrm>
-            <a:off x="4510802" y="4692458"/>
+            <a:off x="5882402" y="4783883"/>
             <a:ext cx="32000" cy="32000"/>
           </a:xfrm>
           <a:prstGeom prst="ellipse">
@@ -22345,7 +22345,7 @@
         </p:nvSpPr>
         <p:spPr>
           <a:xfrm>
-            <a:off x="4593528" y="4608003"/>
+            <a:off x="5965128" y="4697631"/>
             <a:ext cx="32000" cy="32000"/>
           </a:xfrm>
           <a:prstGeom prst="ellipse">
@@ -22389,7 +22389,7 @@
         </p:nvSpPr>
         <p:spPr>
           <a:xfrm>
-            <a:off x="4513548" y="4687890"/>
+            <a:off x="5885148" y="4779218"/>
             <a:ext cx="32000" cy="32000"/>
           </a:xfrm>
           <a:prstGeom prst="ellipse">
@@ -22433,7 +22433,7 @@
         </p:nvSpPr>
         <p:spPr>
           <a:xfrm>
-            <a:off x="4724369" y="4592950"/>
+            <a:off x="6095969" y="4682258"/>
             <a:ext cx="32000" cy="32000"/>
           </a:xfrm>
           <a:prstGeom prst="ellipse">
@@ -22477,7 +22477,7 @@
         </p:nvSpPr>
         <p:spPr>
           <a:xfrm>
-            <a:off x="4627770" y="4631816"/>
+            <a:off x="5999370" y="4721951"/>
             <a:ext cx="32000" cy="32000"/>
           </a:xfrm>
           <a:prstGeom prst="ellipse">
@@ -22521,7 +22521,7 @@
         </p:nvSpPr>
         <p:spPr>
           <a:xfrm>
-            <a:off x="4006446" y="4145125"/>
+            <a:off x="5378046" y="4224904"/>
             <a:ext cx="32000" cy="32000"/>
           </a:xfrm>
           <a:prstGeom prst="ellipse">
@@ -22565,7 +22565,7 @@
         </p:nvSpPr>
         <p:spPr>
           <a:xfrm>
-            <a:off x="3832267" y="4263079"/>
+            <a:off x="5203867" y="4345368"/>
             <a:ext cx="32000" cy="32000"/>
           </a:xfrm>
           <a:prstGeom prst="ellipse">
@@ -22609,7 +22609,7 @@
         </p:nvSpPr>
         <p:spPr>
           <a:xfrm>
-            <a:off x="4743689" y="4036172"/>
+            <a:off x="6115289" y="4113633"/>
             <a:ext cx="32000" cy="32000"/>
           </a:xfrm>
           <a:prstGeom prst="ellipse">
@@ -22653,7 +22653,7 @@
         </p:nvSpPr>
         <p:spPr>
           <a:xfrm>
-            <a:off x="4237390" y="4367483"/>
+            <a:off x="5608990" y="4451994"/>
             <a:ext cx="32000" cy="32000"/>
           </a:xfrm>
           <a:prstGeom prst="ellipse">
@@ -22697,7 +22697,7 @@
         </p:nvSpPr>
         <p:spPr>
           <a:xfrm>
-            <a:off x="4627378" y="4620807"/>
+            <a:off x="5998978" y="4710707"/>
             <a:ext cx="32000" cy="32000"/>
           </a:xfrm>
           <a:prstGeom prst="ellipse">
@@ -22741,7 +22741,7 @@
         </p:nvSpPr>
         <p:spPr>
           <a:xfrm>
-            <a:off x="4528539" y="4680107"/>
+            <a:off x="5900139" y="4771270"/>
             <a:ext cx="32000" cy="32000"/>
           </a:xfrm>
           <a:prstGeom prst="ellipse">
@@ -22785,7 +22785,7 @@
         </p:nvSpPr>
         <p:spPr>
           <a:xfrm>
-            <a:off x="4990316" y="4601366"/>
+            <a:off x="6361916" y="4690853"/>
             <a:ext cx="32000" cy="32000"/>
           </a:xfrm>
           <a:prstGeom prst="ellipse">
@@ -22829,7 +22829,7 @@
         </p:nvSpPr>
         <p:spPr>
           <a:xfrm>
-            <a:off x="4558861" y="4654035"/>
+            <a:off x="5930461" y="4744643"/>
             <a:ext cx="32000" cy="32000"/>
           </a:xfrm>
           <a:prstGeom prst="ellipse">
@@ -22873,7 +22873,7 @@
         </p:nvSpPr>
         <p:spPr>
           <a:xfrm>
-            <a:off x="4767995" y="4625616"/>
+            <a:off x="6139595" y="4715619"/>
             <a:ext cx="32000" cy="32000"/>
           </a:xfrm>
           <a:prstGeom prst="ellipse">
@@ -22917,7 +22917,7 @@
         </p:nvSpPr>
         <p:spPr>
           <a:xfrm>
-            <a:off x="4449632" y="4624409"/>
+            <a:off x="5821232" y="4714386"/>
             <a:ext cx="32000" cy="32000"/>
           </a:xfrm>
           <a:prstGeom prst="ellipse">
@@ -22961,7 +22961,7 @@
         </p:nvSpPr>
         <p:spPr>
           <a:xfrm>
-            <a:off x="4459981" y="4619923"/>
+            <a:off x="5831581" y="4709805"/>
             <a:ext cx="32000" cy="32000"/>
           </a:xfrm>
           <a:prstGeom prst="ellipse">
@@ -23005,7 +23005,7 @@
         </p:nvSpPr>
         <p:spPr>
           <a:xfrm>
-            <a:off x="4186582" y="4540818"/>
+            <a:off x="5558182" y="4629016"/>
             <a:ext cx="32000" cy="32000"/>
           </a:xfrm>
           <a:prstGeom prst="ellipse">
@@ -23049,7 +23049,7 @@
         </p:nvSpPr>
         <p:spPr>
           <a:xfrm>
-            <a:off x="4560509" y="4569148"/>
+            <a:off x="5932109" y="4657950"/>
             <a:ext cx="32000" cy="32000"/>
           </a:xfrm>
           <a:prstGeom prst="ellipse">
@@ -23093,7 +23093,7 @@
         </p:nvSpPr>
         <p:spPr>
           <a:xfrm>
-            <a:off x="4620130" y="4537397"/>
+            <a:off x="5991730" y="4625523"/>
             <a:ext cx="32000" cy="32000"/>
           </a:xfrm>
           <a:prstGeom prst="ellipse">
@@ -23137,7 +23137,7 @@
         </p:nvSpPr>
         <p:spPr>
           <a:xfrm>
-            <a:off x="4495695" y="4672677"/>
+            <a:off x="5867295" y="4763681"/>
             <a:ext cx="32000" cy="32000"/>
           </a:xfrm>
           <a:prstGeom prst="ellipse">
@@ -23181,7 +23181,7 @@
         </p:nvSpPr>
         <p:spPr>
           <a:xfrm>
-            <a:off x="4905273" y="4375266"/>
+            <a:off x="6276873" y="4459943"/>
             <a:ext cx="32000" cy="32000"/>
           </a:xfrm>
           <a:prstGeom prst="ellipse">
@@ -23225,7 +23225,7 @@
         </p:nvSpPr>
         <p:spPr>
           <a:xfrm>
-            <a:off x="5023557" y="4490611"/>
+            <a:off x="6395157" y="4577742"/>
             <a:ext cx="32000" cy="32000"/>
           </a:xfrm>
           <a:prstGeom prst="ellipse">
@@ -23269,7 +23269,7 @@
         </p:nvSpPr>
         <p:spPr>
           <a:xfrm>
-            <a:off x="4858251" y="4373013"/>
+            <a:off x="6229851" y="4457641"/>
             <a:ext cx="32000" cy="32000"/>
           </a:xfrm>
           <a:prstGeom prst="ellipse">
@@ -23313,7 +23313,7 @@
         </p:nvSpPr>
         <p:spPr>
           <a:xfrm>
-            <a:off x="4441622" y="4558044"/>
+            <a:off x="5813222" y="4646609"/>
             <a:ext cx="32000" cy="32000"/>
           </a:xfrm>
           <a:prstGeom prst="ellipse">
@@ -23357,7 +23357,7 @@
         </p:nvSpPr>
         <p:spPr>
           <a:xfrm>
-            <a:off x="4935217" y="3716984"/>
+            <a:off x="6306817" y="3787654"/>
             <a:ext cx="32000" cy="32000"/>
           </a:xfrm>
           <a:prstGeom prst="ellipse">
@@ -23401,7 +23401,7 @@
         </p:nvSpPr>
         <p:spPr>
           <a:xfrm>
-            <a:off x="4769358" y="4566295"/>
+            <a:off x="6140958" y="4655036"/>
             <a:ext cx="32000" cy="32000"/>
           </a:xfrm>
           <a:prstGeom prst="ellipse">
@@ -23445,7 +23445,7 @@
         </p:nvSpPr>
         <p:spPr>
           <a:xfrm>
-            <a:off x="4440251" y="4534583"/>
+            <a:off x="5811851" y="4622649"/>
             <a:ext cx="32000" cy="32000"/>
           </a:xfrm>
           <a:prstGeom prst="ellipse">
@@ -23489,7 +23489,7 @@
         </p:nvSpPr>
         <p:spPr>
           <a:xfrm>
-            <a:off x="3793528" y="3836815"/>
+            <a:off x="5165128" y="3910035"/>
             <a:ext cx="32000" cy="32000"/>
           </a:xfrm>
           <a:prstGeom prst="ellipse">
@@ -23533,7 +23533,7 @@
         </p:nvSpPr>
         <p:spPr>
           <a:xfrm>
-            <a:off x="4213843" y="4199421"/>
+            <a:off x="5585443" y="4280356"/>
             <a:ext cx="32000" cy="32000"/>
           </a:xfrm>
           <a:prstGeom prst="ellipse">
@@ -23577,7 +23577,7 @@
         </p:nvSpPr>
         <p:spPr>
           <a:xfrm>
-            <a:off x="4656839" y="4412918"/>
+            <a:off x="6028439" y="4498396"/>
             <a:ext cx="32000" cy="32000"/>
           </a:xfrm>
           <a:prstGeom prst="ellipse">
@@ -23621,7 +23621,7 @@
         </p:nvSpPr>
         <p:spPr>
           <a:xfrm>
-            <a:off x="4616573" y="4628517"/>
+            <a:off x="5988173" y="4718581"/>
             <a:ext cx="32000" cy="32000"/>
           </a:xfrm>
           <a:prstGeom prst="ellipse">
@@ -23665,7 +23665,7 @@
         </p:nvSpPr>
         <p:spPr>
           <a:xfrm>
-            <a:off x="4709391" y="4595746"/>
+            <a:off x="6080991" y="4685113"/>
             <a:ext cx="32000" cy="32000"/>
           </a:xfrm>
           <a:prstGeom prst="ellipse">
@@ -23709,7 +23709,7 @@
         </p:nvSpPr>
         <p:spPr>
           <a:xfrm>
-            <a:off x="4276480" y="4389023"/>
+            <a:off x="5648080" y="4473992"/>
             <a:ext cx="32000" cy="32000"/>
           </a:xfrm>
           <a:prstGeom prst="ellipse">
@@ -23753,7 +23753,7 @@
         </p:nvSpPr>
         <p:spPr>
           <a:xfrm>
-            <a:off x="4595441" y="4615534"/>
+            <a:off x="5967041" y="4705322"/>
             <a:ext cx="32000" cy="32000"/>
           </a:xfrm>
           <a:prstGeom prst="ellipse">
@@ -23797,7 +23797,7 @@
         </p:nvSpPr>
         <p:spPr>
           <a:xfrm>
-            <a:off x="5013773" y="4515705"/>
+            <a:off x="6385373" y="4603369"/>
             <a:ext cx="32000" cy="32000"/>
           </a:xfrm>
           <a:prstGeom prst="ellipse">
@@ -23841,7 +23841,7 @@
         </p:nvSpPr>
         <p:spPr>
           <a:xfrm>
-            <a:off x="3764214" y="4363102"/>
+            <a:off x="5135814" y="4447519"/>
             <a:ext cx="32000" cy="32000"/>
           </a:xfrm>
           <a:prstGeom prst="ellipse">
@@ -23885,7 +23885,7 @@
         </p:nvSpPr>
         <p:spPr>
           <a:xfrm>
-            <a:off x="4118428" y="4428544"/>
+            <a:off x="5490028" y="4514354"/>
             <a:ext cx="32000" cy="32000"/>
           </a:xfrm>
           <a:prstGeom prst="ellipse">
@@ -23929,7 +23929,7 @@
         </p:nvSpPr>
         <p:spPr>
           <a:xfrm>
-            <a:off x="4512783" y="4686913"/>
+            <a:off x="5884383" y="4778220"/>
             <a:ext cx="32000" cy="32000"/>
           </a:xfrm>
           <a:prstGeom prst="ellipse">
@@ -23973,7 +23973,7 @@
         </p:nvSpPr>
         <p:spPr>
           <a:xfrm>
-            <a:off x="4571119" y="4672392"/>
+            <a:off x="5942719" y="4763390"/>
             <a:ext cx="32000" cy="32000"/>
           </a:xfrm>
           <a:prstGeom prst="ellipse">
@@ -24017,7 +24017,7 @@
         </p:nvSpPr>
         <p:spPr>
           <a:xfrm>
-            <a:off x="4694601" y="4594499"/>
+            <a:off x="6066201" y="4683840"/>
             <a:ext cx="32000" cy="32000"/>
           </a:xfrm>
           <a:prstGeom prst="ellipse">
@@ -24061,7 +24061,7 @@
         </p:nvSpPr>
         <p:spPr>
           <a:xfrm>
-            <a:off x="4651948" y="4487955"/>
+            <a:off x="6023548" y="4575029"/>
             <a:ext cx="32000" cy="32000"/>
           </a:xfrm>
           <a:prstGeom prst="ellipse">
@@ -24105,7 +24105,7 @@
         </p:nvSpPr>
         <p:spPr>
           <a:xfrm>
-            <a:off x="4783283" y="4545854"/>
+            <a:off x="6154883" y="4634160"/>
             <a:ext cx="32000" cy="32000"/>
           </a:xfrm>
           <a:prstGeom prst="ellipse">
@@ -24149,7 +24149,7 @@
         </p:nvSpPr>
         <p:spPr>
           <a:xfrm>
-            <a:off x="4525052" y="4678851"/>
+            <a:off x="5896652" y="4769986"/>
             <a:ext cx="32000" cy="32000"/>
           </a:xfrm>
           <a:prstGeom prst="ellipse">
@@ -24193,7 +24193,7 @@
         </p:nvSpPr>
         <p:spPr>
           <a:xfrm>
-            <a:off x="4498135" y="4672215"/>
+            <a:off x="5869735" y="4763209"/>
             <a:ext cx="32000" cy="32000"/>
           </a:xfrm>
           <a:prstGeom prst="ellipse">
@@ -24237,7 +24237,7 @@
         </p:nvSpPr>
         <p:spPr>
           <a:xfrm>
-            <a:off x="4628987" y="4628240"/>
+            <a:off x="6000587" y="4718299"/>
             <a:ext cx="32000" cy="32000"/>
           </a:xfrm>
           <a:prstGeom prst="ellipse">
@@ -24281,7 +24281,7 @@
         </p:nvSpPr>
         <p:spPr>
           <a:xfrm>
-            <a:off x="4393688" y="4609931"/>
+            <a:off x="5765288" y="4699601"/>
             <a:ext cx="32000" cy="32000"/>
           </a:xfrm>
           <a:prstGeom prst="ellipse">
@@ -24325,7 +24325,7 @@
         </p:nvSpPr>
         <p:spPr>
           <a:xfrm>
-            <a:off x="4390592" y="4630621"/>
+            <a:off x="5762192" y="4720730"/>
             <a:ext cx="32000" cy="32000"/>
           </a:xfrm>
           <a:prstGeom prst="ellipse">
@@ -24369,7 +24369,7 @@
         </p:nvSpPr>
         <p:spPr>
           <a:xfrm>
-            <a:off x="5210701" y="3941444"/>
+            <a:off x="6582301" y="4016890"/>
             <a:ext cx="32000" cy="32000"/>
           </a:xfrm>
           <a:prstGeom prst="ellipse">
@@ -24413,7 +24413,7 @@
         </p:nvSpPr>
         <p:spPr>
           <a:xfrm>
-            <a:off x="4468412" y="4623384"/>
+            <a:off x="5840012" y="4713339"/>
             <a:ext cx="32000" cy="32000"/>
           </a:xfrm>
           <a:prstGeom prst="ellipse">
@@ -24457,7 +24457,7 @@
         </p:nvSpPr>
         <p:spPr>
           <a:xfrm>
-            <a:off x="4635093" y="4587840"/>
+            <a:off x="6006693" y="4677040"/>
             <a:ext cx="32000" cy="32000"/>
           </a:xfrm>
           <a:prstGeom prst="ellipse">
@@ -24501,7 +24501,7 @@
         </p:nvSpPr>
         <p:spPr>
           <a:xfrm>
-            <a:off x="4546795" y="4667310"/>
+            <a:off x="5918395" y="4758200"/>
             <a:ext cx="32000" cy="32000"/>
           </a:xfrm>
           <a:prstGeom prst="ellipse">
@@ -24545,7 +24545,7 @@
         </p:nvSpPr>
         <p:spPr>
           <a:xfrm>
-            <a:off x="4893059" y="4221211"/>
+            <a:off x="6264659" y="4302610"/>
             <a:ext cx="32000" cy="32000"/>
           </a:xfrm>
           <a:prstGeom prst="ellipse">
@@ -24589,7 +24589,7 @@
         </p:nvSpPr>
         <p:spPr>
           <a:xfrm>
-            <a:off x="4401958" y="4642865"/>
+            <a:off x="5773558" y="4733235"/>
             <a:ext cx="32000" cy="32000"/>
           </a:xfrm>
           <a:prstGeom prst="ellipse">
@@ -24633,7 +24633,7 @@
         </p:nvSpPr>
         <p:spPr>
           <a:xfrm>
-            <a:off x="4445864" y="4608871"/>
+            <a:off x="5817464" y="4698518"/>
             <a:ext cx="32000" cy="32000"/>
           </a:xfrm>
           <a:prstGeom prst="ellipse">
@@ -24677,7 +24677,7 @@
         </p:nvSpPr>
         <p:spPr>
           <a:xfrm>
-            <a:off x="3953919" y="4220109"/>
+            <a:off x="5325519" y="4301484"/>
             <a:ext cx="32000" cy="32000"/>
           </a:xfrm>
           <a:prstGeom prst="ellipse">
@@ -24721,7 +24721,7 @@
         </p:nvSpPr>
         <p:spPr>
           <a:xfrm>
-            <a:off x="4762967" y="4593075"/>
+            <a:off x="6134567" y="4682385"/>
             <a:ext cx="32000" cy="32000"/>
           </a:xfrm>
           <a:prstGeom prst="ellipse">
@@ -24765,7 +24765,7 @@
         </p:nvSpPr>
         <p:spPr>
           <a:xfrm>
-            <a:off x="4411116" y="4608393"/>
+            <a:off x="5782716" y="4698030"/>
             <a:ext cx="32000" cy="32000"/>
           </a:xfrm>
           <a:prstGeom prst="ellipse">
@@ -24809,7 +24809,7 @@
         </p:nvSpPr>
         <p:spPr>
           <a:xfrm>
-            <a:off x="4538717" y="4600484"/>
+            <a:off x="5910317" y="4689953"/>
             <a:ext cx="32000" cy="32000"/>
           </a:xfrm>
           <a:prstGeom prst="ellipse">
@@ -24853,7 +24853,7 @@
         </p:nvSpPr>
         <p:spPr>
           <a:xfrm>
-            <a:off x="4005864" y="4272855"/>
+            <a:off x="5377464" y="4355353"/>
             <a:ext cx="32000" cy="32000"/>
           </a:xfrm>
           <a:prstGeom prst="ellipse">
@@ -24897,7 +24897,7 @@
         </p:nvSpPr>
         <p:spPr>
           <a:xfrm>
-            <a:off x="4287676" y="4540945"/>
+            <a:off x="5659276" y="4629146"/>
             <a:ext cx="32000" cy="32000"/>
           </a:xfrm>
           <a:prstGeom prst="ellipse">
@@ -24941,7 +24941,7 @@
         </p:nvSpPr>
         <p:spPr>
           <a:xfrm>
-            <a:off x="4388558" y="4465063"/>
+            <a:off x="5760158" y="4551650"/>
             <a:ext cx="32000" cy="32000"/>
           </a:xfrm>
           <a:prstGeom prst="ellipse">
@@ -24985,7 +24985,7 @@
         </p:nvSpPr>
         <p:spPr>
           <a:xfrm>
-            <a:off x="4388052" y="4565570"/>
+            <a:off x="5759652" y="4654295"/>
             <a:ext cx="32000" cy="32000"/>
           </a:xfrm>
           <a:prstGeom prst="ellipse">
@@ -25029,7 +25029,7 @@
         </p:nvSpPr>
         <p:spPr>
           <a:xfrm>
-            <a:off x="4233231" y="4457770"/>
+            <a:off x="5604831" y="4544201"/>
             <a:ext cx="32000" cy="32000"/>
           </a:xfrm>
           <a:prstGeom prst="ellipse">
@@ -25073,7 +25073,7 @@
         </p:nvSpPr>
         <p:spPr>
           <a:xfrm>
-            <a:off x="4801964" y="3820671"/>
+            <a:off x="6173564" y="3893547"/>
             <a:ext cx="32000" cy="32000"/>
           </a:xfrm>
           <a:prstGeom prst="ellipse">
@@ -25117,7 +25117,7 @@
         </p:nvSpPr>
         <p:spPr>
           <a:xfrm>
-            <a:off x="4554950" y="4550949"/>
+            <a:off x="5926550" y="4639364"/>
             <a:ext cx="32000" cy="32000"/>
           </a:xfrm>
           <a:prstGeom prst="ellipse">
@@ -25161,7 +25161,7 @@
         </p:nvSpPr>
         <p:spPr>
           <a:xfrm>
-            <a:off x="4544090" y="4620296"/>
+            <a:off x="5915690" y="4710185"/>
             <a:ext cx="32000" cy="32000"/>
           </a:xfrm>
           <a:prstGeom prst="ellipse">
@@ -25205,7 +25205,7 @@
         </p:nvSpPr>
         <p:spPr>
           <a:xfrm>
-            <a:off x="4568941" y="4607051"/>
+            <a:off x="5940541" y="4696659"/>
             <a:ext cx="32000" cy="32000"/>
           </a:xfrm>
           <a:prstGeom prst="ellipse">
@@ -25249,7 +25249,7 @@
         </p:nvSpPr>
         <p:spPr>
           <a:xfrm>
-            <a:off x="4815902" y="4350544"/>
+            <a:off x="6187502" y="4434694"/>
             <a:ext cx="32000" cy="32000"/>
           </a:xfrm>
           <a:prstGeom prst="ellipse">
@@ -25293,7 +25293,7 @@
         </p:nvSpPr>
         <p:spPr>
           <a:xfrm>
-            <a:off x="4607541" y="4473571"/>
+            <a:off x="5979141" y="4560339"/>
             <a:ext cx="32000" cy="32000"/>
           </a:xfrm>
           <a:prstGeom prst="ellipse">
@@ -25337,7 +25337,7 @@
         </p:nvSpPr>
         <p:spPr>
           <a:xfrm>
-            <a:off x="4548621" y="4652107"/>
+            <a:off x="5920221" y="4742673"/>
             <a:ext cx="32000" cy="32000"/>
           </a:xfrm>
           <a:prstGeom prst="ellipse">
@@ -25381,7 +25381,7 @@
         </p:nvSpPr>
         <p:spPr>
           <a:xfrm>
-            <a:off x="3408296" y="4377926"/>
+            <a:off x="4779896" y="4462659"/>
             <a:ext cx="32000" cy="32000"/>
           </a:xfrm>
           <a:prstGeom prst="ellipse">
@@ -25425,7 +25425,7 @@
         </p:nvSpPr>
         <p:spPr>
           <a:xfrm>
-            <a:off x="4040325" y="4320062"/>
+            <a:off x="5411925" y="4403564"/>
             <a:ext cx="32000" cy="32000"/>
           </a:xfrm>
           <a:prstGeom prst="ellipse">
@@ -25469,7 +25469,7 @@
         </p:nvSpPr>
         <p:spPr>
           <a:xfrm>
-            <a:off x="4289601" y="4436614"/>
+            <a:off x="5661201" y="4522595"/>
             <a:ext cx="32000" cy="32000"/>
           </a:xfrm>
           <a:prstGeom prst="ellipse">
@@ -25513,7 +25513,7 @@
         </p:nvSpPr>
         <p:spPr>
           <a:xfrm>
-            <a:off x="4173207" y="4436502"/>
+            <a:off x="5544807" y="4522482"/>
             <a:ext cx="32000" cy="32000"/>
           </a:xfrm>
           <a:prstGeom prst="ellipse">
@@ -25557,7 +25557,7 @@
         </p:nvSpPr>
         <p:spPr>
           <a:xfrm>
-            <a:off x="4442558" y="4607842"/>
+            <a:off x="5814158" y="4697467"/>
             <a:ext cx="32000" cy="32000"/>
           </a:xfrm>
           <a:prstGeom prst="ellipse">
@@ -25601,7 +25601,7 @@
         </p:nvSpPr>
         <p:spPr>
           <a:xfrm>
-            <a:off x="4230928" y="4293611"/>
+            <a:off x="5602528" y="4376550"/>
             <a:ext cx="32000" cy="32000"/>
           </a:xfrm>
           <a:prstGeom prst="ellipse">
@@ -25645,7 +25645,7 @@
         </p:nvSpPr>
         <p:spPr>
           <a:xfrm>
-            <a:off x="4437224" y="4493532"/>
+            <a:off x="5808824" y="4580725"/>
             <a:ext cx="32000" cy="32000"/>
           </a:xfrm>
           <a:prstGeom prst="ellipse">
@@ -25689,7 +25689,7 @@
         </p:nvSpPr>
         <p:spPr>
           <a:xfrm>
-            <a:off x="4180089" y="4576086"/>
+            <a:off x="5551689" y="4665036"/>
             <a:ext cx="32000" cy="32000"/>
           </a:xfrm>
           <a:prstGeom prst="ellipse">
@@ -25733,7 +25733,7 @@
         </p:nvSpPr>
         <p:spPr>
           <a:xfrm>
-            <a:off x="4387753" y="4676586"/>
+            <a:off x="5759353" y="4767673"/>
             <a:ext cx="32000" cy="32000"/>
           </a:xfrm>
           <a:prstGeom prst="ellipse">
@@ -25777,7 +25777,7 @@
         </p:nvSpPr>
         <p:spPr>
           <a:xfrm>
-            <a:off x="6532453" y="4336050"/>
+            <a:off x="7904053" y="4419892"/>
             <a:ext cx="32000" cy="32000"/>
           </a:xfrm>
           <a:prstGeom prst="ellipse">
@@ -25821,7 +25821,7 @@
         </p:nvSpPr>
         <p:spPr>
           <a:xfrm>
-            <a:off x="4440819" y="4555237"/>
+            <a:off x="5812419" y="4643742"/>
             <a:ext cx="32000" cy="32000"/>
           </a:xfrm>
           <a:prstGeom prst="ellipse">
@@ -25865,7 +25865,7 @@
         </p:nvSpPr>
         <p:spPr>
           <a:xfrm>
-            <a:off x="4626097" y="4392050"/>
+            <a:off x="5997697" y="4477083"/>
             <a:ext cx="32000" cy="32000"/>
           </a:xfrm>
           <a:prstGeom prst="ellipse">
@@ -25909,7 +25909,7 @@
         </p:nvSpPr>
         <p:spPr>
           <a:xfrm>
-            <a:off x="4417103" y="4527632"/>
+            <a:off x="5788703" y="4615550"/>
             <a:ext cx="32000" cy="32000"/>
           </a:xfrm>
           <a:prstGeom prst="ellipse">
@@ -25953,7 +25953,7 @@
         </p:nvSpPr>
         <p:spPr>
           <a:xfrm>
-            <a:off x="4590152" y="4580174"/>
+            <a:off x="5961752" y="4669210"/>
             <a:ext cx="32000" cy="32000"/>
           </a:xfrm>
           <a:prstGeom prst="ellipse">
@@ -25997,7 +25997,7 @@
         </p:nvSpPr>
         <p:spPr>
           <a:xfrm>
-            <a:off x="4853544" y="4476256"/>
+            <a:off x="6225144" y="4563081"/>
             <a:ext cx="32000" cy="32000"/>
           </a:xfrm>
           <a:prstGeom prst="ellipse">
@@ -26041,7 +26041,7 @@
         </p:nvSpPr>
         <p:spPr>
           <a:xfrm>
-            <a:off x="4788087" y="4503514"/>
+            <a:off x="6159687" y="4590919"/>
             <a:ext cx="32000" cy="32000"/>
           </a:xfrm>
           <a:prstGeom prst="ellipse">
@@ -26085,7 +26085,7 @@
         </p:nvSpPr>
         <p:spPr>
           <a:xfrm>
-            <a:off x="4510073" y="4692728"/>
+            <a:off x="5881673" y="4784158"/>
             <a:ext cx="32000" cy="32000"/>
           </a:xfrm>
           <a:prstGeom prst="ellipse">
@@ -26129,7 +26129,7 @@
         </p:nvSpPr>
         <p:spPr>
           <a:xfrm>
-            <a:off x="4235630" y="4618027"/>
+            <a:off x="5607230" y="4707868"/>
             <a:ext cx="32000" cy="32000"/>
           </a:xfrm>
           <a:prstGeom prst="ellipse">
@@ -26173,7 +26173,7 @@
         </p:nvSpPr>
         <p:spPr>
           <a:xfrm>
-            <a:off x="4680801" y="4335721"/>
+            <a:off x="6052401" y="4419556"/>
             <a:ext cx="32000" cy="32000"/>
           </a:xfrm>
           <a:prstGeom prst="ellipse">
@@ -26217,7 +26217,7 @@
         </p:nvSpPr>
         <p:spPr>
           <a:xfrm>
-            <a:off x="3231799" y="4306412"/>
+            <a:off x="4603399" y="4389624"/>
             <a:ext cx="32000" cy="32000"/>
           </a:xfrm>
           <a:prstGeom prst="ellipse">
@@ -26261,7 +26261,7 @@
         </p:nvSpPr>
         <p:spPr>
           <a:xfrm>
-            <a:off x="4593315" y="4493666"/>
+            <a:off x="5964915" y="4580862"/>
             <a:ext cx="32000" cy="32000"/>
           </a:xfrm>
           <a:prstGeom prst="ellipse">
@@ -26305,7 +26305,7 @@
         </p:nvSpPr>
         <p:spPr>
           <a:xfrm>
-            <a:off x="4023482" y="4270181"/>
+            <a:off x="5395082" y="4352622"/>
             <a:ext cx="32000" cy="32000"/>
           </a:xfrm>
           <a:prstGeom prst="ellipse">
@@ -26349,7 +26349,7 @@
         </p:nvSpPr>
         <p:spPr>
           <a:xfrm>
-            <a:off x="4886355" y="4024988"/>
+            <a:off x="6257955" y="4102212"/>
             <a:ext cx="32000" cy="32000"/>
           </a:xfrm>
           <a:prstGeom prst="ellipse">
@@ -26393,7 +26393,7 @@
         </p:nvSpPr>
         <p:spPr>
           <a:xfrm>
-            <a:off x="4293411" y="4491501"/>
+            <a:off x="5665011" y="4578651"/>
             <a:ext cx="32000" cy="32000"/>
           </a:xfrm>
           <a:prstGeom prst="ellipse">
@@ -26437,7 +26437,7 @@
         </p:nvSpPr>
         <p:spPr>
           <a:xfrm>
-            <a:off x="4415187" y="4661833"/>
+            <a:off x="5786787" y="4752606"/>
             <a:ext cx="32000" cy="32000"/>
           </a:xfrm>
           <a:prstGeom prst="ellipse">
@@ -26481,7 +26481,7 @@
         </p:nvSpPr>
         <p:spPr>
           <a:xfrm>
-            <a:off x="4366535" y="4647121"/>
+            <a:off x="5738135" y="4737581"/>
             <a:ext cx="32000" cy="32000"/>
           </a:xfrm>
           <a:prstGeom prst="ellipse">
@@ -26525,7 +26525,7 @@
         </p:nvSpPr>
         <p:spPr>
           <a:xfrm>
-            <a:off x="4506671" y="4687444"/>
+            <a:off x="5878271" y="4778762"/>
             <a:ext cx="32000" cy="32000"/>
           </a:xfrm>
           <a:prstGeom prst="ellipse">
@@ -26569,7 +26569,7 @@
         </p:nvSpPr>
         <p:spPr>
           <a:xfrm>
-            <a:off x="4419221" y="4560502"/>
+            <a:off x="5790821" y="4649119"/>
             <a:ext cx="32000" cy="32000"/>
           </a:xfrm>
           <a:prstGeom prst="ellipse">
@@ -26613,7 +26613,7 @@
         </p:nvSpPr>
         <p:spPr>
           <a:xfrm>
-            <a:off x="4205389" y="4453993"/>
+            <a:off x="5576989" y="4540344"/>
             <a:ext cx="32000" cy="32000"/>
           </a:xfrm>
           <a:prstGeom prst="ellipse">
@@ -26657,7 +26657,7 @@
         </p:nvSpPr>
         <p:spPr>
           <a:xfrm>
-            <a:off x="4447155" y="4664301"/>
+            <a:off x="5818755" y="4755127"/>
             <a:ext cx="32000" cy="32000"/>
           </a:xfrm>
           <a:prstGeom prst="ellipse">
@@ -26701,7 +26701,7 @@
         </p:nvSpPr>
         <p:spPr>
           <a:xfrm>
-            <a:off x="4631572" y="4307442"/>
+            <a:off x="6003172" y="4390675"/>
             <a:ext cx="32000" cy="32000"/>
           </a:xfrm>
           <a:prstGeom prst="ellipse">
@@ -26745,7 +26745,7 @@
         </p:nvSpPr>
         <p:spPr>
           <a:xfrm>
-            <a:off x="4181320" y="4462997"/>
+            <a:off x="5552920" y="4549540"/>
             <a:ext cx="32000" cy="32000"/>
           </a:xfrm>
           <a:prstGeom prst="ellipse">
@@ -26789,7 +26789,7 @@
         </p:nvSpPr>
         <p:spPr>
           <a:xfrm>
-            <a:off x="2427542" y="2396726"/>
+            <a:off x="3799142" y="2439433"/>
             <a:ext cx="44000" cy="44000"/>
           </a:xfrm>
           <a:prstGeom prst="ellipse">
@@ -26835,7 +26835,7 @@
         </p:nvSpPr>
         <p:spPr>
           <a:xfrm>
-            <a:off x="4912817" y="2536355"/>
+            <a:off x="6284417" y="2582033"/>
             <a:ext cx="44000" cy="44000"/>
           </a:xfrm>
           <a:prstGeom prst="ellipse">
@@ -26881,7 +26881,7 @@
         </p:nvSpPr>
         <p:spPr>
           <a:xfrm>
-            <a:off x="3891013" y="2626267"/>
+            <a:off x="5262613" y="2673858"/>
             <a:ext cx="44000" cy="44000"/>
           </a:xfrm>
           <a:prstGeom prst="ellipse">
@@ -26927,7 +26927,7 @@
         </p:nvSpPr>
         <p:spPr>
           <a:xfrm>
-            <a:off x="4932753" y="2708589"/>
+            <a:off x="6304353" y="2757932"/>
             <a:ext cx="44000" cy="44000"/>
           </a:xfrm>
           <a:prstGeom prst="ellipse">
@@ -26973,7 +26973,7 @@
         </p:nvSpPr>
         <p:spPr>
           <a:xfrm>
-            <a:off x="2120826" y="2722536"/>
+            <a:off x="3492426" y="2772175"/>
             <a:ext cx="44000" cy="44000"/>
           </a:xfrm>
           <a:prstGeom prst="ellipse">
@@ -27019,7 +27019,7 @@
         </p:nvSpPr>
         <p:spPr>
           <a:xfrm>
-            <a:off x="5431220" y="2754454"/>
+            <a:off x="6802820" y="2804773"/>
             <a:ext cx="44000" cy="44000"/>
           </a:xfrm>
           <a:prstGeom prst="ellipse">
@@ -27065,7 +27065,7 @@
         </p:nvSpPr>
         <p:spPr>
           <a:xfrm>
-            <a:off x="3405959" y="2784810"/>
+            <a:off x="4777559" y="2835774"/>
             <a:ext cx="44000" cy="44000"/>
           </a:xfrm>
           <a:prstGeom prst="ellipse">
@@ -27111,7 +27111,7 @@
         </p:nvSpPr>
         <p:spPr>
           <a:xfrm>
-            <a:off x="4906087" y="2794505"/>
+            <a:off x="6277687" y="2845676"/>
             <a:ext cx="44000" cy="44000"/>
           </a:xfrm>
           <a:prstGeom prst="ellipse">
@@ -27157,7 +27157,7 @@
         </p:nvSpPr>
         <p:spPr>
           <a:xfrm>
-            <a:off x="4751633" y="2914154"/>
+            <a:off x="6123233" y="2967870"/>
             <a:ext cx="44000" cy="44000"/>
           </a:xfrm>
           <a:prstGeom prst="ellipse">
@@ -27203,7 +27203,7 @@
         </p:nvSpPr>
         <p:spPr>
           <a:xfrm>
-            <a:off x="3257241" y="2943529"/>
+            <a:off x="4628841" y="2997871"/>
             <a:ext cx="44000" cy="44000"/>
           </a:xfrm>
           <a:prstGeom prst="ellipse">
@@ -27249,7 +27249,7 @@
         </p:nvSpPr>
         <p:spPr>
           <a:xfrm>
-            <a:off x="7477577" y="2977640"/>
+            <a:off x="8849177" y="3032707"/>
             <a:ext cx="44000" cy="44000"/>
           </a:xfrm>
           <a:prstGeom prst="ellipse">
@@ -27295,7 +27295,7 @@
         </p:nvSpPr>
         <p:spPr>
           <a:xfrm>
-            <a:off x="1295087" y="2980587"/>
+            <a:off x="2666687" y="3035717"/>
             <a:ext cx="44000" cy="44000"/>
           </a:xfrm>
           <a:prstGeom prst="ellipse">
@@ -27341,7 +27341,7 @@
         </p:nvSpPr>
         <p:spPr>
           <a:xfrm>
-            <a:off x="5794244" y="2987522"/>
+            <a:off x="7165844" y="3042799"/>
             <a:ext cx="44000" cy="44000"/>
           </a:xfrm>
           <a:prstGeom prst="ellipse">
@@ -27387,7 +27387,7 @@
         </p:nvSpPr>
         <p:spPr>
           <a:xfrm>
-            <a:off x="6171402" y="2988931"/>
+            <a:off x="7543002" y="3044239"/>
             <a:ext cx="44000" cy="44000"/>
           </a:xfrm>
           <a:prstGeom prst="ellipse">
@@ -27433,7 +27433,7 @@
         </p:nvSpPr>
         <p:spPr>
           <a:xfrm>
-            <a:off x="3240281" y="2989267"/>
+            <a:off x="4611881" y="3044581"/>
             <a:ext cx="44000" cy="44000"/>
           </a:xfrm>
           <a:prstGeom prst="ellipse">
@@ -27479,7 +27479,7 @@
         </p:nvSpPr>
         <p:spPr>
           <a:xfrm>
-            <a:off x="5302778" y="3005617"/>
+            <a:off x="6674378" y="3061280"/>
             <a:ext cx="44000" cy="44000"/>
           </a:xfrm>
           <a:prstGeom prst="ellipse">
@@ -27525,7 +27525,7 @@
         </p:nvSpPr>
         <p:spPr>
           <a:xfrm>
-            <a:off x="4763166" y="3006433"/>
+            <a:off x="6134766" y="3062113"/>
             <a:ext cx="44000" cy="44000"/>
           </a:xfrm>
           <a:prstGeom prst="ellipse">
@@ -27571,7 +27571,7 @@
         </p:nvSpPr>
         <p:spPr>
           <a:xfrm>
-            <a:off x="5199698" y="3010989"/>
+            <a:off x="6571298" y="3066766"/>
             <a:ext cx="44000" cy="44000"/>
           </a:xfrm>
           <a:prstGeom prst="ellipse">
@@ -27617,7 +27617,7 @@
         </p:nvSpPr>
         <p:spPr>
           <a:xfrm>
-            <a:off x="4079338" y="3025625"/>
+            <a:off x="5450938" y="3081713"/>
             <a:ext cx="44000" cy="44000"/>
           </a:xfrm>
           <a:prstGeom prst="ellipse">
@@ -27663,7 +27663,7 @@
         </p:nvSpPr>
         <p:spPr>
           <a:xfrm>
-            <a:off x="5153147" y="3060502"/>
+            <a:off x="6524747" y="3117333"/>
             <a:ext cx="44000" cy="44000"/>
           </a:xfrm>
           <a:prstGeom prst="ellipse">
@@ -27709,7 +27709,7 @@
         </p:nvSpPr>
         <p:spPr>
           <a:xfrm>
-            <a:off x="5461391" y="3066646"/>
+            <a:off x="6832991" y="3123607"/>
             <a:ext cx="44000" cy="44000"/>
           </a:xfrm>
           <a:prstGeom prst="ellipse">
@@ -27755,7 +27755,7 @@
         </p:nvSpPr>
         <p:spPr>
           <a:xfrm>
-            <a:off x="5052469" y="3105051"/>
+            <a:off x="6424069" y="3162829"/>
             <a:ext cx="44000" cy="44000"/>
           </a:xfrm>
           <a:prstGeom prst="ellipse">
@@ -27801,7 +27801,7 @@
         </p:nvSpPr>
         <p:spPr>
           <a:xfrm>
-            <a:off x="6389936" y="3107877"/>
+            <a:off x="7761536" y="3165715"/>
             <a:ext cx="44000" cy="44000"/>
           </a:xfrm>
           <a:prstGeom prst="ellipse">
@@ -27847,7 +27847,7 @@
         </p:nvSpPr>
         <p:spPr>
           <a:xfrm>
-            <a:off x="6062564" y="3129158"/>
+            <a:off x="7434164" y="3187449"/>
             <a:ext cx="44000" cy="44000"/>
           </a:xfrm>
           <a:prstGeom prst="ellipse">
@@ -27893,7 +27893,7 @@
         </p:nvSpPr>
         <p:spPr>
           <a:xfrm>
-            <a:off x="3589481" y="3129291"/>
+            <a:off x="4961081" y="3187585"/>
             <a:ext cx="44000" cy="44000"/>
           </a:xfrm>
           <a:prstGeom prst="ellipse">
@@ -27939,7 +27939,7 @@
         </p:nvSpPr>
         <p:spPr>
           <a:xfrm>
-            <a:off x="3823055" y="3135217"/>
+            <a:off x="5194655" y="3193636"/>
             <a:ext cx="44000" cy="44000"/>
           </a:xfrm>
           <a:prstGeom prst="ellipse">
@@ -27985,7 +27985,7 @@
         </p:nvSpPr>
         <p:spPr>
           <a:xfrm>
-            <a:off x="5413710" y="3151980"/>
+            <a:off x="6785310" y="3210757"/>
             <a:ext cx="44000" cy="44000"/>
           </a:xfrm>
           <a:prstGeom prst="ellipse">
@@ -28031,7 +28031,7 @@
         </p:nvSpPr>
         <p:spPr>
           <a:xfrm>
-            <a:off x="3785092" y="3159438"/>
+            <a:off x="5156692" y="3218374"/>
             <a:ext cx="44000" cy="44000"/>
           </a:xfrm>
           <a:prstGeom prst="ellipse">
@@ -28077,7 +28077,7 @@
         </p:nvSpPr>
         <p:spPr>
           <a:xfrm>
-            <a:off x="3326238" y="3165104"/>
+            <a:off x="4697838" y="3224160"/>
             <a:ext cx="44000" cy="44000"/>
           </a:xfrm>
           <a:prstGeom prst="ellipse">
@@ -28123,7 +28123,7 @@
         </p:nvSpPr>
         <p:spPr>
           <a:xfrm>
-            <a:off x="2897136" y="3192282"/>
+            <a:off x="4268736" y="3251916"/>
             <a:ext cx="44000" cy="44000"/>
           </a:xfrm>
           <a:prstGeom prst="ellipse">
@@ -28169,7 +28169,7 @@
         </p:nvSpPr>
         <p:spPr>
           <a:xfrm>
-            <a:off x="3133387" y="3202158"/>
+            <a:off x="4504987" y="3262002"/>
             <a:ext cx="44000" cy="44000"/>
           </a:xfrm>
           <a:prstGeom prst="ellipse">
@@ -28215,7 +28215,7 @@
         </p:nvSpPr>
         <p:spPr>
           <a:xfrm>
-            <a:off x="6470535" y="3209855"/>
+            <a:off x="7842135" y="3269863"/>
             <a:ext cx="44000" cy="44000"/>
           </a:xfrm>
           <a:prstGeom prst="ellipse">
@@ -28261,7 +28261,7 @@
         </p:nvSpPr>
         <p:spPr>
           <a:xfrm>
-            <a:off x="5115108" y="3210719"/>
+            <a:off x="6486708" y="3270745"/>
             <a:ext cx="44000" cy="44000"/>
           </a:xfrm>
           <a:prstGeom prst="ellipse">
@@ -28307,7 +28307,7 @@
         </p:nvSpPr>
         <p:spPr>
           <a:xfrm>
-            <a:off x="4170415" y="3211908"/>
+            <a:off x="5542015" y="3271960"/>
             <a:ext cx="44000" cy="44000"/>
           </a:xfrm>
           <a:prstGeom prst="ellipse">
@@ -28353,7 +28353,7 @@
         </p:nvSpPr>
         <p:spPr>
           <a:xfrm>
-            <a:off x="2383922" y="3216125"/>
+            <a:off x="3755522" y="3276266"/>
             <a:ext cx="44000" cy="44000"/>
           </a:xfrm>
           <a:prstGeom prst="ellipse">
@@ -28399,7 +28399,7 @@
         </p:nvSpPr>
         <p:spPr>
           <a:xfrm>
-            <a:off x="4913103" y="3218807"/>
+            <a:off x="6284703" y="3279005"/>
             <a:ext cx="44000" cy="44000"/>
           </a:xfrm>
           <a:prstGeom prst="ellipse">
@@ -28445,7 +28445,7 @@
         </p:nvSpPr>
         <p:spPr>
           <a:xfrm>
-            <a:off x="6062926" y="3224922"/>
+            <a:off x="7434526" y="3285250"/>
             <a:ext cx="44000" cy="44000"/>
           </a:xfrm>
           <a:prstGeom prst="ellipse">
@@ -28491,7 +28491,7 @@
         </p:nvSpPr>
         <p:spPr>
           <a:xfrm>
-            <a:off x="3831071" y="3230146"/>
+            <a:off x="5202671" y="3290586"/>
             <a:ext cx="44000" cy="44000"/>
           </a:xfrm>
           <a:prstGeom prst="ellipse">
@@ -28537,7 +28537,7 @@
         </p:nvSpPr>
         <p:spPr>
           <a:xfrm>
-            <a:off x="3439145" y="3234708"/>
+            <a:off x="4810745" y="3295245"/>
             <a:ext cx="44000" cy="44000"/>
           </a:xfrm>
           <a:prstGeom prst="ellipse">
@@ -28583,7 +28583,7 @@
         </p:nvSpPr>
         <p:spPr>
           <a:xfrm>
-            <a:off x="2952569" y="3237366"/>
+            <a:off x="4324169" y="3297960"/>
             <a:ext cx="44000" cy="44000"/>
           </a:xfrm>
           <a:prstGeom prst="ellipse">
@@ -28629,7 +28629,7 @@
         </p:nvSpPr>
         <p:spPr>
           <a:xfrm>
-            <a:off x="5195212" y="3245885"/>
+            <a:off x="6566812" y="3306660"/>
             <a:ext cx="44000" cy="44000"/>
           </a:xfrm>
           <a:prstGeom prst="ellipse">
@@ -28675,7 +28675,7 @@
         </p:nvSpPr>
         <p:spPr>
           <a:xfrm>
-            <a:off x="4745702" y="3246288"/>
+            <a:off x="6117302" y="3307071"/>
             <a:ext cx="44000" cy="44000"/>
           </a:xfrm>
           <a:prstGeom prst="ellipse">
@@ -28721,7 +28721,7 @@
         </p:nvSpPr>
         <p:spPr>
           <a:xfrm>
-            <a:off x="3705902" y="3249709"/>
+            <a:off x="5077502" y="3310565"/>
             <a:ext cx="44000" cy="44000"/>
           </a:xfrm>
           <a:prstGeom prst="ellipse">
@@ -28767,7 +28767,7 @@
         </p:nvSpPr>
         <p:spPr>
           <a:xfrm>
-            <a:off x="3312660" y="3262560"/>
+            <a:off x="4684260" y="3323689"/>
             <a:ext cx="44000" cy="44000"/>
           </a:xfrm>
           <a:prstGeom prst="ellipse">
@@ -28813,7 +28813,7 @@
         </p:nvSpPr>
         <p:spPr>
           <a:xfrm>
-            <a:off x="3004452" y="3267798"/>
+            <a:off x="4376052" y="3329039"/>
             <a:ext cx="44000" cy="44000"/>
           </a:xfrm>
           <a:prstGeom prst="ellipse">
@@ -28859,7 +28859,7 @@
         </p:nvSpPr>
         <p:spPr>
           <a:xfrm>
-            <a:off x="3278674" y="3275575"/>
+            <a:off x="4650274" y="3336981"/>
             <a:ext cx="44000" cy="44000"/>
           </a:xfrm>
           <a:prstGeom prst="ellipse">
@@ -28905,7 +28905,7 @@
         </p:nvSpPr>
         <p:spPr>
           <a:xfrm>
-            <a:off x="4088813" y="3280310"/>
+            <a:off x="5460413" y="3341817"/>
             <a:ext cx="44000" cy="44000"/>
           </a:xfrm>
           <a:prstGeom prst="ellipse">
@@ -28951,7 +28951,7 @@
         </p:nvSpPr>
         <p:spPr>
           <a:xfrm>
-            <a:off x="3476095" y="3284315"/>
+            <a:off x="4847695" y="3345907"/>
             <a:ext cx="44000" cy="44000"/>
           </a:xfrm>
           <a:prstGeom prst="ellipse">
@@ -28997,7 +28997,7 @@
         </p:nvSpPr>
         <p:spPr>
           <a:xfrm>
-            <a:off x="3352335" y="3286694"/>
+            <a:off x="4723935" y="3348337"/>
             <a:ext cx="44000" cy="44000"/>
           </a:xfrm>
           <a:prstGeom prst="ellipse">
@@ -29043,7 +29043,7 @@
         </p:nvSpPr>
         <p:spPr>
           <a:xfrm>
-            <a:off x="7713472" y="3293714"/>
+            <a:off x="9085072" y="3355507"/>
             <a:ext cx="44000" cy="44000"/>
           </a:xfrm>
           <a:prstGeom prst="ellipse">
@@ -29089,7 +29089,7 @@
         </p:nvSpPr>
         <p:spPr>
           <a:xfrm>
-            <a:off x="4797395" y="3332121"/>
+            <a:off x="6168995" y="3394730"/>
             <a:ext cx="44000" cy="44000"/>
           </a:xfrm>
           <a:prstGeom prst="ellipse">
@@ -29135,7 +29135,7 @@
         </p:nvSpPr>
         <p:spPr>
           <a:xfrm>
-            <a:off x="5253948" y="3339252"/>
+            <a:off x="6625548" y="3402013"/>
             <a:ext cx="44000" cy="44000"/>
           </a:xfrm>
           <a:prstGeom prst="ellipse">
@@ -29181,7 +29181,7 @@
         </p:nvSpPr>
         <p:spPr>
           <a:xfrm>
-            <a:off x="7639138" y="3340346"/>
+            <a:off x="9010738" y="3403130"/>
             <a:ext cx="44000" cy="44000"/>
           </a:xfrm>
           <a:prstGeom prst="ellipse">
@@ -29227,7 +29227,7 @@
         </p:nvSpPr>
         <p:spPr>
           <a:xfrm>
-            <a:off x="3485389" y="3341457"/>
+            <a:off x="4856989" y="3404265"/>
             <a:ext cx="44000" cy="44000"/>
           </a:xfrm>
           <a:prstGeom prst="ellipse">
@@ -29273,7 +29273,7 @@
         </p:nvSpPr>
         <p:spPr>
           <a:xfrm>
-            <a:off x="2602077" y="3342910"/>
+            <a:off x="3973677" y="3405749"/>
             <a:ext cx="44000" cy="44000"/>
           </a:xfrm>
           <a:prstGeom prst="ellipse">
@@ -29319,7 +29319,7 @@
         </p:nvSpPr>
         <p:spPr>
           <a:xfrm>
-            <a:off x="4086848" y="3345472"/>
+            <a:off x="5458448" y="3408365"/>
             <a:ext cx="44000" cy="44000"/>
           </a:xfrm>
           <a:prstGeom prst="ellipse">
@@ -29365,7 +29365,7 @@
         </p:nvSpPr>
         <p:spPr>
           <a:xfrm>
-            <a:off x="4107400" y="3348680"/>
+            <a:off x="5479000" y="3411641"/>
             <a:ext cx="44000" cy="44000"/>
           </a:xfrm>
           <a:prstGeom prst="ellipse">
@@ -29411,7 +29411,7 @@
         </p:nvSpPr>
         <p:spPr>
           <a:xfrm>
-            <a:off x="5481089" y="3353701"/>
+            <a:off x="6852689" y="3416769"/>
             <a:ext cx="44000" cy="44000"/>
           </a:xfrm>
           <a:prstGeom prst="ellipse">
@@ -29457,7 +29457,7 @@
         </p:nvSpPr>
         <p:spPr>
           <a:xfrm>
-            <a:off x="3480534" y="3353804"/>
+            <a:off x="4852134" y="3416874"/>
             <a:ext cx="44000" cy="44000"/>
           </a:xfrm>
           <a:prstGeom prst="ellipse">
@@ -29503,7 +29503,7 @@
         </p:nvSpPr>
         <p:spPr>
           <a:xfrm>
-            <a:off x="4690375" y="3354749"/>
+            <a:off x="6061975" y="3417840"/>
             <a:ext cx="44000" cy="44000"/>
           </a:xfrm>
           <a:prstGeom prst="ellipse">
@@ -29549,7 +29549,7 @@
         </p:nvSpPr>
         <p:spPr>
           <a:xfrm>
-            <a:off x="4783699" y="3356711"/>
+            <a:off x="6155299" y="3419844"/>
             <a:ext cx="44000" cy="44000"/>
           </a:xfrm>
           <a:prstGeom prst="ellipse">
@@ -29595,7 +29595,7 @@
         </p:nvSpPr>
         <p:spPr>
           <a:xfrm>
-            <a:off x="4210033" y="3360464"/>
+            <a:off x="5581633" y="3423677"/>
             <a:ext cx="44000" cy="44000"/>
           </a:xfrm>
           <a:prstGeom prst="ellipse">
@@ -29641,7 +29641,7 @@
         </p:nvSpPr>
         <p:spPr>
           <a:xfrm>
-            <a:off x="4738358" y="3369550"/>
+            <a:off x="6109958" y="3432956"/>
             <a:ext cx="44000" cy="44000"/>
           </a:xfrm>
           <a:prstGeom prst="ellipse">
@@ -29687,7 +29687,7 @@
         </p:nvSpPr>
         <p:spPr>
           <a:xfrm>
-            <a:off x="4701050" y="3389436"/>
+            <a:off x="6072650" y="3453265"/>
             <a:ext cx="44000" cy="44000"/>
           </a:xfrm>
           <a:prstGeom prst="ellipse">
@@ -29733,7 +29733,7 @@
         </p:nvSpPr>
         <p:spPr>
           <a:xfrm>
-            <a:off x="5977989" y="3391161"/>
+            <a:off x="7349589" y="3455026"/>
             <a:ext cx="44000" cy="44000"/>
           </a:xfrm>
           <a:prstGeom prst="ellipse">
@@ -29779,7 +29779,7 @@
         </p:nvSpPr>
         <p:spPr>
           <a:xfrm>
-            <a:off x="5834646" y="3393333"/>
+            <a:off x="7206246" y="3457244"/>
             <a:ext cx="44000" cy="44000"/>
           </a:xfrm>
           <a:prstGeom prst="ellipse">
@@ -29825,7 +29825,7 @@
         </p:nvSpPr>
         <p:spPr>
           <a:xfrm>
-            <a:off x="5961110" y="3395021"/>
+            <a:off x="7332710" y="3458969"/>
             <a:ext cx="44000" cy="44000"/>
           </a:xfrm>
           <a:prstGeom prst="ellipse">
@@ -29871,7 +29871,7 @@
         </p:nvSpPr>
         <p:spPr>
           <a:xfrm>
-            <a:off x="4348552" y="3398164"/>
+            <a:off x="5720152" y="3462178"/>
             <a:ext cx="44000" cy="44000"/>
           </a:xfrm>
           <a:prstGeom prst="ellipse">
@@ -29917,7 +29917,7 @@
         </p:nvSpPr>
         <p:spPr>
           <a:xfrm>
-            <a:off x="6518610" y="3408092"/>
+            <a:off x="7890210" y="3472318"/>
             <a:ext cx="44000" cy="44000"/>
           </a:xfrm>
           <a:prstGeom prst="ellipse">
@@ -29963,7 +29963,7 @@
         </p:nvSpPr>
         <p:spPr>
           <a:xfrm>
-            <a:off x="4873486" y="3411195"/>
+            <a:off x="6245086" y="3475487"/>
             <a:ext cx="44000" cy="44000"/>
           </a:xfrm>
           <a:prstGeom prst="ellipse">
@@ -30009,7 +30009,7 @@
         </p:nvSpPr>
         <p:spPr>
           <a:xfrm>
-            <a:off x="1320196" y="3416045"/>
+            <a:off x="2691796" y="3480440"/>
             <a:ext cx="44000" cy="44000"/>
           </a:xfrm>
           <a:prstGeom prst="ellipse">
@@ -30055,7 +30055,7 @@
         </p:nvSpPr>
         <p:spPr>
           <a:xfrm>
-            <a:off x="3184945" y="3421507"/>
+            <a:off x="4556545" y="3486018"/>
             <a:ext cx="44000" cy="44000"/>
           </a:xfrm>
           <a:prstGeom prst="ellipse">
@@ -30101,7 +30101,7 @@
         </p:nvSpPr>
         <p:spPr>
           <a:xfrm>
-            <a:off x="4790682" y="3423444"/>
+            <a:off x="6162282" y="3487996"/>
             <a:ext cx="44000" cy="44000"/>
           </a:xfrm>
           <a:prstGeom prst="ellipse">
@@ -30147,7 +30147,7 @@
         </p:nvSpPr>
         <p:spPr>
           <a:xfrm>
-            <a:off x="4862589" y="3424114"/>
+            <a:off x="6234189" y="3488681"/>
             <a:ext cx="44000" cy="44000"/>
           </a:xfrm>
           <a:prstGeom prst="ellipse">
@@ -30193,7 +30193,7 @@
         </p:nvSpPr>
         <p:spPr>
           <a:xfrm>
-            <a:off x="4776486" y="3424990"/>
+            <a:off x="6148086" y="3489576"/>
             <a:ext cx="44000" cy="44000"/>
           </a:xfrm>
           <a:prstGeom prst="ellipse">
@@ -30239,7 +30239,7 @@
         </p:nvSpPr>
         <p:spPr>
           <a:xfrm>
-            <a:off x="4173115" y="3440347"/>
+            <a:off x="5544715" y="3505259"/>
             <a:ext cx="44000" cy="44000"/>
           </a:xfrm>
           <a:prstGeom prst="ellipse">
@@ -30285,7 +30285,7 @@
         </p:nvSpPr>
         <p:spPr>
           <a:xfrm>
-            <a:off x="3960316" y="3442358"/>
+            <a:off x="5331916" y="3507312"/>
             <a:ext cx="44000" cy="44000"/>
           </a:xfrm>
           <a:prstGeom prst="ellipse">
@@ -30331,7 +30331,7 @@
         </p:nvSpPr>
         <p:spPr>
           <a:xfrm>
-            <a:off x="3306672" y="3442620"/>
+            <a:off x="4678272" y="3507580"/>
             <a:ext cx="44000" cy="44000"/>
           </a:xfrm>
           <a:prstGeom prst="ellipse">
@@ -30377,7 +30377,7 @@
         </p:nvSpPr>
         <p:spPr>
           <a:xfrm>
-            <a:off x="5010720" y="3444604"/>
+            <a:off x="6382320" y="3509606"/>
             <a:ext cx="44000" cy="44000"/>
           </a:xfrm>
           <a:prstGeom prst="ellipse">
@@ -30423,7 +30423,7 @@
         </p:nvSpPr>
         <p:spPr>
           <a:xfrm>
-            <a:off x="1464344" y="3444772"/>
+            <a:off x="2835944" y="3509778"/>
             <a:ext cx="44000" cy="44000"/>
           </a:xfrm>
           <a:prstGeom prst="ellipse">
@@ -30469,7 +30469,7 @@
         </p:nvSpPr>
         <p:spPr>
           <a:xfrm>
-            <a:off x="4090672" y="3448266"/>
+            <a:off x="5462272" y="3513346"/>
             <a:ext cx="44000" cy="44000"/>
           </a:xfrm>
           <a:prstGeom prst="ellipse">
@@ -30515,7 +30515,7 @@
         </p:nvSpPr>
         <p:spPr>
           <a:xfrm>
-            <a:off x="4787917" y="3448630"/>
+            <a:off x="6159517" y="3513719"/>
             <a:ext cx="44000" cy="44000"/>
           </a:xfrm>
           <a:prstGeom prst="ellipse">
@@ -30561,7 +30561,7 @@
         </p:nvSpPr>
         <p:spPr>
           <a:xfrm>
-            <a:off x="4912444" y="3455654"/>
+            <a:off x="6284044" y="3520891"/>
             <a:ext cx="44000" cy="44000"/>
           </a:xfrm>
           <a:prstGeom prst="ellipse">
@@ -30607,7 +30607,7 @@
         </p:nvSpPr>
         <p:spPr>
           <a:xfrm>
-            <a:off x="3506129" y="3458739"/>
+            <a:off x="4877729" y="3524042"/>
             <a:ext cx="44000" cy="44000"/>
           </a:xfrm>
           <a:prstGeom prst="ellipse">
@@ -30653,7 +30653,7 @@
         </p:nvSpPr>
         <p:spPr>
           <a:xfrm>
-            <a:off x="5114736" y="3459035"/>
+            <a:off x="6486336" y="3524345"/>
             <a:ext cx="44000" cy="44000"/>
           </a:xfrm>
           <a:prstGeom prst="ellipse">
@@ -30699,7 +30699,7 @@
         </p:nvSpPr>
         <p:spPr>
           <a:xfrm>
-            <a:off x="4833522" y="3462628"/>
+            <a:off x="6205122" y="3528014"/>
             <a:ext cx="44000" cy="44000"/>
           </a:xfrm>
           <a:prstGeom prst="ellipse">
@@ -30745,7 +30745,7 @@
         </p:nvSpPr>
         <p:spPr>
           <a:xfrm>
-            <a:off x="4269684" y="3464145"/>
+            <a:off x="5641284" y="3529564"/>
             <a:ext cx="44000" cy="44000"/>
           </a:xfrm>
           <a:prstGeom prst="ellipse">
@@ -30791,7 +30791,7 @@
         </p:nvSpPr>
         <p:spPr>
           <a:xfrm>
-            <a:off x="4959259" y="3467698"/>
+            <a:off x="6330859" y="3533192"/>
             <a:ext cx="44000" cy="44000"/>
           </a:xfrm>
           <a:prstGeom prst="ellipse">
@@ -30837,7 +30837,7 @@
         </p:nvSpPr>
         <p:spPr>
           <a:xfrm>
-            <a:off x="5482477" y="3470134"/>
+            <a:off x="6854077" y="3535680"/>
             <a:ext cx="44000" cy="44000"/>
           </a:xfrm>
           <a:prstGeom prst="ellipse">
@@ -30883,7 +30883,7 @@
         </p:nvSpPr>
         <p:spPr>
           <a:xfrm>
-            <a:off x="3317519" y="3486897"/>
+            <a:off x="4689119" y="3552800"/>
             <a:ext cx="44000" cy="44000"/>
           </a:xfrm>
           <a:prstGeom prst="ellipse">
@@ -30929,7 +30929,7 @@
         </p:nvSpPr>
         <p:spPr>
           <a:xfrm>
-            <a:off x="4805711" y="3486965"/>
+            <a:off x="6177311" y="3552869"/>
             <a:ext cx="44000" cy="44000"/>
           </a:xfrm>
           <a:prstGeom prst="ellipse">
@@ -30975,7 +30975,7 @@
         </p:nvSpPr>
         <p:spPr>
           <a:xfrm>
-            <a:off x="2810333" y="3487666"/>
+            <a:off x="4181933" y="3553584"/>
             <a:ext cx="44000" cy="44000"/>
           </a:xfrm>
           <a:prstGeom prst="ellipse">
@@ -31021,7 +31021,7 @@
         </p:nvSpPr>
         <p:spPr>
           <a:xfrm>
-            <a:off x="3498146" y="3494030"/>
+            <a:off x="4869746" y="3560084"/>
             <a:ext cx="44000" cy="44000"/>
           </a:xfrm>
           <a:prstGeom prst="ellipse">
@@ -31067,7 +31067,7 @@
         </p:nvSpPr>
         <p:spPr>
           <a:xfrm>
-            <a:off x="3897662" y="3501176"/>
+            <a:off x="5269262" y="3567383"/>
             <a:ext cx="44000" cy="44000"/>
           </a:xfrm>
           <a:prstGeom prst="ellipse">
@@ -31113,7 +31113,7 @@
         </p:nvSpPr>
         <p:spPr>
           <a:xfrm>
-            <a:off x="3193200" y="3501873"/>
+            <a:off x="4564800" y="3568094"/>
             <a:ext cx="44000" cy="44000"/>
           </a:xfrm>
           <a:prstGeom prst="ellipse">
@@ -31159,7 +31159,7 @@
         </p:nvSpPr>
         <p:spPr>
           <a:xfrm>
-            <a:off x="5701728" y="3502220"/>
+            <a:off x="7073328" y="3568449"/>
             <a:ext cx="44000" cy="44000"/>
           </a:xfrm>
           <a:prstGeom prst="ellipse">
@@ -31205,7 +31205,7 @@
         </p:nvSpPr>
         <p:spPr>
           <a:xfrm>
-            <a:off x="4813466" y="3507169"/>
+            <a:off x="6185066" y="3573503"/>
             <a:ext cx="44000" cy="44000"/>
           </a:xfrm>
           <a:prstGeom prst="ellipse">
@@ -31251,7 +31251,7 @@
         </p:nvSpPr>
         <p:spPr>
           <a:xfrm>
-            <a:off x="3712267" y="3509063"/>
+            <a:off x="5083867" y="3575437"/>
             <a:ext cx="44000" cy="44000"/>
           </a:xfrm>
           <a:prstGeom prst="ellipse">
@@ -31297,7 +31297,7 @@
         </p:nvSpPr>
         <p:spPr>
           <a:xfrm>
-            <a:off x="6324167" y="3515686"/>
+            <a:off x="7695767" y="3582201"/>
             <a:ext cx="44000" cy="44000"/>
           </a:xfrm>
           <a:prstGeom prst="ellipse">
@@ -31343,7 +31343,7 @@
         </p:nvSpPr>
         <p:spPr>
           <a:xfrm>
-            <a:off x="6795422" y="3517301"/>
+            <a:off x="8167022" y="3583851"/>
             <a:ext cx="44000" cy="44000"/>
           </a:xfrm>
           <a:prstGeom prst="ellipse">
@@ -31389,7 +31389,7 @@
         </p:nvSpPr>
         <p:spPr>
           <a:xfrm>
-            <a:off x="4950474" y="3518434"/>
+            <a:off x="6322074" y="3585007"/>
             <a:ext cx="44000" cy="44000"/>
           </a:xfrm>
           <a:prstGeom prst="ellipse">
@@ -31435,7 +31435,7 @@
         </p:nvSpPr>
         <p:spPr>
           <a:xfrm>
-            <a:off x="4655478" y="3519206"/>
+            <a:off x="6027078" y="3585796"/>
             <a:ext cx="44000" cy="44000"/>
           </a:xfrm>
           <a:prstGeom prst="ellipse">
@@ -31481,7 +31481,7 @@
         </p:nvSpPr>
         <p:spPr>
           <a:xfrm>
-            <a:off x="4890747" y="3520486"/>
+            <a:off x="6262347" y="3587103"/>
             <a:ext cx="44000" cy="44000"/>
           </a:xfrm>
           <a:prstGeom prst="ellipse">
@@ -31527,7 +31527,7 @@
         </p:nvSpPr>
         <p:spPr>
           <a:xfrm>
-            <a:off x="3973596" y="3521437"/>
+            <a:off x="5345196" y="3588075"/>
             <a:ext cx="44000" cy="44000"/>
           </a:xfrm>
           <a:prstGeom prst="ellipse">
@@ -31573,7 +31573,7 @@
         </p:nvSpPr>
         <p:spPr>
           <a:xfrm>
-            <a:off x="3887089" y="3529581"/>
+            <a:off x="5258689" y="3596391"/>
             <a:ext cx="44000" cy="44000"/>
           </a:xfrm>
           <a:prstGeom prst="ellipse">
@@ -31619,7 +31619,7 @@
         </p:nvSpPr>
         <p:spPr>
           <a:xfrm>
-            <a:off x="3410786" y="3530686"/>
+            <a:off x="4782386" y="3597520"/>
             <a:ext cx="44000" cy="44000"/>
           </a:xfrm>
           <a:prstGeom prst="ellipse">
@@ -31665,7 +31665,7 @@
         </p:nvSpPr>
         <p:spPr>
           <a:xfrm>
-            <a:off x="2227539" y="3530689"/>
+            <a:off x="3599139" y="3597523"/>
             <a:ext cx="44000" cy="44000"/>
           </a:xfrm>
           <a:prstGeom prst="ellipse">
@@ -31711,7 +31711,7 @@
         </p:nvSpPr>
         <p:spPr>
           <a:xfrm>
-            <a:off x="4765885" y="3532895"/>
+            <a:off x="6137485" y="3599776"/>
             <a:ext cx="44000" cy="44000"/>
           </a:xfrm>
           <a:prstGeom prst="ellipse">
@@ -31757,7 +31757,7 @@
         </p:nvSpPr>
         <p:spPr>
           <a:xfrm>
-            <a:off x="4859123" y="3535158"/>
+            <a:off x="6230723" y="3602087"/>
             <a:ext cx="44000" cy="44000"/>
           </a:xfrm>
           <a:prstGeom prst="ellipse">
@@ -31803,7 +31803,7 @@
         </p:nvSpPr>
         <p:spPr>
           <a:xfrm>
-            <a:off x="3888450" y="3535252"/>
+            <a:off x="5260050" y="3602183"/>
             <a:ext cx="44000" cy="44000"/>
           </a:xfrm>
           <a:prstGeom prst="ellipse">
@@ -31849,7 +31849,7 @@
         </p:nvSpPr>
         <p:spPr>
           <a:xfrm>
-            <a:off x="3967241" y="3535302"/>
+            <a:off x="5338841" y="3602235"/>
             <a:ext cx="44000" cy="44000"/>
           </a:xfrm>
           <a:prstGeom prst="ellipse">
@@ -31895,7 +31895,7 @@
         </p:nvSpPr>
         <p:spPr>
           <a:xfrm>
-            <a:off x="3312812" y="3538648"/>
+            <a:off x="4684412" y="3605651"/>
             <a:ext cx="44000" cy="44000"/>
           </a:xfrm>
           <a:prstGeom prst="ellipse">
@@ -31941,7 +31941,7 @@
         </p:nvSpPr>
         <p:spPr>
           <a:xfrm>
-            <a:off x="3493252" y="3542196"/>
+            <a:off x="4864852" y="3609275"/>
             <a:ext cx="44000" cy="44000"/>
           </a:xfrm>
           <a:prstGeom prst="ellipse">
@@ -31987,7 +31987,7 @@
         </p:nvSpPr>
         <p:spPr>
           <a:xfrm>
-            <a:off x="5890398" y="3547688"/>
+            <a:off x="7261998" y="3614884"/>
             <a:ext cx="44000" cy="44000"/>
           </a:xfrm>
           <a:prstGeom prst="ellipse">
@@ -32033,7 +32033,7 @@
         </p:nvSpPr>
         <p:spPr>
           <a:xfrm>
-            <a:off x="1706635" y="3550404"/>
+            <a:off x="3078235" y="3617658"/>
             <a:ext cx="44000" cy="44000"/>
           </a:xfrm>
           <a:prstGeom prst="ellipse">
@@ -32079,7 +32079,7 @@
         </p:nvSpPr>
         <p:spPr>
           <a:xfrm>
-            <a:off x="3826054" y="3551532"/>
+            <a:off x="5197654" y="3618810"/>
             <a:ext cx="44000" cy="44000"/>
           </a:xfrm>
           <a:prstGeom prst="ellipse">
@@ -32125,7 +32125,7 @@
         </p:nvSpPr>
         <p:spPr>
           <a:xfrm>
-            <a:off x="4853919" y="3553451"/>
+            <a:off x="6225519" y="3620769"/>
             <a:ext cx="44000" cy="44000"/>
           </a:xfrm>
           <a:prstGeom prst="ellipse">
@@ -32171,7 +32171,7 @@
         </p:nvSpPr>
         <p:spPr>
           <a:xfrm>
-            <a:off x="4229498" y="3555683"/>
+            <a:off x="5601098" y="3623049"/>
             <a:ext cx="44000" cy="44000"/>
           </a:xfrm>
           <a:prstGeom prst="ellipse">
@@ -32217,7 +32217,7 @@
         </p:nvSpPr>
         <p:spPr>
           <a:xfrm>
-            <a:off x="2441213" y="3557213"/>
+            <a:off x="3812813" y="3624612"/>
             <a:ext cx="44000" cy="44000"/>
           </a:xfrm>
           <a:prstGeom prst="ellipse">
@@ -32263,7 +32263,7 @@
         </p:nvSpPr>
         <p:spPr>
           <a:xfrm>
-            <a:off x="6677282" y="3557792"/>
+            <a:off x="8048882" y="3625203"/>
             <a:ext cx="44000" cy="44000"/>
           </a:xfrm>
           <a:prstGeom prst="ellipse">
@@ -32309,7 +32309,7 @@
         </p:nvSpPr>
         <p:spPr>
           <a:xfrm>
-            <a:off x="4818049" y="3561311"/>
+            <a:off x="6189649" y="3628797"/>
             <a:ext cx="44000" cy="44000"/>
           </a:xfrm>
           <a:prstGeom prst="ellipse">
@@ -32355,7 +32355,7 @@
         </p:nvSpPr>
         <p:spPr>
           <a:xfrm>
-            <a:off x="3775574" y="3562534"/>
+            <a:off x="5147174" y="3630046"/>
             <a:ext cx="44000" cy="44000"/>
           </a:xfrm>
           <a:prstGeom prst="ellipse">
@@ -32401,7 +32401,7 @@
         </p:nvSpPr>
         <p:spPr>
           <a:xfrm>
-            <a:off x="4143561" y="3563742"/>
+            <a:off x="5515161" y="3631280"/>
             <a:ext cx="44000" cy="44000"/>
           </a:xfrm>
           <a:prstGeom prst="ellipse">
@@ -32447,7 +32447,7 @@
         </p:nvSpPr>
         <p:spPr>
           <a:xfrm>
-            <a:off x="5143490" y="3564943"/>
+            <a:off x="6515090" y="3632506"/>
             <a:ext cx="44000" cy="44000"/>
           </a:xfrm>
           <a:prstGeom prst="ellipse">
@@ -32493,7 +32493,7 @@
         </p:nvSpPr>
         <p:spPr>
           <a:xfrm>
-            <a:off x="4674411" y="3565094"/>
+            <a:off x="6046011" y="3632661"/>
             <a:ext cx="44000" cy="44000"/>
           </a:xfrm>
           <a:prstGeom prst="ellipse">
@@ -32539,7 +32539,7 @@
         </p:nvSpPr>
         <p:spPr>
           <a:xfrm>
-            <a:off x="6616930" y="3566793"/>
+            <a:off x="7988530" y="3634395"/>
             <a:ext cx="44000" cy="44000"/>
           </a:xfrm>
           <a:prstGeom prst="ellipse">
@@ -32585,7 +32585,7 @@
         </p:nvSpPr>
         <p:spPr>
           <a:xfrm>
-            <a:off x="7134505" y="3569559"/>
+            <a:off x="8506105" y="3637221"/>
             <a:ext cx="44000" cy="44000"/>
           </a:xfrm>
           <a:prstGeom prst="ellipse">
@@ -32631,7 +32631,7 @@
         </p:nvSpPr>
         <p:spPr>
           <a:xfrm>
-            <a:off x="1942335" y="3571835"/>
+            <a:off x="3313935" y="3639545"/>
             <a:ext cx="44000" cy="44000"/>
           </a:xfrm>
           <a:prstGeom prst="ellipse">
@@ -32677,7 +32677,7 @@
         </p:nvSpPr>
         <p:spPr>
           <a:xfrm>
-            <a:off x="4659134" y="3573866"/>
+            <a:off x="6030734" y="3641619"/>
             <a:ext cx="44000" cy="44000"/>
           </a:xfrm>
           <a:prstGeom prst="ellipse">
@@ -32723,7 +32723,7 @@
         </p:nvSpPr>
         <p:spPr>
           <a:xfrm>
-            <a:off x="5665122" y="3574976"/>
+            <a:off x="7036722" y="3642753"/>
             <a:ext cx="44000" cy="44000"/>
           </a:xfrm>
           <a:prstGeom prst="ellipse">
@@ -32769,7 +32769,7 @@
         </p:nvSpPr>
         <p:spPr>
           <a:xfrm>
-            <a:off x="4809017" y="3576972"/>
+            <a:off x="6180617" y="3644791"/>
             <a:ext cx="44000" cy="44000"/>
           </a:xfrm>
           <a:prstGeom prst="ellipse">
@@ -32815,7 +32815,7 @@
         </p:nvSpPr>
         <p:spPr>
           <a:xfrm>
-            <a:off x="3553253" y="3577150"/>
+            <a:off x="4924853" y="3644972"/>
             <a:ext cx="44000" cy="44000"/>
           </a:xfrm>
           <a:prstGeom prst="ellipse">
@@ -32861,7 +32861,7 @@
         </p:nvSpPr>
         <p:spPr>
           <a:xfrm>
-            <a:off x="6274970" y="3578593"/>
+            <a:off x="7646570" y="3646446"/>
             <a:ext cx="44000" cy="44000"/>
           </a:xfrm>
           <a:prstGeom prst="ellipse">
@@ -32907,7 +32907,7 @@
         </p:nvSpPr>
         <p:spPr>
           <a:xfrm>
-            <a:off x="5679688" y="3579416"/>
+            <a:off x="7051288" y="3647287"/>
             <a:ext cx="44000" cy="44000"/>
           </a:xfrm>
           <a:prstGeom prst="ellipse">
@@ -32953,7 +32953,7 @@
         </p:nvSpPr>
         <p:spPr>
           <a:xfrm>
-            <a:off x="5875085" y="3582830"/>
+            <a:off x="7246685" y="3650774"/>
             <a:ext cx="44000" cy="44000"/>
           </a:xfrm>
           <a:prstGeom prst="ellipse">
@@ -32999,7 +32999,7 @@
         </p:nvSpPr>
         <p:spPr>
           <a:xfrm>
-            <a:off x="7713472" y="3585789"/>
+            <a:off x="9085072" y="3653796"/>
             <a:ext cx="44000" cy="44000"/>
           </a:xfrm>
           <a:prstGeom prst="ellipse">
@@ -33045,7 +33045,7 @@
         </p:nvSpPr>
         <p:spPr>
           <a:xfrm>
-            <a:off x="3012062" y="3585837"/>
+            <a:off x="4383662" y="3653844"/>
             <a:ext cx="44000" cy="44000"/>
           </a:xfrm>
           <a:prstGeom prst="ellipse">
@@ -33091,7 +33091,7 @@
         </p:nvSpPr>
         <p:spPr>
           <a:xfrm>
-            <a:off x="4208518" y="3586643"/>
+            <a:off x="5580118" y="3654668"/>
             <a:ext cx="44000" cy="44000"/>
           </a:xfrm>
           <a:prstGeom prst="ellipse">
@@ -33137,7 +33137,7 @@
         </p:nvSpPr>
         <p:spPr>
           <a:xfrm>
-            <a:off x="7713472" y="3588030"/>
+            <a:off x="9085072" y="3656085"/>
             <a:ext cx="44000" cy="44000"/>
           </a:xfrm>
           <a:prstGeom prst="ellipse">
@@ -33183,7 +33183,7 @@
         </p:nvSpPr>
         <p:spPr>
           <a:xfrm>
-            <a:off x="3669385" y="3588137"/>
+            <a:off x="5040985" y="3656194"/>
             <a:ext cx="44000" cy="44000"/>
           </a:xfrm>
           <a:prstGeom prst="ellipse">
@@ -33229,7 +33229,7 @@
         </p:nvSpPr>
         <p:spPr>
           <a:xfrm>
-            <a:off x="3952141" y="3589202"/>
+            <a:off x="5323741" y="3657281"/>
             <a:ext cx="44000" cy="44000"/>
           </a:xfrm>
           <a:prstGeom prst="ellipse">
@@ -33275,7 +33275,7 @@
         </p:nvSpPr>
         <p:spPr>
           <a:xfrm>
-            <a:off x="5002216" y="3589943"/>
+            <a:off x="6373816" y="3658037"/>
             <a:ext cx="44000" cy="44000"/>
           </a:xfrm>
           <a:prstGeom prst="ellipse">
@@ -33321,7 +33321,7 @@
         </p:nvSpPr>
         <p:spPr>
           <a:xfrm>
-            <a:off x="3930887" y="3590332"/>
+            <a:off x="5302487" y="3658435"/>
             <a:ext cx="44000" cy="44000"/>
           </a:xfrm>
           <a:prstGeom prst="ellipse">
@@ -33367,7 +33367,7 @@
         </p:nvSpPr>
         <p:spPr>
           <a:xfrm>
-            <a:off x="4717224" y="3592476"/>
+            <a:off x="6088824" y="3660625"/>
             <a:ext cx="44000" cy="44000"/>
           </a:xfrm>
           <a:prstGeom prst="ellipse">
@@ -33413,7 +33413,7 @@
         </p:nvSpPr>
         <p:spPr>
           <a:xfrm>
-            <a:off x="4971594" y="3593243"/>
+            <a:off x="6343194" y="3661408"/>
             <a:ext cx="44000" cy="44000"/>
           </a:xfrm>
           <a:prstGeom prst="ellipse">
@@ -33459,7 +33459,7 @@
         </p:nvSpPr>
         <p:spPr>
           <a:xfrm>
-            <a:off x="3885108" y="3594073"/>
+            <a:off x="5256708" y="3662255"/>
             <a:ext cx="44000" cy="44000"/>
           </a:xfrm>
           <a:prstGeom prst="ellipse">
@@ -33505,7 +33505,7 @@
         </p:nvSpPr>
         <p:spPr>
           <a:xfrm>
-            <a:off x="6385111" y="3595533"/>
+            <a:off x="7756711" y="3663747"/>
             <a:ext cx="44000" cy="44000"/>
           </a:xfrm>
           <a:prstGeom prst="ellipse">
@@ -33551,7 +33551,7 @@
         </p:nvSpPr>
         <p:spPr>
           <a:xfrm>
-            <a:off x="4997139" y="3596424"/>
+            <a:off x="6368739" y="3664657"/>
             <a:ext cx="44000" cy="44000"/>
           </a:xfrm>
           <a:prstGeom prst="ellipse">
@@ -33597,7 +33597,7 @@
         </p:nvSpPr>
         <p:spPr>
           <a:xfrm>
-            <a:off x="3196352" y="3597220"/>
+            <a:off x="4567952" y="3665470"/>
             <a:ext cx="44000" cy="44000"/>
           </a:xfrm>
           <a:prstGeom prst="ellipse">
@@ -33643,7 +33643,7 @@
         </p:nvSpPr>
         <p:spPr>
           <a:xfrm>
-            <a:off x="3739830" y="3597310"/>
+            <a:off x="5111430" y="3665562"/>
             <a:ext cx="44000" cy="44000"/>
           </a:xfrm>
           <a:prstGeom prst="ellipse">
@@ -33689,7 +33689,7 @@
         </p:nvSpPr>
         <p:spPr>
           <a:xfrm>
-            <a:off x="4217066" y="3598229"/>
+            <a:off x="5588666" y="3666500"/>
             <a:ext cx="44000" cy="44000"/>
           </a:xfrm>
           <a:prstGeom prst="ellipse">
@@ -33735,7 +33735,7 @@
         </p:nvSpPr>
         <p:spPr>
           <a:xfrm>
-            <a:off x="5068989" y="3598415"/>
+            <a:off x="6440589" y="3666690"/>
             <a:ext cx="44000" cy="44000"/>
           </a:xfrm>
           <a:prstGeom prst="ellipse">
@@ -33781,7 +33781,7 @@
         </p:nvSpPr>
         <p:spPr>
           <a:xfrm>
-            <a:off x="3739403" y="3598546"/>
+            <a:off x="5111003" y="3666824"/>
             <a:ext cx="44000" cy="44000"/>
           </a:xfrm>
           <a:prstGeom prst="ellipse">
@@ -33827,7 +33827,7 @@
         </p:nvSpPr>
         <p:spPr>
           <a:xfrm>
-            <a:off x="5433486" y="3599924"/>
+            <a:off x="6805086" y="3668231"/>
             <a:ext cx="44000" cy="44000"/>
           </a:xfrm>
           <a:prstGeom prst="ellipse">
@@ -33873,7 +33873,7 @@
         </p:nvSpPr>
         <p:spPr>
           <a:xfrm>
-            <a:off x="2315052" y="3602981"/>
+            <a:off x="3686652" y="3671354"/>
             <a:ext cx="44000" cy="44000"/>
           </a:xfrm>
           <a:prstGeom prst="ellipse">
@@ -33919,7 +33919,7 @@
         </p:nvSpPr>
         <p:spPr>
           <a:xfrm>
-            <a:off x="6113070" y="3604947"/>
+            <a:off x="7484670" y="3673361"/>
             <a:ext cx="44000" cy="44000"/>
           </a:xfrm>
           <a:prstGeom prst="ellipse">
@@ -33965,7 +33965,7 @@
         </p:nvSpPr>
         <p:spPr>
           <a:xfrm>
-            <a:off x="4757563" y="3606331"/>
+            <a:off x="6129163" y="3674775"/>
             <a:ext cx="44000" cy="44000"/>
           </a:xfrm>
           <a:prstGeom prst="ellipse">
@@ -34011,7 +34011,7 @@
         </p:nvSpPr>
         <p:spPr>
           <a:xfrm>
-            <a:off x="1516251" y="3607048"/>
+            <a:off x="2887851" y="3675507"/>
             <a:ext cx="44000" cy="44000"/>
           </a:xfrm>
           <a:prstGeom prst="ellipse">
@@ -34057,7 +34057,7 @@
         </p:nvSpPr>
         <p:spPr>
           <a:xfrm>
-            <a:off x="3747578" y="3608141"/>
+            <a:off x="5119178" y="3676624"/>
             <a:ext cx="44000" cy="44000"/>
           </a:xfrm>
           <a:prstGeom prst="ellipse">
@@ -34103,7 +34103,7 @@
         </p:nvSpPr>
         <p:spPr>
           <a:xfrm>
-            <a:off x="4942802" y="3609637"/>
+            <a:off x="6314402" y="3678151"/>
             <a:ext cx="44000" cy="44000"/>
           </a:xfrm>
           <a:prstGeom prst="ellipse">
@@ -34149,7 +34149,7 @@
         </p:nvSpPr>
         <p:spPr>
           <a:xfrm>
-            <a:off x="7282814" y="3610180"/>
+            <a:off x="8654414" y="3678706"/>
             <a:ext cx="44000" cy="44000"/>
           </a:xfrm>
           <a:prstGeom prst="ellipse">
@@ -34195,7 +34195,7 @@
         </p:nvSpPr>
         <p:spPr>
           <a:xfrm>
-            <a:off x="5654558" y="3610415"/>
+            <a:off x="7026158" y="3678945"/>
             <a:ext cx="44000" cy="44000"/>
           </a:xfrm>
           <a:prstGeom prst="ellipse">
@@ -34241,7 +34241,7 @@
         </p:nvSpPr>
         <p:spPr>
           <a:xfrm>
-            <a:off x="3125099" y="3610707"/>
+            <a:off x="4496699" y="3679244"/>
             <a:ext cx="44000" cy="44000"/>
           </a:xfrm>
           <a:prstGeom prst="ellipse">
@@ -34287,7 +34287,7 @@
         </p:nvSpPr>
         <p:spPr>
           <a:xfrm>
-            <a:off x="7713472" y="3611367"/>
+            <a:off x="9085072" y="3679918"/>
             <a:ext cx="44000" cy="44000"/>
           </a:xfrm>
           <a:prstGeom prst="ellipse">
@@ -34333,7 +34333,7 @@
         </p:nvSpPr>
         <p:spPr>
           <a:xfrm>
-            <a:off x="4732189" y="3615260"/>
+            <a:off x="6103789" y="3683894"/>
             <a:ext cx="44000" cy="44000"/>
           </a:xfrm>
           <a:prstGeom prst="ellipse">
@@ -34379,7 +34379,7 @@
         </p:nvSpPr>
         <p:spPr>
           <a:xfrm>
-            <a:off x="5149416" y="3615272"/>
+            <a:off x="6521016" y="3683906"/>
             <a:ext cx="44000" cy="44000"/>
           </a:xfrm>
           <a:prstGeom prst="ellipse">
@@ -34425,7 +34425,7 @@
         </p:nvSpPr>
         <p:spPr>
           <a:xfrm>
-            <a:off x="4277243" y="3615355"/>
+            <a:off x="5648843" y="3683990"/>
             <a:ext cx="44000" cy="44000"/>
           </a:xfrm>
           <a:prstGeom prst="ellipse">
@@ -34471,7 +34471,7 @@
         </p:nvSpPr>
         <p:spPr>
           <a:xfrm>
-            <a:off x="6172494" y="3615356"/>
+            <a:off x="7544094" y="3683992"/>
             <a:ext cx="44000" cy="44000"/>
           </a:xfrm>
           <a:prstGeom prst="ellipse">
@@ -34517,7 +34517,7 @@
         </p:nvSpPr>
         <p:spPr>
           <a:xfrm>
-            <a:off x="6851528" y="3616145"/>
+            <a:off x="8223128" y="3684797"/>
             <a:ext cx="44000" cy="44000"/>
           </a:xfrm>
           <a:prstGeom prst="ellipse">
@@ -34563,7 +34563,7 @@
         </p:nvSpPr>
         <p:spPr>
           <a:xfrm>
-            <a:off x="5666045" y="3616671"/>
+            <a:off x="7037645" y="3685334"/>
             <a:ext cx="44000" cy="44000"/>
           </a:xfrm>
           <a:prstGeom prst="ellipse">
@@ -34609,7 +34609,7 @@
         </p:nvSpPr>
         <p:spPr>
           <a:xfrm>
-            <a:off x="5049188" y="3618158"/>
+            <a:off x="6420788" y="3686854"/>
             <a:ext cx="44000" cy="44000"/>
           </a:xfrm>
           <a:prstGeom prst="ellipse">
@@ -34655,7 +34655,7 @@
         </p:nvSpPr>
         <p:spPr>
           <a:xfrm>
-            <a:off x="4677807" y="3618773"/>
+            <a:off x="6049407" y="3687481"/>
             <a:ext cx="44000" cy="44000"/>
           </a:xfrm>
           <a:prstGeom prst="ellipse">
@@ -34701,7 +34701,7 @@
         </p:nvSpPr>
         <p:spPr>
           <a:xfrm>
-            <a:off x="3388029" y="3624162"/>
+            <a:off x="4759629" y="3692985"/>
             <a:ext cx="44000" cy="44000"/>
           </a:xfrm>
           <a:prstGeom prst="ellipse">
@@ -34747,7 +34747,7 @@
         </p:nvSpPr>
         <p:spPr>
           <a:xfrm>
-            <a:off x="3049102" y="3625458"/>
+            <a:off x="4420702" y="3694308"/>
             <a:ext cx="44000" cy="44000"/>
           </a:xfrm>
           <a:prstGeom prst="ellipse">
@@ -34793,7 +34793,7 @@
         </p:nvSpPr>
         <p:spPr>
           <a:xfrm>
-            <a:off x="4821375" y="3625897"/>
+            <a:off x="6192975" y="3694757"/>
             <a:ext cx="44000" cy="44000"/>
           </a:xfrm>
           <a:prstGeom prst="ellipse">
@@ -34839,7 +34839,7 @@
         </p:nvSpPr>
         <p:spPr>
           <a:xfrm>
-            <a:off x="3923136" y="3630432"/>
+            <a:off x="5294736" y="3699388"/>
             <a:ext cx="44000" cy="44000"/>
           </a:xfrm>
           <a:prstGeom prst="ellipse">
@@ -34885,7 +34885,7 @@
         </p:nvSpPr>
         <p:spPr>
           <a:xfrm>
-            <a:off x="3421725" y="3631411"/>
+            <a:off x="4793325" y="3700388"/>
             <a:ext cx="44000" cy="44000"/>
           </a:xfrm>
           <a:prstGeom prst="ellipse">
@@ -34931,7 +34931,7 @@
         </p:nvSpPr>
         <p:spPr>
           <a:xfrm>
-            <a:off x="1901365" y="3632008"/>
+            <a:off x="3272965" y="3700998"/>
             <a:ext cx="44000" cy="44000"/>
           </a:xfrm>
           <a:prstGeom prst="ellipse">
@@ -34977,7 +34977,7 @@
         </p:nvSpPr>
         <p:spPr>
           <a:xfrm>
-            <a:off x="4226978" y="3635273"/>
+            <a:off x="5598578" y="3704333"/>
             <a:ext cx="44000" cy="44000"/>
           </a:xfrm>
           <a:prstGeom prst="ellipse">
@@ -35023,7 +35023,7 @@
         </p:nvSpPr>
         <p:spPr>
           <a:xfrm>
-            <a:off x="3627208" y="3635657"/>
+            <a:off x="4998808" y="3704725"/>
             <a:ext cx="44000" cy="44000"/>
           </a:xfrm>
           <a:prstGeom prst="ellipse">
@@ -35069,7 +35069,7 @@
         </p:nvSpPr>
         <p:spPr>
           <a:xfrm>
-            <a:off x="3006291" y="3637191"/>
+            <a:off x="4377891" y="3706291"/>
             <a:ext cx="44000" cy="44000"/>
           </a:xfrm>
           <a:prstGeom prst="ellipse">
@@ -35115,7 +35115,7 @@
         </p:nvSpPr>
         <p:spPr>
           <a:xfrm>
-            <a:off x="4188146" y="3637580"/>
+            <a:off x="5559746" y="3706688"/>
             <a:ext cx="44000" cy="44000"/>
           </a:xfrm>
           <a:prstGeom prst="ellipse">
@@ -35161,7 +35161,7 @@
         </p:nvSpPr>
         <p:spPr>
           <a:xfrm>
-            <a:off x="3456293" y="3637820"/>
+            <a:off x="4827893" y="3706933"/>
             <a:ext cx="44000" cy="44000"/>
           </a:xfrm>
           <a:prstGeom prst="ellipse">
@@ -35207,7 +35207,7 @@
         </p:nvSpPr>
         <p:spPr>
           <a:xfrm>
-            <a:off x="5190380" y="3640792"/>
+            <a:off x="6561980" y="3709969"/>
             <a:ext cx="44000" cy="44000"/>
           </a:xfrm>
           <a:prstGeom prst="ellipse">
@@ -35253,7 +35253,7 @@
         </p:nvSpPr>
         <p:spPr>
           <a:xfrm>
-            <a:off x="2427020" y="3641166"/>
+            <a:off x="3798620" y="3710351"/>
             <a:ext cx="44000" cy="44000"/>
           </a:xfrm>
           <a:prstGeom prst="ellipse">
@@ -35299,7 +35299,7 @@
         </p:nvSpPr>
         <p:spPr>
           <a:xfrm>
-            <a:off x="4793196" y="3642164"/>
+            <a:off x="6164796" y="3711370"/>
             <a:ext cx="44000" cy="44000"/>
           </a:xfrm>
           <a:prstGeom prst="ellipse">
@@ -35345,7 +35345,7 @@
         </p:nvSpPr>
         <p:spPr>
           <a:xfrm>
-            <a:off x="4838454" y="3646015"/>
+            <a:off x="6210054" y="3715303"/>
             <a:ext cx="44000" cy="44000"/>
           </a:xfrm>
           <a:prstGeom prst="ellipse">
@@ -35391,7 +35391,7 @@
         </p:nvSpPr>
         <p:spPr>
           <a:xfrm>
-            <a:off x="3862051" y="3646409"/>
+            <a:off x="5233651" y="3715705"/>
             <a:ext cx="44000" cy="44000"/>
           </a:xfrm>
           <a:prstGeom prst="ellipse">
@@ -35437,7 +35437,7 @@
         </p:nvSpPr>
         <p:spPr>
           <a:xfrm>
-            <a:off x="4086747" y="3647726"/>
+            <a:off x="5458347" y="3717050"/>
             <a:ext cx="44000" cy="44000"/>
           </a:xfrm>
           <a:prstGeom prst="ellipse">
@@ -35483,7 +35483,7 @@
         </p:nvSpPr>
         <p:spPr>
           <a:xfrm>
-            <a:off x="5233066" y="3650460"/>
+            <a:off x="6604666" y="3719843"/>
             <a:ext cx="44000" cy="44000"/>
           </a:xfrm>
           <a:prstGeom prst="ellipse">
@@ -35529,7 +35529,7 @@
         </p:nvSpPr>
         <p:spPr>
           <a:xfrm>
-            <a:off x="4211896" y="3652031"/>
+            <a:off x="5583496" y="3721447"/>
             <a:ext cx="44000" cy="44000"/>
           </a:xfrm>
           <a:prstGeom prst="ellipse">
@@ -35575,7 +35575,7 @@
         </p:nvSpPr>
         <p:spPr>
           <a:xfrm>
-            <a:off x="4826640" y="3653660"/>
+            <a:off x="6198240" y="3723111"/>
             <a:ext cx="44000" cy="44000"/>
           </a:xfrm>
           <a:prstGeom prst="ellipse">
@@ -35621,7 +35621,7 @@
         </p:nvSpPr>
         <p:spPr>
           <a:xfrm>
-            <a:off x="4201670" y="3656602"/>
+            <a:off x="5573270" y="3726115"/>
             <a:ext cx="44000" cy="44000"/>
           </a:xfrm>
           <a:prstGeom prst="ellipse">
@@ -35667,7 +35667,7 @@
         </p:nvSpPr>
         <p:spPr>
           <a:xfrm>
-            <a:off x="4171104" y="3658955"/>
+            <a:off x="5542704" y="3728519"/>
             <a:ext cx="44000" cy="44000"/>
           </a:xfrm>
           <a:prstGeom prst="ellipse">
@@ -35713,7 +35713,7 @@
         </p:nvSpPr>
         <p:spPr>
           <a:xfrm>
-            <a:off x="4099054" y="3660384"/>
+            <a:off x="5470654" y="3729977"/>
             <a:ext cx="44000" cy="44000"/>
           </a:xfrm>
           <a:prstGeom prst="ellipse">
@@ -35759,7 +35759,7 @@
         </p:nvSpPr>
         <p:spPr>
           <a:xfrm>
-            <a:off x="6629665" y="3661303"/>
+            <a:off x="8001265" y="3730916"/>
             <a:ext cx="44000" cy="44000"/>
           </a:xfrm>
           <a:prstGeom prst="ellipse">
@@ -35805,7 +35805,7 @@
         </p:nvSpPr>
         <p:spPr>
           <a:xfrm>
-            <a:off x="5595399" y="3662592"/>
+            <a:off x="6966999" y="3732233"/>
             <a:ext cx="44000" cy="44000"/>
           </a:xfrm>
           <a:prstGeom prst="ellipse">
@@ -35851,7 +35851,7 @@
         </p:nvSpPr>
         <p:spPr>
           <a:xfrm>
-            <a:off x="3727297" y="3665073"/>
+            <a:off x="5098897" y="3734767"/>
             <a:ext cx="44000" cy="44000"/>
           </a:xfrm>
           <a:prstGeom prst="ellipse">
@@ -35897,7 +35897,7 @@
         </p:nvSpPr>
         <p:spPr>
           <a:xfrm>
-            <a:off x="5316479" y="3665132"/>
+            <a:off x="6688079" y="3734827"/>
             <a:ext cx="44000" cy="44000"/>
           </a:xfrm>
           <a:prstGeom prst="ellipse">
@@ -35943,7 +35943,7 @@
         </p:nvSpPr>
         <p:spPr>
           <a:xfrm>
-            <a:off x="7713472" y="3666400"/>
+            <a:off x="9085072" y="3736122"/>
             <a:ext cx="44000" cy="44000"/>
           </a:xfrm>
           <a:prstGeom prst="ellipse">
@@ -35989,7 +35989,7 @@
         </p:nvSpPr>
         <p:spPr>
           <a:xfrm>
-            <a:off x="4912611" y="3667630"/>
+            <a:off x="6284211" y="3737378"/>
             <a:ext cx="44000" cy="44000"/>
           </a:xfrm>
           <a:prstGeom prst="ellipse">
@@ -36035,7 +36035,7 @@
         </p:nvSpPr>
         <p:spPr>
           <a:xfrm>
-            <a:off x="3592512" y="3669078"/>
+            <a:off x="4964112" y="3738856"/>
             <a:ext cx="44000" cy="44000"/>
           </a:xfrm>
           <a:prstGeom prst="ellipse">
@@ -36081,7 +36081,7 @@
         </p:nvSpPr>
         <p:spPr>
           <a:xfrm>
-            <a:off x="5203330" y="3670571"/>
+            <a:off x="6574930" y="3740381"/>
             <a:ext cx="44000" cy="44000"/>
           </a:xfrm>
           <a:prstGeom prst="ellipse">
@@ -36127,7 +36127,7 @@
         </p:nvSpPr>
         <p:spPr>
           <a:xfrm>
-            <a:off x="3881108" y="3670794"/>
+            <a:off x="5252708" y="3740610"/>
             <a:ext cx="44000" cy="44000"/>
           </a:xfrm>
           <a:prstGeom prst="ellipse">
@@ -36173,7 +36173,7 @@
         </p:nvSpPr>
         <p:spPr>
           <a:xfrm>
-            <a:off x="5834913" y="3672768"/>
+            <a:off x="7206513" y="3742625"/>
             <a:ext cx="44000" cy="44000"/>
           </a:xfrm>
           <a:prstGeom prst="ellipse">
@@ -36219,7 +36219,7 @@
         </p:nvSpPr>
         <p:spPr>
           <a:xfrm>
-            <a:off x="4028406" y="3675202"/>
+            <a:off x="5400006" y="3745111"/>
             <a:ext cx="44000" cy="44000"/>
           </a:xfrm>
           <a:prstGeom prst="ellipse">
@@ -36265,7 +36265,7 @@
         </p:nvSpPr>
         <p:spPr>
           <a:xfrm>
-            <a:off x="3515973" y="2971549"/>
+            <a:off x="4887573" y="3026699"/>
             <a:ext cx="64000" cy="64000"/>
           </a:xfrm>
           <a:prstGeom prst="ellipse">
@@ -36311,7 +36311,7 @@
         </p:nvSpPr>
         <p:spPr>
           <a:xfrm>
-            <a:off x="2605379" y="3279457"/>
+            <a:off x="3976979" y="3341159"/>
             <a:ext cx="64000" cy="64000"/>
           </a:xfrm>
           <a:prstGeom prst="ellipse">
@@ -36357,7 +36357,7 @@
         </p:nvSpPr>
         <p:spPr>
           <a:xfrm>
-            <a:off x="4167031" y="3284927"/>
+            <a:off x="5538631" y="3346745"/>
             <a:ext cx="64000" cy="64000"/>
           </a:xfrm>
           <a:prstGeom prst="ellipse">
@@ -36403,7 +36403,7 @@
         </p:nvSpPr>
         <p:spPr>
           <a:xfrm>
-            <a:off x="2734492" y="3326759"/>
+            <a:off x="4106092" y="3389467"/>
             <a:ext cx="64000" cy="64000"/>
           </a:xfrm>
           <a:prstGeom prst="ellipse">
@@ -36449,7 +36449,7 @@
         </p:nvSpPr>
         <p:spPr>
           <a:xfrm>
-            <a:off x="3295363" y="3353617"/>
+            <a:off x="4666963" y="3416896"/>
             <a:ext cx="64000" cy="64000"/>
           </a:xfrm>
           <a:prstGeom prst="ellipse">
@@ -36495,7 +36495,7 @@
         </p:nvSpPr>
         <p:spPr>
           <a:xfrm>
-            <a:off x="5891428" y="3377129"/>
+            <a:off x="7263028" y="3440908"/>
             <a:ext cx="64000" cy="64000"/>
           </a:xfrm>
           <a:prstGeom prst="ellipse">
@@ -36541,7 +36541,7 @@
         </p:nvSpPr>
         <p:spPr>
           <a:xfrm>
-            <a:off x="3397821" y="3388152"/>
+            <a:off x="4769421" y="3452166"/>
             <a:ext cx="64000" cy="64000"/>
           </a:xfrm>
           <a:prstGeom prst="ellipse">
@@ -36587,7 +36587,7 @@
         </p:nvSpPr>
         <p:spPr>
           <a:xfrm>
-            <a:off x="3443213" y="3413016"/>
+            <a:off x="4814813" y="3477559"/>
             <a:ext cx="64000" cy="64000"/>
           </a:xfrm>
           <a:prstGeom prst="ellipse">
@@ -36633,7 +36633,7 @@
         </p:nvSpPr>
         <p:spPr>
           <a:xfrm>
-            <a:off x="3888842" y="3478786"/>
+            <a:off x="5260442" y="3544729"/>
             <a:ext cx="64000" cy="64000"/>
           </a:xfrm>
           <a:prstGeom prst="ellipse">
@@ -36679,7 +36679,7 @@
         </p:nvSpPr>
         <p:spPr>
           <a:xfrm>
-            <a:off x="4007815" y="3480140"/>
+            <a:off x="5379415" y="3546112"/>
             <a:ext cx="64000" cy="64000"/>
           </a:xfrm>
           <a:prstGeom prst="ellipse">
@@ -36725,7 +36725,7 @@
         </p:nvSpPr>
         <p:spPr>
           <a:xfrm>
-            <a:off x="3556663" y="3524599"/>
+            <a:off x="4928263" y="3591516"/>
             <a:ext cx="64000" cy="64000"/>
           </a:xfrm>
           <a:prstGeom prst="ellipse">
@@ -36771,7 +36771,7 @@
         </p:nvSpPr>
         <p:spPr>
           <a:xfrm>
-            <a:off x="3272596" y="3565826"/>
+            <a:off x="4644196" y="3633621"/>
             <a:ext cx="64000" cy="64000"/>
           </a:xfrm>
           <a:prstGeom prst="ellipse">
@@ -36817,7 +36817,7 @@
         </p:nvSpPr>
         <p:spPr>
           <a:xfrm>
-            <a:off x="3704085" y="3582654"/>
+            <a:off x="5075685" y="3650806"/>
             <a:ext cx="64000" cy="64000"/>
           </a:xfrm>
           <a:prstGeom prst="ellipse">
@@ -36863,7 +36863,7 @@
         </p:nvSpPr>
         <p:spPr>
           <a:xfrm>
-            <a:off x="4972433" y="3590546"/>
+            <a:off x="6344033" y="3658867"/>
             <a:ext cx="64000" cy="64000"/>
           </a:xfrm>
           <a:prstGeom prst="ellipse">
@@ -36909,7 +36909,7 @@
         </p:nvSpPr>
         <p:spPr>
           <a:xfrm>
-            <a:off x="4694127" y="3591103"/>
+            <a:off x="6065727" y="3659436"/>
             <a:ext cx="64000" cy="64000"/>
           </a:xfrm>
           <a:prstGeom prst="ellipse">
@@ -36955,7 +36955,7 @@
         </p:nvSpPr>
         <p:spPr>
           <a:xfrm>
-            <a:off x="3713420" y="3598679"/>
+            <a:off x="5085020" y="3667173"/>
             <a:ext cx="64000" cy="64000"/>
           </a:xfrm>
           <a:prstGeom prst="ellipse">
@@ -37001,7 +37001,7 @@
         </p:nvSpPr>
         <p:spPr>
           <a:xfrm>
-            <a:off x="2546479" y="3611957"/>
+            <a:off x="3918079" y="3680733"/>
             <a:ext cx="64000" cy="64000"/>
           </a:xfrm>
           <a:prstGeom prst="ellipse">
@@ -37047,7 +37047,7 @@
         </p:nvSpPr>
         <p:spPr>
           <a:xfrm>
-            <a:off x="4870999" y="3632697"/>
+            <a:off x="6242599" y="3701914"/>
             <a:ext cx="64000" cy="64000"/>
           </a:xfrm>
           <a:prstGeom prst="ellipse">
@@ -37093,7 +37093,7 @@
         </p:nvSpPr>
         <p:spPr>
           <a:xfrm>
-            <a:off x="3845413" y="3640069"/>
+            <a:off x="5217013" y="3709444"/>
             <a:ext cx="64000" cy="64000"/>
           </a:xfrm>
           <a:prstGeom prst="ellipse">
@@ -37139,7 +37139,7 @@
         </p:nvSpPr>
         <p:spPr>
           <a:xfrm>
-            <a:off x="4736568" y="3649648"/>
+            <a:off x="6108168" y="3719226"/>
             <a:ext cx="64000" cy="64000"/>
           </a:xfrm>
           <a:prstGeom prst="ellipse">
@@ -37185,7 +37185,7 @@
         </p:nvSpPr>
         <p:spPr>
           <a:xfrm>
-            <a:off x="4777486" y="3651265"/>
+            <a:off x="6149086" y="3720877"/>
             <a:ext cx="64000" cy="64000"/>
           </a:xfrm>
           <a:prstGeom prst="ellipse">
@@ -37231,7 +37231,7 @@
         </p:nvSpPr>
         <p:spPr>
           <a:xfrm>
-            <a:off x="4192129" y="3658410"/>
+            <a:off x="5563729" y="3728174"/>
             <a:ext cx="64000" cy="64000"/>
           </a:xfrm>
           <a:prstGeom prst="ellipse">
@@ -37277,8 +37277,8 @@
         </p:nvSpPr>
         <p:spPr>
           <a:xfrm>
-            <a:off x="1768699" y="3268805"/>
-            <a:ext cx="777240" cy="146304"/>
+            <a:off x="91440" y="695212"/>
+            <a:ext cx="960120" cy="155448"/>
           </a:xfrm>
           <a:prstGeom prst="rect">
             <a:avLst/>
@@ -37294,7 +37294,79 @@
           <a:p>
             <a:pPr algn="r"/>
             <a:r>
-              <a:rPr sz="700" b="1" i="0">
+              <a:rPr sz="750" b="1" i="0">
+                <a:solidFill>
+                  <a:srgbClr val="A24E78"/>
+                </a:solidFill>
+                <a:latin typeface="Arial"/>
+              </a:rPr>
+              <a:t>GPX3</a:t>
+            </a:r>
+          </a:p>
+        </p:txBody>
+      </p:sp>
+      <p:cxnSp>
+        <p:nvCxnSpPr>
+          <p:cNvPr id="778" name="Connector 777"/>
+          <p:cNvCxnSpPr/>
+          <p:nvPr/>
+        </p:nvCxnSpPr>
+        <p:spPr>
+          <a:xfrm flipH="1" flipV="1">
+            <a:off x="1051560" y="772936"/>
+            <a:ext cx="3868013" cy="2285763"/>
+          </a:xfrm>
+          <a:prstGeom prst="line">
+            <a:avLst/>
+          </a:prstGeom>
+          <a:ln w="6985">
+            <a:solidFill>
+              <a:srgbClr val="A24E78"/>
+            </a:solidFill>
+          </a:ln>
+          <a:effectLst/>
+        </p:spPr>
+        <p:style>
+          <a:lnRef idx="2">
+            <a:schemeClr val="accent1"/>
+          </a:lnRef>
+          <a:fillRef idx="0">
+            <a:schemeClr val="accent1"/>
+          </a:fillRef>
+          <a:effectRef idx="1">
+            <a:schemeClr val="accent1"/>
+          </a:effectRef>
+          <a:fontRef idx="minor">
+            <a:schemeClr val="tx1"/>
+          </a:fontRef>
+        </p:style>
+      </p:cxnSp>
+      <p:sp>
+        <p:nvSpPr>
+          <p:cNvPr id="779" name="TextBox 778"/>
+          <p:cNvSpPr txBox="1"/>
+          <p:nvPr/>
+        </p:nvSpPr>
+        <p:spPr>
+          <a:xfrm>
+            <a:off x="91440" y="887989"/>
+            <a:ext cx="960120" cy="155448"/>
+          </a:xfrm>
+          <a:prstGeom prst="rect">
+            <a:avLst/>
+          </a:prstGeom>
+          <a:noFill/>
+          <a:effectLst/>
+        </p:spPr>
+        <p:txBody>
+          <a:bodyPr wrap="square" lIns="0" rIns="0" tIns="0" bIns="0" anchor="ctr">
+            <a:spAutoFit/>
+          </a:bodyPr>
+          <a:lstStyle/>
+          <a:p>
+            <a:pPr algn="r"/>
+            <a:r>
+              <a:rPr sz="750" b="1" i="0">
                 <a:solidFill>
                   <a:srgbClr val="118AB2"/>
                 </a:solidFill>
@@ -37305,16 +37377,52 @@
           </a:p>
         </p:txBody>
       </p:sp>
-      <p:sp>
-        <p:nvSpPr>
-          <p:cNvPr id="778" name="TextBox 777"/>
+      <p:cxnSp>
+        <p:nvCxnSpPr>
+          <p:cNvPr id="780" name="Connector 779"/>
+          <p:cNvCxnSpPr/>
+          <p:nvPr/>
+        </p:nvCxnSpPr>
+        <p:spPr>
+          <a:xfrm flipH="1" flipV="1">
+            <a:off x="1051560" y="965713"/>
+            <a:ext cx="2957419" cy="2407446"/>
+          </a:xfrm>
+          <a:prstGeom prst="line">
+            <a:avLst/>
+          </a:prstGeom>
+          <a:ln w="6985">
+            <a:solidFill>
+              <a:srgbClr val="118AB2"/>
+            </a:solidFill>
+          </a:ln>
+          <a:effectLst/>
+        </p:spPr>
+        <p:style>
+          <a:lnRef idx="2">
+            <a:schemeClr val="accent1"/>
+          </a:lnRef>
+          <a:fillRef idx="0">
+            <a:schemeClr val="accent1"/>
+          </a:fillRef>
+          <a:effectRef idx="1">
+            <a:schemeClr val="accent1"/>
+          </a:effectRef>
+          <a:fontRef idx="minor">
+            <a:schemeClr val="tx1"/>
+          </a:fontRef>
+        </p:style>
+      </p:cxnSp>
+      <p:sp>
+        <p:nvSpPr>
+          <p:cNvPr id="781" name="TextBox 780"/>
           <p:cNvSpPr txBox="1"/>
           <p:nvPr/>
         </p:nvSpPr>
         <p:spPr>
           <a:xfrm>
-            <a:off x="1897812" y="3316401"/>
-            <a:ext cx="777240" cy="146304"/>
+            <a:off x="91440" y="1080767"/>
+            <a:ext cx="960120" cy="155448"/>
           </a:xfrm>
           <a:prstGeom prst="rect">
             <a:avLst/>
@@ -37330,7 +37438,79 @@
           <a:p>
             <a:pPr algn="r"/>
             <a:r>
-              <a:rPr sz="700" b="1" i="0">
+              <a:rPr sz="750" b="1" i="0">
+                <a:solidFill>
+                  <a:srgbClr val="A24E78"/>
+                </a:solidFill>
+                <a:latin typeface="Arial"/>
+              </a:rPr>
+              <a:t>MRPL40</a:t>
+            </a:r>
+          </a:p>
+        </p:txBody>
+      </p:sp>
+      <p:cxnSp>
+        <p:nvCxnSpPr>
+          <p:cNvPr id="782" name="Connector 781"/>
+          <p:cNvCxnSpPr/>
+          <p:nvPr/>
+        </p:nvCxnSpPr>
+        <p:spPr>
+          <a:xfrm flipH="1" flipV="1">
+            <a:off x="1051560" y="1158491"/>
+            <a:ext cx="4519071" cy="2220254"/>
+          </a:xfrm>
+          <a:prstGeom prst="line">
+            <a:avLst/>
+          </a:prstGeom>
+          <a:ln w="6985">
+            <a:solidFill>
+              <a:srgbClr val="A24E78"/>
+            </a:solidFill>
+          </a:ln>
+          <a:effectLst/>
+        </p:spPr>
+        <p:style>
+          <a:lnRef idx="2">
+            <a:schemeClr val="accent1"/>
+          </a:lnRef>
+          <a:fillRef idx="0">
+            <a:schemeClr val="accent1"/>
+          </a:fillRef>
+          <a:effectRef idx="1">
+            <a:schemeClr val="accent1"/>
+          </a:effectRef>
+          <a:fontRef idx="minor">
+            <a:schemeClr val="tx1"/>
+          </a:fontRef>
+        </p:style>
+      </p:cxnSp>
+      <p:sp>
+        <p:nvSpPr>
+          <p:cNvPr id="783" name="TextBox 782"/>
+          <p:cNvSpPr txBox="1"/>
+          <p:nvPr/>
+        </p:nvSpPr>
+        <p:spPr>
+          <a:xfrm>
+            <a:off x="91440" y="1273544"/>
+            <a:ext cx="960120" cy="155448"/>
+          </a:xfrm>
+          <a:prstGeom prst="rect">
+            <a:avLst/>
+          </a:prstGeom>
+          <a:noFill/>
+          <a:effectLst/>
+        </p:spPr>
+        <p:txBody>
+          <a:bodyPr wrap="square" lIns="0" rIns="0" tIns="0" bIns="0" anchor="ctr">
+            <a:spAutoFit/>
+          </a:bodyPr>
+          <a:lstStyle/>
+          <a:p>
+            <a:pPr algn="r"/>
+            <a:r>
+              <a:rPr sz="750" b="1" i="0">
                 <a:solidFill>
                   <a:srgbClr val="5A8261"/>
                 </a:solidFill>
@@ -37341,16 +37521,52 @@
           </a:p>
         </p:txBody>
       </p:sp>
-      <p:sp>
-        <p:nvSpPr>
-          <p:cNvPr id="779" name="TextBox 778"/>
+      <p:cxnSp>
+        <p:nvCxnSpPr>
+          <p:cNvPr id="784" name="Connector 783"/>
+          <p:cNvCxnSpPr/>
+          <p:nvPr/>
+        </p:nvCxnSpPr>
+        <p:spPr>
+          <a:xfrm flipH="1" flipV="1">
+            <a:off x="1051560" y="1351268"/>
+            <a:ext cx="3086532" cy="2070199"/>
+          </a:xfrm>
+          <a:prstGeom prst="line">
+            <a:avLst/>
+          </a:prstGeom>
+          <a:ln w="6985">
+            <a:solidFill>
+              <a:srgbClr val="5A8261"/>
+            </a:solidFill>
+          </a:ln>
+          <a:effectLst/>
+        </p:spPr>
+        <p:style>
+          <a:lnRef idx="2">
+            <a:schemeClr val="accent1"/>
+          </a:lnRef>
+          <a:fillRef idx="0">
+            <a:schemeClr val="accent1"/>
+          </a:fillRef>
+          <a:effectRef idx="1">
+            <a:schemeClr val="accent1"/>
+          </a:effectRef>
+          <a:fontRef idx="minor">
+            <a:schemeClr val="tx1"/>
+          </a:fontRef>
+        </p:style>
+      </p:cxnSp>
+      <p:sp>
+        <p:nvSpPr>
+          <p:cNvPr id="785" name="TextBox 784"/>
           <p:cNvSpPr txBox="1"/>
           <p:nvPr/>
         </p:nvSpPr>
         <p:spPr>
           <a:xfrm>
-            <a:off x="1709799" y="3572337"/>
-            <a:ext cx="777240" cy="146304"/>
+            <a:off x="91440" y="1466321"/>
+            <a:ext cx="960120" cy="155448"/>
           </a:xfrm>
           <a:prstGeom prst="rect">
             <a:avLst/>
@@ -37366,7 +37582,655 @@
           <a:p>
             <a:pPr algn="r"/>
             <a:r>
-              <a:rPr sz="700" b="1" i="0">
+              <a:rPr sz="750" b="1" i="0">
+                <a:solidFill>
+                  <a:srgbClr val="118AB2"/>
+                </a:solidFill>
+                <a:latin typeface="Arial"/>
+              </a:rPr>
+              <a:t>CCL11</a:t>
+            </a:r>
+          </a:p>
+        </p:txBody>
+      </p:sp>
+      <p:cxnSp>
+        <p:nvCxnSpPr>
+          <p:cNvPr id="786" name="Connector 785"/>
+          <p:cNvCxnSpPr/>
+          <p:nvPr/>
+        </p:nvCxnSpPr>
+        <p:spPr>
+          <a:xfrm flipH="1" flipV="1">
+            <a:off x="1051560" y="1544045"/>
+            <a:ext cx="3647403" cy="1904851"/>
+          </a:xfrm>
+          <a:prstGeom prst="line">
+            <a:avLst/>
+          </a:prstGeom>
+          <a:ln w="6985">
+            <a:solidFill>
+              <a:srgbClr val="118AB2"/>
+            </a:solidFill>
+          </a:ln>
+          <a:effectLst/>
+        </p:spPr>
+        <p:style>
+          <a:lnRef idx="2">
+            <a:schemeClr val="accent1"/>
+          </a:lnRef>
+          <a:fillRef idx="0">
+            <a:schemeClr val="accent1"/>
+          </a:fillRef>
+          <a:effectRef idx="1">
+            <a:schemeClr val="accent1"/>
+          </a:effectRef>
+          <a:fontRef idx="minor">
+            <a:schemeClr val="tx1"/>
+          </a:fontRef>
+        </p:style>
+      </p:cxnSp>
+      <p:sp>
+        <p:nvSpPr>
+          <p:cNvPr id="787" name="TextBox 786"/>
+          <p:cNvSpPr txBox="1"/>
+          <p:nvPr/>
+        </p:nvSpPr>
+        <p:spPr>
+          <a:xfrm>
+            <a:off x="91440" y="1659098"/>
+            <a:ext cx="960120" cy="155448"/>
+          </a:xfrm>
+          <a:prstGeom prst="rect">
+            <a:avLst/>
+          </a:prstGeom>
+          <a:noFill/>
+          <a:effectLst/>
+        </p:spPr>
+        <p:txBody>
+          <a:bodyPr wrap="square" lIns="0" rIns="0" tIns="0" bIns="0" anchor="ctr">
+            <a:spAutoFit/>
+          </a:bodyPr>
+          <a:lstStyle/>
+          <a:p>
+            <a:pPr algn="r"/>
+            <a:r>
+              <a:rPr sz="750" b="1" i="0">
+                <a:solidFill>
+                  <a:srgbClr val="5A8261"/>
+                </a:solidFill>
+                <a:latin typeface="Arial"/>
+              </a:rPr>
+              <a:t>CACNA1H</a:t>
+            </a:r>
+          </a:p>
+        </p:txBody>
+      </p:sp>
+      <p:cxnSp>
+        <p:nvCxnSpPr>
+          <p:cNvPr id="788" name="Connector 787"/>
+          <p:cNvCxnSpPr/>
+          <p:nvPr/>
+        </p:nvCxnSpPr>
+        <p:spPr>
+          <a:xfrm flipH="1" flipV="1">
+            <a:off x="1051560" y="1736822"/>
+            <a:ext cx="3749861" cy="1747344"/>
+          </a:xfrm>
+          <a:prstGeom prst="line">
+            <a:avLst/>
+          </a:prstGeom>
+          <a:ln w="6985">
+            <a:solidFill>
+              <a:srgbClr val="5A8261"/>
+            </a:solidFill>
+          </a:ln>
+          <a:effectLst/>
+        </p:spPr>
+        <p:style>
+          <a:lnRef idx="2">
+            <a:schemeClr val="accent1"/>
+          </a:lnRef>
+          <a:fillRef idx="0">
+            <a:schemeClr val="accent1"/>
+          </a:fillRef>
+          <a:effectRef idx="1">
+            <a:schemeClr val="accent1"/>
+          </a:effectRef>
+          <a:fontRef idx="minor">
+            <a:schemeClr val="tx1"/>
+          </a:fontRef>
+        </p:style>
+      </p:cxnSp>
+      <p:sp>
+        <p:nvSpPr>
+          <p:cNvPr id="789" name="TextBox 788"/>
+          <p:cNvSpPr txBox="1"/>
+          <p:nvPr/>
+        </p:nvSpPr>
+        <p:spPr>
+          <a:xfrm>
+            <a:off x="91440" y="1851875"/>
+            <a:ext cx="960120" cy="155448"/>
+          </a:xfrm>
+          <a:prstGeom prst="rect">
+            <a:avLst/>
+          </a:prstGeom>
+          <a:noFill/>
+          <a:effectLst/>
+        </p:spPr>
+        <p:txBody>
+          <a:bodyPr wrap="square" lIns="0" rIns="0" tIns="0" bIns="0" anchor="ctr">
+            <a:spAutoFit/>
+          </a:bodyPr>
+          <a:lstStyle/>
+          <a:p>
+            <a:pPr algn="r"/>
+            <a:r>
+              <a:rPr sz="750" b="1" i="0">
+                <a:solidFill>
+                  <a:srgbClr val="5A8261"/>
+                </a:solidFill>
+                <a:latin typeface="Arial"/>
+              </a:rPr>
+              <a:t>SLIT3</a:t>
+            </a:r>
+          </a:p>
+        </p:txBody>
+      </p:sp>
+      <p:cxnSp>
+        <p:nvCxnSpPr>
+          <p:cNvPr id="790" name="Connector 789"/>
+          <p:cNvCxnSpPr/>
+          <p:nvPr/>
+        </p:nvCxnSpPr>
+        <p:spPr>
+          <a:xfrm flipH="1" flipV="1">
+            <a:off x="1051560" y="1929599"/>
+            <a:ext cx="3795253" cy="1579960"/>
+          </a:xfrm>
+          <a:prstGeom prst="line">
+            <a:avLst/>
+          </a:prstGeom>
+          <a:ln w="6985">
+            <a:solidFill>
+              <a:srgbClr val="5A8261"/>
+            </a:solidFill>
+          </a:ln>
+          <a:effectLst/>
+        </p:spPr>
+        <p:style>
+          <a:lnRef idx="2">
+            <a:schemeClr val="accent1"/>
+          </a:lnRef>
+          <a:fillRef idx="0">
+            <a:schemeClr val="accent1"/>
+          </a:fillRef>
+          <a:effectRef idx="1">
+            <a:schemeClr val="accent1"/>
+          </a:effectRef>
+          <a:fontRef idx="minor">
+            <a:schemeClr val="tx1"/>
+          </a:fontRef>
+        </p:style>
+      </p:cxnSp>
+      <p:sp>
+        <p:nvSpPr>
+          <p:cNvPr id="791" name="TextBox 790"/>
+          <p:cNvSpPr txBox="1"/>
+          <p:nvPr/>
+        </p:nvSpPr>
+        <p:spPr>
+          <a:xfrm>
+            <a:off x="91440" y="2044652"/>
+            <a:ext cx="960120" cy="155448"/>
+          </a:xfrm>
+          <a:prstGeom prst="rect">
+            <a:avLst/>
+          </a:prstGeom>
+          <a:noFill/>
+          <a:effectLst/>
+        </p:spPr>
+        <p:txBody>
+          <a:bodyPr wrap="square" lIns="0" rIns="0" tIns="0" bIns="0" anchor="ctr">
+            <a:spAutoFit/>
+          </a:bodyPr>
+          <a:lstStyle/>
+          <a:p>
+            <a:pPr algn="r"/>
+            <a:r>
+              <a:rPr sz="750" b="1" i="0">
+                <a:solidFill>
+                  <a:srgbClr val="118AB2"/>
+                </a:solidFill>
+                <a:latin typeface="Arial"/>
+              </a:rPr>
+              <a:t>PRSS23</a:t>
+            </a:r>
+          </a:p>
+        </p:txBody>
+      </p:sp>
+      <p:cxnSp>
+        <p:nvCxnSpPr>
+          <p:cNvPr id="792" name="Connector 791"/>
+          <p:cNvCxnSpPr/>
+          <p:nvPr/>
+        </p:nvCxnSpPr>
+        <p:spPr>
+          <a:xfrm flipH="1" flipV="1">
+            <a:off x="1051560" y="2122376"/>
+            <a:ext cx="4240882" cy="1454353"/>
+          </a:xfrm>
+          <a:prstGeom prst="line">
+            <a:avLst/>
+          </a:prstGeom>
+          <a:ln w="6985">
+            <a:solidFill>
+              <a:srgbClr val="118AB2"/>
+            </a:solidFill>
+          </a:ln>
+          <a:effectLst/>
+        </p:spPr>
+        <p:style>
+          <a:lnRef idx="2">
+            <a:schemeClr val="accent1"/>
+          </a:lnRef>
+          <a:fillRef idx="0">
+            <a:schemeClr val="accent1"/>
+          </a:fillRef>
+          <a:effectRef idx="1">
+            <a:schemeClr val="accent1"/>
+          </a:effectRef>
+          <a:fontRef idx="minor">
+            <a:schemeClr val="tx1"/>
+          </a:fontRef>
+        </p:style>
+      </p:cxnSp>
+      <p:sp>
+        <p:nvSpPr>
+          <p:cNvPr id="793" name="TextBox 792"/>
+          <p:cNvSpPr txBox="1"/>
+          <p:nvPr/>
+        </p:nvSpPr>
+        <p:spPr>
+          <a:xfrm>
+            <a:off x="91440" y="2237429"/>
+            <a:ext cx="960120" cy="155448"/>
+          </a:xfrm>
+          <a:prstGeom prst="rect">
+            <a:avLst/>
+          </a:prstGeom>
+          <a:noFill/>
+          <a:effectLst/>
+        </p:spPr>
+        <p:txBody>
+          <a:bodyPr wrap="square" lIns="0" rIns="0" tIns="0" bIns="0" anchor="ctr">
+            <a:spAutoFit/>
+          </a:bodyPr>
+          <a:lstStyle/>
+          <a:p>
+            <a:pPr algn="r"/>
+            <a:r>
+              <a:rPr sz="750" b="1" i="0">
+                <a:solidFill>
+                  <a:srgbClr val="A24E78"/>
+                </a:solidFill>
+                <a:latin typeface="Arial"/>
+              </a:rPr>
+              <a:t>SMAD7</a:t>
+            </a:r>
+          </a:p>
+        </p:txBody>
+      </p:sp>
+      <p:cxnSp>
+        <p:nvCxnSpPr>
+          <p:cNvPr id="794" name="Connector 793"/>
+          <p:cNvCxnSpPr/>
+          <p:nvPr/>
+        </p:nvCxnSpPr>
+        <p:spPr>
+          <a:xfrm flipH="1" flipV="1">
+            <a:off x="1051560" y="2315153"/>
+            <a:ext cx="4359855" cy="1262959"/>
+          </a:xfrm>
+          <a:prstGeom prst="line">
+            <a:avLst/>
+          </a:prstGeom>
+          <a:ln w="6985">
+            <a:solidFill>
+              <a:srgbClr val="A24E78"/>
+            </a:solidFill>
+          </a:ln>
+          <a:effectLst/>
+        </p:spPr>
+        <p:style>
+          <a:lnRef idx="2">
+            <a:schemeClr val="accent1"/>
+          </a:lnRef>
+          <a:fillRef idx="0">
+            <a:schemeClr val="accent1"/>
+          </a:fillRef>
+          <a:effectRef idx="1">
+            <a:schemeClr val="accent1"/>
+          </a:effectRef>
+          <a:fontRef idx="minor">
+            <a:schemeClr val="tx1"/>
+          </a:fontRef>
+        </p:style>
+      </p:cxnSp>
+      <p:sp>
+        <p:nvSpPr>
+          <p:cNvPr id="795" name="TextBox 794"/>
+          <p:cNvSpPr txBox="1"/>
+          <p:nvPr/>
+        </p:nvSpPr>
+        <p:spPr>
+          <a:xfrm>
+            <a:off x="91440" y="2430206"/>
+            <a:ext cx="960120" cy="155448"/>
+          </a:xfrm>
+          <a:prstGeom prst="rect">
+            <a:avLst/>
+          </a:prstGeom>
+          <a:noFill/>
+          <a:effectLst/>
+        </p:spPr>
+        <p:txBody>
+          <a:bodyPr wrap="square" lIns="0" rIns="0" tIns="0" bIns="0" anchor="ctr">
+            <a:spAutoFit/>
+          </a:bodyPr>
+          <a:lstStyle/>
+          <a:p>
+            <a:pPr algn="r"/>
+            <a:r>
+              <a:rPr sz="750" b="1" i="0">
+                <a:solidFill>
+                  <a:srgbClr val="118AB2"/>
+                </a:solidFill>
+                <a:latin typeface="Arial"/>
+              </a:rPr>
+              <a:t>PCDH7</a:t>
+            </a:r>
+          </a:p>
+        </p:txBody>
+      </p:sp>
+      <p:cxnSp>
+        <p:nvCxnSpPr>
+          <p:cNvPr id="796" name="Connector 795"/>
+          <p:cNvCxnSpPr/>
+          <p:nvPr/>
+        </p:nvCxnSpPr>
+        <p:spPr>
+          <a:xfrm flipH="1" flipV="1">
+            <a:off x="1051560" y="2507930"/>
+            <a:ext cx="3908703" cy="1115586"/>
+          </a:xfrm>
+          <a:prstGeom prst="line">
+            <a:avLst/>
+          </a:prstGeom>
+          <a:ln w="6985">
+            <a:solidFill>
+              <a:srgbClr val="118AB2"/>
+            </a:solidFill>
+          </a:ln>
+          <a:effectLst/>
+        </p:spPr>
+        <p:style>
+          <a:lnRef idx="2">
+            <a:schemeClr val="accent1"/>
+          </a:lnRef>
+          <a:fillRef idx="0">
+            <a:schemeClr val="accent1"/>
+          </a:fillRef>
+          <a:effectRef idx="1">
+            <a:schemeClr val="accent1"/>
+          </a:effectRef>
+          <a:fontRef idx="minor">
+            <a:schemeClr val="tx1"/>
+          </a:fontRef>
+        </p:style>
+      </p:cxnSp>
+      <p:sp>
+        <p:nvSpPr>
+          <p:cNvPr id="797" name="TextBox 796"/>
+          <p:cNvSpPr txBox="1"/>
+          <p:nvPr/>
+        </p:nvSpPr>
+        <p:spPr>
+          <a:xfrm>
+            <a:off x="91440" y="2622983"/>
+            <a:ext cx="960120" cy="155448"/>
+          </a:xfrm>
+          <a:prstGeom prst="rect">
+            <a:avLst/>
+          </a:prstGeom>
+          <a:noFill/>
+          <a:effectLst/>
+        </p:spPr>
+        <p:txBody>
+          <a:bodyPr wrap="square" lIns="0" rIns="0" tIns="0" bIns="0" anchor="ctr">
+            <a:spAutoFit/>
+          </a:bodyPr>
+          <a:lstStyle/>
+          <a:p>
+            <a:pPr algn="r"/>
+            <a:r>
+              <a:rPr sz="750" b="1" i="0">
+                <a:solidFill>
+                  <a:srgbClr val="5A8261"/>
+                </a:solidFill>
+                <a:latin typeface="Arial"/>
+              </a:rPr>
+              <a:t>SFRP1</a:t>
+            </a:r>
+          </a:p>
+        </p:txBody>
+      </p:sp>
+      <p:cxnSp>
+        <p:nvCxnSpPr>
+          <p:cNvPr id="798" name="Connector 797"/>
+          <p:cNvCxnSpPr/>
+          <p:nvPr/>
+        </p:nvCxnSpPr>
+        <p:spPr>
+          <a:xfrm flipH="1" flipV="1">
+            <a:off x="1051560" y="2700707"/>
+            <a:ext cx="3624636" cy="964914"/>
+          </a:xfrm>
+          <a:prstGeom prst="line">
+            <a:avLst/>
+          </a:prstGeom>
+          <a:ln w="6985">
+            <a:solidFill>
+              <a:srgbClr val="5A8261"/>
+            </a:solidFill>
+          </a:ln>
+          <a:effectLst/>
+        </p:spPr>
+        <p:style>
+          <a:lnRef idx="2">
+            <a:schemeClr val="accent1"/>
+          </a:lnRef>
+          <a:fillRef idx="0">
+            <a:schemeClr val="accent1"/>
+          </a:fillRef>
+          <a:effectRef idx="1">
+            <a:schemeClr val="accent1"/>
+          </a:effectRef>
+          <a:fontRef idx="minor">
+            <a:schemeClr val="tx1"/>
+          </a:fontRef>
+        </p:style>
+      </p:cxnSp>
+      <p:sp>
+        <p:nvSpPr>
+          <p:cNvPr id="799" name="TextBox 798"/>
+          <p:cNvSpPr txBox="1"/>
+          <p:nvPr/>
+        </p:nvSpPr>
+        <p:spPr>
+          <a:xfrm>
+            <a:off x="91440" y="2815760"/>
+            <a:ext cx="960120" cy="155448"/>
+          </a:xfrm>
+          <a:prstGeom prst="rect">
+            <a:avLst/>
+          </a:prstGeom>
+          <a:noFill/>
+          <a:effectLst/>
+        </p:spPr>
+        <p:txBody>
+          <a:bodyPr wrap="square" lIns="0" rIns="0" tIns="0" bIns="0" anchor="ctr">
+            <a:spAutoFit/>
+          </a:bodyPr>
+          <a:lstStyle/>
+          <a:p>
+            <a:pPr algn="r"/>
+            <a:r>
+              <a:rPr sz="750" b="1" i="0">
+                <a:solidFill>
+                  <a:srgbClr val="118AB2"/>
+                </a:solidFill>
+                <a:latin typeface="Arial"/>
+              </a:rPr>
+              <a:t>CCL24</a:t>
+            </a:r>
+          </a:p>
+        </p:txBody>
+      </p:sp>
+      <p:cxnSp>
+        <p:nvCxnSpPr>
+          <p:cNvPr id="800" name="Connector 799"/>
+          <p:cNvCxnSpPr/>
+          <p:nvPr/>
+        </p:nvCxnSpPr>
+        <p:spPr>
+          <a:xfrm flipH="1" flipV="1">
+            <a:off x="1051560" y="2893484"/>
+            <a:ext cx="4056125" cy="789322"/>
+          </a:xfrm>
+          <a:prstGeom prst="line">
+            <a:avLst/>
+          </a:prstGeom>
+          <a:ln w="6985">
+            <a:solidFill>
+              <a:srgbClr val="118AB2"/>
+            </a:solidFill>
+          </a:ln>
+          <a:effectLst/>
+        </p:spPr>
+        <p:style>
+          <a:lnRef idx="2">
+            <a:schemeClr val="accent1"/>
+          </a:lnRef>
+          <a:fillRef idx="0">
+            <a:schemeClr val="accent1"/>
+          </a:fillRef>
+          <a:effectRef idx="1">
+            <a:schemeClr val="accent1"/>
+          </a:effectRef>
+          <a:fontRef idx="minor">
+            <a:schemeClr val="tx1"/>
+          </a:fontRef>
+        </p:style>
+      </p:cxnSp>
+      <p:sp>
+        <p:nvSpPr>
+          <p:cNvPr id="801" name="TextBox 800"/>
+          <p:cNvSpPr txBox="1"/>
+          <p:nvPr/>
+        </p:nvSpPr>
+        <p:spPr>
+          <a:xfrm>
+            <a:off x="91440" y="3008537"/>
+            <a:ext cx="960120" cy="155448"/>
+          </a:xfrm>
+          <a:prstGeom prst="rect">
+            <a:avLst/>
+          </a:prstGeom>
+          <a:noFill/>
+          <a:effectLst/>
+        </p:spPr>
+        <p:txBody>
+          <a:bodyPr wrap="square" lIns="0" rIns="0" tIns="0" bIns="0" anchor="ctr">
+            <a:spAutoFit/>
+          </a:bodyPr>
+          <a:lstStyle/>
+          <a:p>
+            <a:pPr algn="r"/>
+            <a:r>
+              <a:rPr sz="750" b="1" i="0">
+                <a:solidFill>
+                  <a:srgbClr val="118AB2"/>
+                </a:solidFill>
+                <a:latin typeface="Arial"/>
+              </a:rPr>
+              <a:t>NMUR1</a:t>
+            </a:r>
+          </a:p>
+        </p:txBody>
+      </p:sp>
+      <p:cxnSp>
+        <p:nvCxnSpPr>
+          <p:cNvPr id="802" name="Connector 801"/>
+          <p:cNvCxnSpPr/>
+          <p:nvPr/>
+        </p:nvCxnSpPr>
+        <p:spPr>
+          <a:xfrm flipH="1" flipV="1">
+            <a:off x="1051560" y="3086261"/>
+            <a:ext cx="4065460" cy="612912"/>
+          </a:xfrm>
+          <a:prstGeom prst="line">
+            <a:avLst/>
+          </a:prstGeom>
+          <a:ln w="6985">
+            <a:solidFill>
+              <a:srgbClr val="118AB2"/>
+            </a:solidFill>
+          </a:ln>
+          <a:effectLst/>
+        </p:spPr>
+        <p:style>
+          <a:lnRef idx="2">
+            <a:schemeClr val="accent1"/>
+          </a:lnRef>
+          <a:fillRef idx="0">
+            <a:schemeClr val="accent1"/>
+          </a:fillRef>
+          <a:effectRef idx="1">
+            <a:schemeClr val="accent1"/>
+          </a:effectRef>
+          <a:fontRef idx="minor">
+            <a:schemeClr val="tx1"/>
+          </a:fontRef>
+        </p:style>
+      </p:cxnSp>
+      <p:sp>
+        <p:nvSpPr>
+          <p:cNvPr id="803" name="TextBox 802"/>
+          <p:cNvSpPr txBox="1"/>
+          <p:nvPr/>
+        </p:nvSpPr>
+        <p:spPr>
+          <a:xfrm>
+            <a:off x="91440" y="3201314"/>
+            <a:ext cx="960120" cy="155448"/>
+          </a:xfrm>
+          <a:prstGeom prst="rect">
+            <a:avLst/>
+          </a:prstGeom>
+          <a:noFill/>
+          <a:effectLst/>
+        </p:spPr>
+        <p:txBody>
+          <a:bodyPr wrap="square" lIns="0" rIns="0" tIns="0" bIns="0" anchor="ctr">
+            <a:spAutoFit/>
+          </a:bodyPr>
+          <a:lstStyle/>
+          <a:p>
+            <a:pPr algn="r"/>
+            <a:r>
+              <a:rPr sz="750" b="1" i="0">
                 <a:solidFill>
                   <a:srgbClr val="A24E78"/>
                 </a:solidFill>
@@ -37377,16 +38241,52 @@
           </a:p>
         </p:txBody>
       </p:sp>
-      <p:sp>
-        <p:nvSpPr>
-          <p:cNvPr id="780" name="TextBox 779"/>
+      <p:cxnSp>
+        <p:nvCxnSpPr>
+          <p:cNvPr id="804" name="Connector 803"/>
+          <p:cNvCxnSpPr/>
+          <p:nvPr/>
+        </p:nvCxnSpPr>
+        <p:spPr>
+          <a:xfrm flipH="1" flipV="1">
+            <a:off x="1051560" y="3279038"/>
+            <a:ext cx="2898519" cy="433695"/>
+          </a:xfrm>
+          <a:prstGeom prst="line">
+            <a:avLst/>
+          </a:prstGeom>
+          <a:ln w="6985">
+            <a:solidFill>
+              <a:srgbClr val="A24E78"/>
+            </a:solidFill>
+          </a:ln>
+          <a:effectLst/>
+        </p:spPr>
+        <p:style>
+          <a:lnRef idx="2">
+            <a:schemeClr val="accent1"/>
+          </a:lnRef>
+          <a:fillRef idx="0">
+            <a:schemeClr val="accent1"/>
+          </a:fillRef>
+          <a:effectRef idx="1">
+            <a:schemeClr val="accent1"/>
+          </a:effectRef>
+          <a:fontRef idx="minor">
+            <a:schemeClr val="tx1"/>
+          </a:fontRef>
+        </p:style>
+      </p:cxnSp>
+      <p:sp>
+        <p:nvSpPr>
+          <p:cNvPr id="805" name="TextBox 804"/>
           <p:cNvSpPr txBox="1"/>
           <p:nvPr/>
         </p:nvSpPr>
         <p:spPr>
           <a:xfrm>
-            <a:off x="6014868" y="3314558"/>
-            <a:ext cx="777240" cy="146304"/>
+            <a:off x="91440" y="3394091"/>
+            <a:ext cx="960120" cy="155448"/>
           </a:xfrm>
           <a:prstGeom prst="rect">
             <a:avLst/>
@@ -37400,9 +38300,153 @@
           </a:bodyPr>
           <a:lstStyle/>
           <a:p>
+            <a:pPr algn="r"/>
+            <a:r>
+              <a:rPr sz="750" b="1" i="0">
+                <a:solidFill>
+                  <a:srgbClr val="118AB2"/>
+                </a:solidFill>
+                <a:latin typeface="Arial"/>
+              </a:rPr>
+              <a:t>CX3CL1</a:t>
+            </a:r>
+          </a:p>
+        </p:txBody>
+      </p:sp>
+      <p:cxnSp>
+        <p:nvCxnSpPr>
+          <p:cNvPr id="806" name="Connector 805"/>
+          <p:cNvCxnSpPr/>
+          <p:nvPr/>
+        </p:nvCxnSpPr>
+        <p:spPr>
+          <a:xfrm flipH="1" flipV="1">
+            <a:off x="1051560" y="3471815"/>
+            <a:ext cx="4197453" cy="269629"/>
+          </a:xfrm>
+          <a:prstGeom prst="line">
+            <a:avLst/>
+          </a:prstGeom>
+          <a:ln w="6985">
+            <a:solidFill>
+              <a:srgbClr val="118AB2"/>
+            </a:solidFill>
+          </a:ln>
+          <a:effectLst/>
+        </p:spPr>
+        <p:style>
+          <a:lnRef idx="2">
+            <a:schemeClr val="accent1"/>
+          </a:lnRef>
+          <a:fillRef idx="0">
+            <a:schemeClr val="accent1"/>
+          </a:fillRef>
+          <a:effectRef idx="1">
+            <a:schemeClr val="accent1"/>
+          </a:effectRef>
+          <a:fontRef idx="minor">
+            <a:schemeClr val="tx1"/>
+          </a:fontRef>
+        </p:style>
+      </p:cxnSp>
+      <p:sp>
+        <p:nvSpPr>
+          <p:cNvPr id="807" name="TextBox 806"/>
+          <p:cNvSpPr txBox="1"/>
+          <p:nvPr/>
+        </p:nvSpPr>
+        <p:spPr>
+          <a:xfrm>
+            <a:off x="91440" y="3586868"/>
+            <a:ext cx="960120" cy="155448"/>
+          </a:xfrm>
+          <a:prstGeom prst="rect">
+            <a:avLst/>
+          </a:prstGeom>
+          <a:noFill/>
+          <a:effectLst/>
+        </p:spPr>
+        <p:txBody>
+          <a:bodyPr wrap="square" lIns="0" rIns="0" tIns="0" bIns="0" anchor="ctr">
+            <a:spAutoFit/>
+          </a:bodyPr>
+          <a:lstStyle/>
+          <a:p>
+            <a:pPr algn="r"/>
+            <a:r>
+              <a:rPr sz="750" b="1" i="0">
+                <a:solidFill>
+                  <a:srgbClr val="A24E78"/>
+                </a:solidFill>
+                <a:latin typeface="Arial"/>
+              </a:rPr>
+              <a:t>NME3</a:t>
+            </a:r>
+          </a:p>
+        </p:txBody>
+      </p:sp>
+      <p:cxnSp>
+        <p:nvCxnSpPr>
+          <p:cNvPr id="808" name="Connector 807"/>
+          <p:cNvCxnSpPr/>
+          <p:nvPr/>
+        </p:nvCxnSpPr>
+        <p:spPr>
+          <a:xfrm flipH="1" flipV="1">
+            <a:off x="1051560" y="3664592"/>
+            <a:ext cx="4544169" cy="95582"/>
+          </a:xfrm>
+          <a:prstGeom prst="line">
+            <a:avLst/>
+          </a:prstGeom>
+          <a:ln w="6985">
+            <a:solidFill>
+              <a:srgbClr val="A24E78"/>
+            </a:solidFill>
+          </a:ln>
+          <a:effectLst/>
+        </p:spPr>
+        <p:style>
+          <a:lnRef idx="2">
+            <a:schemeClr val="accent1"/>
+          </a:lnRef>
+          <a:fillRef idx="0">
+            <a:schemeClr val="accent1"/>
+          </a:fillRef>
+          <a:effectRef idx="1">
+            <a:schemeClr val="accent1"/>
+          </a:effectRef>
+          <a:fontRef idx="minor">
+            <a:schemeClr val="tx1"/>
+          </a:fontRef>
+        </p:style>
+      </p:cxnSp>
+      <p:sp>
+        <p:nvSpPr>
+          <p:cNvPr id="809" name="TextBox 808"/>
+          <p:cNvSpPr txBox="1"/>
+          <p:nvPr/>
+        </p:nvSpPr>
+        <p:spPr>
+          <a:xfrm>
+            <a:off x="10378440" y="695212"/>
+            <a:ext cx="960120" cy="155448"/>
+          </a:xfrm>
+          <a:prstGeom prst="rect">
+            <a:avLst/>
+          </a:prstGeom>
+          <a:noFill/>
+          <a:effectLst/>
+        </p:spPr>
+        <p:txBody>
+          <a:bodyPr wrap="square" lIns="0" rIns="0" tIns="0" bIns="0" anchor="ctr">
+            <a:spAutoFit/>
+          </a:bodyPr>
+          <a:lstStyle/>
+          <a:p>
             <a:pPr algn="l"/>
             <a:r>
-              <a:rPr sz="700" b="1" i="0">
+              <a:rPr sz="750" b="1" i="0">
                 <a:solidFill>
                   <a:srgbClr val="5A8261"/>
                 </a:solidFill>
@@ -37413,16 +38457,52 @@
           </a:p>
         </p:txBody>
       </p:sp>
-      <p:sp>
-        <p:nvSpPr>
-          <p:cNvPr id="781" name="TextBox 780"/>
+      <p:cxnSp>
+        <p:nvCxnSpPr>
+          <p:cNvPr id="810" name="Connector 809"/>
+          <p:cNvCxnSpPr/>
+          <p:nvPr/>
+        </p:nvCxnSpPr>
+        <p:spPr>
+          <a:xfrm flipV="1">
+            <a:off x="7295028" y="772936"/>
+            <a:ext cx="3083412" cy="2699972"/>
+          </a:xfrm>
+          <a:prstGeom prst="line">
+            <a:avLst/>
+          </a:prstGeom>
+          <a:ln w="6985">
+            <a:solidFill>
+              <a:srgbClr val="5A8261"/>
+            </a:solidFill>
+          </a:ln>
+          <a:effectLst/>
+        </p:spPr>
+        <p:style>
+          <a:lnRef idx="2">
+            <a:schemeClr val="accent1"/>
+          </a:lnRef>
+          <a:fillRef idx="0">
+            <a:schemeClr val="accent1"/>
+          </a:fillRef>
+          <a:effectRef idx="1">
+            <a:schemeClr val="accent1"/>
+          </a:effectRef>
+          <a:fontRef idx="minor">
+            <a:schemeClr val="tx1"/>
+          </a:fontRef>
+        </p:style>
+      </p:cxnSp>
+      <p:sp>
+        <p:nvSpPr>
+          <p:cNvPr id="811" name="TextBox 810"/>
           <p:cNvSpPr txBox="1"/>
           <p:nvPr/>
         </p:nvSpPr>
         <p:spPr>
           <a:xfrm>
-            <a:off x="2679293" y="2885791"/>
-            <a:ext cx="777240" cy="146304"/>
+            <a:off x="10378440" y="1273544"/>
+            <a:ext cx="960120" cy="155448"/>
           </a:xfrm>
           <a:prstGeom prst="rect">
             <a:avLst/>
@@ -37436,29 +38516,137 @@
           </a:bodyPr>
           <a:lstStyle/>
           <a:p>
-            <a:pPr algn="r"/>
+            <a:pPr algn="l"/>
             <a:r>
-              <a:rPr sz="700" b="1" i="0">
+              <a:rPr sz="750" b="1" i="0">
+                <a:solidFill>
+                  <a:srgbClr val="E39A1E"/>
+                </a:solidFill>
+                <a:latin typeface="Arial"/>
+              </a:rPr>
+              <a:t>DNMT1</a:t>
+            </a:r>
+          </a:p>
+        </p:txBody>
+      </p:sp>
+      <p:cxnSp>
+        <p:nvCxnSpPr>
+          <p:cNvPr id="812" name="Connector 811"/>
+          <p:cNvCxnSpPr/>
+          <p:nvPr/>
+        </p:nvCxnSpPr>
+        <p:spPr>
+          <a:xfrm flipV="1">
+            <a:off x="6376033" y="1351268"/>
+            <a:ext cx="4002407" cy="2339599"/>
+          </a:xfrm>
+          <a:prstGeom prst="line">
+            <a:avLst/>
+          </a:prstGeom>
+          <a:ln w="6985">
+            <a:solidFill>
+              <a:srgbClr val="E39A1E"/>
+            </a:solidFill>
+          </a:ln>
+          <a:effectLst/>
+        </p:spPr>
+        <p:style>
+          <a:lnRef idx="2">
+            <a:schemeClr val="accent1"/>
+          </a:lnRef>
+          <a:fillRef idx="0">
+            <a:schemeClr val="accent1"/>
+          </a:fillRef>
+          <a:effectRef idx="1">
+            <a:schemeClr val="accent1"/>
+          </a:effectRef>
+          <a:fontRef idx="minor">
+            <a:schemeClr val="tx1"/>
+          </a:fontRef>
+        </p:style>
+      </p:cxnSp>
+      <p:sp>
+        <p:nvSpPr>
+          <p:cNvPr id="813" name="TextBox 812"/>
+          <p:cNvSpPr txBox="1"/>
+          <p:nvPr/>
+        </p:nvSpPr>
+        <p:spPr>
+          <a:xfrm>
+            <a:off x="10378440" y="1851875"/>
+            <a:ext cx="960120" cy="155448"/>
+          </a:xfrm>
+          <a:prstGeom prst="rect">
+            <a:avLst/>
+          </a:prstGeom>
+          <a:noFill/>
+          <a:effectLst/>
+        </p:spPr>
+        <p:txBody>
+          <a:bodyPr wrap="square" lIns="0" rIns="0" tIns="0" bIns="0" anchor="ctr">
+            <a:spAutoFit/>
+          </a:bodyPr>
+          <a:lstStyle/>
+          <a:p>
+            <a:pPr algn="l"/>
+            <a:r>
+              <a:rPr sz="750" b="1" i="0">
                 <a:solidFill>
                   <a:srgbClr val="A24E78"/>
                 </a:solidFill>
                 <a:latin typeface="Arial"/>
               </a:rPr>
-              <a:t>GPX3</a:t>
+              <a:t>SUPT5H</a:t>
             </a:r>
           </a:p>
         </p:txBody>
       </p:sp>
-      <p:sp>
-        <p:nvSpPr>
-          <p:cNvPr id="782" name="TextBox 781"/>
+      <p:cxnSp>
+        <p:nvCxnSpPr>
+          <p:cNvPr id="814" name="Connector 813"/>
+          <p:cNvCxnSpPr/>
+          <p:nvPr/>
+        </p:nvCxnSpPr>
+        <p:spPr>
+          <a:xfrm flipV="1">
+            <a:off x="6097727" y="1929599"/>
+            <a:ext cx="4280713" cy="1761837"/>
+          </a:xfrm>
+          <a:prstGeom prst="line">
+            <a:avLst/>
+          </a:prstGeom>
+          <a:ln w="6985">
+            <a:solidFill>
+              <a:srgbClr val="A24E78"/>
+            </a:solidFill>
+          </a:ln>
+          <a:effectLst/>
+        </p:spPr>
+        <p:style>
+          <a:lnRef idx="2">
+            <a:schemeClr val="accent1"/>
+          </a:lnRef>
+          <a:fillRef idx="0">
+            <a:schemeClr val="accent1"/>
+          </a:fillRef>
+          <a:effectRef idx="1">
+            <a:schemeClr val="accent1"/>
+          </a:effectRef>
+          <a:fontRef idx="minor">
+            <a:schemeClr val="tx1"/>
+          </a:fontRef>
+        </p:style>
+      </p:cxnSp>
+      <p:sp>
+        <p:nvSpPr>
+          <p:cNvPr id="815" name="TextBox 814"/>
           <p:cNvSpPr txBox="1"/>
           <p:nvPr/>
         </p:nvSpPr>
         <p:spPr>
           <a:xfrm>
-            <a:off x="2458683" y="3300802"/>
-            <a:ext cx="777240" cy="146304"/>
+            <a:off x="10378440" y="2430206"/>
+            <a:ext cx="960120" cy="155448"/>
           </a:xfrm>
           <a:prstGeom prst="rect">
             <a:avLst/>
@@ -37472,29 +38660,65 @@
           </a:bodyPr>
           <a:lstStyle/>
           <a:p>
-            <a:pPr algn="r"/>
+            <a:pPr algn="l"/>
             <a:r>
-              <a:rPr sz="700" b="1" i="0">
+              <a:rPr sz="750" b="1" i="0">
                 <a:solidFill>
                   <a:srgbClr val="118AB2"/>
                 </a:solidFill>
                 <a:latin typeface="Arial"/>
               </a:rPr>
-              <a:t>CCL11</a:t>
+              <a:t>PUS1</a:t>
             </a:r>
           </a:p>
         </p:txBody>
       </p:sp>
-      <p:sp>
-        <p:nvSpPr>
-          <p:cNvPr id="783" name="TextBox 782"/>
+      <p:cxnSp>
+        <p:nvCxnSpPr>
+          <p:cNvPr id="816" name="Connector 815"/>
+          <p:cNvCxnSpPr/>
+          <p:nvPr/>
+        </p:nvCxnSpPr>
+        <p:spPr>
+          <a:xfrm flipV="1">
+            <a:off x="6274599" y="2507930"/>
+            <a:ext cx="4103841" cy="1225984"/>
+          </a:xfrm>
+          <a:prstGeom prst="line">
+            <a:avLst/>
+          </a:prstGeom>
+          <a:ln w="6985">
+            <a:solidFill>
+              <a:srgbClr val="118AB2"/>
+            </a:solidFill>
+          </a:ln>
+          <a:effectLst/>
+        </p:spPr>
+        <p:style>
+          <a:lnRef idx="2">
+            <a:schemeClr val="accent1"/>
+          </a:lnRef>
+          <a:fillRef idx="0">
+            <a:schemeClr val="accent1"/>
+          </a:fillRef>
+          <a:effectRef idx="1">
+            <a:schemeClr val="accent1"/>
+          </a:effectRef>
+          <a:fontRef idx="minor">
+            <a:schemeClr val="tx1"/>
+          </a:fontRef>
+        </p:style>
+      </p:cxnSp>
+      <p:sp>
+        <p:nvSpPr>
+          <p:cNvPr id="817" name="TextBox 816"/>
           <p:cNvSpPr txBox="1"/>
           <p:nvPr/>
         </p:nvSpPr>
         <p:spPr>
           <a:xfrm>
-            <a:off x="2561141" y="3337848"/>
-            <a:ext cx="777240" cy="146304"/>
+            <a:off x="10378440" y="3008537"/>
+            <a:ext cx="960120" cy="155448"/>
           </a:xfrm>
           <a:prstGeom prst="rect">
             <a:avLst/>
@@ -37508,29 +38732,65 @@
           </a:bodyPr>
           <a:lstStyle/>
           <a:p>
-            <a:pPr algn="r"/>
+            <a:pPr algn="l"/>
             <a:r>
-              <a:rPr sz="700" b="1" i="0">
+              <a:rPr sz="750" b="1" i="0">
                 <a:solidFill>
                   <a:srgbClr val="5A8261"/>
                 </a:solidFill>
                 <a:latin typeface="Arial"/>
               </a:rPr>
-              <a:t>CACNA1H</a:t>
+              <a:t>AKT2</a:t>
             </a:r>
           </a:p>
         </p:txBody>
       </p:sp>
-      <p:sp>
-        <p:nvSpPr>
-          <p:cNvPr id="784" name="TextBox 783"/>
+      <p:cxnSp>
+        <p:nvCxnSpPr>
+          <p:cNvPr id="818" name="Connector 817"/>
+          <p:cNvCxnSpPr/>
+          <p:nvPr/>
+        </p:nvCxnSpPr>
+        <p:spPr>
+          <a:xfrm flipV="1">
+            <a:off x="6140168" y="3086261"/>
+            <a:ext cx="4238272" cy="664965"/>
+          </a:xfrm>
+          <a:prstGeom prst="line">
+            <a:avLst/>
+          </a:prstGeom>
+          <a:ln w="6985">
+            <a:solidFill>
+              <a:srgbClr val="5A8261"/>
+            </a:solidFill>
+          </a:ln>
+          <a:effectLst/>
+        </p:spPr>
+        <p:style>
+          <a:lnRef idx="2">
+            <a:schemeClr val="accent1"/>
+          </a:lnRef>
+          <a:fillRef idx="0">
+            <a:schemeClr val="accent1"/>
+          </a:fillRef>
+          <a:effectRef idx="1">
+            <a:schemeClr val="accent1"/>
+          </a:effectRef>
+          <a:fontRef idx="minor">
+            <a:schemeClr val="tx1"/>
+          </a:fontRef>
+        </p:style>
+      </p:cxnSp>
+      <p:sp>
+        <p:nvSpPr>
+          <p:cNvPr id="819" name="TextBox 818"/>
           <p:cNvSpPr txBox="1"/>
           <p:nvPr/>
         </p:nvSpPr>
         <p:spPr>
           <a:xfrm>
-            <a:off x="2435916" y="3479202"/>
-            <a:ext cx="777240" cy="146304"/>
+            <a:off x="10378440" y="3586868"/>
+            <a:ext cx="960120" cy="155448"/>
           </a:xfrm>
           <a:prstGeom prst="rect">
             <a:avLst/>
@@ -37544,280 +38804,64 @@
           </a:bodyPr>
           <a:lstStyle/>
           <a:p>
-            <a:pPr algn="r"/>
+            <a:pPr algn="l"/>
             <a:r>
-              <a:rPr sz="700" b="1" i="0">
-                <a:solidFill>
-                  <a:srgbClr val="5A8261"/>
-                </a:solidFill>
-                <a:latin typeface="Arial"/>
-              </a:rPr>
-              <a:t>SFRP1</a:t>
-            </a:r>
-          </a:p>
-        </p:txBody>
-      </p:sp>
-      <p:sp>
-        <p:nvSpPr>
-          <p:cNvPr id="785" name="TextBox 784"/>
-          <p:cNvSpPr txBox="1"/>
-          <p:nvPr/>
-        </p:nvSpPr>
-        <p:spPr>
-          <a:xfrm>
-            <a:off x="2606533" y="3326740"/>
-            <a:ext cx="777240" cy="146304"/>
-          </a:xfrm>
-          <a:prstGeom prst="rect">
-            <a:avLst/>
-          </a:prstGeom>
-          <a:noFill/>
-          <a:effectLst/>
-        </p:spPr>
-        <p:txBody>
-          <a:bodyPr wrap="square" lIns="0" rIns="0" tIns="0" bIns="0" anchor="ctr">
-            <a:spAutoFit/>
-          </a:bodyPr>
-          <a:lstStyle/>
-          <a:p>
-            <a:pPr algn="r"/>
-            <a:r>
-              <a:rPr sz="700" b="1" i="0">
-                <a:solidFill>
-                  <a:srgbClr val="5A8261"/>
-                </a:solidFill>
-                <a:latin typeface="Arial"/>
-              </a:rPr>
-              <a:t>SLIT3</a:t>
-            </a:r>
-          </a:p>
-        </p:txBody>
-      </p:sp>
-      <p:sp>
-        <p:nvSpPr>
-          <p:cNvPr id="786" name="TextBox 785"/>
-          <p:cNvSpPr txBox="1"/>
-          <p:nvPr/>
-        </p:nvSpPr>
-        <p:spPr>
-          <a:xfrm>
-            <a:off x="2719983" y="3533364"/>
-            <a:ext cx="777240" cy="146304"/>
-          </a:xfrm>
-          <a:prstGeom prst="rect">
-            <a:avLst/>
-          </a:prstGeom>
-          <a:noFill/>
-          <a:effectLst/>
-        </p:spPr>
-        <p:txBody>
-          <a:bodyPr wrap="square" lIns="0" rIns="0" tIns="0" bIns="0" anchor="ctr">
-            <a:spAutoFit/>
-          </a:bodyPr>
-          <a:lstStyle/>
-          <a:p>
-            <a:pPr algn="r"/>
-            <a:r>
-              <a:rPr sz="700" b="1" i="0">
-                <a:solidFill>
-                  <a:srgbClr val="118AB2"/>
-                </a:solidFill>
-                <a:latin typeface="Arial"/>
-              </a:rPr>
-              <a:t>PCDH7</a:t>
-            </a:r>
-          </a:p>
-        </p:txBody>
-      </p:sp>
-      <p:sp>
-        <p:nvSpPr>
-          <p:cNvPr id="787" name="TextBox 786"/>
-          <p:cNvSpPr txBox="1"/>
-          <p:nvPr/>
-        </p:nvSpPr>
-        <p:spPr>
-          <a:xfrm>
-            <a:off x="2867405" y="3556738"/>
-            <a:ext cx="777240" cy="146304"/>
-          </a:xfrm>
-          <a:prstGeom prst="rect">
-            <a:avLst/>
-          </a:prstGeom>
-          <a:noFill/>
-          <a:effectLst/>
-        </p:spPr>
-        <p:txBody>
-          <a:bodyPr wrap="square" lIns="0" rIns="0" tIns="0" bIns="0" anchor="ctr">
-            <a:spAutoFit/>
-          </a:bodyPr>
-          <a:lstStyle/>
-          <a:p>
-            <a:pPr algn="r"/>
-            <a:r>
-              <a:rPr sz="700" b="1" i="0">
-                <a:solidFill>
-                  <a:srgbClr val="118AB2"/>
-                </a:solidFill>
-                <a:latin typeface="Arial"/>
-              </a:rPr>
-              <a:t>CCL24</a:t>
-            </a:r>
-          </a:p>
-        </p:txBody>
-      </p:sp>
-      <p:sp>
-        <p:nvSpPr>
-          <p:cNvPr id="788" name="TextBox 787"/>
-          <p:cNvSpPr txBox="1"/>
-          <p:nvPr/>
-        </p:nvSpPr>
-        <p:spPr>
-          <a:xfrm>
-            <a:off x="2876740" y="3530979"/>
-            <a:ext cx="777240" cy="146304"/>
-          </a:xfrm>
-          <a:prstGeom prst="rect">
-            <a:avLst/>
-          </a:prstGeom>
-          <a:noFill/>
-          <a:effectLst/>
-        </p:spPr>
-        <p:txBody>
-          <a:bodyPr wrap="square" lIns="0" rIns="0" tIns="0" bIns="0" anchor="ctr">
-            <a:spAutoFit/>
-          </a:bodyPr>
-          <a:lstStyle/>
-          <a:p>
-            <a:pPr algn="r"/>
-            <a:r>
-              <a:rPr sz="700" b="1" i="0">
-                <a:solidFill>
-                  <a:srgbClr val="118AB2"/>
-                </a:solidFill>
-                <a:latin typeface="Arial"/>
-              </a:rPr>
-              <a:t>NMUR1</a:t>
-            </a:r>
-          </a:p>
-        </p:txBody>
-      </p:sp>
-      <p:sp>
-        <p:nvSpPr>
-          <p:cNvPr id="789" name="TextBox 788"/>
-          <p:cNvSpPr txBox="1"/>
-          <p:nvPr/>
-        </p:nvSpPr>
-        <p:spPr>
-          <a:xfrm>
-            <a:off x="3052162" y="3431129"/>
-            <a:ext cx="777240" cy="146304"/>
-          </a:xfrm>
-          <a:prstGeom prst="rect">
-            <a:avLst/>
-          </a:prstGeom>
-          <a:noFill/>
-          <a:effectLst/>
-        </p:spPr>
-        <p:txBody>
-          <a:bodyPr wrap="square" lIns="0" rIns="0" tIns="0" bIns="0" anchor="ctr">
-            <a:spAutoFit/>
-          </a:bodyPr>
-          <a:lstStyle/>
-          <a:p>
-            <a:pPr algn="r"/>
-            <a:r>
-              <a:rPr sz="700" b="1" i="0">
-                <a:solidFill>
-                  <a:srgbClr val="118AB2"/>
-                </a:solidFill>
-                <a:latin typeface="Arial"/>
-              </a:rPr>
-              <a:t>PRSS23</a:t>
-            </a:r>
-          </a:p>
-        </p:txBody>
-      </p:sp>
-      <p:sp>
-        <p:nvSpPr>
-          <p:cNvPr id="790" name="TextBox 789"/>
-          <p:cNvSpPr txBox="1"/>
-          <p:nvPr/>
-        </p:nvSpPr>
-        <p:spPr>
-          <a:xfrm>
-            <a:off x="3008733" y="3646335"/>
-            <a:ext cx="777240" cy="146304"/>
-          </a:xfrm>
-          <a:prstGeom prst="rect">
-            <a:avLst/>
-          </a:prstGeom>
-          <a:noFill/>
-          <a:effectLst/>
-        </p:spPr>
-        <p:txBody>
-          <a:bodyPr wrap="square" lIns="0" rIns="0" tIns="0" bIns="0" anchor="ctr">
-            <a:spAutoFit/>
-          </a:bodyPr>
-          <a:lstStyle/>
-          <a:p>
-            <a:pPr algn="r"/>
-            <a:r>
-              <a:rPr sz="700" b="1" i="0">
-                <a:solidFill>
-                  <a:srgbClr val="118AB2"/>
-                </a:solidFill>
-                <a:latin typeface="Arial"/>
-              </a:rPr>
-              <a:t>CX3CL1</a:t>
-            </a:r>
-          </a:p>
-        </p:txBody>
-      </p:sp>
-      <p:sp>
-        <p:nvSpPr>
-          <p:cNvPr id="791" name="TextBox 790"/>
-          <p:cNvSpPr txBox="1"/>
-          <p:nvPr/>
-        </p:nvSpPr>
-        <p:spPr>
-          <a:xfrm>
-            <a:off x="3171135" y="3478755"/>
-            <a:ext cx="777240" cy="146304"/>
-          </a:xfrm>
-          <a:prstGeom prst="rect">
-            <a:avLst/>
-          </a:prstGeom>
-          <a:noFill/>
-          <a:effectLst/>
-        </p:spPr>
-        <p:txBody>
-          <a:bodyPr wrap="square" lIns="0" rIns="0" tIns="0" bIns="0" anchor="ctr">
-            <a:spAutoFit/>
-          </a:bodyPr>
-          <a:lstStyle/>
-          <a:p>
-            <a:pPr algn="r"/>
-            <a:r>
-              <a:rPr sz="700" b="1" i="0">
+              <a:rPr sz="750" b="1" i="0">
                 <a:solidFill>
                   <a:srgbClr val="A24E78"/>
                 </a:solidFill>
                 <a:latin typeface="Arial"/>
               </a:rPr>
-              <a:t>SMAD7</a:t>
+              <a:t>UPF3B</a:t>
             </a:r>
           </a:p>
         </p:txBody>
       </p:sp>
-      <p:sp>
-        <p:nvSpPr>
-          <p:cNvPr id="792" name="TextBox 791"/>
+      <p:cxnSp>
+        <p:nvCxnSpPr>
+          <p:cNvPr id="820" name="Connector 819"/>
+          <p:cNvCxnSpPr/>
+          <p:nvPr/>
+        </p:nvCxnSpPr>
+        <p:spPr>
+          <a:xfrm flipV="1">
+            <a:off x="6181086" y="3664592"/>
+            <a:ext cx="4197354" cy="88285"/>
+          </a:xfrm>
+          <a:prstGeom prst="line">
+            <a:avLst/>
+          </a:prstGeom>
+          <a:ln w="6985">
+            <a:solidFill>
+              <a:srgbClr val="A24E78"/>
+            </a:solidFill>
+          </a:ln>
+          <a:effectLst/>
+        </p:spPr>
+        <p:style>
+          <a:lnRef idx="2">
+            <a:schemeClr val="accent1"/>
+          </a:lnRef>
+          <a:fillRef idx="0">
+            <a:schemeClr val="accent1"/>
+          </a:fillRef>
+          <a:effectRef idx="1">
+            <a:schemeClr val="accent1"/>
+          </a:effectRef>
+          <a:fontRef idx="minor">
+            <a:schemeClr val="tx1"/>
+          </a:fontRef>
+        </p:style>
+      </p:cxnSp>
+      <p:sp>
+        <p:nvSpPr>
+          <p:cNvPr id="821" name="TextBox 820"/>
           <p:cNvSpPr txBox="1"/>
           <p:nvPr/>
         </p:nvSpPr>
         <p:spPr>
           <a:xfrm>
-            <a:off x="448407" y="2963858"/>
+            <a:off x="1820007" y="3015065"/>
             <a:ext cx="777240" cy="146304"/>
           </a:xfrm>
           <a:prstGeom prst="rect">
@@ -37834,7 +38878,7 @@
           <a:p>
             <a:pPr algn="r"/>
             <a:r>
-              <a:rPr sz="700" b="1" i="0">
+              <a:rPr sz="700" b="0" i="0">
                 <a:solidFill>
                   <a:srgbClr val="6C757D"/>
                 </a:solidFill>
@@ -37847,13 +38891,13 @@
       </p:sp>
       <p:sp>
         <p:nvSpPr>
-          <p:cNvPr id="793" name="TextBox 792"/>
+          <p:cNvPr id="822" name="TextBox 821"/>
           <p:cNvSpPr txBox="1"/>
           <p:nvPr/>
         </p:nvSpPr>
         <p:spPr>
           <a:xfrm>
-            <a:off x="7826912" y="3231803"/>
+            <a:off x="9198512" y="3335149"/>
             <a:ext cx="777240" cy="146304"/>
           </a:xfrm>
           <a:prstGeom prst="rect">
@@ -37870,7 +38914,7 @@
           <a:p>
             <a:pPr algn="l"/>
             <a:r>
-              <a:rPr sz="700" b="1" i="0">
+              <a:rPr sz="700" b="0" i="0">
                 <a:solidFill>
                   <a:srgbClr val="6C757D"/>
                 </a:solidFill>
@@ -37883,13 +38927,13 @@
       </p:sp>
       <p:sp>
         <p:nvSpPr>
-          <p:cNvPr id="794" name="TextBox 793"/>
+          <p:cNvPr id="823" name="TextBox 822"/>
           <p:cNvSpPr txBox="1"/>
           <p:nvPr/>
         </p:nvSpPr>
         <p:spPr>
           <a:xfrm>
-            <a:off x="7826912" y="3533940"/>
+            <a:off x="9198512" y="3604176"/>
             <a:ext cx="777240" cy="146304"/>
           </a:xfrm>
           <a:prstGeom prst="rect">
@@ -37906,7 +38950,7 @@
           <a:p>
             <a:pPr algn="l"/>
             <a:r>
-              <a:rPr sz="700" b="1" i="0">
+              <a:rPr sz="700" b="0" i="0">
                 <a:solidFill>
                   <a:srgbClr val="6C757D"/>
                 </a:solidFill>
@@ -37919,13 +38963,13 @@
       </p:sp>
       <p:sp>
         <p:nvSpPr>
-          <p:cNvPr id="795" name="TextBox 794"/>
+          <p:cNvPr id="824" name="TextBox 823"/>
           <p:cNvSpPr txBox="1"/>
           <p:nvPr/>
         </p:nvSpPr>
         <p:spPr>
           <a:xfrm>
-            <a:off x="7826912" y="3577883"/>
+            <a:off x="9198512" y="3607347"/>
             <a:ext cx="777240" cy="146304"/>
           </a:xfrm>
           <a:prstGeom prst="rect">
@@ -37942,7 +38986,7 @@
           <a:p>
             <a:pPr algn="l"/>
             <a:r>
-              <a:rPr sz="700" b="1" i="0">
+              <a:rPr sz="700" b="0" i="0">
                 <a:solidFill>
                   <a:srgbClr val="6C757D"/>
                 </a:solidFill>
@@ -37955,13 +38999,13 @@
       </p:sp>
       <p:sp>
         <p:nvSpPr>
-          <p:cNvPr id="796" name="TextBox 795"/>
+          <p:cNvPr id="825" name="TextBox 824"/>
           <p:cNvSpPr txBox="1"/>
           <p:nvPr/>
         </p:nvSpPr>
         <p:spPr>
           <a:xfrm>
-            <a:off x="7591017" y="2882569"/>
+            <a:off x="8962617" y="2936949"/>
             <a:ext cx="777240" cy="146304"/>
           </a:xfrm>
           <a:prstGeom prst="rect">
@@ -37978,7 +39022,7 @@
           <a:p>
             <a:pPr algn="l"/>
             <a:r>
-              <a:rPr sz="700" b="1" i="0">
+              <a:rPr sz="700" b="0" i="0">
                 <a:solidFill>
                   <a:srgbClr val="6C757D"/>
                 </a:solidFill>
@@ -37991,13 +39035,13 @@
       </p:sp>
       <p:sp>
         <p:nvSpPr>
-          <p:cNvPr id="797" name="TextBox 796"/>
+          <p:cNvPr id="826" name="TextBox 825"/>
           <p:cNvSpPr txBox="1"/>
           <p:nvPr/>
         </p:nvSpPr>
         <p:spPr>
           <a:xfrm>
-            <a:off x="1580862" y="2351133"/>
+            <a:off x="2952462" y="2376618"/>
             <a:ext cx="777240" cy="146304"/>
           </a:xfrm>
           <a:prstGeom prst="rect">
@@ -38014,7 +39058,7 @@
           <a:p>
             <a:pPr algn="r"/>
             <a:r>
-              <a:rPr sz="700" b="1" i="0">
+              <a:rPr sz="700" b="0" i="0">
                 <a:solidFill>
                   <a:srgbClr val="6C757D"/>
                 </a:solidFill>
@@ -38025,159 +39069,15 @@
           </a:p>
         </p:txBody>
       </p:sp>
-      <p:sp>
-        <p:nvSpPr>
-          <p:cNvPr id="798" name="TextBox 797"/>
-          <p:cNvSpPr txBox="1"/>
-          <p:nvPr/>
-        </p:nvSpPr>
-        <p:spPr>
-          <a:xfrm>
-            <a:off x="1274146" y="2648530"/>
-            <a:ext cx="777240" cy="146304"/>
-          </a:xfrm>
-          <a:prstGeom prst="rect">
-            <a:avLst/>
-          </a:prstGeom>
-          <a:noFill/>
-          <a:effectLst/>
-        </p:spPr>
-        <p:txBody>
-          <a:bodyPr wrap="square" lIns="0" rIns="0" tIns="0" bIns="0" anchor="ctr">
-            <a:spAutoFit/>
-          </a:bodyPr>
-          <a:lstStyle/>
-          <a:p>
-            <a:pPr algn="r"/>
-            <a:r>
-              <a:rPr sz="700" b="1" i="0">
-                <a:solidFill>
-                  <a:srgbClr val="6C757D"/>
-                </a:solidFill>
-                <a:latin typeface="Arial"/>
-              </a:rPr>
-              <a:t>LCN15</a:t>
-            </a:r>
-          </a:p>
-        </p:txBody>
-      </p:sp>
-      <p:sp>
-        <p:nvSpPr>
-          <p:cNvPr id="799" name="TextBox 798"/>
-          <p:cNvSpPr txBox="1"/>
-          <p:nvPr/>
-        </p:nvSpPr>
-        <p:spPr>
-          <a:xfrm>
-            <a:off x="7826912" y="3653213"/>
-            <a:ext cx="777240" cy="146304"/>
-          </a:xfrm>
-          <a:prstGeom prst="rect">
-            <a:avLst/>
-          </a:prstGeom>
-          <a:noFill/>
-          <a:effectLst/>
-        </p:spPr>
-        <p:txBody>
-          <a:bodyPr wrap="square" lIns="0" rIns="0" tIns="0" bIns="0" anchor="ctr">
-            <a:spAutoFit/>
-          </a:bodyPr>
-          <a:lstStyle/>
-          <a:p>
-            <a:pPr algn="l"/>
-            <a:r>
-              <a:rPr sz="700" b="1" i="0">
-                <a:solidFill>
-                  <a:srgbClr val="6C757D"/>
-                </a:solidFill>
-                <a:latin typeface="Arial"/>
-              </a:rPr>
-              <a:t>BOK-AS1</a:t>
-            </a:r>
-          </a:p>
-        </p:txBody>
-      </p:sp>
-      <p:sp>
-        <p:nvSpPr>
-          <p:cNvPr id="800" name="TextBox 799"/>
-          <p:cNvSpPr txBox="1"/>
-          <p:nvPr/>
-        </p:nvSpPr>
-        <p:spPr>
-          <a:xfrm>
-            <a:off x="7752578" y="3245616"/>
-            <a:ext cx="777240" cy="146304"/>
-          </a:xfrm>
-          <a:prstGeom prst="rect">
-            <a:avLst/>
-          </a:prstGeom>
-          <a:noFill/>
-          <a:effectLst/>
-        </p:spPr>
-        <p:txBody>
-          <a:bodyPr wrap="square" lIns="0" rIns="0" tIns="0" bIns="0" anchor="ctr">
-            <a:spAutoFit/>
-          </a:bodyPr>
-          <a:lstStyle/>
-          <a:p>
-            <a:pPr algn="l"/>
-            <a:r>
-              <a:rPr sz="700" b="1" i="0">
-                <a:solidFill>
-                  <a:srgbClr val="6C757D"/>
-                </a:solidFill>
-                <a:latin typeface="Arial"/>
-              </a:rPr>
-              <a:t>SCN2A</a:t>
-            </a:r>
-          </a:p>
-        </p:txBody>
-      </p:sp>
-      <p:sp>
-        <p:nvSpPr>
-          <p:cNvPr id="801" name="TextBox 800"/>
-          <p:cNvSpPr txBox="1"/>
-          <p:nvPr/>
-        </p:nvSpPr>
-        <p:spPr>
-          <a:xfrm>
-            <a:off x="7826912" y="3554796"/>
-            <a:ext cx="777240" cy="146304"/>
-          </a:xfrm>
-          <a:prstGeom prst="rect">
-            <a:avLst/>
-          </a:prstGeom>
-          <a:noFill/>
-          <a:effectLst/>
-        </p:spPr>
-        <p:txBody>
-          <a:bodyPr wrap="square" lIns="0" rIns="0" tIns="0" bIns="0" anchor="ctr">
-            <a:spAutoFit/>
-          </a:bodyPr>
-          <a:lstStyle/>
-          <a:p>
-            <a:pPr algn="l"/>
-            <a:r>
-              <a:rPr sz="700" b="1" i="0">
-                <a:solidFill>
-                  <a:srgbClr val="6C757D"/>
-                </a:solidFill>
-                <a:latin typeface="Arial"/>
-              </a:rPr>
-              <a:t>DNAAF4-CCPG1</a:t>
-            </a:r>
-          </a:p>
-        </p:txBody>
-      </p:sp>
       <p:cxnSp>
         <p:nvCxnSpPr>
-          <p:cNvPr id="802" name="Connector 801"/>
+          <p:cNvPr id="827" name="Connector 826"/>
           <p:cNvCxnSpPr/>
           <p:nvPr/>
         </p:nvCxnSpPr>
         <p:spPr>
           <a:xfrm>
-            <a:off x="4975566" y="740126"/>
+            <a:off x="6347166" y="747118"/>
             <a:ext cx="2503170" cy="0"/>
           </a:xfrm>
           <a:prstGeom prst="line">
@@ -38207,13 +39107,13 @@
       </p:cxnSp>
       <p:sp>
         <p:nvSpPr>
-          <p:cNvPr id="803" name="Right Triangle 802"/>
-          <p:cNvSpPr/>
-          <p:nvPr/>
-        </p:nvSpPr>
-        <p:spPr>
-          <a:xfrm>
-            <a:off x="7448736" y="710126"/>
+          <p:cNvPr id="828" name="Right Triangle 827"/>
+          <p:cNvSpPr/>
+          <p:nvPr/>
+        </p:nvSpPr>
+        <p:spPr>
+          <a:xfrm>
+            <a:off x="8820336" y="717118"/>
             <a:ext cx="60000" cy="60000"/>
           </a:xfrm>
           <a:prstGeom prst="rtTriangle">
@@ -38251,13 +39151,13 @@
       </p:sp>
       <p:sp>
         <p:nvSpPr>
-          <p:cNvPr id="804" name="TextBox 803"/>
+          <p:cNvPr id="829" name="TextBox 828"/>
           <p:cNvSpPr txBox="1"/>
           <p:nvPr/>
         </p:nvSpPr>
         <p:spPr>
           <a:xfrm>
-            <a:off x="4975566" y="465806"/>
+            <a:off x="6347166" y="472798"/>
             <a:ext cx="2503170" cy="201168"/>
           </a:xfrm>
           <a:prstGeom prst="rect">
@@ -38287,13 +39187,13 @@
       </p:sp>
       <p:cxnSp>
         <p:nvCxnSpPr>
-          <p:cNvPr id="805" name="Connector 804"/>
+          <p:cNvPr id="830" name="Connector 829"/>
           <p:cNvCxnSpPr/>
           <p:nvPr/>
         </p:nvCxnSpPr>
         <p:spPr>
           <a:xfrm flipH="1">
-            <a:off x="1573823" y="740126"/>
+            <a:off x="2945423" y="747118"/>
             <a:ext cx="2503170" cy="0"/>
           </a:xfrm>
           <a:prstGeom prst="line">
@@ -38323,13 +39223,13 @@
       </p:cxnSp>
       <p:sp>
         <p:nvSpPr>
-          <p:cNvPr id="806" name="Right Triangle 805"/>
+          <p:cNvPr id="831" name="Right Triangle 830"/>
           <p:cNvSpPr/>
           <p:nvPr/>
         </p:nvSpPr>
         <p:spPr>
           <a:xfrm rot="10800000">
-            <a:off x="1543823" y="710126"/>
+            <a:off x="2915423" y="717118"/>
             <a:ext cx="60000" cy="60000"/>
           </a:xfrm>
           <a:prstGeom prst="rtTriangle">
@@ -38367,13 +39267,13 @@
       </p:sp>
       <p:sp>
         <p:nvSpPr>
-          <p:cNvPr id="807" name="TextBox 806"/>
+          <p:cNvPr id="832" name="TextBox 831"/>
           <p:cNvSpPr txBox="1"/>
           <p:nvPr/>
         </p:nvSpPr>
         <p:spPr>
           <a:xfrm>
-            <a:off x="1573823" y="465806"/>
+            <a:off x="2945423" y="472798"/>
             <a:ext cx="2503170" cy="201168"/>
           </a:xfrm>
           <a:prstGeom prst="rect">
@@ -38403,13 +39303,13 @@
       </p:sp>
       <p:sp>
         <p:nvSpPr>
-          <p:cNvPr id="808" name="Oval 807"/>
-          <p:cNvSpPr/>
-          <p:nvPr/>
-        </p:nvSpPr>
-        <p:spPr>
-          <a:xfrm>
-            <a:off x="1299880" y="5314096"/>
+          <p:cNvPr id="833" name="Oval 832"/>
+          <p:cNvSpPr/>
+          <p:nvPr/>
+        </p:nvSpPr>
+        <p:spPr>
+          <a:xfrm>
+            <a:off x="2671480" y="5405536"/>
             <a:ext cx="52000" cy="52000"/>
           </a:xfrm>
           <a:prstGeom prst="ellipse">
@@ -38449,13 +39349,13 @@
       </p:sp>
       <p:sp>
         <p:nvSpPr>
-          <p:cNvPr id="809" name="TextBox 808"/>
+          <p:cNvPr id="834" name="TextBox 833"/>
           <p:cNvSpPr txBox="1"/>
           <p:nvPr/>
         </p:nvSpPr>
         <p:spPr>
           <a:xfrm>
-            <a:off x="1463040" y="5257800"/>
+            <a:off x="2834640" y="5349240"/>
             <a:ext cx="1950720" cy="164592"/>
           </a:xfrm>
           <a:prstGeom prst="rect">
@@ -38485,13 +39385,13 @@
       </p:sp>
       <p:sp>
         <p:nvSpPr>
-          <p:cNvPr id="810" name="Oval 809"/>
-          <p:cNvSpPr/>
-          <p:nvPr/>
-        </p:nvSpPr>
-        <p:spPr>
-          <a:xfrm>
-            <a:off x="3524920" y="5314096"/>
+          <p:cNvPr id="835" name="Oval 834"/>
+          <p:cNvSpPr/>
+          <p:nvPr/>
+        </p:nvSpPr>
+        <p:spPr>
+          <a:xfrm>
+            <a:off x="4896520" y="5405536"/>
             <a:ext cx="52000" cy="52000"/>
           </a:xfrm>
           <a:prstGeom prst="ellipse">
@@ -38531,13 +39431,13 @@
       </p:sp>
       <p:sp>
         <p:nvSpPr>
-          <p:cNvPr id="811" name="TextBox 810"/>
+          <p:cNvPr id="836" name="TextBox 835"/>
           <p:cNvSpPr txBox="1"/>
           <p:nvPr/>
         </p:nvSpPr>
         <p:spPr>
           <a:xfrm>
-            <a:off x="3688080" y="5257800"/>
+            <a:off x="5059680" y="5349240"/>
             <a:ext cx="1950720" cy="164592"/>
           </a:xfrm>
           <a:prstGeom prst="rect">
@@ -38567,13 +39467,13 @@
       </p:sp>
       <p:sp>
         <p:nvSpPr>
-          <p:cNvPr id="812" name="Oval 811"/>
-          <p:cNvSpPr/>
-          <p:nvPr/>
-        </p:nvSpPr>
-        <p:spPr>
-          <a:xfrm>
-            <a:off x="5749960" y="5314096"/>
+          <p:cNvPr id="837" name="Oval 836"/>
+          <p:cNvSpPr/>
+          <p:nvPr/>
+        </p:nvSpPr>
+        <p:spPr>
+          <a:xfrm>
+            <a:off x="7121560" y="5405536"/>
             <a:ext cx="52000" cy="52000"/>
           </a:xfrm>
           <a:prstGeom prst="ellipse">
@@ -38613,13 +39513,13 @@
       </p:sp>
       <p:sp>
         <p:nvSpPr>
-          <p:cNvPr id="813" name="TextBox 812"/>
+          <p:cNvPr id="838" name="TextBox 837"/>
           <p:cNvSpPr txBox="1"/>
           <p:nvPr/>
         </p:nvSpPr>
         <p:spPr>
           <a:xfrm>
-            <a:off x="5913120" y="5257800"/>
+            <a:off x="7284720" y="5349240"/>
             <a:ext cx="1950720" cy="164592"/>
           </a:xfrm>
           <a:prstGeom prst="rect">
@@ -38649,13 +39549,13 @@
       </p:sp>
       <p:sp>
         <p:nvSpPr>
-          <p:cNvPr id="814" name="Oval 813"/>
-          <p:cNvSpPr/>
-          <p:nvPr/>
-        </p:nvSpPr>
-        <p:spPr>
-          <a:xfrm>
-            <a:off x="1299880" y="5560984"/>
+          <p:cNvPr id="839" name="Oval 838"/>
+          <p:cNvSpPr/>
+          <p:nvPr/>
+        </p:nvSpPr>
+        <p:spPr>
+          <a:xfrm>
+            <a:off x="2671480" y="5652424"/>
             <a:ext cx="52000" cy="52000"/>
           </a:xfrm>
           <a:prstGeom prst="ellipse">
@@ -38695,13 +39595,13 @@
       </p:sp>
       <p:sp>
         <p:nvSpPr>
-          <p:cNvPr id="815" name="TextBox 814"/>
+          <p:cNvPr id="840" name="TextBox 839"/>
           <p:cNvSpPr txBox="1"/>
           <p:nvPr/>
         </p:nvSpPr>
         <p:spPr>
           <a:xfrm>
-            <a:off x="1463040" y="5504688"/>
+            <a:off x="2834640" y="5596128"/>
             <a:ext cx="1950720" cy="164592"/>
           </a:xfrm>
           <a:prstGeom prst="rect">
@@ -38731,13 +39631,13 @@
       </p:sp>
       <p:sp>
         <p:nvSpPr>
-          <p:cNvPr id="816" name="Oval 815"/>
-          <p:cNvSpPr/>
-          <p:nvPr/>
-        </p:nvSpPr>
-        <p:spPr>
-          <a:xfrm>
-            <a:off x="3528920" y="5564984"/>
+          <p:cNvPr id="841" name="Oval 840"/>
+          <p:cNvSpPr/>
+          <p:nvPr/>
+        </p:nvSpPr>
+        <p:spPr>
+          <a:xfrm>
+            <a:off x="4900520" y="5656424"/>
             <a:ext cx="44000" cy="44000"/>
           </a:xfrm>
           <a:prstGeom prst="ellipse">
@@ -38777,13 +39677,13 @@
       </p:sp>
       <p:sp>
         <p:nvSpPr>
-          <p:cNvPr id="817" name="TextBox 816"/>
+          <p:cNvPr id="842" name="TextBox 841"/>
           <p:cNvSpPr txBox="1"/>
           <p:nvPr/>
         </p:nvSpPr>
         <p:spPr>
           <a:xfrm>
-            <a:off x="3688080" y="5504688"/>
+            <a:off x="5059680" y="5596128"/>
             <a:ext cx="1950720" cy="164592"/>
           </a:xfrm>
           <a:prstGeom prst="rect">
@@ -38813,13 +39713,13 @@
       </p:sp>
       <p:sp>
         <p:nvSpPr>
-          <p:cNvPr id="818" name="Oval 817"/>
-          <p:cNvSpPr/>
-          <p:nvPr/>
-        </p:nvSpPr>
-        <p:spPr>
-          <a:xfrm>
-            <a:off x="5757960" y="5568984"/>
+          <p:cNvPr id="843" name="Oval 842"/>
+          <p:cNvSpPr/>
+          <p:nvPr/>
+        </p:nvSpPr>
+        <p:spPr>
+          <a:xfrm>
+            <a:off x="7129560" y="5660424"/>
             <a:ext cx="36000" cy="36000"/>
           </a:xfrm>
           <a:prstGeom prst="ellipse">
@@ -38859,13 +39759,13 @@
       </p:sp>
       <p:sp>
         <p:nvSpPr>
-          <p:cNvPr id="819" name="TextBox 818"/>
+          <p:cNvPr id="844" name="TextBox 843"/>
           <p:cNvSpPr txBox="1"/>
           <p:nvPr/>
         </p:nvSpPr>
         <p:spPr>
           <a:xfrm>
-            <a:off x="5913120" y="5504688"/>
+            <a:off x="7284720" y="5596128"/>
             <a:ext cx="1950720" cy="164592"/>
           </a:xfrm>
           <a:prstGeom prst="rect">
